--- a/_static/sesion06/S06_audio_imagen_video.pptx
+++ b/_static/sesion06/S06_audio_imagen_video.pptx
@@ -522,7 +522,7 @@
           <a:p/>
           <a:p>
             <a:r>
-              <a:t>Mostrar primero el ejemplo terminado (el del docente) y después desarmarlo paso por paso. Que vean el resultado antes de entender el procedimiento.</a:t>
+              <a:t>Mostrar primero el ejemplo terminado (S06_ejemplo_que_es_la_IA.mp4) y después desarmarlo paso por paso. Que vean el resultado antes de entender el procedimiento.</a:t>
             </a:r>
           </a:p>
         </p:txBody>
@@ -598,34 +598,34 @@
           <a:p/>
           <a:p>
             <a:r>
-              <a:t>RUTA A · Google AI Studio (aistudio.google.com), modo Speech/TTS.</a:t>
-            </a:r>
-          </a:p>
-          <a:p>
-            <a:r>
-              <a:t>Pegas el guion, eliges voz y le das una indicación de estilo:</a:t>
-            </a:r>
-          </a:p>
-          <a:p>
-            <a:r>
-              <a:t>«Léelo en español latinoamericano, tono cercano y pausado, como quien le explica algo a un amigo. No lo leas como noticiero.»</a:t>
-            </a:r>
-          </a:p>
-          <a:p>
-            <a:r>
-              <a:t>Las voces en español están marcadas como preview: pruébalas antes de clase.</a:t>
+              <a:t>RUTA A · Google AI Studio (aistudio.google.com), modo Generate speech.</a:t>
+            </a:r>
+          </a:p>
+          <a:p>
+            <a:r>
+              <a:t>Pegas el guion, eliges voz y escribes la indicación de estilo en el campo Style:</a:t>
+            </a:r>
+          </a:p>
+          <a:p>
+            <a:r>
+              <a:t>«Español latinoamericano, tono cercano y pausado, como quien le explica algo a un amigo. No leas como noticiero.»</a:t>
+            </a:r>
+          </a:p>
+          <a:p>
+            <a:r>
+              <a:t>COMPROBADO: las voces filtradas como "Spanish" piden clave de pago. Las voces genéricas (yo usé Gero, masculina, clara y amable) leen español perfectamente. Filtra por Gender, no por Language.</a:t>
             </a:r>
           </a:p>
           <a:p/>
           <a:p>
             <a:r>
-              <a:t>RUTA B · ElevenLabs. Plan gratuito de unos 10 minutos de audio al mes, de sobra para 60 segundos. Sin derechos comerciales: para una tarea está bien.</a:t>
+              <a:t>RUTA B · ElevenLabs. Plan gratuito de unos 10 minutos de audio al mes. Sin derechos comerciales: para una tarea está bien.</a:t>
             </a:r>
           </a:p>
           <a:p/>
           <a:p>
             <a:r>
-              <a:t>RUTA C · Tu propia voz, grabada con el celular. Gratis, es tuya, y a veces suena mejor.</a:t>
+              <a:t>RUTA C · Tu propia voz, grabada con el celular. Gratis, es tuya, y a veces suena mejor. Si quieres que el personaje suene como tú, esta es la ruta directa: clonar la voz cuesta plata, grabarla no.</a:t>
             </a:r>
           </a:p>
           <a:p/>
@@ -727,7 +727,7 @@
           </a:p>
           <a:p>
             <a:r>
-              <a:t>· Google Vids: avatares gratis para cuentas personales, pero el despliegue empezó por Estados Unidos y puede que todavía no esté disponible aquí.</a:t>
+              <a:t>· Google Vids: avatares gratis para cuentas personales, pero el despliegue empezó por Estados Unidos.</a:t>
             </a:r>
           </a:p>
           <a:p/>
@@ -819,7 +819,7 @@
           </a:p>
           <a:p>
             <a:r>
-              <a:t>2. Encima, tu avatar. Si tiene fondo gris, usar «quitar fondo».</a:t>
+              <a:t>2. Encima, tu avatar. Si tiene fondo gris liso, usar «quitar fondo».</a:t>
             </a:r>
           </a:p>
           <a:p>
@@ -920,7 +920,12 @@
           <a:lstStyle/>
           <a:p>
             <a:r>
-              <a:t>EL EJEMPLO DEL DOCENTE. Desarmarlo en vivo, mostrando cada pieza por separado.</a:t>
+              <a:t>EL EJEMPLO DEL DOCENTE: S06_ejemplo_que_es_la_IA.mp4, 33 segundos.</a:t>
+            </a:r>
+          </a:p>
+          <a:p>
+            <a:r>
+              <a:t>Desarmarlo en vivo, mostrando cada pieza por separado.</a:t>
             </a:r>
           </a:p>
           <a:p/>
@@ -943,34 +948,51 @@
           <a:p/>
           <a:p>
             <a:r>
-              <a:t>PROMPT DEL AVATAR:</a:t>
-            </a:r>
-          </a:p>
-          <a:p>
-            <a:r>
-              <a:t>«Con esta foto mía como referencia, genera un retrato de medio cuerpo del mismo personaje: ingeniero de sistemas, camisa oscura, expresión amable, mirando al frente. Fondo gris liso. Ilustración digital limpia. Formato vertical.»</a:t>
+              <a:t>GUION QUE SALIÓ (81 palabras, 30 segundos de locución):</a:t>
+            </a:r>
+          </a:p>
+          <a:p>
+            <a:r>
+              <a:t>«¿Alguna vez le enseñaste algo a un niño mostrándole ejemplos? Así se entrena la inteligencia artificial. Nadie le explica las reglas. Le muestran miles de fotos de perros, hasta que reconoce uno que nunca había visto. Nadie le dijo: un perro tiene cuatro patas. Lo fue deduciendo de los ejemplos. Por eso aprende lo que le mostramos. Y también nuestros errores. Si solo le mostramos un tipo de perro, se equivoca con todos los demás. Entonces, ¿qué ejemplos le estamos mostrando?»</a:t>
             </a:r>
           </a:p>
           <a:p/>
           <a:p>
             <a:r>
+              <a:t>OJO: pedí 60 segundos y me dio 80 palabras, que son 30. Ese es el punto de la cuenta de la diapositiva 6.</a:t>
+            </a:r>
+          </a:p>
+          <a:p/>
+          <a:p>
+            <a:r>
               <a:t>PROMPT DEL AMBIENTE:</a:t>
             </a:r>
           </a:p>
           <a:p>
             <a:r>
-              <a:t>«Imagen 16:9, fotografía realista: un salón de clase universitario vacío con un tablero al fondo, luz natural suave. Sin personas, sin texto. Deja espacio libre a la derecha.»</a:t>
+              <a:t>«Genera una imagen horizontal, formato 16:9, fotografía realista: un salón de clase universitario vacío con un tablero al fondo, luz natural suave que entra por ventanas laterales. Sin personas en la escena. Sin texto ni letreros. Deja espacio libre en el lado derecho de la imagen.»</a:t>
             </a:r>
           </a:p>
           <a:p/>
           <a:p>
             <a:r>
-              <a:t>INDICACIÓN DE VOZ:</a:t>
-            </a:r>
-          </a:p>
-          <a:p>
-            <a:r>
-              <a:t>«Léelo en español latinoamericano, tono cercano y pausado, como quien le explica algo a un amigo. No lo leas como noticiero.»</a:t>
+              <a:t>PROMPT DEL AVATAR (adjuntando mi foto):</a:t>
+            </a:r>
+          </a:p>
+          <a:p>
+            <a:r>
+              <a:t>«Con esta foto mía como referencia, genera un retrato de medio cuerpo del mismo personaje: ingeniero de sistemas, camisa oscura, expresión amable, mirando al frente. Fondo gris liso y uniforme, sin sombras ni degradados. Ilustración digital limpia. Formato vertical. Cabeza y hombros completos, sin cortar la coronilla.»</a:t>
+            </a:r>
+          </a:p>
+          <a:p/>
+          <a:p>
+            <a:r>
+              <a:t>INDICACIÓN DE VOZ (campo Style en AI Studio, voz Gero):</a:t>
+            </a:r>
+          </a:p>
+          <a:p>
+            <a:r>
+              <a:t>«Español latinoamericano, tono cercano y pausado, como quien le explica algo a un amigo. No leas como noticiero.»</a:t>
             </a:r>
           </a:p>
         </p:txBody>
@@ -1083,6 +1105,11 @@
           </a:p>
           <a:p>
             <a:r>
+              <a:t>· «Cuenta las palabras» — a quien tiene 60 y cree que le alcanzan para un minuto.</a:t>
+            </a:r>
+          </a:p>
+          <a:p>
+            <a:r>
               <a:t>· «Bájale a la música» — a todos.</a:t>
             </a:r>
           </a:p>
@@ -1267,13 +1294,13 @@
           <a:p/>
           <a:p>
             <a:r>
-              <a:t>Si tienes el video de ejemplo listo, reprodúcelo aquí completo. Dura menos de dos minutos y ahorra diez de explicación.</a:t>
+              <a:t>Reproducir el video de ejemplo completo: S06_ejemplo_que_es_la_IA.mp4, 33 segundos. Ahorra diez minutos de explicación.</a:t>
             </a:r>
           </a:p>
           <a:p/>
           <a:p>
             <a:r>
-              <a:t>Pregunta después: ¿cuántas piezas distintas creen que tiene esto adentro? Ir recogiendo: guion, imagen, voz, movimiento, subtítulos, música. Esa lista es la agenda.</a:t>
+              <a:t>Pregunta después: ¿cuántas piezas distintas creen que tiene esto adentro? Ir recogiendo: guion, imagen, voz, movimiento, subtítulos. Esa lista es la agenda.</a:t>
             </a:r>
           </a:p>
         </p:txBody>
@@ -1443,7 +1470,7 @@
           <a:p/>
           <a:p>
             <a:r>
-              <a:t>Si alguna no abre, hay alternativa en la misma fila.</a:t>
+              <a:t>DATO COMPROBADO al preparar la clase: en Google AI Studio las voces marcadas como españolas pedían clave de pago. Las voces genéricas leen español perfectamente y son las que usé en el ejemplo.</a:t>
             </a:r>
           </a:p>
         </p:txBody>
@@ -1616,7 +1643,7 @@
           <a:p/>
           <a:p>
             <a:r>
-              <a:t>«Eres guionista de videos educativos cortos. Escríbeme un guion de 80 palabras para un video de 60 segundos.</a:t>
+              <a:t>«Eres guionista de videos educativos cortos. Escríbeme un guion de 150 palabras para un video de 60 segundos.</a:t>
             </a:r>
           </a:p>
           <a:p>
@@ -1642,7 +1669,13 @@
           <a:p/>
           <a:p>
             <a:r>
-              <a:t>Después de generarlo: que lo LEAN EN VOZ ALTA y cronometren. 80 palabras son unos 45 segundos. Si se traban al leerlo, está mal escrito y hay que pedirle que lo simplifique.</a:t>
+              <a:t>LA CUENTA REAL: se habla a unas 150 palabras por minuto. 150 palabras = 1 minuto. 80 palabras = medio minuto. El video de ejemplo tiene 81 palabras y dura 30 segundos de locución: compruébalo con ellos.</a:t>
+            </a:r>
+          </a:p>
+          <a:p/>
+          <a:p>
+            <a:r>
+              <a:t>Después de generarlo: que lo LEAN EN VOZ ALTA y cronometren. Si se traban al leerlo, está mal escrito y hay que pedirle que lo simplifique.</a:t>
             </a:r>
           </a:p>
         </p:txBody>
@@ -1832,7 +1865,7 @@
           <a:p/>
           <a:p>
             <a:r>
-              <a:t>ESE ÚLTIMO RENGLÓN ES EL IMPORTANTE. Si no lo pides, la imagen queda llena y el avatar no cabe.</a:t>
+              <a:t>ESE ÚLTIMO RENGLÓN ES EL IMPORTANTE. Si no lo pides, la imagen queda llena y el avatar no cabe. AVISO HONESTO: al generar el ejemplo, Gemini llenó igual el lado derecho de pupitres. Si pasa, pídela otra vez o corre el avatar.</a:t>
             </a:r>
           </a:p>
           <a:p/>
@@ -1924,7 +1957,7 @@
           </a:p>
           <a:p>
             <a:r>
-              <a:t>Fondo: gris liso y neutro.</a:t>
+              <a:t>Fondo: gris liso y uniforme, sin sombras ni degradados.</a:t>
             </a:r>
           </a:p>
           <a:p>
@@ -1940,7 +1973,7 @@
           <a:p/>
           <a:p>
             <a:r>
-              <a:t>POR QUÉ FONDO LISO: para poder recortarlo y montarlo sobre el ambiente del paso 2. Si el fondo tiene detalles, el recorte queda feo.</a:t>
+              <a:t>POR QUÉ FONDO GRIS LISO Y SIN SOMBRAS: para poder recortarlo y montarlo sobre el ambiente del paso 2. Si el fondo tiene degradado, el recorte queda sucio. Este detalle sí cambia el resultado: compruébalo en vivo.</a:t>
             </a:r>
           </a:p>
           <a:p/>
@@ -4948,7 +4981,7 @@
     <p:bg>
       <p:bgPr>
         <a:solidFill>
-          <a:srgbClr val="101418"/>
+          <a:srgbClr val="FFFFFF"/>
         </a:solidFill>
         <a:effectLst/>
       </p:bgPr>
@@ -4969,13 +5002,13 @@
         <p:spPr>
           <a:xfrm>
             <a:off x="0" y="0"/>
-            <a:ext cx="155448" cy="6858000"/>
+            <a:ext cx="128016" cy="6858000"/>
           </a:xfrm>
           <a:prstGeom prst="rect">
             <a:avLst/>
           </a:prstGeom>
           <a:solidFill>
-            <a:srgbClr val="FF5C7A"/>
+            <a:srgbClr val="ED7623"/>
           </a:solidFill>
           <a:ln>
             <a:noFill/>
@@ -5004,52 +5037,30 @@
           </a:p>
         </p:txBody>
       </p:sp>
-      <p:sp>
-        <p:nvSpPr>
-          <p:cNvPr id="3" name="Rounded Rectangle 2"/>
-          <p:cNvSpPr/>
-          <p:nvPr/>
-        </p:nvSpPr>
-        <p:spPr>
-          <a:xfrm>
-            <a:off x="822960" y="1463040"/>
-            <a:ext cx="6766560" cy="3200400"/>
-          </a:xfrm>
-          <a:prstGeom prst="roundRect">
-            <a:avLst>
-              <a:gd name="adj" fmla="val 6000"/>
-            </a:avLst>
-          </a:prstGeom>
-          <a:solidFill>
-            <a:srgbClr val="1A2027"/>
-          </a:solidFill>
-          <a:ln>
-            <a:noFill/>
-          </a:ln>
-          <a:effectLst/>
-        </p:spPr>
-        <p:style>
-          <a:lnRef idx="1">
-            <a:schemeClr val="accent1"/>
-          </a:lnRef>
-          <a:fillRef idx="3">
-            <a:schemeClr val="accent1"/>
-          </a:fillRef>
-          <a:effectRef idx="2">
-            <a:schemeClr val="accent1"/>
-          </a:effectRef>
-          <a:fontRef idx="minor">
-            <a:schemeClr val="lt1"/>
-          </a:fontRef>
-        </p:style>
-        <p:txBody>
-          <a:bodyPr rtlCol="0" anchor="ctr"/>
-          <a:lstStyle/>
-          <a:p>
-            <a:pPr algn="ctr"/>
-          </a:p>
-        </p:txBody>
-      </p:sp>
+      <p:pic>
+        <p:nvPicPr>
+          <p:cNvPr id="3" name="Picture 2" descr="logo_ucaldas.png"/>
+          <p:cNvPicPr>
+            <a:picLocks noChangeAspect="1"/>
+          </p:cNvPicPr>
+          <p:nvPr/>
+        </p:nvPicPr>
+        <p:blipFill>
+          <a:blip r:embed="rId3"/>
+          <a:stretch>
+            <a:fillRect/>
+          </a:stretch>
+        </p:blipFill>
+        <p:spPr>
+          <a:xfrm>
+            <a:off x="777240" y="457200"/>
+            <a:ext cx="1946298" cy="475488"/>
+          </a:xfrm>
+          <a:prstGeom prst="rect">
+            <a:avLst/>
+          </a:prstGeom>
+        </p:spPr>
+      </p:pic>
       <p:sp>
         <p:nvSpPr>
           <p:cNvPr id="4" name="TextBox 3"/>
@@ -5058,8 +5069,8 @@
         </p:nvSpPr>
         <p:spPr>
           <a:xfrm>
-            <a:off x="1280160" y="1783080"/>
-            <a:ext cx="5943600" cy="457200"/>
+            <a:off x="804672" y="1024128"/>
+            <a:ext cx="6400800" cy="274320"/>
           </a:xfrm>
           <a:prstGeom prst="rect">
             <a:avLst/>
@@ -5078,13 +5089,13 @@
               </a:spcAft>
             </a:pPr>
             <a:r>
-              <a:rPr sz="1300" b="1">
-                <a:solidFill>
-                  <a:srgbClr val="45E0C8"/>
-                </a:solidFill>
-                <a:latin typeface="Helvetica Neue"/>
-              </a:rPr>
-              <a:t>SESIÓN 6 · INTRODUCCIÓN A LA INFORMÁTICA</a:t>
+              <a:rPr sz="1000" b="1">
+                <a:solidFill>
+                  <a:srgbClr val="ED7623"/>
+                </a:solidFill>
+                <a:latin typeface="Helvetica Neue"/>
+              </a:rPr>
+              <a:t>FACULTAD DE INTELIGENCIA ARTIFICIAL E INGENIERÍAS</a:t>
             </a:r>
           </a:p>
         </p:txBody>
@@ -5097,8 +5108,47 @@
         </p:nvSpPr>
         <p:spPr>
           <a:xfrm>
-            <a:off x="1280160" y="2286000"/>
-            <a:ext cx="6035040" cy="2194560"/>
+            <a:off x="822960" y="2103120"/>
+            <a:ext cx="7315200" cy="457200"/>
+          </a:xfrm>
+          <a:prstGeom prst="rect">
+            <a:avLst/>
+          </a:prstGeom>
+          <a:noFill/>
+        </p:spPr>
+        <p:txBody>
+          <a:bodyPr wrap="square" lIns="0" rIns="0" tIns="0" bIns="0">
+            <a:spAutoFit/>
+          </a:bodyPr>
+          <a:lstStyle/>
+          <a:p>
+            <a:pPr algn="l">
+              <a:spcAft>
+                <a:spcPts val="600"/>
+              </a:spcAft>
+            </a:pPr>
+            <a:r>
+              <a:rPr sz="1300" b="1">
+                <a:solidFill>
+                  <a:srgbClr val="35789C"/>
+                </a:solidFill>
+                <a:latin typeface="Helvetica Neue"/>
+              </a:rPr>
+              <a:t>SESIÓN 6 · INTRODUCCIÓN A LA INFORMÁTICA</a:t>
+            </a:r>
+          </a:p>
+        </p:txBody>
+      </p:sp>
+      <p:sp>
+        <p:nvSpPr>
+          <p:cNvPr id="6" name="TextBox 5"/>
+          <p:cNvSpPr txBox="1"/>
+          <p:nvPr/>
+        </p:nvSpPr>
+        <p:spPr>
+          <a:xfrm>
+            <a:off x="822960" y="2651760"/>
+            <a:ext cx="7863840" cy="2377440"/>
           </a:xfrm>
           <a:prstGeom prst="rect">
             <a:avLst/>
@@ -5120,9 +5170,9 @@
               </a:spcAft>
             </a:pPr>
             <a:r>
-              <a:rPr sz="5400" b="1">
-                <a:solidFill>
-                  <a:srgbClr val="F2EFEA"/>
+              <a:rPr sz="5600" b="1">
+                <a:solidFill>
+                  <a:srgbClr val="11406E"/>
                 </a:solidFill>
                 <a:latin typeface="Helvetica Neue"/>
               </a:rPr>
@@ -5139,9 +5189,9 @@
               </a:spcAft>
             </a:pPr>
             <a:r>
-              <a:rPr sz="5400" b="1">
-                <a:solidFill>
-                  <a:srgbClr val="FF5C7A"/>
+              <a:rPr sz="5600" b="1">
+                <a:solidFill>
+                  <a:srgbClr val="ED7623"/>
                 </a:solidFill>
                 <a:latin typeface="Helvetica Neue"/>
               </a:rPr>
@@ -5158,9 +5208,9 @@
               </a:spcAft>
             </a:pPr>
             <a:r>
-              <a:rPr sz="5400" b="1">
-                <a:solidFill>
-                  <a:srgbClr val="F2EFEA"/>
+              <a:rPr sz="5600" b="1">
+                <a:solidFill>
+                  <a:srgbClr val="11406E"/>
                 </a:solidFill>
                 <a:latin typeface="Helvetica Neue"/>
               </a:rPr>
@@ -5171,14 +5221,14 @@
       </p:sp>
       <p:sp>
         <p:nvSpPr>
-          <p:cNvPr id="6" name="TextBox 5"/>
+          <p:cNvPr id="7" name="TextBox 6"/>
           <p:cNvSpPr txBox="1"/>
           <p:nvPr/>
         </p:nvSpPr>
         <p:spPr>
           <a:xfrm>
-            <a:off x="822960" y="4892040"/>
-            <a:ext cx="7315200" cy="822960"/>
+            <a:off x="822960" y="5303520"/>
+            <a:ext cx="8229600" cy="822960"/>
           </a:xfrm>
           <a:prstGeom prst="rect">
             <a:avLst/>
@@ -5202,7 +5252,7 @@
             <a:r>
               <a:rPr sz="1900" b="0">
                 <a:solidFill>
-                  <a:srgbClr val="8A94A0"/>
+                  <a:srgbClr val="6E6E6E"/>
                 </a:solidFill>
                 <a:latin typeface="Helvetica Neue"/>
               </a:rPr>
@@ -5213,14 +5263,14 @@
       </p:sp>
       <p:sp>
         <p:nvSpPr>
-          <p:cNvPr id="7" name="TextBox 6"/>
+          <p:cNvPr id="8" name="TextBox 7"/>
           <p:cNvSpPr txBox="1"/>
           <p:nvPr/>
         </p:nvSpPr>
         <p:spPr>
           <a:xfrm>
-            <a:off x="8503920" y="2011680"/>
-            <a:ext cx="2926080" cy="2377440"/>
+            <a:off x="9326880" y="2651760"/>
+            <a:ext cx="2194560" cy="2377440"/>
           </a:xfrm>
           <a:prstGeom prst="rect">
             <a:avLst/>
@@ -5241,7 +5291,7 @@
             <a:r>
               <a:rPr sz="5400" b="0">
                 <a:solidFill>
-                  <a:srgbClr val="F2EFEA"/>
+                  <a:srgbClr val="11406E"/>
                 </a:solidFill>
                 <a:latin typeface="Helvetica Neue"/>
               </a:rPr>
@@ -5257,7 +5307,7 @@
             <a:r>
               <a:rPr sz="5400" b="0">
                 <a:solidFill>
-                  <a:srgbClr val="F2EFEA"/>
+                  <a:srgbClr val="11406E"/>
                 </a:solidFill>
                 <a:latin typeface="Helvetica Neue"/>
               </a:rPr>
@@ -5273,7 +5323,7 @@
             <a:r>
               <a:rPr sz="5400" b="0">
                 <a:solidFill>
-                  <a:srgbClr val="F2EFEA"/>
+                  <a:srgbClr val="11406E"/>
                 </a:solidFill>
                 <a:latin typeface="Helvetica Neue"/>
               </a:rPr>
@@ -5284,13 +5334,13 @@
       </p:sp>
       <p:sp>
         <p:nvSpPr>
-          <p:cNvPr id="8" name="TextBox 7"/>
+          <p:cNvPr id="9" name="TextBox 8"/>
           <p:cNvSpPr txBox="1"/>
           <p:nvPr/>
         </p:nvSpPr>
         <p:spPr>
           <a:xfrm>
-            <a:off x="822960" y="6035040"/>
+            <a:off x="822960" y="6172200"/>
             <a:ext cx="10515600" cy="457200"/>
           </a:xfrm>
           <a:prstGeom prst="rect">
@@ -5312,7 +5362,7 @@
             <a:r>
               <a:rPr sz="1300" b="0">
                 <a:solidFill>
-                  <a:srgbClr val="8A94A0"/>
+                  <a:srgbClr val="6E6E6E"/>
                 </a:solidFill>
                 <a:latin typeface="Helvetica Neue"/>
               </a:rPr>
@@ -5335,7 +5385,7 @@
     <p:bg>
       <p:bgPr>
         <a:solidFill>
-          <a:srgbClr val="101418"/>
+          <a:srgbClr val="FFFFFF"/>
         </a:solidFill>
         <a:effectLst/>
       </p:bgPr>
@@ -5356,13 +5406,13 @@
         <p:spPr>
           <a:xfrm>
             <a:off x="0" y="0"/>
-            <a:ext cx="155448" cy="6858000"/>
+            <a:ext cx="128016" cy="6858000"/>
           </a:xfrm>
           <a:prstGeom prst="rect">
             <a:avLst/>
           </a:prstGeom>
           <a:solidFill>
-            <a:srgbClr val="FF5C7A"/>
+            <a:srgbClr val="ED7623"/>
           </a:solidFill>
           <a:ln>
             <a:noFill/>
@@ -5421,7 +5471,7 @@
             <a:r>
               <a:rPr sz="9600" b="1">
                 <a:solidFill>
-                  <a:srgbClr val="FF5C7A"/>
+                  <a:srgbClr val="ED7623"/>
                 </a:solidFill>
                 <a:latin typeface="Helvetica Neue"/>
               </a:rPr>
@@ -5460,7 +5510,7 @@
             <a:r>
               <a:rPr sz="4400" b="1">
                 <a:solidFill>
-                  <a:srgbClr val="F2EFEA"/>
+                  <a:srgbClr val="11406E"/>
                 </a:solidFill>
                 <a:latin typeface="Helvetica Neue"/>
               </a:rPr>
@@ -5499,7 +5549,7 @@
             <a:r>
               <a:rPr sz="2000" b="0">
                 <a:solidFill>
-                  <a:srgbClr val="45E0C8"/>
+                  <a:srgbClr val="35789C"/>
                 </a:solidFill>
                 <a:latin typeface="Helvetica Neue"/>
               </a:rPr>
@@ -5521,14 +5571,16 @@
           </a:xfrm>
           <a:prstGeom prst="roundRect">
             <a:avLst>
-              <a:gd name="adj" fmla="val 6000"/>
+              <a:gd name="adj" fmla="val 5000"/>
             </a:avLst>
           </a:prstGeom>
           <a:solidFill>
-            <a:srgbClr val="1A2027"/>
+            <a:srgbClr val="F5F3EF"/>
           </a:solidFill>
-          <a:ln>
-            <a:noFill/>
+          <a:ln w="11430">
+            <a:solidFill>
+              <a:srgbClr val="E3E0DA"/>
+            </a:solidFill>
           </a:ln>
           <a:effectLst/>
         </p:spPr>
@@ -5584,7 +5636,7 @@
             <a:r>
               <a:rPr sz="2600" b="1">
                 <a:solidFill>
-                  <a:srgbClr val="FF5C7A"/>
+                  <a:srgbClr val="ED7623"/>
                 </a:solidFill>
                 <a:latin typeface="Helvetica Neue"/>
               </a:rPr>
@@ -5623,7 +5675,7 @@
             <a:r>
               <a:rPr sz="2000" b="1">
                 <a:solidFill>
-                  <a:srgbClr val="F2EFEA"/>
+                  <a:srgbClr val="11406E"/>
                 </a:solidFill>
                 <a:latin typeface="Helvetica Neue"/>
               </a:rPr>
@@ -5665,11 +5717,11 @@
             <a:r>
               <a:rPr sz="1500" b="0">
                 <a:solidFill>
-                  <a:srgbClr val="8A94A0"/>
-                </a:solidFill>
-                <a:latin typeface="Helvetica Neue"/>
-              </a:rPr>
-              <a:t>Pegas el guion, eliges voz y das una indicación de estilo</a:t>
+                  <a:srgbClr val="6E6E6E"/>
+                </a:solidFill>
+                <a:latin typeface="Helvetica Neue"/>
+              </a:rPr>
+              <a:t>Pegas el guion, eliges voz y escribes la indicación de estilo</a:t>
             </a:r>
           </a:p>
         </p:txBody>
@@ -5687,14 +5739,16 @@
           </a:xfrm>
           <a:prstGeom prst="roundRect">
             <a:avLst>
-              <a:gd name="adj" fmla="val 6000"/>
+              <a:gd name="adj" fmla="val 5000"/>
             </a:avLst>
           </a:prstGeom>
           <a:solidFill>
-            <a:srgbClr val="1A2027"/>
+            <a:srgbClr val="F5F3EF"/>
           </a:solidFill>
-          <a:ln>
-            <a:noFill/>
+          <a:ln w="11430">
+            <a:solidFill>
+              <a:srgbClr val="E3E0DA"/>
+            </a:solidFill>
           </a:ln>
           <a:effectLst/>
         </p:spPr>
@@ -5750,7 +5804,7 @@
             <a:r>
               <a:rPr sz="2600" b="1">
                 <a:solidFill>
-                  <a:srgbClr val="FF5C7A"/>
+                  <a:srgbClr val="ED7623"/>
                 </a:solidFill>
                 <a:latin typeface="Helvetica Neue"/>
               </a:rPr>
@@ -5789,7 +5843,7 @@
             <a:r>
               <a:rPr sz="2000" b="1">
                 <a:solidFill>
-                  <a:srgbClr val="F2EFEA"/>
+                  <a:srgbClr val="11406E"/>
                 </a:solidFill>
                 <a:latin typeface="Helvetica Neue"/>
               </a:rPr>
@@ -5831,7 +5885,7 @@
             <a:r>
               <a:rPr sz="1500" b="0">
                 <a:solidFill>
-                  <a:srgbClr val="8A94A0"/>
+                  <a:srgbClr val="6E6E6E"/>
                 </a:solidFill>
                 <a:latin typeface="Helvetica Neue"/>
               </a:rPr>
@@ -5853,14 +5907,16 @@
           </a:xfrm>
           <a:prstGeom prst="roundRect">
             <a:avLst>
-              <a:gd name="adj" fmla="val 6000"/>
+              <a:gd name="adj" fmla="val 5000"/>
             </a:avLst>
           </a:prstGeom>
           <a:solidFill>
-            <a:srgbClr val="1A2027"/>
+            <a:srgbClr val="F5F3EF"/>
           </a:solidFill>
-          <a:ln>
-            <a:noFill/>
+          <a:ln w="11430">
+            <a:solidFill>
+              <a:srgbClr val="E3E0DA"/>
+            </a:solidFill>
           </a:ln>
           <a:effectLst/>
         </p:spPr>
@@ -5916,7 +5972,7 @@
             <a:r>
               <a:rPr sz="2600" b="1">
                 <a:solidFill>
-                  <a:srgbClr val="FF5C7A"/>
+                  <a:srgbClr val="ED7623"/>
                 </a:solidFill>
                 <a:latin typeface="Helvetica Neue"/>
               </a:rPr>
@@ -5955,7 +6011,7 @@
             <a:r>
               <a:rPr sz="2000" b="1">
                 <a:solidFill>
-                  <a:srgbClr val="F2EFEA"/>
+                  <a:srgbClr val="11406E"/>
                 </a:solidFill>
                 <a:latin typeface="Helvetica Neue"/>
               </a:rPr>
@@ -5997,7 +6053,7 @@
             <a:r>
               <a:rPr sz="1500" b="0">
                 <a:solidFill>
-                  <a:srgbClr val="8A94A0"/>
+                  <a:srgbClr val="6E6E6E"/>
                 </a:solidFill>
                 <a:latin typeface="Helvetica Neue"/>
               </a:rPr>
@@ -6036,11 +6092,11 @@
             <a:r>
               <a:rPr sz="1500" b="0">
                 <a:solidFill>
-                  <a:srgbClr val="8A94A0"/>
-                </a:solidFill>
-                <a:latin typeface="Helvetica Neue"/>
-              </a:rPr>
-              <a:t>La indicación de estilo de voz está en las notas.</a:t>
+                  <a:srgbClr val="6E6E6E"/>
+                </a:solidFill>
+                <a:latin typeface="Helvetica Neue"/>
+              </a:rPr>
+              <a:t>Filtra las voces por Gender, no por Language: las de español piden clave de pago.</a:t>
             </a:r>
           </a:p>
         </p:txBody>
@@ -6059,7 +6115,7 @@
     <p:bg>
       <p:bgPr>
         <a:solidFill>
-          <a:srgbClr val="101418"/>
+          <a:srgbClr val="FFFFFF"/>
         </a:solidFill>
         <a:effectLst/>
       </p:bgPr>
@@ -6080,13 +6136,13 @@
         <p:spPr>
           <a:xfrm>
             <a:off x="0" y="0"/>
-            <a:ext cx="155448" cy="6858000"/>
+            <a:ext cx="128016" cy="6858000"/>
           </a:xfrm>
           <a:prstGeom prst="rect">
             <a:avLst/>
           </a:prstGeom>
           <a:solidFill>
-            <a:srgbClr val="FF5C7A"/>
+            <a:srgbClr val="ED7623"/>
           </a:solidFill>
           <a:ln>
             <a:noFill/>
@@ -6145,7 +6201,7 @@
             <a:r>
               <a:rPr sz="9600" b="1">
                 <a:solidFill>
-                  <a:srgbClr val="FF5C7A"/>
+                  <a:srgbClr val="ED7623"/>
                 </a:solidFill>
                 <a:latin typeface="Helvetica Neue"/>
               </a:rPr>
@@ -6184,7 +6240,7 @@
             <a:r>
               <a:rPr sz="4400" b="1">
                 <a:solidFill>
-                  <a:srgbClr val="F2EFEA"/>
+                  <a:srgbClr val="11406E"/>
                 </a:solidFill>
                 <a:latin typeface="Helvetica Neue"/>
               </a:rPr>
@@ -6223,7 +6279,7 @@
             <a:r>
               <a:rPr sz="2000" b="0">
                 <a:solidFill>
-                  <a:srgbClr val="45E0C8"/>
+                  <a:srgbClr val="35789C"/>
                 </a:solidFill>
                 <a:latin typeface="Helvetica Neue"/>
               </a:rPr>
@@ -6247,7 +6303,7 @@
             <a:avLst/>
           </a:prstGeom>
           <a:solidFill>
-            <a:srgbClr val="45E0C8"/>
+            <a:srgbClr val="ED7623"/>
           </a:solidFill>
           <a:ln>
             <a:noFill/>
@@ -6309,7 +6365,7 @@
             <a:r>
               <a:rPr sz="1600" b="1">
                 <a:solidFill>
-                  <a:srgbClr val="45E0C8"/>
+                  <a:srgbClr val="35789C"/>
                 </a:solidFill>
                 <a:latin typeface="Helvetica Neue"/>
               </a:rPr>
@@ -6351,7 +6407,7 @@
             <a:r>
               <a:rPr sz="1600" b="1">
                 <a:solidFill>
-                  <a:srgbClr val="45E0C8"/>
+                  <a:srgbClr val="35789C"/>
                 </a:solidFill>
                 <a:latin typeface="Helvetica Neue"/>
               </a:rPr>
@@ -6393,7 +6449,7 @@
             <a:r>
               <a:rPr sz="1600" b="1">
                 <a:solidFill>
-                  <a:srgbClr val="FF5C7A"/>
+                  <a:srgbClr val="ED7623"/>
                 </a:solidFill>
                 <a:latin typeface="Helvetica Neue"/>
               </a:rPr>
@@ -6435,7 +6491,7 @@
             <a:r>
               <a:rPr sz="1600" b="0">
                 <a:solidFill>
-                  <a:srgbClr val="F2EFEA"/>
+                  <a:srgbClr val="6E6E6E"/>
                 </a:solidFill>
                 <a:latin typeface="Helvetica Neue"/>
               </a:rPr>
@@ -6459,7 +6515,7 @@
             <a:avLst/>
           </a:prstGeom>
           <a:solidFill>
-            <a:srgbClr val="2A333C"/>
+            <a:srgbClr val="E3E0DA"/>
           </a:solidFill>
           <a:ln>
             <a:noFill/>
@@ -6521,7 +6577,7 @@
             <a:r>
               <a:rPr sz="1600" b="1">
                 <a:solidFill>
-                  <a:srgbClr val="FF5C7A"/>
+                  <a:srgbClr val="ED7623"/>
                 </a:solidFill>
                 <a:latin typeface="Helvetica Neue"/>
               </a:rPr>
@@ -6563,7 +6619,7 @@
             <a:r>
               <a:rPr sz="1600" b="0">
                 <a:solidFill>
-                  <a:srgbClr val="F2EFEA"/>
+                  <a:srgbClr val="6E6E6E"/>
                 </a:solidFill>
                 <a:latin typeface="Helvetica Neue"/>
               </a:rPr>
@@ -6587,7 +6643,7 @@
             <a:avLst/>
           </a:prstGeom>
           <a:solidFill>
-            <a:srgbClr val="2A333C"/>
+            <a:srgbClr val="E3E0DA"/>
           </a:solidFill>
           <a:ln>
             <a:noFill/>
@@ -6649,7 +6705,7 @@
             <a:r>
               <a:rPr sz="1600" b="1">
                 <a:solidFill>
-                  <a:srgbClr val="FF5C7A"/>
+                  <a:srgbClr val="ED7623"/>
                 </a:solidFill>
                 <a:latin typeface="Helvetica Neue"/>
               </a:rPr>
@@ -6691,7 +6747,7 @@
             <a:r>
               <a:rPr sz="1600" b="0">
                 <a:solidFill>
-                  <a:srgbClr val="F2EFEA"/>
+                  <a:srgbClr val="6E6E6E"/>
                 </a:solidFill>
                 <a:latin typeface="Helvetica Neue"/>
               </a:rPr>
@@ -6715,7 +6771,7 @@
             <a:avLst/>
           </a:prstGeom>
           <a:solidFill>
-            <a:srgbClr val="2A333C"/>
+            <a:srgbClr val="E3E0DA"/>
           </a:solidFill>
           <a:ln>
             <a:noFill/>
@@ -6777,7 +6833,7 @@
             <a:r>
               <a:rPr sz="1600" b="1">
                 <a:solidFill>
-                  <a:srgbClr val="FF5C7A"/>
+                  <a:srgbClr val="ED7623"/>
                 </a:solidFill>
                 <a:latin typeface="Helvetica Neue"/>
               </a:rPr>
@@ -6819,7 +6875,7 @@
             <a:r>
               <a:rPr sz="1600" b="0">
                 <a:solidFill>
-                  <a:srgbClr val="F2EFEA"/>
+                  <a:srgbClr val="6E6E6E"/>
                 </a:solidFill>
                 <a:latin typeface="Helvetica Neue"/>
               </a:rPr>
@@ -6841,11 +6897,11 @@
           </a:xfrm>
           <a:prstGeom prst="roundRect">
             <a:avLst>
-              <a:gd name="adj" fmla="val 6000"/>
+              <a:gd name="adj" fmla="val 5000"/>
             </a:avLst>
           </a:prstGeom>
           <a:solidFill>
-            <a:srgbClr val="2A1A20"/>
+            <a:srgbClr val="FDF0E6"/>
           </a:solidFill>
           <a:ln>
             <a:noFill/>
@@ -6904,7 +6960,7 @@
             <a:r>
               <a:rPr sz="1700" b="1">
                 <a:solidFill>
-                  <a:srgbClr val="FF5C7A"/>
+                  <a:srgbClr val="ED7623"/>
                 </a:solidFill>
                 <a:latin typeface="Helvetica Neue"/>
               </a:rPr>
@@ -6927,7 +6983,7 @@
     <p:bg>
       <p:bgPr>
         <a:solidFill>
-          <a:srgbClr val="101418"/>
+          <a:srgbClr val="FFFFFF"/>
         </a:solidFill>
         <a:effectLst/>
       </p:bgPr>
@@ -6948,13 +7004,13 @@
         <p:spPr>
           <a:xfrm>
             <a:off x="0" y="0"/>
-            <a:ext cx="155448" cy="6858000"/>
+            <a:ext cx="128016" cy="6858000"/>
           </a:xfrm>
           <a:prstGeom prst="rect">
             <a:avLst/>
           </a:prstGeom>
           <a:solidFill>
-            <a:srgbClr val="FF5C7A"/>
+            <a:srgbClr val="ED7623"/>
           </a:solidFill>
           <a:ln>
             <a:noFill/>
@@ -7013,7 +7069,7 @@
             <a:r>
               <a:rPr sz="9600" b="1">
                 <a:solidFill>
-                  <a:srgbClr val="FF5C7A"/>
+                  <a:srgbClr val="ED7623"/>
                 </a:solidFill>
                 <a:latin typeface="Helvetica Neue"/>
               </a:rPr>
@@ -7052,7 +7108,7 @@
             <a:r>
               <a:rPr sz="4400" b="1">
                 <a:solidFill>
-                  <a:srgbClr val="F2EFEA"/>
+                  <a:srgbClr val="11406E"/>
                 </a:solidFill>
                 <a:latin typeface="Helvetica Neue"/>
               </a:rPr>
@@ -7091,7 +7147,7 @@
             <a:r>
               <a:rPr sz="2000" b="0">
                 <a:solidFill>
-                  <a:srgbClr val="45E0C8"/>
+                  <a:srgbClr val="35789C"/>
                 </a:solidFill>
                 <a:latin typeface="Helvetica Neue"/>
               </a:rPr>
@@ -7113,11 +7169,785 @@
           </a:xfrm>
           <a:prstGeom prst="roundRect">
             <a:avLst>
-              <a:gd name="adj" fmla="val 6000"/>
+              <a:gd name="adj" fmla="val 5000"/>
             </a:avLst>
           </a:prstGeom>
           <a:solidFill>
-            <a:srgbClr val="1A2027"/>
+            <a:srgbClr val="F5F3EF"/>
+          </a:solidFill>
+          <a:ln w="11430">
+            <a:solidFill>
+              <a:srgbClr val="E3E0DA"/>
+            </a:solidFill>
+          </a:ln>
+          <a:effectLst/>
+        </p:spPr>
+        <p:style>
+          <a:lnRef idx="1">
+            <a:schemeClr val="accent1"/>
+          </a:lnRef>
+          <a:fillRef idx="3">
+            <a:schemeClr val="accent1"/>
+          </a:fillRef>
+          <a:effectRef idx="2">
+            <a:schemeClr val="accent1"/>
+          </a:effectRef>
+          <a:fontRef idx="minor">
+            <a:schemeClr val="lt1"/>
+          </a:fontRef>
+        </p:style>
+        <p:txBody>
+          <a:bodyPr rtlCol="0" anchor="ctr"/>
+          <a:lstStyle/>
+          <a:p>
+            <a:pPr algn="ctr"/>
+          </a:p>
+        </p:txBody>
+      </p:sp>
+      <p:sp>
+        <p:nvSpPr>
+          <p:cNvPr id="7" name="TextBox 6"/>
+          <p:cNvSpPr txBox="1"/>
+          <p:nvPr/>
+        </p:nvSpPr>
+        <p:spPr>
+          <a:xfrm>
+            <a:off x="2423160" y="2825496"/>
+            <a:ext cx="457200" cy="548640"/>
+          </a:xfrm>
+          <a:prstGeom prst="rect">
+            <a:avLst/>
+          </a:prstGeom>
+          <a:noFill/>
+        </p:spPr>
+        <p:txBody>
+          <a:bodyPr wrap="square" lIns="0" rIns="0" tIns="0" bIns="0">
+            <a:spAutoFit/>
+          </a:bodyPr>
+          <a:lstStyle/>
+          <a:p>
+            <a:pPr algn="l">
+              <a:spcAft>
+                <a:spcPts val="600"/>
+              </a:spcAft>
+            </a:pPr>
+            <a:r>
+              <a:rPr sz="2200" b="1">
+                <a:solidFill>
+                  <a:srgbClr val="ED7623"/>
+                </a:solidFill>
+                <a:latin typeface="Helvetica Neue"/>
+              </a:rPr>
+              <a:t>1</a:t>
+            </a:r>
+          </a:p>
+        </p:txBody>
+      </p:sp>
+      <p:sp>
+        <p:nvSpPr>
+          <p:cNvPr id="8" name="TextBox 7"/>
+          <p:cNvSpPr txBox="1"/>
+          <p:nvPr/>
+        </p:nvSpPr>
+        <p:spPr>
+          <a:xfrm>
+            <a:off x="2971800" y="2880360"/>
+            <a:ext cx="3108960" cy="548640"/>
+          </a:xfrm>
+          <a:prstGeom prst="rect">
+            <a:avLst/>
+          </a:prstGeom>
+          <a:noFill/>
+        </p:spPr>
+        <p:txBody>
+          <a:bodyPr wrap="square" lIns="0" rIns="0" tIns="0" bIns="0">
+            <a:spAutoFit/>
+          </a:bodyPr>
+          <a:lstStyle/>
+          <a:p>
+            <a:pPr algn="l">
+              <a:lnSpc>
+                <a:spcPct val="115000"/>
+              </a:lnSpc>
+              <a:spcAft>
+                <a:spcPts val="600"/>
+              </a:spcAft>
+            </a:pPr>
+            <a:r>
+              <a:rPr sz="1550" b="0">
+                <a:solidFill>
+                  <a:srgbClr val="11406E"/>
+                </a:solidFill>
+                <a:latin typeface="Helvetica Neue"/>
+              </a:rPr>
+              <a:t>Ambiente de fondo</a:t>
+            </a:r>
+          </a:p>
+        </p:txBody>
+      </p:sp>
+      <p:sp>
+        <p:nvSpPr>
+          <p:cNvPr id="9" name="Rounded Rectangle 8"/>
+          <p:cNvSpPr/>
+          <p:nvPr/>
+        </p:nvSpPr>
+        <p:spPr>
+          <a:xfrm>
+            <a:off x="6583680" y="2697480"/>
+            <a:ext cx="4160520" cy="868680"/>
+          </a:xfrm>
+          <a:prstGeom prst="roundRect">
+            <a:avLst>
+              <a:gd name="adj" fmla="val 5000"/>
+            </a:avLst>
+          </a:prstGeom>
+          <a:solidFill>
+            <a:srgbClr val="F5F3EF"/>
+          </a:solidFill>
+          <a:ln w="11430">
+            <a:solidFill>
+              <a:srgbClr val="E3E0DA"/>
+            </a:solidFill>
+          </a:ln>
+          <a:effectLst/>
+        </p:spPr>
+        <p:style>
+          <a:lnRef idx="1">
+            <a:schemeClr val="accent1"/>
+          </a:lnRef>
+          <a:fillRef idx="3">
+            <a:schemeClr val="accent1"/>
+          </a:fillRef>
+          <a:effectRef idx="2">
+            <a:schemeClr val="accent1"/>
+          </a:effectRef>
+          <a:fontRef idx="minor">
+            <a:schemeClr val="lt1"/>
+          </a:fontRef>
+        </p:style>
+        <p:txBody>
+          <a:bodyPr rtlCol="0" anchor="ctr"/>
+          <a:lstStyle/>
+          <a:p>
+            <a:pPr algn="ctr"/>
+          </a:p>
+        </p:txBody>
+      </p:sp>
+      <p:sp>
+        <p:nvSpPr>
+          <p:cNvPr id="10" name="TextBox 9"/>
+          <p:cNvSpPr txBox="1"/>
+          <p:nvPr/>
+        </p:nvSpPr>
+        <p:spPr>
+          <a:xfrm>
+            <a:off x="6903720" y="2825496"/>
+            <a:ext cx="457200" cy="548640"/>
+          </a:xfrm>
+          <a:prstGeom prst="rect">
+            <a:avLst/>
+          </a:prstGeom>
+          <a:noFill/>
+        </p:spPr>
+        <p:txBody>
+          <a:bodyPr wrap="square" lIns="0" rIns="0" tIns="0" bIns="0">
+            <a:spAutoFit/>
+          </a:bodyPr>
+          <a:lstStyle/>
+          <a:p>
+            <a:pPr algn="l">
+              <a:spcAft>
+                <a:spcPts val="600"/>
+              </a:spcAft>
+            </a:pPr>
+            <a:r>
+              <a:rPr sz="2200" b="1">
+                <a:solidFill>
+                  <a:srgbClr val="ED7623"/>
+                </a:solidFill>
+                <a:latin typeface="Helvetica Neue"/>
+              </a:rPr>
+              <a:t>2</a:t>
+            </a:r>
+          </a:p>
+        </p:txBody>
+      </p:sp>
+      <p:sp>
+        <p:nvSpPr>
+          <p:cNvPr id="11" name="TextBox 10"/>
+          <p:cNvSpPr txBox="1"/>
+          <p:nvPr/>
+        </p:nvSpPr>
+        <p:spPr>
+          <a:xfrm>
+            <a:off x="7452360" y="2880360"/>
+            <a:ext cx="3108960" cy="548640"/>
+          </a:xfrm>
+          <a:prstGeom prst="rect">
+            <a:avLst/>
+          </a:prstGeom>
+          <a:noFill/>
+        </p:spPr>
+        <p:txBody>
+          <a:bodyPr wrap="square" lIns="0" rIns="0" tIns="0" bIns="0">
+            <a:spAutoFit/>
+          </a:bodyPr>
+          <a:lstStyle/>
+          <a:p>
+            <a:pPr algn="l">
+              <a:lnSpc>
+                <a:spcPct val="115000"/>
+              </a:lnSpc>
+              <a:spcAft>
+                <a:spcPts val="600"/>
+              </a:spcAft>
+            </a:pPr>
+            <a:r>
+              <a:rPr sz="1550" b="0">
+                <a:solidFill>
+                  <a:srgbClr val="11406E"/>
+                </a:solidFill>
+                <a:latin typeface="Helvetica Neue"/>
+              </a:rPr>
+              <a:t>Avatar encima, sin fondo</a:t>
+            </a:r>
+          </a:p>
+        </p:txBody>
+      </p:sp>
+      <p:sp>
+        <p:nvSpPr>
+          <p:cNvPr id="12" name="Rounded Rectangle 11"/>
+          <p:cNvSpPr/>
+          <p:nvPr/>
+        </p:nvSpPr>
+        <p:spPr>
+          <a:xfrm>
+            <a:off x="2103120" y="3794760"/>
+            <a:ext cx="4160520" cy="868680"/>
+          </a:xfrm>
+          <a:prstGeom prst="roundRect">
+            <a:avLst>
+              <a:gd name="adj" fmla="val 5000"/>
+            </a:avLst>
+          </a:prstGeom>
+          <a:solidFill>
+            <a:srgbClr val="F5F3EF"/>
+          </a:solidFill>
+          <a:ln w="11430">
+            <a:solidFill>
+              <a:srgbClr val="E3E0DA"/>
+            </a:solidFill>
+          </a:ln>
+          <a:effectLst/>
+        </p:spPr>
+        <p:style>
+          <a:lnRef idx="1">
+            <a:schemeClr val="accent1"/>
+          </a:lnRef>
+          <a:fillRef idx="3">
+            <a:schemeClr val="accent1"/>
+          </a:fillRef>
+          <a:effectRef idx="2">
+            <a:schemeClr val="accent1"/>
+          </a:effectRef>
+          <a:fontRef idx="minor">
+            <a:schemeClr val="lt1"/>
+          </a:fontRef>
+        </p:style>
+        <p:txBody>
+          <a:bodyPr rtlCol="0" anchor="ctr"/>
+          <a:lstStyle/>
+          <a:p>
+            <a:pPr algn="ctr"/>
+          </a:p>
+        </p:txBody>
+      </p:sp>
+      <p:sp>
+        <p:nvSpPr>
+          <p:cNvPr id="13" name="TextBox 12"/>
+          <p:cNvSpPr txBox="1"/>
+          <p:nvPr/>
+        </p:nvSpPr>
+        <p:spPr>
+          <a:xfrm>
+            <a:off x="2423160" y="3922776"/>
+            <a:ext cx="457200" cy="548640"/>
+          </a:xfrm>
+          <a:prstGeom prst="rect">
+            <a:avLst/>
+          </a:prstGeom>
+          <a:noFill/>
+        </p:spPr>
+        <p:txBody>
+          <a:bodyPr wrap="square" lIns="0" rIns="0" tIns="0" bIns="0">
+            <a:spAutoFit/>
+          </a:bodyPr>
+          <a:lstStyle/>
+          <a:p>
+            <a:pPr algn="l">
+              <a:spcAft>
+                <a:spcPts val="600"/>
+              </a:spcAft>
+            </a:pPr>
+            <a:r>
+              <a:rPr sz="2200" b="1">
+                <a:solidFill>
+                  <a:srgbClr val="ED7623"/>
+                </a:solidFill>
+                <a:latin typeface="Helvetica Neue"/>
+              </a:rPr>
+              <a:t>3</a:t>
+            </a:r>
+          </a:p>
+        </p:txBody>
+      </p:sp>
+      <p:sp>
+        <p:nvSpPr>
+          <p:cNvPr id="14" name="TextBox 13"/>
+          <p:cNvSpPr txBox="1"/>
+          <p:nvPr/>
+        </p:nvSpPr>
+        <p:spPr>
+          <a:xfrm>
+            <a:off x="2971800" y="3977640"/>
+            <a:ext cx="3108960" cy="548640"/>
+          </a:xfrm>
+          <a:prstGeom prst="rect">
+            <a:avLst/>
+          </a:prstGeom>
+          <a:noFill/>
+        </p:spPr>
+        <p:txBody>
+          <a:bodyPr wrap="square" lIns="0" rIns="0" tIns="0" bIns="0">
+            <a:spAutoFit/>
+          </a:bodyPr>
+          <a:lstStyle/>
+          <a:p>
+            <a:pPr algn="l">
+              <a:lnSpc>
+                <a:spcPct val="115000"/>
+              </a:lnSpc>
+              <a:spcAft>
+                <a:spcPts val="600"/>
+              </a:spcAft>
+            </a:pPr>
+            <a:r>
+              <a:rPr sz="1550" b="0">
+                <a:solidFill>
+                  <a:srgbClr val="11406E"/>
+                </a:solidFill>
+                <a:latin typeface="Helvetica Neue"/>
+              </a:rPr>
+              <a:t>La voz debajo de todo</a:t>
+            </a:r>
+          </a:p>
+        </p:txBody>
+      </p:sp>
+      <p:sp>
+        <p:nvSpPr>
+          <p:cNvPr id="15" name="Rounded Rectangle 14"/>
+          <p:cNvSpPr/>
+          <p:nvPr/>
+        </p:nvSpPr>
+        <p:spPr>
+          <a:xfrm>
+            <a:off x="6583680" y="3794760"/>
+            <a:ext cx="4160520" cy="868680"/>
+          </a:xfrm>
+          <a:prstGeom prst="roundRect">
+            <a:avLst>
+              <a:gd name="adj" fmla="val 5000"/>
+            </a:avLst>
+          </a:prstGeom>
+          <a:solidFill>
+            <a:srgbClr val="F5F3EF"/>
+          </a:solidFill>
+          <a:ln w="11430">
+            <a:solidFill>
+              <a:srgbClr val="E3E0DA"/>
+            </a:solidFill>
+          </a:ln>
+          <a:effectLst/>
+        </p:spPr>
+        <p:style>
+          <a:lnRef idx="1">
+            <a:schemeClr val="accent1"/>
+          </a:lnRef>
+          <a:fillRef idx="3">
+            <a:schemeClr val="accent1"/>
+          </a:fillRef>
+          <a:effectRef idx="2">
+            <a:schemeClr val="accent1"/>
+          </a:effectRef>
+          <a:fontRef idx="minor">
+            <a:schemeClr val="lt1"/>
+          </a:fontRef>
+        </p:style>
+        <p:txBody>
+          <a:bodyPr rtlCol="0" anchor="ctr"/>
+          <a:lstStyle/>
+          <a:p>
+            <a:pPr algn="ctr"/>
+          </a:p>
+        </p:txBody>
+      </p:sp>
+      <p:sp>
+        <p:nvSpPr>
+          <p:cNvPr id="16" name="TextBox 15"/>
+          <p:cNvSpPr txBox="1"/>
+          <p:nvPr/>
+        </p:nvSpPr>
+        <p:spPr>
+          <a:xfrm>
+            <a:off x="6903720" y="3922776"/>
+            <a:ext cx="457200" cy="548640"/>
+          </a:xfrm>
+          <a:prstGeom prst="rect">
+            <a:avLst/>
+          </a:prstGeom>
+          <a:noFill/>
+        </p:spPr>
+        <p:txBody>
+          <a:bodyPr wrap="square" lIns="0" rIns="0" tIns="0" bIns="0">
+            <a:spAutoFit/>
+          </a:bodyPr>
+          <a:lstStyle/>
+          <a:p>
+            <a:pPr algn="l">
+              <a:spcAft>
+                <a:spcPts val="600"/>
+              </a:spcAft>
+            </a:pPr>
+            <a:r>
+              <a:rPr sz="2200" b="1">
+                <a:solidFill>
+                  <a:srgbClr val="ED7623"/>
+                </a:solidFill>
+                <a:latin typeface="Helvetica Neue"/>
+              </a:rPr>
+              <a:t>4</a:t>
+            </a:r>
+          </a:p>
+        </p:txBody>
+      </p:sp>
+      <p:sp>
+        <p:nvSpPr>
+          <p:cNvPr id="17" name="TextBox 16"/>
+          <p:cNvSpPr txBox="1"/>
+          <p:nvPr/>
+        </p:nvSpPr>
+        <p:spPr>
+          <a:xfrm>
+            <a:off x="7452360" y="3977640"/>
+            <a:ext cx="3108960" cy="548640"/>
+          </a:xfrm>
+          <a:prstGeom prst="rect">
+            <a:avLst/>
+          </a:prstGeom>
+          <a:noFill/>
+        </p:spPr>
+        <p:txBody>
+          <a:bodyPr wrap="square" lIns="0" rIns="0" tIns="0" bIns="0">
+            <a:spAutoFit/>
+          </a:bodyPr>
+          <a:lstStyle/>
+          <a:p>
+            <a:pPr algn="l">
+              <a:lnSpc>
+                <a:spcPct val="115000"/>
+              </a:lnSpc>
+              <a:spcAft>
+                <a:spcPts val="600"/>
+              </a:spcAft>
+            </a:pPr>
+            <a:r>
+              <a:rPr sz="1550" b="0">
+                <a:solidFill>
+                  <a:srgbClr val="11406E"/>
+                </a:solidFill>
+                <a:latin typeface="Helvetica Neue"/>
+              </a:rPr>
+              <a:t>Cortar los silencios largos</a:t>
+            </a:r>
+          </a:p>
+        </p:txBody>
+      </p:sp>
+      <p:sp>
+        <p:nvSpPr>
+          <p:cNvPr id="18" name="Rounded Rectangle 17"/>
+          <p:cNvSpPr/>
+          <p:nvPr/>
+        </p:nvSpPr>
+        <p:spPr>
+          <a:xfrm>
+            <a:off x="2103120" y="4892040"/>
+            <a:ext cx="4160520" cy="868680"/>
+          </a:xfrm>
+          <a:prstGeom prst="roundRect">
+            <a:avLst>
+              <a:gd name="adj" fmla="val 5000"/>
+            </a:avLst>
+          </a:prstGeom>
+          <a:solidFill>
+            <a:srgbClr val="F5F3EF"/>
+          </a:solidFill>
+          <a:ln w="11430">
+            <a:solidFill>
+              <a:srgbClr val="E3E0DA"/>
+            </a:solidFill>
+          </a:ln>
+          <a:effectLst/>
+        </p:spPr>
+        <p:style>
+          <a:lnRef idx="1">
+            <a:schemeClr val="accent1"/>
+          </a:lnRef>
+          <a:fillRef idx="3">
+            <a:schemeClr val="accent1"/>
+          </a:fillRef>
+          <a:effectRef idx="2">
+            <a:schemeClr val="accent1"/>
+          </a:effectRef>
+          <a:fontRef idx="minor">
+            <a:schemeClr val="lt1"/>
+          </a:fontRef>
+        </p:style>
+        <p:txBody>
+          <a:bodyPr rtlCol="0" anchor="ctr"/>
+          <a:lstStyle/>
+          <a:p>
+            <a:pPr algn="ctr"/>
+          </a:p>
+        </p:txBody>
+      </p:sp>
+      <p:sp>
+        <p:nvSpPr>
+          <p:cNvPr id="19" name="TextBox 18"/>
+          <p:cNvSpPr txBox="1"/>
+          <p:nvPr/>
+        </p:nvSpPr>
+        <p:spPr>
+          <a:xfrm>
+            <a:off x="2423160" y="5020055"/>
+            <a:ext cx="457200" cy="548640"/>
+          </a:xfrm>
+          <a:prstGeom prst="rect">
+            <a:avLst/>
+          </a:prstGeom>
+          <a:noFill/>
+        </p:spPr>
+        <p:txBody>
+          <a:bodyPr wrap="square" lIns="0" rIns="0" tIns="0" bIns="0">
+            <a:spAutoFit/>
+          </a:bodyPr>
+          <a:lstStyle/>
+          <a:p>
+            <a:pPr algn="l">
+              <a:spcAft>
+                <a:spcPts val="600"/>
+              </a:spcAft>
+            </a:pPr>
+            <a:r>
+              <a:rPr sz="2200" b="1">
+                <a:solidFill>
+                  <a:srgbClr val="ED7623"/>
+                </a:solidFill>
+                <a:latin typeface="Helvetica Neue"/>
+              </a:rPr>
+              <a:t>5</a:t>
+            </a:r>
+          </a:p>
+        </p:txBody>
+      </p:sp>
+      <p:sp>
+        <p:nvSpPr>
+          <p:cNvPr id="20" name="TextBox 19"/>
+          <p:cNvSpPr txBox="1"/>
+          <p:nvPr/>
+        </p:nvSpPr>
+        <p:spPr>
+          <a:xfrm>
+            <a:off x="2971800" y="5074920"/>
+            <a:ext cx="3108960" cy="548640"/>
+          </a:xfrm>
+          <a:prstGeom prst="rect">
+            <a:avLst/>
+          </a:prstGeom>
+          <a:noFill/>
+        </p:spPr>
+        <p:txBody>
+          <a:bodyPr wrap="square" lIns="0" rIns="0" tIns="0" bIns="0">
+            <a:spAutoFit/>
+          </a:bodyPr>
+          <a:lstStyle/>
+          <a:p>
+            <a:pPr algn="l">
+              <a:lnSpc>
+                <a:spcPct val="115000"/>
+              </a:lnSpc>
+              <a:spcAft>
+                <a:spcPts val="600"/>
+              </a:spcAft>
+            </a:pPr>
+            <a:r>
+              <a:rPr sz="1550" b="0">
+                <a:solidFill>
+                  <a:srgbClr val="11406E"/>
+                </a:solidFill>
+                <a:latin typeface="Helvetica Neue"/>
+              </a:rPr>
+              <a:t>Subtítulos automáticos, y revisarlos</a:t>
+            </a:r>
+          </a:p>
+        </p:txBody>
+      </p:sp>
+      <p:sp>
+        <p:nvSpPr>
+          <p:cNvPr id="21" name="Rounded Rectangle 20"/>
+          <p:cNvSpPr/>
+          <p:nvPr/>
+        </p:nvSpPr>
+        <p:spPr>
+          <a:xfrm>
+            <a:off x="6583680" y="4892040"/>
+            <a:ext cx="4160520" cy="868680"/>
+          </a:xfrm>
+          <a:prstGeom prst="roundRect">
+            <a:avLst>
+              <a:gd name="adj" fmla="val 5000"/>
+            </a:avLst>
+          </a:prstGeom>
+          <a:solidFill>
+            <a:srgbClr val="F5F3EF"/>
+          </a:solidFill>
+          <a:ln w="11430">
+            <a:solidFill>
+              <a:srgbClr val="E3E0DA"/>
+            </a:solidFill>
+          </a:ln>
+          <a:effectLst/>
+        </p:spPr>
+        <p:style>
+          <a:lnRef idx="1">
+            <a:schemeClr val="accent1"/>
+          </a:lnRef>
+          <a:fillRef idx="3">
+            <a:schemeClr val="accent1"/>
+          </a:fillRef>
+          <a:effectRef idx="2">
+            <a:schemeClr val="accent1"/>
+          </a:effectRef>
+          <a:fontRef idx="minor">
+            <a:schemeClr val="lt1"/>
+          </a:fontRef>
+        </p:style>
+        <p:txBody>
+          <a:bodyPr rtlCol="0" anchor="ctr"/>
+          <a:lstStyle/>
+          <a:p>
+            <a:pPr algn="ctr"/>
+          </a:p>
+        </p:txBody>
+      </p:sp>
+      <p:sp>
+        <p:nvSpPr>
+          <p:cNvPr id="22" name="TextBox 21"/>
+          <p:cNvSpPr txBox="1"/>
+          <p:nvPr/>
+        </p:nvSpPr>
+        <p:spPr>
+          <a:xfrm>
+            <a:off x="6903720" y="5020055"/>
+            <a:ext cx="457200" cy="548640"/>
+          </a:xfrm>
+          <a:prstGeom prst="rect">
+            <a:avLst/>
+          </a:prstGeom>
+          <a:noFill/>
+        </p:spPr>
+        <p:txBody>
+          <a:bodyPr wrap="square" lIns="0" rIns="0" tIns="0" bIns="0">
+            <a:spAutoFit/>
+          </a:bodyPr>
+          <a:lstStyle/>
+          <a:p>
+            <a:pPr algn="l">
+              <a:spcAft>
+                <a:spcPts val="600"/>
+              </a:spcAft>
+            </a:pPr>
+            <a:r>
+              <a:rPr sz="2200" b="1">
+                <a:solidFill>
+                  <a:srgbClr val="ED7623"/>
+                </a:solidFill>
+                <a:latin typeface="Helvetica Neue"/>
+              </a:rPr>
+              <a:t>6</a:t>
+            </a:r>
+          </a:p>
+        </p:txBody>
+      </p:sp>
+      <p:sp>
+        <p:nvSpPr>
+          <p:cNvPr id="23" name="TextBox 22"/>
+          <p:cNvSpPr txBox="1"/>
+          <p:nvPr/>
+        </p:nvSpPr>
+        <p:spPr>
+          <a:xfrm>
+            <a:off x="7452360" y="5074920"/>
+            <a:ext cx="3108960" cy="548640"/>
+          </a:xfrm>
+          <a:prstGeom prst="rect">
+            <a:avLst/>
+          </a:prstGeom>
+          <a:noFill/>
+        </p:spPr>
+        <p:txBody>
+          <a:bodyPr wrap="square" lIns="0" rIns="0" tIns="0" bIns="0">
+            <a:spAutoFit/>
+          </a:bodyPr>
+          <a:lstStyle/>
+          <a:p>
+            <a:pPr algn="l">
+              <a:lnSpc>
+                <a:spcPct val="115000"/>
+              </a:lnSpc>
+              <a:spcAft>
+                <a:spcPts val="600"/>
+              </a:spcAft>
+            </a:pPr>
+            <a:r>
+              <a:rPr sz="1550" b="0">
+                <a:solidFill>
+                  <a:srgbClr val="11406E"/>
+                </a:solidFill>
+                <a:latin typeface="Helvetica Neue"/>
+              </a:rPr>
+              <a:t>Música baja · zoom lento sobre la imagen</a:t>
+            </a:r>
+          </a:p>
+        </p:txBody>
+      </p:sp>
+      <p:sp>
+        <p:nvSpPr>
+          <p:cNvPr id="24" name="Rounded Rectangle 23"/>
+          <p:cNvSpPr/>
+          <p:nvPr/>
+        </p:nvSpPr>
+        <p:spPr>
+          <a:xfrm>
+            <a:off x="2103120" y="5943600"/>
+            <a:ext cx="8778240" cy="713232"/>
+          </a:xfrm>
+          <a:prstGeom prst="roundRect">
+            <a:avLst>
+              <a:gd name="adj" fmla="val 5000"/>
+            </a:avLst>
+          </a:prstGeom>
+          <a:solidFill>
+            <a:srgbClr val="ECF3F7"/>
           </a:solidFill>
           <a:ln>
             <a:noFill/>
@@ -7148,14 +7978,14 @@
       </p:sp>
       <p:sp>
         <p:nvSpPr>
-          <p:cNvPr id="7" name="TextBox 6"/>
+          <p:cNvPr id="25" name="TextBox 24"/>
           <p:cNvSpPr txBox="1"/>
           <p:nvPr/>
         </p:nvSpPr>
         <p:spPr>
           <a:xfrm>
-            <a:off x="2423160" y="2825496"/>
-            <a:ext cx="457200" cy="548640"/>
+            <a:off x="2514600" y="6117336"/>
+            <a:ext cx="8138160" cy="457200"/>
           </a:xfrm>
           <a:prstGeom prst="rect">
             <a:avLst/>
@@ -7174,771 +8004,9 @@
               </a:spcAft>
             </a:pPr>
             <a:r>
-              <a:rPr sz="2200" b="1">
-                <a:solidFill>
-                  <a:srgbClr val="FF5C7A"/>
-                </a:solidFill>
-                <a:latin typeface="Helvetica Neue"/>
-              </a:rPr>
-              <a:t>1</a:t>
-            </a:r>
-          </a:p>
-        </p:txBody>
-      </p:sp>
-      <p:sp>
-        <p:nvSpPr>
-          <p:cNvPr id="8" name="TextBox 7"/>
-          <p:cNvSpPr txBox="1"/>
-          <p:nvPr/>
-        </p:nvSpPr>
-        <p:spPr>
-          <a:xfrm>
-            <a:off x="2971800" y="2880360"/>
-            <a:ext cx="3108960" cy="548640"/>
-          </a:xfrm>
-          <a:prstGeom prst="rect">
-            <a:avLst/>
-          </a:prstGeom>
-          <a:noFill/>
-        </p:spPr>
-        <p:txBody>
-          <a:bodyPr wrap="square" lIns="0" rIns="0" tIns="0" bIns="0">
-            <a:spAutoFit/>
-          </a:bodyPr>
-          <a:lstStyle/>
-          <a:p>
-            <a:pPr algn="l">
-              <a:lnSpc>
-                <a:spcPct val="115000"/>
-              </a:lnSpc>
-              <a:spcAft>
-                <a:spcPts val="600"/>
-              </a:spcAft>
-            </a:pPr>
-            <a:r>
-              <a:rPr sz="1550" b="0">
-                <a:solidFill>
-                  <a:srgbClr val="F2EFEA"/>
-                </a:solidFill>
-                <a:latin typeface="Helvetica Neue"/>
-              </a:rPr>
-              <a:t>Ambiente de fondo</a:t>
-            </a:r>
-          </a:p>
-        </p:txBody>
-      </p:sp>
-      <p:sp>
-        <p:nvSpPr>
-          <p:cNvPr id="9" name="Rounded Rectangle 8"/>
-          <p:cNvSpPr/>
-          <p:nvPr/>
-        </p:nvSpPr>
-        <p:spPr>
-          <a:xfrm>
-            <a:off x="6583680" y="2697480"/>
-            <a:ext cx="4160520" cy="868680"/>
-          </a:xfrm>
-          <a:prstGeom prst="roundRect">
-            <a:avLst>
-              <a:gd name="adj" fmla="val 6000"/>
-            </a:avLst>
-          </a:prstGeom>
-          <a:solidFill>
-            <a:srgbClr val="1A2027"/>
-          </a:solidFill>
-          <a:ln>
-            <a:noFill/>
-          </a:ln>
-          <a:effectLst/>
-        </p:spPr>
-        <p:style>
-          <a:lnRef idx="1">
-            <a:schemeClr val="accent1"/>
-          </a:lnRef>
-          <a:fillRef idx="3">
-            <a:schemeClr val="accent1"/>
-          </a:fillRef>
-          <a:effectRef idx="2">
-            <a:schemeClr val="accent1"/>
-          </a:effectRef>
-          <a:fontRef idx="minor">
-            <a:schemeClr val="lt1"/>
-          </a:fontRef>
-        </p:style>
-        <p:txBody>
-          <a:bodyPr rtlCol="0" anchor="ctr"/>
-          <a:lstStyle/>
-          <a:p>
-            <a:pPr algn="ctr"/>
-          </a:p>
-        </p:txBody>
-      </p:sp>
-      <p:sp>
-        <p:nvSpPr>
-          <p:cNvPr id="10" name="TextBox 9"/>
-          <p:cNvSpPr txBox="1"/>
-          <p:nvPr/>
-        </p:nvSpPr>
-        <p:spPr>
-          <a:xfrm>
-            <a:off x="6903720" y="2825496"/>
-            <a:ext cx="457200" cy="548640"/>
-          </a:xfrm>
-          <a:prstGeom prst="rect">
-            <a:avLst/>
-          </a:prstGeom>
-          <a:noFill/>
-        </p:spPr>
-        <p:txBody>
-          <a:bodyPr wrap="square" lIns="0" rIns="0" tIns="0" bIns="0">
-            <a:spAutoFit/>
-          </a:bodyPr>
-          <a:lstStyle/>
-          <a:p>
-            <a:pPr algn="l">
-              <a:spcAft>
-                <a:spcPts val="600"/>
-              </a:spcAft>
-            </a:pPr>
-            <a:r>
-              <a:rPr sz="2200" b="1">
-                <a:solidFill>
-                  <a:srgbClr val="FF5C7A"/>
-                </a:solidFill>
-                <a:latin typeface="Helvetica Neue"/>
-              </a:rPr>
-              <a:t>2</a:t>
-            </a:r>
-          </a:p>
-        </p:txBody>
-      </p:sp>
-      <p:sp>
-        <p:nvSpPr>
-          <p:cNvPr id="11" name="TextBox 10"/>
-          <p:cNvSpPr txBox="1"/>
-          <p:nvPr/>
-        </p:nvSpPr>
-        <p:spPr>
-          <a:xfrm>
-            <a:off x="7452360" y="2880360"/>
-            <a:ext cx="3108960" cy="548640"/>
-          </a:xfrm>
-          <a:prstGeom prst="rect">
-            <a:avLst/>
-          </a:prstGeom>
-          <a:noFill/>
-        </p:spPr>
-        <p:txBody>
-          <a:bodyPr wrap="square" lIns="0" rIns="0" tIns="0" bIns="0">
-            <a:spAutoFit/>
-          </a:bodyPr>
-          <a:lstStyle/>
-          <a:p>
-            <a:pPr algn="l">
-              <a:lnSpc>
-                <a:spcPct val="115000"/>
-              </a:lnSpc>
-              <a:spcAft>
-                <a:spcPts val="600"/>
-              </a:spcAft>
-            </a:pPr>
-            <a:r>
-              <a:rPr sz="1550" b="0">
-                <a:solidFill>
-                  <a:srgbClr val="F2EFEA"/>
-                </a:solidFill>
-                <a:latin typeface="Helvetica Neue"/>
-              </a:rPr>
-              <a:t>Avatar encima, sin fondo</a:t>
-            </a:r>
-          </a:p>
-        </p:txBody>
-      </p:sp>
-      <p:sp>
-        <p:nvSpPr>
-          <p:cNvPr id="12" name="Rounded Rectangle 11"/>
-          <p:cNvSpPr/>
-          <p:nvPr/>
-        </p:nvSpPr>
-        <p:spPr>
-          <a:xfrm>
-            <a:off x="2103120" y="3794760"/>
-            <a:ext cx="4160520" cy="868680"/>
-          </a:xfrm>
-          <a:prstGeom prst="roundRect">
-            <a:avLst>
-              <a:gd name="adj" fmla="val 6000"/>
-            </a:avLst>
-          </a:prstGeom>
-          <a:solidFill>
-            <a:srgbClr val="1A2027"/>
-          </a:solidFill>
-          <a:ln>
-            <a:noFill/>
-          </a:ln>
-          <a:effectLst/>
-        </p:spPr>
-        <p:style>
-          <a:lnRef idx="1">
-            <a:schemeClr val="accent1"/>
-          </a:lnRef>
-          <a:fillRef idx="3">
-            <a:schemeClr val="accent1"/>
-          </a:fillRef>
-          <a:effectRef idx="2">
-            <a:schemeClr val="accent1"/>
-          </a:effectRef>
-          <a:fontRef idx="minor">
-            <a:schemeClr val="lt1"/>
-          </a:fontRef>
-        </p:style>
-        <p:txBody>
-          <a:bodyPr rtlCol="0" anchor="ctr"/>
-          <a:lstStyle/>
-          <a:p>
-            <a:pPr algn="ctr"/>
-          </a:p>
-        </p:txBody>
-      </p:sp>
-      <p:sp>
-        <p:nvSpPr>
-          <p:cNvPr id="13" name="TextBox 12"/>
-          <p:cNvSpPr txBox="1"/>
-          <p:nvPr/>
-        </p:nvSpPr>
-        <p:spPr>
-          <a:xfrm>
-            <a:off x="2423160" y="3922776"/>
-            <a:ext cx="457200" cy="548640"/>
-          </a:xfrm>
-          <a:prstGeom prst="rect">
-            <a:avLst/>
-          </a:prstGeom>
-          <a:noFill/>
-        </p:spPr>
-        <p:txBody>
-          <a:bodyPr wrap="square" lIns="0" rIns="0" tIns="0" bIns="0">
-            <a:spAutoFit/>
-          </a:bodyPr>
-          <a:lstStyle/>
-          <a:p>
-            <a:pPr algn="l">
-              <a:spcAft>
-                <a:spcPts val="600"/>
-              </a:spcAft>
-            </a:pPr>
-            <a:r>
-              <a:rPr sz="2200" b="1">
-                <a:solidFill>
-                  <a:srgbClr val="FF5C7A"/>
-                </a:solidFill>
-                <a:latin typeface="Helvetica Neue"/>
-              </a:rPr>
-              <a:t>3</a:t>
-            </a:r>
-          </a:p>
-        </p:txBody>
-      </p:sp>
-      <p:sp>
-        <p:nvSpPr>
-          <p:cNvPr id="14" name="TextBox 13"/>
-          <p:cNvSpPr txBox="1"/>
-          <p:nvPr/>
-        </p:nvSpPr>
-        <p:spPr>
-          <a:xfrm>
-            <a:off x="2971800" y="3977640"/>
-            <a:ext cx="3108960" cy="548640"/>
-          </a:xfrm>
-          <a:prstGeom prst="rect">
-            <a:avLst/>
-          </a:prstGeom>
-          <a:noFill/>
-        </p:spPr>
-        <p:txBody>
-          <a:bodyPr wrap="square" lIns="0" rIns="0" tIns="0" bIns="0">
-            <a:spAutoFit/>
-          </a:bodyPr>
-          <a:lstStyle/>
-          <a:p>
-            <a:pPr algn="l">
-              <a:lnSpc>
-                <a:spcPct val="115000"/>
-              </a:lnSpc>
-              <a:spcAft>
-                <a:spcPts val="600"/>
-              </a:spcAft>
-            </a:pPr>
-            <a:r>
-              <a:rPr sz="1550" b="0">
-                <a:solidFill>
-                  <a:srgbClr val="F2EFEA"/>
-                </a:solidFill>
-                <a:latin typeface="Helvetica Neue"/>
-              </a:rPr>
-              <a:t>La voz debajo de todo</a:t>
-            </a:r>
-          </a:p>
-        </p:txBody>
-      </p:sp>
-      <p:sp>
-        <p:nvSpPr>
-          <p:cNvPr id="15" name="Rounded Rectangle 14"/>
-          <p:cNvSpPr/>
-          <p:nvPr/>
-        </p:nvSpPr>
-        <p:spPr>
-          <a:xfrm>
-            <a:off x="6583680" y="3794760"/>
-            <a:ext cx="4160520" cy="868680"/>
-          </a:xfrm>
-          <a:prstGeom prst="roundRect">
-            <a:avLst>
-              <a:gd name="adj" fmla="val 6000"/>
-            </a:avLst>
-          </a:prstGeom>
-          <a:solidFill>
-            <a:srgbClr val="1A2027"/>
-          </a:solidFill>
-          <a:ln>
-            <a:noFill/>
-          </a:ln>
-          <a:effectLst/>
-        </p:spPr>
-        <p:style>
-          <a:lnRef idx="1">
-            <a:schemeClr val="accent1"/>
-          </a:lnRef>
-          <a:fillRef idx="3">
-            <a:schemeClr val="accent1"/>
-          </a:fillRef>
-          <a:effectRef idx="2">
-            <a:schemeClr val="accent1"/>
-          </a:effectRef>
-          <a:fontRef idx="minor">
-            <a:schemeClr val="lt1"/>
-          </a:fontRef>
-        </p:style>
-        <p:txBody>
-          <a:bodyPr rtlCol="0" anchor="ctr"/>
-          <a:lstStyle/>
-          <a:p>
-            <a:pPr algn="ctr"/>
-          </a:p>
-        </p:txBody>
-      </p:sp>
-      <p:sp>
-        <p:nvSpPr>
-          <p:cNvPr id="16" name="TextBox 15"/>
-          <p:cNvSpPr txBox="1"/>
-          <p:nvPr/>
-        </p:nvSpPr>
-        <p:spPr>
-          <a:xfrm>
-            <a:off x="6903720" y="3922776"/>
-            <a:ext cx="457200" cy="548640"/>
-          </a:xfrm>
-          <a:prstGeom prst="rect">
-            <a:avLst/>
-          </a:prstGeom>
-          <a:noFill/>
-        </p:spPr>
-        <p:txBody>
-          <a:bodyPr wrap="square" lIns="0" rIns="0" tIns="0" bIns="0">
-            <a:spAutoFit/>
-          </a:bodyPr>
-          <a:lstStyle/>
-          <a:p>
-            <a:pPr algn="l">
-              <a:spcAft>
-                <a:spcPts val="600"/>
-              </a:spcAft>
-            </a:pPr>
-            <a:r>
-              <a:rPr sz="2200" b="1">
-                <a:solidFill>
-                  <a:srgbClr val="FF5C7A"/>
-                </a:solidFill>
-                <a:latin typeface="Helvetica Neue"/>
-              </a:rPr>
-              <a:t>4</a:t>
-            </a:r>
-          </a:p>
-        </p:txBody>
-      </p:sp>
-      <p:sp>
-        <p:nvSpPr>
-          <p:cNvPr id="17" name="TextBox 16"/>
-          <p:cNvSpPr txBox="1"/>
-          <p:nvPr/>
-        </p:nvSpPr>
-        <p:spPr>
-          <a:xfrm>
-            <a:off x="7452360" y="3977640"/>
-            <a:ext cx="3108960" cy="548640"/>
-          </a:xfrm>
-          <a:prstGeom prst="rect">
-            <a:avLst/>
-          </a:prstGeom>
-          <a:noFill/>
-        </p:spPr>
-        <p:txBody>
-          <a:bodyPr wrap="square" lIns="0" rIns="0" tIns="0" bIns="0">
-            <a:spAutoFit/>
-          </a:bodyPr>
-          <a:lstStyle/>
-          <a:p>
-            <a:pPr algn="l">
-              <a:lnSpc>
-                <a:spcPct val="115000"/>
-              </a:lnSpc>
-              <a:spcAft>
-                <a:spcPts val="600"/>
-              </a:spcAft>
-            </a:pPr>
-            <a:r>
-              <a:rPr sz="1550" b="0">
-                <a:solidFill>
-                  <a:srgbClr val="F2EFEA"/>
-                </a:solidFill>
-                <a:latin typeface="Helvetica Neue"/>
-              </a:rPr>
-              <a:t>Cortar los silencios largos</a:t>
-            </a:r>
-          </a:p>
-        </p:txBody>
-      </p:sp>
-      <p:sp>
-        <p:nvSpPr>
-          <p:cNvPr id="18" name="Rounded Rectangle 17"/>
-          <p:cNvSpPr/>
-          <p:nvPr/>
-        </p:nvSpPr>
-        <p:spPr>
-          <a:xfrm>
-            <a:off x="2103120" y="4892040"/>
-            <a:ext cx="4160520" cy="868680"/>
-          </a:xfrm>
-          <a:prstGeom prst="roundRect">
-            <a:avLst>
-              <a:gd name="adj" fmla="val 6000"/>
-            </a:avLst>
-          </a:prstGeom>
-          <a:solidFill>
-            <a:srgbClr val="1A2027"/>
-          </a:solidFill>
-          <a:ln>
-            <a:noFill/>
-          </a:ln>
-          <a:effectLst/>
-        </p:spPr>
-        <p:style>
-          <a:lnRef idx="1">
-            <a:schemeClr val="accent1"/>
-          </a:lnRef>
-          <a:fillRef idx="3">
-            <a:schemeClr val="accent1"/>
-          </a:fillRef>
-          <a:effectRef idx="2">
-            <a:schemeClr val="accent1"/>
-          </a:effectRef>
-          <a:fontRef idx="minor">
-            <a:schemeClr val="lt1"/>
-          </a:fontRef>
-        </p:style>
-        <p:txBody>
-          <a:bodyPr rtlCol="0" anchor="ctr"/>
-          <a:lstStyle/>
-          <a:p>
-            <a:pPr algn="ctr"/>
-          </a:p>
-        </p:txBody>
-      </p:sp>
-      <p:sp>
-        <p:nvSpPr>
-          <p:cNvPr id="19" name="TextBox 18"/>
-          <p:cNvSpPr txBox="1"/>
-          <p:nvPr/>
-        </p:nvSpPr>
-        <p:spPr>
-          <a:xfrm>
-            <a:off x="2423160" y="5020055"/>
-            <a:ext cx="457200" cy="548640"/>
-          </a:xfrm>
-          <a:prstGeom prst="rect">
-            <a:avLst/>
-          </a:prstGeom>
-          <a:noFill/>
-        </p:spPr>
-        <p:txBody>
-          <a:bodyPr wrap="square" lIns="0" rIns="0" tIns="0" bIns="0">
-            <a:spAutoFit/>
-          </a:bodyPr>
-          <a:lstStyle/>
-          <a:p>
-            <a:pPr algn="l">
-              <a:spcAft>
-                <a:spcPts val="600"/>
-              </a:spcAft>
-            </a:pPr>
-            <a:r>
-              <a:rPr sz="2200" b="1">
-                <a:solidFill>
-                  <a:srgbClr val="FF5C7A"/>
-                </a:solidFill>
-                <a:latin typeface="Helvetica Neue"/>
-              </a:rPr>
-              <a:t>5</a:t>
-            </a:r>
-          </a:p>
-        </p:txBody>
-      </p:sp>
-      <p:sp>
-        <p:nvSpPr>
-          <p:cNvPr id="20" name="TextBox 19"/>
-          <p:cNvSpPr txBox="1"/>
-          <p:nvPr/>
-        </p:nvSpPr>
-        <p:spPr>
-          <a:xfrm>
-            <a:off x="2971800" y="5074920"/>
-            <a:ext cx="3108960" cy="548640"/>
-          </a:xfrm>
-          <a:prstGeom prst="rect">
-            <a:avLst/>
-          </a:prstGeom>
-          <a:noFill/>
-        </p:spPr>
-        <p:txBody>
-          <a:bodyPr wrap="square" lIns="0" rIns="0" tIns="0" bIns="0">
-            <a:spAutoFit/>
-          </a:bodyPr>
-          <a:lstStyle/>
-          <a:p>
-            <a:pPr algn="l">
-              <a:lnSpc>
-                <a:spcPct val="115000"/>
-              </a:lnSpc>
-              <a:spcAft>
-                <a:spcPts val="600"/>
-              </a:spcAft>
-            </a:pPr>
-            <a:r>
-              <a:rPr sz="1550" b="0">
-                <a:solidFill>
-                  <a:srgbClr val="F2EFEA"/>
-                </a:solidFill>
-                <a:latin typeface="Helvetica Neue"/>
-              </a:rPr>
-              <a:t>Subtítulos automáticos, y revisarlos</a:t>
-            </a:r>
-          </a:p>
-        </p:txBody>
-      </p:sp>
-      <p:sp>
-        <p:nvSpPr>
-          <p:cNvPr id="21" name="Rounded Rectangle 20"/>
-          <p:cNvSpPr/>
-          <p:nvPr/>
-        </p:nvSpPr>
-        <p:spPr>
-          <a:xfrm>
-            <a:off x="6583680" y="4892040"/>
-            <a:ext cx="4160520" cy="868680"/>
-          </a:xfrm>
-          <a:prstGeom prst="roundRect">
-            <a:avLst>
-              <a:gd name="adj" fmla="val 6000"/>
-            </a:avLst>
-          </a:prstGeom>
-          <a:solidFill>
-            <a:srgbClr val="1A2027"/>
-          </a:solidFill>
-          <a:ln>
-            <a:noFill/>
-          </a:ln>
-          <a:effectLst/>
-        </p:spPr>
-        <p:style>
-          <a:lnRef idx="1">
-            <a:schemeClr val="accent1"/>
-          </a:lnRef>
-          <a:fillRef idx="3">
-            <a:schemeClr val="accent1"/>
-          </a:fillRef>
-          <a:effectRef idx="2">
-            <a:schemeClr val="accent1"/>
-          </a:effectRef>
-          <a:fontRef idx="minor">
-            <a:schemeClr val="lt1"/>
-          </a:fontRef>
-        </p:style>
-        <p:txBody>
-          <a:bodyPr rtlCol="0" anchor="ctr"/>
-          <a:lstStyle/>
-          <a:p>
-            <a:pPr algn="ctr"/>
-          </a:p>
-        </p:txBody>
-      </p:sp>
-      <p:sp>
-        <p:nvSpPr>
-          <p:cNvPr id="22" name="TextBox 21"/>
-          <p:cNvSpPr txBox="1"/>
-          <p:nvPr/>
-        </p:nvSpPr>
-        <p:spPr>
-          <a:xfrm>
-            <a:off x="6903720" y="5020055"/>
-            <a:ext cx="457200" cy="548640"/>
-          </a:xfrm>
-          <a:prstGeom prst="rect">
-            <a:avLst/>
-          </a:prstGeom>
-          <a:noFill/>
-        </p:spPr>
-        <p:txBody>
-          <a:bodyPr wrap="square" lIns="0" rIns="0" tIns="0" bIns="0">
-            <a:spAutoFit/>
-          </a:bodyPr>
-          <a:lstStyle/>
-          <a:p>
-            <a:pPr algn="l">
-              <a:spcAft>
-                <a:spcPts val="600"/>
-              </a:spcAft>
-            </a:pPr>
-            <a:r>
-              <a:rPr sz="2200" b="1">
-                <a:solidFill>
-                  <a:srgbClr val="FF5C7A"/>
-                </a:solidFill>
-                <a:latin typeface="Helvetica Neue"/>
-              </a:rPr>
-              <a:t>6</a:t>
-            </a:r>
-          </a:p>
-        </p:txBody>
-      </p:sp>
-      <p:sp>
-        <p:nvSpPr>
-          <p:cNvPr id="23" name="TextBox 22"/>
-          <p:cNvSpPr txBox="1"/>
-          <p:nvPr/>
-        </p:nvSpPr>
-        <p:spPr>
-          <a:xfrm>
-            <a:off x="7452360" y="5074920"/>
-            <a:ext cx="3108960" cy="548640"/>
-          </a:xfrm>
-          <a:prstGeom prst="rect">
-            <a:avLst/>
-          </a:prstGeom>
-          <a:noFill/>
-        </p:spPr>
-        <p:txBody>
-          <a:bodyPr wrap="square" lIns="0" rIns="0" tIns="0" bIns="0">
-            <a:spAutoFit/>
-          </a:bodyPr>
-          <a:lstStyle/>
-          <a:p>
-            <a:pPr algn="l">
-              <a:lnSpc>
-                <a:spcPct val="115000"/>
-              </a:lnSpc>
-              <a:spcAft>
-                <a:spcPts val="600"/>
-              </a:spcAft>
-            </a:pPr>
-            <a:r>
-              <a:rPr sz="1550" b="0">
-                <a:solidFill>
-                  <a:srgbClr val="F2EFEA"/>
-                </a:solidFill>
-                <a:latin typeface="Helvetica Neue"/>
-              </a:rPr>
-              <a:t>Música baja · zoom lento sobre la imagen</a:t>
-            </a:r>
-          </a:p>
-        </p:txBody>
-      </p:sp>
-      <p:sp>
-        <p:nvSpPr>
-          <p:cNvPr id="24" name="Rounded Rectangle 23"/>
-          <p:cNvSpPr/>
-          <p:nvPr/>
-        </p:nvSpPr>
-        <p:spPr>
-          <a:xfrm>
-            <a:off x="2103120" y="5943600"/>
-            <a:ext cx="8778240" cy="713232"/>
-          </a:xfrm>
-          <a:prstGeom prst="roundRect">
-            <a:avLst>
-              <a:gd name="adj" fmla="val 6000"/>
-            </a:avLst>
-          </a:prstGeom>
-          <a:solidFill>
-            <a:srgbClr val="142826"/>
-          </a:solidFill>
-          <a:ln>
-            <a:noFill/>
-          </a:ln>
-          <a:effectLst/>
-        </p:spPr>
-        <p:style>
-          <a:lnRef idx="1">
-            <a:schemeClr val="accent1"/>
-          </a:lnRef>
-          <a:fillRef idx="3">
-            <a:schemeClr val="accent1"/>
-          </a:fillRef>
-          <a:effectRef idx="2">
-            <a:schemeClr val="accent1"/>
-          </a:effectRef>
-          <a:fontRef idx="minor">
-            <a:schemeClr val="lt1"/>
-          </a:fontRef>
-        </p:style>
-        <p:txBody>
-          <a:bodyPr rtlCol="0" anchor="ctr"/>
-          <a:lstStyle/>
-          <a:p>
-            <a:pPr algn="ctr"/>
-          </a:p>
-        </p:txBody>
-      </p:sp>
-      <p:sp>
-        <p:nvSpPr>
-          <p:cNvPr id="25" name="TextBox 24"/>
-          <p:cNvSpPr txBox="1"/>
-          <p:nvPr/>
-        </p:nvSpPr>
-        <p:spPr>
-          <a:xfrm>
-            <a:off x="2514600" y="6117336"/>
-            <a:ext cx="8138160" cy="457200"/>
-          </a:xfrm>
-          <a:prstGeom prst="rect">
-            <a:avLst/>
-          </a:prstGeom>
-          <a:noFill/>
-        </p:spPr>
-        <p:txBody>
-          <a:bodyPr wrap="square" lIns="0" rIns="0" tIns="0" bIns="0">
-            <a:spAutoFit/>
-          </a:bodyPr>
-          <a:lstStyle/>
-          <a:p>
-            <a:pPr algn="l">
-              <a:spcAft>
-                <a:spcPts val="600"/>
-              </a:spcAft>
-            </a:pPr>
-            <a:r>
               <a:rPr sz="1600" b="1">
                 <a:solidFill>
-                  <a:srgbClr val="45E0C8"/>
+                  <a:srgbClr val="35789C"/>
                 </a:solidFill>
                 <a:latin typeface="Helvetica Neue"/>
               </a:rPr>
@@ -7961,7 +8029,7 @@
     <p:bg>
       <p:bgPr>
         <a:solidFill>
-          <a:srgbClr val="101418"/>
+          <a:srgbClr val="FFFFFF"/>
         </a:solidFill>
         <a:effectLst/>
       </p:bgPr>
@@ -7982,13 +8050,13 @@
         <p:spPr>
           <a:xfrm>
             <a:off x="0" y="0"/>
-            <a:ext cx="155448" cy="6858000"/>
+            <a:ext cx="128016" cy="6858000"/>
           </a:xfrm>
           <a:prstGeom prst="rect">
             <a:avLst/>
           </a:prstGeom>
           <a:solidFill>
-            <a:srgbClr val="FF5C7A"/>
+            <a:srgbClr val="ED7623"/>
           </a:solidFill>
           <a:ln>
             <a:noFill/>
@@ -8047,7 +8115,7 @@
             <a:r>
               <a:rPr sz="1200" b="1">
                 <a:solidFill>
-                  <a:srgbClr val="45E0C8"/>
+                  <a:srgbClr val="ED7623"/>
                 </a:solidFill>
                 <a:latin typeface="Helvetica Neue"/>
               </a:rPr>
@@ -8089,7 +8157,7 @@
             <a:r>
               <a:rPr sz="3600" b="1">
                 <a:solidFill>
-                  <a:srgbClr val="F2EFEA"/>
+                  <a:srgbClr val="11406E"/>
                 </a:solidFill>
                 <a:latin typeface="Helvetica Neue"/>
               </a:rPr>
@@ -8128,7 +8196,7 @@
             <a:r>
               <a:rPr sz="2000" b="0">
                 <a:solidFill>
-                  <a:srgbClr val="8A94A0"/>
+                  <a:srgbClr val="6E6E6E"/>
                 </a:solidFill>
                 <a:latin typeface="Helvetica Neue"/>
               </a:rPr>
@@ -8150,14 +8218,16 @@
           </a:xfrm>
           <a:prstGeom prst="roundRect">
             <a:avLst>
-              <a:gd name="adj" fmla="val 6000"/>
+              <a:gd name="adj" fmla="val 5000"/>
             </a:avLst>
           </a:prstGeom>
           <a:solidFill>
-            <a:srgbClr val="1A2027"/>
+            <a:srgbClr val="F5F3EF"/>
           </a:solidFill>
-          <a:ln>
-            <a:noFill/>
+          <a:ln w="11430">
+            <a:solidFill>
+              <a:srgbClr val="E3E0DA"/>
+            </a:solidFill>
           </a:ln>
           <a:effectLst/>
         </p:spPr>
@@ -8213,7 +8283,7 @@
             <a:r>
               <a:rPr sz="1900" b="1">
                 <a:solidFill>
-                  <a:srgbClr val="FF5C7A"/>
+                  <a:srgbClr val="ED7623"/>
                 </a:solidFill>
                 <a:latin typeface="Helvetica Neue"/>
               </a:rPr>
@@ -8252,11 +8322,11 @@
             <a:r>
               <a:rPr sz="1600" b="0">
                 <a:solidFill>
-                  <a:srgbClr val="F2EFEA"/>
-                </a:solidFill>
-                <a:latin typeface="Helvetica Neue"/>
-              </a:rPr>
-              <a:t>80 palabras, sin decir «algoritmo» ni «modelo»</a:t>
+                  <a:srgbClr val="6E6E6E"/>
+                </a:solidFill>
+                <a:latin typeface="Helvetica Neue"/>
+              </a:rPr>
+              <a:t>81 palabras, sin decir «algoritmo» ni «modelo»</a:t>
             </a:r>
           </a:p>
         </p:txBody>
@@ -8274,14 +8344,16 @@
           </a:xfrm>
           <a:prstGeom prst="roundRect">
             <a:avLst>
-              <a:gd name="adj" fmla="val 6000"/>
+              <a:gd name="adj" fmla="val 5000"/>
             </a:avLst>
           </a:prstGeom>
           <a:solidFill>
-            <a:srgbClr val="1A2027"/>
+            <a:srgbClr val="F5F3EF"/>
           </a:solidFill>
-          <a:ln>
-            <a:noFill/>
+          <a:ln w="11430">
+            <a:solidFill>
+              <a:srgbClr val="E3E0DA"/>
+            </a:solidFill>
           </a:ln>
           <a:effectLst/>
         </p:spPr>
@@ -8337,7 +8409,7 @@
             <a:r>
               <a:rPr sz="1900" b="1">
                 <a:solidFill>
-                  <a:srgbClr val="FF5C7A"/>
+                  <a:srgbClr val="ED7623"/>
                 </a:solidFill>
                 <a:latin typeface="Helvetica Neue"/>
               </a:rPr>
@@ -8376,7 +8448,7 @@
             <a:r>
               <a:rPr sz="1600" b="0">
                 <a:solidFill>
-                  <a:srgbClr val="F2EFEA"/>
+                  <a:srgbClr val="6E6E6E"/>
                 </a:solidFill>
                 <a:latin typeface="Helvetica Neue"/>
               </a:rPr>
@@ -8398,14 +8470,16 @@
           </a:xfrm>
           <a:prstGeom prst="roundRect">
             <a:avLst>
-              <a:gd name="adj" fmla="val 6000"/>
+              <a:gd name="adj" fmla="val 5000"/>
             </a:avLst>
           </a:prstGeom>
           <a:solidFill>
-            <a:srgbClr val="1A2027"/>
+            <a:srgbClr val="F5F3EF"/>
           </a:solidFill>
-          <a:ln>
-            <a:noFill/>
+          <a:ln w="11430">
+            <a:solidFill>
+              <a:srgbClr val="E3E0DA"/>
+            </a:solidFill>
           </a:ln>
           <a:effectLst/>
         </p:spPr>
@@ -8461,7 +8535,7 @@
             <a:r>
               <a:rPr sz="1900" b="1">
                 <a:solidFill>
-                  <a:srgbClr val="FF5C7A"/>
+                  <a:srgbClr val="ED7623"/>
                 </a:solidFill>
                 <a:latin typeface="Helvetica Neue"/>
               </a:rPr>
@@ -8500,7 +8574,7 @@
             <a:r>
               <a:rPr sz="1600" b="0">
                 <a:solidFill>
-                  <a:srgbClr val="F2EFEA"/>
+                  <a:srgbClr val="6E6E6E"/>
                 </a:solidFill>
                 <a:latin typeface="Helvetica Neue"/>
               </a:rPr>
@@ -8522,14 +8596,16 @@
           </a:xfrm>
           <a:prstGeom prst="roundRect">
             <a:avLst>
-              <a:gd name="adj" fmla="val 6000"/>
+              <a:gd name="adj" fmla="val 5000"/>
             </a:avLst>
           </a:prstGeom>
           <a:solidFill>
-            <a:srgbClr val="1A2027"/>
+            <a:srgbClr val="F5F3EF"/>
           </a:solidFill>
-          <a:ln>
-            <a:noFill/>
+          <a:ln w="11430">
+            <a:solidFill>
+              <a:srgbClr val="E3E0DA"/>
+            </a:solidFill>
           </a:ln>
           <a:effectLst/>
         </p:spPr>
@@ -8585,7 +8661,7 @@
             <a:r>
               <a:rPr sz="1900" b="1">
                 <a:solidFill>
-                  <a:srgbClr val="FF5C7A"/>
+                  <a:srgbClr val="ED7623"/>
                 </a:solidFill>
                 <a:latin typeface="Helvetica Neue"/>
               </a:rPr>
@@ -8624,7 +8700,7 @@
             <a:r>
               <a:rPr sz="1600" b="0">
                 <a:solidFill>
-                  <a:srgbClr val="F2EFEA"/>
+                  <a:srgbClr val="6E6E6E"/>
                 </a:solidFill>
                 <a:latin typeface="Helvetica Neue"/>
               </a:rPr>
@@ -8663,11 +8739,11 @@
             <a:r>
               <a:rPr sz="1400" b="0">
                 <a:solidFill>
-                  <a:srgbClr val="8A94A0"/>
-                </a:solidFill>
-                <a:latin typeface="Helvetica Neue"/>
-              </a:rPr>
-              <a:t>Los cuatro prompts completos están en las notas de esta diapositiva.</a:t>
+                  <a:srgbClr val="6E6E6E"/>
+                </a:solidFill>
+                <a:latin typeface="Helvetica Neue"/>
+              </a:rPr>
+              <a:t>Los cuatro prompts completos y el guion que salió están en las notas.</a:t>
             </a:r>
           </a:p>
         </p:txBody>
@@ -8686,7 +8762,7 @@
     <p:bg>
       <p:bgPr>
         <a:solidFill>
-          <a:srgbClr val="101418"/>
+          <a:srgbClr val="FFFFFF"/>
         </a:solidFill>
         <a:effectLst/>
       </p:bgPr>
@@ -8707,13 +8783,13 @@
         <p:spPr>
           <a:xfrm>
             <a:off x="0" y="0"/>
-            <a:ext cx="155448" cy="6858000"/>
+            <a:ext cx="128016" cy="6858000"/>
           </a:xfrm>
           <a:prstGeom prst="rect">
             <a:avLst/>
           </a:prstGeom>
           <a:solidFill>
-            <a:srgbClr val="FF5C7A"/>
+            <a:srgbClr val="ED7623"/>
           </a:solidFill>
           <a:ln>
             <a:noFill/>
@@ -8772,7 +8848,7 @@
             <a:r>
               <a:rPr sz="1200" b="1">
                 <a:solidFill>
-                  <a:srgbClr val="FF5C7A"/>
+                  <a:srgbClr val="ED7623"/>
                 </a:solidFill>
                 <a:latin typeface="Helvetica Neue"/>
               </a:rPr>
@@ -8814,7 +8890,7 @@
             <a:r>
               <a:rPr sz="4000" b="1">
                 <a:solidFill>
-                  <a:srgbClr val="F2EFEA"/>
+                  <a:srgbClr val="11406E"/>
                 </a:solidFill>
                 <a:latin typeface="Helvetica Neue"/>
               </a:rPr>
@@ -8836,11 +8912,275 @@
           </a:xfrm>
           <a:prstGeom prst="roundRect">
             <a:avLst>
-              <a:gd name="adj" fmla="val 6000"/>
+              <a:gd name="adj" fmla="val 5000"/>
             </a:avLst>
           </a:prstGeom>
           <a:solidFill>
-            <a:srgbClr val="1A2027"/>
+            <a:srgbClr val="F5F3EF"/>
+          </a:solidFill>
+          <a:ln w="11430">
+            <a:solidFill>
+              <a:srgbClr val="E3E0DA"/>
+            </a:solidFill>
+          </a:ln>
+          <a:effectLst/>
+        </p:spPr>
+        <p:style>
+          <a:lnRef idx="1">
+            <a:schemeClr val="accent1"/>
+          </a:lnRef>
+          <a:fillRef idx="3">
+            <a:schemeClr val="accent1"/>
+          </a:fillRef>
+          <a:effectRef idx="2">
+            <a:schemeClr val="accent1"/>
+          </a:effectRef>
+          <a:fontRef idx="minor">
+            <a:schemeClr val="lt1"/>
+          </a:fontRef>
+        </p:style>
+        <p:txBody>
+          <a:bodyPr rtlCol="0" anchor="ctr"/>
+          <a:lstStyle/>
+          <a:p>
+            <a:pPr algn="ctr"/>
+          </a:p>
+        </p:txBody>
+      </p:sp>
+      <p:sp>
+        <p:nvSpPr>
+          <p:cNvPr id="6" name="TextBox 5"/>
+          <p:cNvSpPr txBox="1"/>
+          <p:nvPr/>
+        </p:nvSpPr>
+        <p:spPr>
+          <a:xfrm>
+            <a:off x="1234440" y="2697480"/>
+            <a:ext cx="4206240" cy="822960"/>
+          </a:xfrm>
+          <a:prstGeom prst="rect">
+            <a:avLst/>
+          </a:prstGeom>
+          <a:noFill/>
+        </p:spPr>
+        <p:txBody>
+          <a:bodyPr wrap="square" lIns="0" rIns="0" tIns="0" bIns="0">
+            <a:spAutoFit/>
+          </a:bodyPr>
+          <a:lstStyle/>
+          <a:p>
+            <a:pPr algn="l">
+              <a:lnSpc>
+                <a:spcPct val="110000"/>
+              </a:lnSpc>
+              <a:spcAft>
+                <a:spcPts val="600"/>
+              </a:spcAft>
+            </a:pPr>
+            <a:r>
+              <a:rPr sz="2300" b="1">
+                <a:solidFill>
+                  <a:srgbClr val="35789C"/>
+                </a:solidFill>
+                <a:latin typeface="Helvetica Neue"/>
+              </a:rPr>
+              <a:t>Qué hago en mi carrera</a:t>
+            </a:r>
+          </a:p>
+        </p:txBody>
+      </p:sp>
+      <p:sp>
+        <p:nvSpPr>
+          <p:cNvPr id="7" name="TextBox 6"/>
+          <p:cNvSpPr txBox="1"/>
+          <p:nvPr/>
+        </p:nvSpPr>
+        <p:spPr>
+          <a:xfrm>
+            <a:off x="1234440" y="3657600"/>
+            <a:ext cx="4206240" cy="1188720"/>
+          </a:xfrm>
+          <a:prstGeom prst="rect">
+            <a:avLst/>
+          </a:prstGeom>
+          <a:noFill/>
+        </p:spPr>
+        <p:txBody>
+          <a:bodyPr wrap="square" lIns="0" rIns="0" tIns="0" bIns="0">
+            <a:spAutoFit/>
+          </a:bodyPr>
+          <a:lstStyle/>
+          <a:p>
+            <a:pPr algn="l">
+              <a:lnSpc>
+                <a:spcPct val="130000"/>
+              </a:lnSpc>
+              <a:spcAft>
+                <a:spcPts val="600"/>
+              </a:spcAft>
+            </a:pPr>
+            <a:r>
+              <a:rPr sz="1600" b="0">
+                <a:solidFill>
+                  <a:srgbClr val="6E6E6E"/>
+                </a:solidFill>
+                <a:latin typeface="Helvetica Neue"/>
+              </a:rPr>
+              <a:t>Un día normal de trabajo de alguien de tu programa. Lo que nadie se imagina que haces.</a:t>
+            </a:r>
+          </a:p>
+        </p:txBody>
+      </p:sp>
+      <p:sp>
+        <p:nvSpPr>
+          <p:cNvPr id="8" name="Rounded Rectangle 7"/>
+          <p:cNvSpPr/>
+          <p:nvPr/>
+        </p:nvSpPr>
+        <p:spPr>
+          <a:xfrm>
+            <a:off x="6217920" y="2377440"/>
+            <a:ext cx="5029200" cy="2377440"/>
+          </a:xfrm>
+          <a:prstGeom prst="roundRect">
+            <a:avLst>
+              <a:gd name="adj" fmla="val 5000"/>
+            </a:avLst>
+          </a:prstGeom>
+          <a:solidFill>
+            <a:srgbClr val="F5F3EF"/>
+          </a:solidFill>
+          <a:ln w="11430">
+            <a:solidFill>
+              <a:srgbClr val="E3E0DA"/>
+            </a:solidFill>
+          </a:ln>
+          <a:effectLst/>
+        </p:spPr>
+        <p:style>
+          <a:lnRef idx="1">
+            <a:schemeClr val="accent1"/>
+          </a:lnRef>
+          <a:fillRef idx="3">
+            <a:schemeClr val="accent1"/>
+          </a:fillRef>
+          <a:effectRef idx="2">
+            <a:schemeClr val="accent1"/>
+          </a:effectRef>
+          <a:fontRef idx="minor">
+            <a:schemeClr val="lt1"/>
+          </a:fontRef>
+        </p:style>
+        <p:txBody>
+          <a:bodyPr rtlCol="0" anchor="ctr"/>
+          <a:lstStyle/>
+          <a:p>
+            <a:pPr algn="ctr"/>
+          </a:p>
+        </p:txBody>
+      </p:sp>
+      <p:sp>
+        <p:nvSpPr>
+          <p:cNvPr id="9" name="TextBox 8"/>
+          <p:cNvSpPr txBox="1"/>
+          <p:nvPr/>
+        </p:nvSpPr>
+        <p:spPr>
+          <a:xfrm>
+            <a:off x="6629400" y="2697480"/>
+            <a:ext cx="4206240" cy="822960"/>
+          </a:xfrm>
+          <a:prstGeom prst="rect">
+            <a:avLst/>
+          </a:prstGeom>
+          <a:noFill/>
+        </p:spPr>
+        <p:txBody>
+          <a:bodyPr wrap="square" lIns="0" rIns="0" tIns="0" bIns="0">
+            <a:spAutoFit/>
+          </a:bodyPr>
+          <a:lstStyle/>
+          <a:p>
+            <a:pPr algn="l">
+              <a:lnSpc>
+                <a:spcPct val="110000"/>
+              </a:lnSpc>
+              <a:spcAft>
+                <a:spcPts val="600"/>
+              </a:spcAft>
+            </a:pPr>
+            <a:r>
+              <a:rPr sz="2300" b="1">
+                <a:solidFill>
+                  <a:srgbClr val="35789C"/>
+                </a:solidFill>
+                <a:latin typeface="Helvetica Neue"/>
+              </a:rPr>
+              <a:t>Lo que me costó entender</a:t>
+            </a:r>
+          </a:p>
+        </p:txBody>
+      </p:sp>
+      <p:sp>
+        <p:nvSpPr>
+          <p:cNvPr id="10" name="TextBox 9"/>
+          <p:cNvSpPr txBox="1"/>
+          <p:nvPr/>
+        </p:nvSpPr>
+        <p:spPr>
+          <a:xfrm>
+            <a:off x="6629400" y="3657600"/>
+            <a:ext cx="4206240" cy="1188720"/>
+          </a:xfrm>
+          <a:prstGeom prst="rect">
+            <a:avLst/>
+          </a:prstGeom>
+          <a:noFill/>
+        </p:spPr>
+        <p:txBody>
+          <a:bodyPr wrap="square" lIns="0" rIns="0" tIns="0" bIns="0">
+            <a:spAutoFit/>
+          </a:bodyPr>
+          <a:lstStyle/>
+          <a:p>
+            <a:pPr algn="l">
+              <a:lnSpc>
+                <a:spcPct val="130000"/>
+              </a:lnSpc>
+              <a:spcAft>
+                <a:spcPts val="600"/>
+              </a:spcAft>
+            </a:pPr>
+            <a:r>
+              <a:rPr sz="1600" b="0">
+                <a:solidFill>
+                  <a:srgbClr val="6E6E6E"/>
+                </a:solidFill>
+                <a:latin typeface="Helvetica Neue"/>
+              </a:rPr>
+              <a:t>Un concepto que te costó, explicado como te hubiera gustado que te lo explicaran.</a:t>
+            </a:r>
+          </a:p>
+        </p:txBody>
+      </p:sp>
+      <p:sp>
+        <p:nvSpPr>
+          <p:cNvPr id="11" name="Rounded Rectangle 10"/>
+          <p:cNvSpPr/>
+          <p:nvPr/>
+        </p:nvSpPr>
+        <p:spPr>
+          <a:xfrm>
+            <a:off x="822960" y="5029200"/>
+            <a:ext cx="10515600" cy="1097280"/>
+          </a:xfrm>
+          <a:prstGeom prst="roundRect">
+            <a:avLst>
+              <a:gd name="adj" fmla="val 5000"/>
+            </a:avLst>
+          </a:prstGeom>
+          <a:solidFill>
+            <a:srgbClr val="FDF0E6"/>
           </a:solidFill>
           <a:ln>
             <a:noFill/>
@@ -8871,266 +9211,6 @@
       </p:sp>
       <p:sp>
         <p:nvSpPr>
-          <p:cNvPr id="6" name="TextBox 5"/>
-          <p:cNvSpPr txBox="1"/>
-          <p:nvPr/>
-        </p:nvSpPr>
-        <p:spPr>
-          <a:xfrm>
-            <a:off x="1234440" y="2697480"/>
-            <a:ext cx="4206240" cy="822960"/>
-          </a:xfrm>
-          <a:prstGeom prst="rect">
-            <a:avLst/>
-          </a:prstGeom>
-          <a:noFill/>
-        </p:spPr>
-        <p:txBody>
-          <a:bodyPr wrap="square" lIns="0" rIns="0" tIns="0" bIns="0">
-            <a:spAutoFit/>
-          </a:bodyPr>
-          <a:lstStyle/>
-          <a:p>
-            <a:pPr algn="l">
-              <a:lnSpc>
-                <a:spcPct val="110000"/>
-              </a:lnSpc>
-              <a:spcAft>
-                <a:spcPts val="600"/>
-              </a:spcAft>
-            </a:pPr>
-            <a:r>
-              <a:rPr sz="2300" b="1">
-                <a:solidFill>
-                  <a:srgbClr val="45E0C8"/>
-                </a:solidFill>
-                <a:latin typeface="Helvetica Neue"/>
-              </a:rPr>
-              <a:t>Qué hago en mi carrera</a:t>
-            </a:r>
-          </a:p>
-        </p:txBody>
-      </p:sp>
-      <p:sp>
-        <p:nvSpPr>
-          <p:cNvPr id="7" name="TextBox 6"/>
-          <p:cNvSpPr txBox="1"/>
-          <p:nvPr/>
-        </p:nvSpPr>
-        <p:spPr>
-          <a:xfrm>
-            <a:off x="1234440" y="3657600"/>
-            <a:ext cx="4206240" cy="1188720"/>
-          </a:xfrm>
-          <a:prstGeom prst="rect">
-            <a:avLst/>
-          </a:prstGeom>
-          <a:noFill/>
-        </p:spPr>
-        <p:txBody>
-          <a:bodyPr wrap="square" lIns="0" rIns="0" tIns="0" bIns="0">
-            <a:spAutoFit/>
-          </a:bodyPr>
-          <a:lstStyle/>
-          <a:p>
-            <a:pPr algn="l">
-              <a:lnSpc>
-                <a:spcPct val="130000"/>
-              </a:lnSpc>
-              <a:spcAft>
-                <a:spcPts val="600"/>
-              </a:spcAft>
-            </a:pPr>
-            <a:r>
-              <a:rPr sz="1600" b="0">
-                <a:solidFill>
-                  <a:srgbClr val="F2EFEA"/>
-                </a:solidFill>
-                <a:latin typeface="Helvetica Neue"/>
-              </a:rPr>
-              <a:t>Un día normal de trabajo de alguien de tu programa. Lo que nadie se imagina que haces.</a:t>
-            </a:r>
-          </a:p>
-        </p:txBody>
-      </p:sp>
-      <p:sp>
-        <p:nvSpPr>
-          <p:cNvPr id="8" name="Rounded Rectangle 7"/>
-          <p:cNvSpPr/>
-          <p:nvPr/>
-        </p:nvSpPr>
-        <p:spPr>
-          <a:xfrm>
-            <a:off x="6217920" y="2377440"/>
-            <a:ext cx="5029200" cy="2377440"/>
-          </a:xfrm>
-          <a:prstGeom prst="roundRect">
-            <a:avLst>
-              <a:gd name="adj" fmla="val 6000"/>
-            </a:avLst>
-          </a:prstGeom>
-          <a:solidFill>
-            <a:srgbClr val="1A2027"/>
-          </a:solidFill>
-          <a:ln>
-            <a:noFill/>
-          </a:ln>
-          <a:effectLst/>
-        </p:spPr>
-        <p:style>
-          <a:lnRef idx="1">
-            <a:schemeClr val="accent1"/>
-          </a:lnRef>
-          <a:fillRef idx="3">
-            <a:schemeClr val="accent1"/>
-          </a:fillRef>
-          <a:effectRef idx="2">
-            <a:schemeClr val="accent1"/>
-          </a:effectRef>
-          <a:fontRef idx="minor">
-            <a:schemeClr val="lt1"/>
-          </a:fontRef>
-        </p:style>
-        <p:txBody>
-          <a:bodyPr rtlCol="0" anchor="ctr"/>
-          <a:lstStyle/>
-          <a:p>
-            <a:pPr algn="ctr"/>
-          </a:p>
-        </p:txBody>
-      </p:sp>
-      <p:sp>
-        <p:nvSpPr>
-          <p:cNvPr id="9" name="TextBox 8"/>
-          <p:cNvSpPr txBox="1"/>
-          <p:nvPr/>
-        </p:nvSpPr>
-        <p:spPr>
-          <a:xfrm>
-            <a:off x="6629400" y="2697480"/>
-            <a:ext cx="4206240" cy="822960"/>
-          </a:xfrm>
-          <a:prstGeom prst="rect">
-            <a:avLst/>
-          </a:prstGeom>
-          <a:noFill/>
-        </p:spPr>
-        <p:txBody>
-          <a:bodyPr wrap="square" lIns="0" rIns="0" tIns="0" bIns="0">
-            <a:spAutoFit/>
-          </a:bodyPr>
-          <a:lstStyle/>
-          <a:p>
-            <a:pPr algn="l">
-              <a:lnSpc>
-                <a:spcPct val="110000"/>
-              </a:lnSpc>
-              <a:spcAft>
-                <a:spcPts val="600"/>
-              </a:spcAft>
-            </a:pPr>
-            <a:r>
-              <a:rPr sz="2300" b="1">
-                <a:solidFill>
-                  <a:srgbClr val="45E0C8"/>
-                </a:solidFill>
-                <a:latin typeface="Helvetica Neue"/>
-              </a:rPr>
-              <a:t>Lo que me costó entender</a:t>
-            </a:r>
-          </a:p>
-        </p:txBody>
-      </p:sp>
-      <p:sp>
-        <p:nvSpPr>
-          <p:cNvPr id="10" name="TextBox 9"/>
-          <p:cNvSpPr txBox="1"/>
-          <p:nvPr/>
-        </p:nvSpPr>
-        <p:spPr>
-          <a:xfrm>
-            <a:off x="6629400" y="3657600"/>
-            <a:ext cx="4206240" cy="1188720"/>
-          </a:xfrm>
-          <a:prstGeom prst="rect">
-            <a:avLst/>
-          </a:prstGeom>
-          <a:noFill/>
-        </p:spPr>
-        <p:txBody>
-          <a:bodyPr wrap="square" lIns="0" rIns="0" tIns="0" bIns="0">
-            <a:spAutoFit/>
-          </a:bodyPr>
-          <a:lstStyle/>
-          <a:p>
-            <a:pPr algn="l">
-              <a:lnSpc>
-                <a:spcPct val="130000"/>
-              </a:lnSpc>
-              <a:spcAft>
-                <a:spcPts val="600"/>
-              </a:spcAft>
-            </a:pPr>
-            <a:r>
-              <a:rPr sz="1600" b="0">
-                <a:solidFill>
-                  <a:srgbClr val="F2EFEA"/>
-                </a:solidFill>
-                <a:latin typeface="Helvetica Neue"/>
-              </a:rPr>
-              <a:t>Un concepto que te costó, explicado como te hubiera gustado que te lo explicaran.</a:t>
-            </a:r>
-          </a:p>
-        </p:txBody>
-      </p:sp>
-      <p:sp>
-        <p:nvSpPr>
-          <p:cNvPr id="11" name="Rounded Rectangle 10"/>
-          <p:cNvSpPr/>
-          <p:nvPr/>
-        </p:nvSpPr>
-        <p:spPr>
-          <a:xfrm>
-            <a:off x="822960" y="5029200"/>
-            <a:ext cx="10515600" cy="1097280"/>
-          </a:xfrm>
-          <a:prstGeom prst="roundRect">
-            <a:avLst>
-              <a:gd name="adj" fmla="val 6000"/>
-            </a:avLst>
-          </a:prstGeom>
-          <a:solidFill>
-            <a:srgbClr val="2A1A20"/>
-          </a:solidFill>
-          <a:ln>
-            <a:noFill/>
-          </a:ln>
-          <a:effectLst/>
-        </p:spPr>
-        <p:style>
-          <a:lnRef idx="1">
-            <a:schemeClr val="accent1"/>
-          </a:lnRef>
-          <a:fillRef idx="3">
-            <a:schemeClr val="accent1"/>
-          </a:fillRef>
-          <a:effectRef idx="2">
-            <a:schemeClr val="accent1"/>
-          </a:effectRef>
-          <a:fontRef idx="minor">
-            <a:schemeClr val="lt1"/>
-          </a:fontRef>
-        </p:style>
-        <p:txBody>
-          <a:bodyPr rtlCol="0" anchor="ctr"/>
-          <a:lstStyle/>
-          <a:p>
-            <a:pPr algn="ctr"/>
-          </a:p>
-        </p:txBody>
-      </p:sp>
-      <p:sp>
-        <p:nvSpPr>
           <p:cNvPr id="12" name="TextBox 11"/>
           <p:cNvSpPr txBox="1"/>
           <p:nvPr/>
@@ -9162,7 +9242,7 @@
             <a:r>
               <a:rPr sz="2000" b="1">
                 <a:solidFill>
-                  <a:srgbClr val="FF5C7A"/>
+                  <a:srgbClr val="ED7623"/>
                 </a:solidFill>
                 <a:latin typeface="Helvetica Neue"/>
               </a:rPr>
@@ -9181,7 +9261,7 @@
             <a:r>
               <a:rPr sz="1600" b="0">
                 <a:solidFill>
-                  <a:srgbClr val="F2EFEA"/>
+                  <a:srgbClr val="6E6E6E"/>
                 </a:solidFill>
                 <a:latin typeface="Helvetica Neue"/>
               </a:rPr>
@@ -9204,7 +9284,7 @@
     <p:bg>
       <p:bgPr>
         <a:solidFill>
-          <a:srgbClr val="101418"/>
+          <a:srgbClr val="FFFFFF"/>
         </a:solidFill>
         <a:effectLst/>
       </p:bgPr>
@@ -9225,13 +9305,13 @@
         <p:spPr>
           <a:xfrm>
             <a:off x="0" y="0"/>
-            <a:ext cx="155448" cy="6858000"/>
+            <a:ext cx="128016" cy="6858000"/>
           </a:xfrm>
           <a:prstGeom prst="rect">
             <a:avLst/>
           </a:prstGeom>
           <a:solidFill>
-            <a:srgbClr val="FF5C7A"/>
+            <a:srgbClr val="ED7623"/>
           </a:solidFill>
           <a:ln>
             <a:noFill/>
@@ -9268,19 +9348,21 @@
         </p:nvSpPr>
         <p:spPr>
           <a:xfrm>
-            <a:off x="822960" y="1737360"/>
-            <a:ext cx="10607040" cy="3291840"/>
+            <a:off x="822960" y="1600200"/>
+            <a:ext cx="10607040" cy="3200400"/>
           </a:xfrm>
           <a:prstGeom prst="roundRect">
             <a:avLst>
-              <a:gd name="adj" fmla="val 6000"/>
+              <a:gd name="adj" fmla="val 5000"/>
             </a:avLst>
           </a:prstGeom>
           <a:solidFill>
-            <a:srgbClr val="1A2027"/>
+            <a:srgbClr val="F5F3EF"/>
           </a:solidFill>
-          <a:ln>
-            <a:noFill/>
+          <a:ln w="11430">
+            <a:solidFill>
+              <a:srgbClr val="E3E0DA"/>
+            </a:solidFill>
           </a:ln>
           <a:effectLst/>
         </p:spPr>
@@ -9314,7 +9396,7 @@
         </p:nvSpPr>
         <p:spPr>
           <a:xfrm>
-            <a:off x="1371600" y="2240280"/>
+            <a:off x="1371600" y="2103120"/>
             <a:ext cx="9509760" cy="1554480"/>
           </a:xfrm>
           <a:prstGeom prst="rect">
@@ -9339,7 +9421,7 @@
             <a:r>
               <a:rPr sz="4000" b="1">
                 <a:solidFill>
-                  <a:srgbClr val="F2EFEA"/>
+                  <a:srgbClr val="11406E"/>
                 </a:solidFill>
                 <a:latin typeface="Helvetica Neue"/>
               </a:rPr>
@@ -9358,7 +9440,7 @@
             <a:r>
               <a:rPr sz="4000" b="1">
                 <a:solidFill>
-                  <a:srgbClr val="FF5C7A"/>
+                  <a:srgbClr val="ED7623"/>
                 </a:solidFill>
                 <a:latin typeface="Helvetica Neue"/>
               </a:rPr>
@@ -9375,7 +9457,7 @@
         </p:nvSpPr>
         <p:spPr>
           <a:xfrm>
-            <a:off x="1371600" y="4023360"/>
+            <a:off x="1371600" y="3886200"/>
             <a:ext cx="9509760" cy="822960"/>
           </a:xfrm>
           <a:prstGeom prst="rect">
@@ -9400,25 +9482,49 @@
             <a:r>
               <a:rPr sz="2100" b="0">
                 <a:solidFill>
-                  <a:srgbClr val="8A94A0"/>
-                </a:solidFill>
-                <a:latin typeface="Helvetica Neue"/>
-              </a:rPr>
-              <a:t>Fue decidir qué valía la pena contar, y decirlo en ochenta palabras.</a:t>
-            </a:r>
-          </a:p>
-        </p:txBody>
-      </p:sp>
-      <p:sp>
-        <p:nvSpPr>
-          <p:cNvPr id="6" name="TextBox 5"/>
+                  <a:srgbClr val="6E6E6E"/>
+                </a:solidFill>
+                <a:latin typeface="Helvetica Neue"/>
+              </a:rPr>
+              <a:t>Fue decidir qué valía la pena contar, y decirlo en ciento cincuenta palabras.</a:t>
+            </a:r>
+          </a:p>
+        </p:txBody>
+      </p:sp>
+      <p:pic>
+        <p:nvPicPr>
+          <p:cNvPr id="6" name="Picture 5" descr="logo_ucaldas.png"/>
+          <p:cNvPicPr>
+            <a:picLocks noChangeAspect="1"/>
+          </p:cNvPicPr>
+          <p:nvPr/>
+        </p:nvPicPr>
+        <p:blipFill>
+          <a:blip r:embed="rId3"/>
+          <a:stretch>
+            <a:fillRect/>
+          </a:stretch>
+        </p:blipFill>
+        <p:spPr>
+          <a:xfrm>
+            <a:off x="822960" y="5349240"/>
+            <a:ext cx="1721725" cy="420624"/>
+          </a:xfrm>
+          <a:prstGeom prst="rect">
+            <a:avLst/>
+          </a:prstGeom>
+        </p:spPr>
+      </p:pic>
+      <p:sp>
+        <p:nvSpPr>
+          <p:cNvPr id="7" name="TextBox 6"/>
           <p:cNvSpPr txBox="1"/>
           <p:nvPr/>
         </p:nvSpPr>
         <p:spPr>
           <a:xfrm>
-            <a:off x="822960" y="5486400"/>
-            <a:ext cx="10515600" cy="457200"/>
+            <a:off x="850392" y="5861303"/>
+            <a:ext cx="6400800" cy="274320"/>
           </a:xfrm>
           <a:prstGeom prst="rect">
             <a:avLst/>
@@ -9437,9 +9543,48 @@
               </a:spcAft>
             </a:pPr>
             <a:r>
-              <a:rPr sz="1400" b="0">
-                <a:solidFill>
-                  <a:srgbClr val="8A94A0"/>
+              <a:rPr sz="1000" b="1">
+                <a:solidFill>
+                  <a:srgbClr val="ED7623"/>
+                </a:solidFill>
+                <a:latin typeface="Helvetica Neue"/>
+              </a:rPr>
+              <a:t>FACULTAD DE INTELIGENCIA ARTIFICIAL E INGENIERÍAS</a:t>
+            </a:r>
+          </a:p>
+        </p:txBody>
+      </p:sp>
+      <p:sp>
+        <p:nvSpPr>
+          <p:cNvPr id="8" name="TextBox 7"/>
+          <p:cNvSpPr txBox="1"/>
+          <p:nvPr/>
+        </p:nvSpPr>
+        <p:spPr>
+          <a:xfrm>
+            <a:off x="822960" y="6355080"/>
+            <a:ext cx="10515600" cy="365760"/>
+          </a:xfrm>
+          <a:prstGeom prst="rect">
+            <a:avLst/>
+          </a:prstGeom>
+          <a:noFill/>
+        </p:spPr>
+        <p:txBody>
+          <a:bodyPr wrap="square" lIns="0" rIns="0" tIns="0" bIns="0">
+            <a:spAutoFit/>
+          </a:bodyPr>
+          <a:lstStyle/>
+          <a:p>
+            <a:pPr algn="l">
+              <a:spcAft>
+                <a:spcPts val="600"/>
+              </a:spcAft>
+            </a:pPr>
+            <a:r>
+              <a:rPr sz="1300" b="0">
+                <a:solidFill>
+                  <a:srgbClr val="6E6E6E"/>
                 </a:solidFill>
                 <a:latin typeface="Helvetica Neue"/>
               </a:rPr>
@@ -9462,7 +9607,7 @@
     <p:bg>
       <p:bgPr>
         <a:solidFill>
-          <a:srgbClr val="101418"/>
+          <a:srgbClr val="FFFFFF"/>
         </a:solidFill>
         <a:effectLst/>
       </p:bgPr>
@@ -9483,13 +9628,13 @@
         <p:spPr>
           <a:xfrm>
             <a:off x="0" y="0"/>
-            <a:ext cx="155448" cy="6858000"/>
+            <a:ext cx="128016" cy="6858000"/>
           </a:xfrm>
           <a:prstGeom prst="rect">
             <a:avLst/>
           </a:prstGeom>
           <a:solidFill>
-            <a:srgbClr val="FF5C7A"/>
+            <a:srgbClr val="ED7623"/>
           </a:solidFill>
           <a:ln>
             <a:noFill/>
@@ -9548,7 +9693,7 @@
             <a:r>
               <a:rPr sz="1200" b="1">
                 <a:solidFill>
-                  <a:srgbClr val="45E0C8"/>
+                  <a:srgbClr val="ED7623"/>
                 </a:solidFill>
                 <a:latin typeface="Helvetica Neue"/>
               </a:rPr>
@@ -9590,7 +9735,7 @@
             <a:r>
               <a:rPr sz="4000" b="1">
                 <a:solidFill>
-                  <a:srgbClr val="F2EFEA"/>
+                  <a:srgbClr val="11406E"/>
                 </a:solidFill>
                 <a:latin typeface="Helvetica Neue"/>
               </a:rPr>
@@ -9632,7 +9777,7 @@
             <a:r>
               <a:rPr sz="2200" b="0">
                 <a:solidFill>
-                  <a:srgbClr val="8A94A0"/>
+                  <a:srgbClr val="6E6E6E"/>
                 </a:solidFill>
                 <a:latin typeface="Helvetica Neue"/>
               </a:rPr>
@@ -9651,7 +9796,7 @@
             <a:r>
               <a:rPr sz="2200" b="0">
                 <a:solidFill>
-                  <a:srgbClr val="8A94A0"/>
+                  <a:srgbClr val="6E6E6E"/>
                 </a:solidFill>
                 <a:latin typeface="Helvetica Neue"/>
               </a:rPr>
@@ -9673,14 +9818,16 @@
           </a:xfrm>
           <a:prstGeom prst="roundRect">
             <a:avLst>
-              <a:gd name="adj" fmla="val 6000"/>
+              <a:gd name="adj" fmla="val 5000"/>
             </a:avLst>
           </a:prstGeom>
           <a:solidFill>
-            <a:srgbClr val="1A2027"/>
+            <a:srgbClr val="F5F3EF"/>
           </a:solidFill>
-          <a:ln>
-            <a:noFill/>
+          <a:ln w="11430">
+            <a:solidFill>
+              <a:srgbClr val="E3E0DA"/>
+            </a:solidFill>
           </a:ln>
           <a:effectLst/>
         </p:spPr>
@@ -9739,7 +9886,7 @@
             <a:r>
               <a:rPr sz="2000" b="1">
                 <a:solidFill>
-                  <a:srgbClr val="F2EFEA"/>
+                  <a:srgbClr val="11406E"/>
                 </a:solidFill>
                 <a:latin typeface="Helvetica Neue"/>
               </a:rPr>
@@ -9778,7 +9925,7 @@
             <a:r>
               <a:rPr sz="1400" b="0">
                 <a:solidFill>
-                  <a:srgbClr val="8A94A0"/>
+                  <a:srgbClr val="6E6E6E"/>
                 </a:solidFill>
                 <a:latin typeface="Helvetica Neue"/>
               </a:rPr>
@@ -9800,14 +9947,16 @@
           </a:xfrm>
           <a:prstGeom prst="roundRect">
             <a:avLst>
-              <a:gd name="adj" fmla="val 6000"/>
+              <a:gd name="adj" fmla="val 5000"/>
             </a:avLst>
           </a:prstGeom>
           <a:solidFill>
-            <a:srgbClr val="1A2027"/>
+            <a:srgbClr val="F5F3EF"/>
           </a:solidFill>
-          <a:ln>
-            <a:noFill/>
+          <a:ln w="11430">
+            <a:solidFill>
+              <a:srgbClr val="E3E0DA"/>
+            </a:solidFill>
           </a:ln>
           <a:effectLst/>
         </p:spPr>
@@ -9866,7 +10015,7 @@
             <a:r>
               <a:rPr sz="2000" b="1">
                 <a:solidFill>
-                  <a:srgbClr val="F2EFEA"/>
+                  <a:srgbClr val="11406E"/>
                 </a:solidFill>
                 <a:latin typeface="Helvetica Neue"/>
               </a:rPr>
@@ -9905,7 +10054,7 @@
             <a:r>
               <a:rPr sz="1400" b="0">
                 <a:solidFill>
-                  <a:srgbClr val="8A94A0"/>
+                  <a:srgbClr val="6E6E6E"/>
                 </a:solidFill>
                 <a:latin typeface="Helvetica Neue"/>
               </a:rPr>
@@ -9927,14 +10076,16 @@
           </a:xfrm>
           <a:prstGeom prst="roundRect">
             <a:avLst>
-              <a:gd name="adj" fmla="val 6000"/>
+              <a:gd name="adj" fmla="val 5000"/>
             </a:avLst>
           </a:prstGeom>
           <a:solidFill>
-            <a:srgbClr val="1A2027"/>
+            <a:srgbClr val="F5F3EF"/>
           </a:solidFill>
-          <a:ln>
-            <a:noFill/>
+          <a:ln w="11430">
+            <a:solidFill>
+              <a:srgbClr val="E3E0DA"/>
+            </a:solidFill>
           </a:ln>
           <a:effectLst/>
         </p:spPr>
@@ -9993,7 +10144,7 @@
             <a:r>
               <a:rPr sz="2000" b="1">
                 <a:solidFill>
-                  <a:srgbClr val="F2EFEA"/>
+                  <a:srgbClr val="11406E"/>
                 </a:solidFill>
                 <a:latin typeface="Helvetica Neue"/>
               </a:rPr>
@@ -10032,7 +10183,7 @@
             <a:r>
               <a:rPr sz="1400" b="0">
                 <a:solidFill>
-                  <a:srgbClr val="8A94A0"/>
+                  <a:srgbClr val="6E6E6E"/>
                 </a:solidFill>
                 <a:latin typeface="Helvetica Neue"/>
               </a:rPr>
@@ -10054,14 +10205,16 @@
           </a:xfrm>
           <a:prstGeom prst="roundRect">
             <a:avLst>
-              <a:gd name="adj" fmla="val 6000"/>
+              <a:gd name="adj" fmla="val 5000"/>
             </a:avLst>
           </a:prstGeom>
           <a:solidFill>
-            <a:srgbClr val="1A2027"/>
+            <a:srgbClr val="F5F3EF"/>
           </a:solidFill>
-          <a:ln>
-            <a:noFill/>
+          <a:ln w="11430">
+            <a:solidFill>
+              <a:srgbClr val="E3E0DA"/>
+            </a:solidFill>
           </a:ln>
           <a:effectLst/>
         </p:spPr>
@@ -10120,7 +10273,7 @@
             <a:r>
               <a:rPr sz="2000" b="1">
                 <a:solidFill>
-                  <a:srgbClr val="F2EFEA"/>
+                  <a:srgbClr val="11406E"/>
                 </a:solidFill>
                 <a:latin typeface="Helvetica Neue"/>
               </a:rPr>
@@ -10159,7 +10312,7 @@
             <a:r>
               <a:rPr sz="1400" b="0">
                 <a:solidFill>
-                  <a:srgbClr val="8A94A0"/>
+                  <a:srgbClr val="6E6E6E"/>
                 </a:solidFill>
                 <a:latin typeface="Helvetica Neue"/>
               </a:rPr>
@@ -10182,7 +10335,7 @@
     <p:bg>
       <p:bgPr>
         <a:solidFill>
-          <a:srgbClr val="101418"/>
+          <a:srgbClr val="FFFFFF"/>
         </a:solidFill>
         <a:effectLst/>
       </p:bgPr>
@@ -10203,13 +10356,13 @@
         <p:spPr>
           <a:xfrm>
             <a:off x="0" y="0"/>
-            <a:ext cx="155448" cy="6858000"/>
+            <a:ext cx="128016" cy="6858000"/>
           </a:xfrm>
           <a:prstGeom prst="rect">
             <a:avLst/>
           </a:prstGeom>
           <a:solidFill>
-            <a:srgbClr val="FF5C7A"/>
+            <a:srgbClr val="ED7623"/>
           </a:solidFill>
           <a:ln>
             <a:noFill/>
@@ -10268,7 +10421,7 @@
             <a:r>
               <a:rPr sz="1200" b="1">
                 <a:solidFill>
-                  <a:srgbClr val="45E0C8"/>
+                  <a:srgbClr val="ED7623"/>
                 </a:solidFill>
                 <a:latin typeface="Helvetica Neue"/>
               </a:rPr>
@@ -10310,7 +10463,7 @@
             <a:r>
               <a:rPr sz="4000" b="1">
                 <a:solidFill>
-                  <a:srgbClr val="F2EFEA"/>
+                  <a:srgbClr val="11406E"/>
                 </a:solidFill>
                 <a:latin typeface="Helvetica Neue"/>
               </a:rPr>
@@ -10332,14 +10485,16 @@
           </a:xfrm>
           <a:prstGeom prst="roundRect">
             <a:avLst>
-              <a:gd name="adj" fmla="val 6000"/>
+              <a:gd name="adj" fmla="val 5000"/>
             </a:avLst>
           </a:prstGeom>
           <a:solidFill>
-            <a:srgbClr val="1A2027"/>
+            <a:srgbClr val="F5F3EF"/>
           </a:solidFill>
-          <a:ln>
-            <a:noFill/>
+          <a:ln w="11430">
+            <a:solidFill>
+              <a:srgbClr val="E3E0DA"/>
+            </a:solidFill>
           </a:ln>
           <a:effectLst/>
         </p:spPr>
@@ -10395,7 +10550,7 @@
             <a:r>
               <a:rPr sz="3400" b="1">
                 <a:solidFill>
-                  <a:srgbClr val="FF5C7A"/>
+                  <a:srgbClr val="ED7623"/>
                 </a:solidFill>
                 <a:latin typeface="Helvetica Neue"/>
               </a:rPr>
@@ -10434,7 +10589,7 @@
             <a:r>
               <a:rPr sz="2100" b="1">
                 <a:solidFill>
-                  <a:srgbClr val="F2EFEA"/>
+                  <a:srgbClr val="11406E"/>
                 </a:solidFill>
                 <a:latin typeface="Helvetica Neue"/>
               </a:rPr>
@@ -10476,7 +10631,7 @@
             <a:r>
               <a:rPr sz="1350" b="0">
                 <a:solidFill>
-                  <a:srgbClr val="8A94A0"/>
+                  <a:srgbClr val="6E6E6E"/>
                 </a:solidFill>
                 <a:latin typeface="Helvetica Neue"/>
               </a:rPr>
@@ -10498,14 +10653,16 @@
           </a:xfrm>
           <a:prstGeom prst="roundRect">
             <a:avLst>
-              <a:gd name="adj" fmla="val 6000"/>
+              <a:gd name="adj" fmla="val 5000"/>
             </a:avLst>
           </a:prstGeom>
           <a:solidFill>
-            <a:srgbClr val="1A2027"/>
+            <a:srgbClr val="F5F3EF"/>
           </a:solidFill>
-          <a:ln>
-            <a:noFill/>
+          <a:ln w="11430">
+            <a:solidFill>
+              <a:srgbClr val="E3E0DA"/>
+            </a:solidFill>
           </a:ln>
           <a:effectLst/>
         </p:spPr>
@@ -10561,7 +10718,7 @@
             <a:r>
               <a:rPr sz="3400" b="1">
                 <a:solidFill>
-                  <a:srgbClr val="FF5C7A"/>
+                  <a:srgbClr val="ED7623"/>
                 </a:solidFill>
                 <a:latin typeface="Helvetica Neue"/>
               </a:rPr>
@@ -10600,7 +10757,7 @@
             <a:r>
               <a:rPr sz="2100" b="1">
                 <a:solidFill>
-                  <a:srgbClr val="F2EFEA"/>
+                  <a:srgbClr val="11406E"/>
                 </a:solidFill>
                 <a:latin typeface="Helvetica Neue"/>
               </a:rPr>
@@ -10642,7 +10799,7 @@
             <a:r>
               <a:rPr sz="1350" b="0">
                 <a:solidFill>
-                  <a:srgbClr val="8A94A0"/>
+                  <a:srgbClr val="6E6E6E"/>
                 </a:solidFill>
                 <a:latin typeface="Helvetica Neue"/>
               </a:rPr>
@@ -10664,14 +10821,16 @@
           </a:xfrm>
           <a:prstGeom prst="roundRect">
             <a:avLst>
-              <a:gd name="adj" fmla="val 6000"/>
+              <a:gd name="adj" fmla="val 5000"/>
             </a:avLst>
           </a:prstGeom>
           <a:solidFill>
-            <a:srgbClr val="1A2027"/>
+            <a:srgbClr val="F5F3EF"/>
           </a:solidFill>
-          <a:ln>
-            <a:noFill/>
+          <a:ln w="11430">
+            <a:solidFill>
+              <a:srgbClr val="E3E0DA"/>
+            </a:solidFill>
           </a:ln>
           <a:effectLst/>
         </p:spPr>
@@ -10727,7 +10886,7 @@
             <a:r>
               <a:rPr sz="3400" b="1">
                 <a:solidFill>
-                  <a:srgbClr val="FF5C7A"/>
+                  <a:srgbClr val="ED7623"/>
                 </a:solidFill>
                 <a:latin typeface="Helvetica Neue"/>
               </a:rPr>
@@ -10766,7 +10925,7 @@
             <a:r>
               <a:rPr sz="2100" b="1">
                 <a:solidFill>
-                  <a:srgbClr val="F2EFEA"/>
+                  <a:srgbClr val="11406E"/>
                 </a:solidFill>
                 <a:latin typeface="Helvetica Neue"/>
               </a:rPr>
@@ -10808,7 +10967,7 @@
             <a:r>
               <a:rPr sz="1350" b="0">
                 <a:solidFill>
-                  <a:srgbClr val="8A94A0"/>
+                  <a:srgbClr val="6E6E6E"/>
                 </a:solidFill>
                 <a:latin typeface="Helvetica Neue"/>
               </a:rPr>
@@ -10830,14 +10989,16 @@
           </a:xfrm>
           <a:prstGeom prst="roundRect">
             <a:avLst>
-              <a:gd name="adj" fmla="val 6000"/>
+              <a:gd name="adj" fmla="val 5000"/>
             </a:avLst>
           </a:prstGeom>
           <a:solidFill>
-            <a:srgbClr val="1A2027"/>
+            <a:srgbClr val="F5F3EF"/>
           </a:solidFill>
-          <a:ln>
-            <a:noFill/>
+          <a:ln w="11430">
+            <a:solidFill>
+              <a:srgbClr val="E3E0DA"/>
+            </a:solidFill>
           </a:ln>
           <a:effectLst/>
         </p:spPr>
@@ -10893,7 +11054,7 @@
             <a:r>
               <a:rPr sz="3400" b="1">
                 <a:solidFill>
-                  <a:srgbClr val="FF5C7A"/>
+                  <a:srgbClr val="ED7623"/>
                 </a:solidFill>
                 <a:latin typeface="Helvetica Neue"/>
               </a:rPr>
@@ -10932,7 +11093,7 @@
             <a:r>
               <a:rPr sz="2100" b="1">
                 <a:solidFill>
-                  <a:srgbClr val="F2EFEA"/>
+                  <a:srgbClr val="11406E"/>
                 </a:solidFill>
                 <a:latin typeface="Helvetica Neue"/>
               </a:rPr>
@@ -10974,7 +11135,7 @@
             <a:r>
               <a:rPr sz="1350" b="0">
                 <a:solidFill>
-                  <a:srgbClr val="8A94A0"/>
+                  <a:srgbClr val="6E6E6E"/>
                 </a:solidFill>
                 <a:latin typeface="Helvetica Neue"/>
               </a:rPr>
@@ -10996,14 +11157,16 @@
           </a:xfrm>
           <a:prstGeom prst="roundRect">
             <a:avLst>
-              <a:gd name="adj" fmla="val 6000"/>
+              <a:gd name="adj" fmla="val 5000"/>
             </a:avLst>
           </a:prstGeom>
           <a:solidFill>
-            <a:srgbClr val="1A2027"/>
+            <a:srgbClr val="F5F3EF"/>
           </a:solidFill>
-          <a:ln>
-            <a:noFill/>
+          <a:ln w="11430">
+            <a:solidFill>
+              <a:srgbClr val="E3E0DA"/>
+            </a:solidFill>
           </a:ln>
           <a:effectLst/>
         </p:spPr>
@@ -11059,7 +11222,7 @@
             <a:r>
               <a:rPr sz="3400" b="1">
                 <a:solidFill>
-                  <a:srgbClr val="FF5C7A"/>
+                  <a:srgbClr val="ED7623"/>
                 </a:solidFill>
                 <a:latin typeface="Helvetica Neue"/>
               </a:rPr>
@@ -11098,7 +11261,7 @@
             <a:r>
               <a:rPr sz="2100" b="1">
                 <a:solidFill>
-                  <a:srgbClr val="F2EFEA"/>
+                  <a:srgbClr val="11406E"/>
                 </a:solidFill>
                 <a:latin typeface="Helvetica Neue"/>
               </a:rPr>
@@ -11140,7 +11303,7 @@
             <a:r>
               <a:rPr sz="1350" b="0">
                 <a:solidFill>
-                  <a:srgbClr val="8A94A0"/>
+                  <a:srgbClr val="6E6E6E"/>
                 </a:solidFill>
                 <a:latin typeface="Helvetica Neue"/>
               </a:rPr>
@@ -11162,14 +11325,16 @@
           </a:xfrm>
           <a:prstGeom prst="roundRect">
             <a:avLst>
-              <a:gd name="adj" fmla="val 6000"/>
+              <a:gd name="adj" fmla="val 5000"/>
             </a:avLst>
           </a:prstGeom>
           <a:solidFill>
-            <a:srgbClr val="1A2027"/>
+            <a:srgbClr val="F5F3EF"/>
           </a:solidFill>
-          <a:ln>
-            <a:noFill/>
+          <a:ln w="11430">
+            <a:solidFill>
+              <a:srgbClr val="E3E0DA"/>
+            </a:solidFill>
           </a:ln>
           <a:effectLst/>
         </p:spPr>
@@ -11225,7 +11390,7 @@
             <a:r>
               <a:rPr sz="3400" b="1">
                 <a:solidFill>
-                  <a:srgbClr val="FF5C7A"/>
+                  <a:srgbClr val="ED7623"/>
                 </a:solidFill>
                 <a:latin typeface="Helvetica Neue"/>
               </a:rPr>
@@ -11264,7 +11429,7 @@
             <a:r>
               <a:rPr sz="2100" b="1">
                 <a:solidFill>
-                  <a:srgbClr val="F2EFEA"/>
+                  <a:srgbClr val="11406E"/>
                 </a:solidFill>
                 <a:latin typeface="Helvetica Neue"/>
               </a:rPr>
@@ -11306,7 +11471,7 @@
             <a:r>
               <a:rPr sz="1350" b="0">
                 <a:solidFill>
-                  <a:srgbClr val="8A94A0"/>
+                  <a:srgbClr val="6E6E6E"/>
                 </a:solidFill>
                 <a:latin typeface="Helvetica Neue"/>
               </a:rPr>
@@ -11329,7 +11494,7 @@
     <p:bg>
       <p:bgPr>
         <a:solidFill>
-          <a:srgbClr val="101418"/>
+          <a:srgbClr val="FFFFFF"/>
         </a:solidFill>
         <a:effectLst/>
       </p:bgPr>
@@ -11350,13 +11515,13 @@
         <p:spPr>
           <a:xfrm>
             <a:off x="0" y="0"/>
-            <a:ext cx="155448" cy="6858000"/>
+            <a:ext cx="128016" cy="6858000"/>
           </a:xfrm>
           <a:prstGeom prst="rect">
             <a:avLst/>
           </a:prstGeom>
           <a:solidFill>
-            <a:srgbClr val="FF5C7A"/>
+            <a:srgbClr val="ED7623"/>
           </a:solidFill>
           <a:ln>
             <a:noFill/>
@@ -11415,7 +11580,7 @@
             <a:r>
               <a:rPr sz="1200" b="1">
                 <a:solidFill>
-                  <a:srgbClr val="45E0C8"/>
+                  <a:srgbClr val="ED7623"/>
                 </a:solidFill>
                 <a:latin typeface="Helvetica Neue"/>
               </a:rPr>
@@ -11457,7 +11622,7 @@
             <a:r>
               <a:rPr sz="3600" b="1">
                 <a:solidFill>
-                  <a:srgbClr val="F2EFEA"/>
+                  <a:srgbClr val="11406E"/>
                 </a:solidFill>
                 <a:latin typeface="Helvetica Neue"/>
               </a:rPr>
@@ -11481,7 +11646,7 @@
             <a:avLst/>
           </a:prstGeom>
           <a:solidFill>
-            <a:srgbClr val="45E0C8"/>
+            <a:srgbClr val="ED7623"/>
           </a:solidFill>
           <a:ln>
             <a:noFill/>
@@ -11543,7 +11708,7 @@
             <a:r>
               <a:rPr sz="1600" b="1">
                 <a:solidFill>
-                  <a:srgbClr val="45E0C8"/>
+                  <a:srgbClr val="35789C"/>
                 </a:solidFill>
                 <a:latin typeface="Helvetica Neue"/>
               </a:rPr>
@@ -11585,7 +11750,7 @@
             <a:r>
               <a:rPr sz="1600" b="1">
                 <a:solidFill>
-                  <a:srgbClr val="45E0C8"/>
+                  <a:srgbClr val="35789C"/>
                 </a:solidFill>
                 <a:latin typeface="Helvetica Neue"/>
               </a:rPr>
@@ -11627,7 +11792,7 @@
             <a:r>
               <a:rPr sz="1600" b="1">
                 <a:solidFill>
-                  <a:srgbClr val="45E0C8"/>
+                  <a:srgbClr val="35789C"/>
                 </a:solidFill>
                 <a:latin typeface="Helvetica Neue"/>
               </a:rPr>
@@ -11669,7 +11834,7 @@
             <a:r>
               <a:rPr sz="1600" b="1">
                 <a:solidFill>
-                  <a:srgbClr val="FF5C7A"/>
+                  <a:srgbClr val="ED7623"/>
                 </a:solidFill>
                 <a:latin typeface="Helvetica Neue"/>
               </a:rPr>
@@ -11711,7 +11876,7 @@
             <a:r>
               <a:rPr sz="1600" b="0">
                 <a:solidFill>
-                  <a:srgbClr val="F2EFEA"/>
+                  <a:srgbClr val="6E6E6E"/>
                 </a:solidFill>
                 <a:latin typeface="Helvetica Neue"/>
               </a:rPr>
@@ -11753,7 +11918,7 @@
             <a:r>
               <a:rPr sz="1600" b="0">
                 <a:solidFill>
-                  <a:srgbClr val="F2EFEA"/>
+                  <a:srgbClr val="6E6E6E"/>
                 </a:solidFill>
                 <a:latin typeface="Helvetica Neue"/>
               </a:rPr>
@@ -11777,7 +11942,7 @@
             <a:avLst/>
           </a:prstGeom>
           <a:solidFill>
-            <a:srgbClr val="2A333C"/>
+            <a:srgbClr val="E3E0DA"/>
           </a:solidFill>
           <a:ln>
             <a:noFill/>
@@ -11839,7 +12004,7 @@
             <a:r>
               <a:rPr sz="1600" b="1">
                 <a:solidFill>
-                  <a:srgbClr val="FF5C7A"/>
+                  <a:srgbClr val="ED7623"/>
                 </a:solidFill>
                 <a:latin typeface="Helvetica Neue"/>
               </a:rPr>
@@ -11881,7 +12046,7 @@
             <a:r>
               <a:rPr sz="1600" b="0">
                 <a:solidFill>
-                  <a:srgbClr val="F2EFEA"/>
+                  <a:srgbClr val="6E6E6E"/>
                 </a:solidFill>
                 <a:latin typeface="Helvetica Neue"/>
               </a:rPr>
@@ -11923,7 +12088,7 @@
             <a:r>
               <a:rPr sz="1600" b="0">
                 <a:solidFill>
-                  <a:srgbClr val="F2EFEA"/>
+                  <a:srgbClr val="6E6E6E"/>
                 </a:solidFill>
                 <a:latin typeface="Helvetica Neue"/>
               </a:rPr>
@@ -11947,7 +12112,7 @@
             <a:avLst/>
           </a:prstGeom>
           <a:solidFill>
-            <a:srgbClr val="2A333C"/>
+            <a:srgbClr val="E3E0DA"/>
           </a:solidFill>
           <a:ln>
             <a:noFill/>
@@ -12009,7 +12174,7 @@
             <a:r>
               <a:rPr sz="1600" b="1">
                 <a:solidFill>
-                  <a:srgbClr val="FF5C7A"/>
+                  <a:srgbClr val="ED7623"/>
                 </a:solidFill>
                 <a:latin typeface="Helvetica Neue"/>
               </a:rPr>
@@ -12051,7 +12216,7 @@
             <a:r>
               <a:rPr sz="1600" b="0">
                 <a:solidFill>
-                  <a:srgbClr val="F2EFEA"/>
+                  <a:srgbClr val="6E6E6E"/>
                 </a:solidFill>
                 <a:latin typeface="Helvetica Neue"/>
               </a:rPr>
@@ -12093,7 +12258,7 @@
             <a:r>
               <a:rPr sz="1600" b="0">
                 <a:solidFill>
-                  <a:srgbClr val="F2EFEA"/>
+                  <a:srgbClr val="6E6E6E"/>
                 </a:solidFill>
                 <a:latin typeface="Helvetica Neue"/>
               </a:rPr>
@@ -12117,7 +12282,7 @@
             <a:avLst/>
           </a:prstGeom>
           <a:solidFill>
-            <a:srgbClr val="2A333C"/>
+            <a:srgbClr val="E3E0DA"/>
           </a:solidFill>
           <a:ln>
             <a:noFill/>
@@ -12179,7 +12344,7 @@
             <a:r>
               <a:rPr sz="1600" b="1">
                 <a:solidFill>
-                  <a:srgbClr val="FF5C7A"/>
+                  <a:srgbClr val="ED7623"/>
                 </a:solidFill>
                 <a:latin typeface="Helvetica Neue"/>
               </a:rPr>
@@ -12221,7 +12386,7 @@
             <a:r>
               <a:rPr sz="1600" b="0">
                 <a:solidFill>
-                  <a:srgbClr val="F2EFEA"/>
+                  <a:srgbClr val="6E6E6E"/>
                 </a:solidFill>
                 <a:latin typeface="Helvetica Neue"/>
               </a:rPr>
@@ -12263,7 +12428,7 @@
             <a:r>
               <a:rPr sz="1600" b="0">
                 <a:solidFill>
-                  <a:srgbClr val="F2EFEA"/>
+                  <a:srgbClr val="6E6E6E"/>
                 </a:solidFill>
                 <a:latin typeface="Helvetica Neue"/>
               </a:rPr>
@@ -12287,7 +12452,7 @@
             <a:avLst/>
           </a:prstGeom>
           <a:solidFill>
-            <a:srgbClr val="2A333C"/>
+            <a:srgbClr val="E3E0DA"/>
           </a:solidFill>
           <a:ln>
             <a:noFill/>
@@ -12349,7 +12514,7 @@
             <a:r>
               <a:rPr sz="1600" b="1">
                 <a:solidFill>
-                  <a:srgbClr val="FF5C7A"/>
+                  <a:srgbClr val="ED7623"/>
                 </a:solidFill>
                 <a:latin typeface="Helvetica Neue"/>
               </a:rPr>
@@ -12391,7 +12556,7 @@
             <a:r>
               <a:rPr sz="1600" b="0">
                 <a:solidFill>
-                  <a:srgbClr val="F2EFEA"/>
+                  <a:srgbClr val="6E6E6E"/>
                 </a:solidFill>
                 <a:latin typeface="Helvetica Neue"/>
               </a:rPr>
@@ -12433,7 +12598,7 @@
             <a:r>
               <a:rPr sz="1600" b="0">
                 <a:solidFill>
-                  <a:srgbClr val="F2EFEA"/>
+                  <a:srgbClr val="6E6E6E"/>
                 </a:solidFill>
                 <a:latin typeface="Helvetica Neue"/>
               </a:rPr>
@@ -12457,7 +12622,7 @@
             <a:avLst/>
           </a:prstGeom>
           <a:solidFill>
-            <a:srgbClr val="2A333C"/>
+            <a:srgbClr val="E3E0DA"/>
           </a:solidFill>
           <a:ln>
             <a:noFill/>
@@ -12519,7 +12684,7 @@
             <a:r>
               <a:rPr sz="1600" b="1">
                 <a:solidFill>
-                  <a:srgbClr val="FF5C7A"/>
+                  <a:srgbClr val="ED7623"/>
                 </a:solidFill>
                 <a:latin typeface="Helvetica Neue"/>
               </a:rPr>
@@ -12561,7 +12726,7 @@
             <a:r>
               <a:rPr sz="1600" b="0">
                 <a:solidFill>
-                  <a:srgbClr val="F2EFEA"/>
+                  <a:srgbClr val="6E6E6E"/>
                 </a:solidFill>
                 <a:latin typeface="Helvetica Neue"/>
               </a:rPr>
@@ -12603,7 +12768,7 @@
             <a:r>
               <a:rPr sz="1600" b="0">
                 <a:solidFill>
-                  <a:srgbClr val="F2EFEA"/>
+                  <a:srgbClr val="6E6E6E"/>
                 </a:solidFill>
                 <a:latin typeface="Helvetica Neue"/>
               </a:rPr>
@@ -12626,7 +12791,7 @@
     <p:bg>
       <p:bgPr>
         <a:solidFill>
-          <a:srgbClr val="101418"/>
+          <a:srgbClr val="FFFFFF"/>
         </a:solidFill>
         <a:effectLst/>
       </p:bgPr>
@@ -12647,13 +12812,13 @@
         <p:spPr>
           <a:xfrm>
             <a:off x="0" y="0"/>
-            <a:ext cx="155448" cy="6858000"/>
+            <a:ext cx="128016" cy="6858000"/>
           </a:xfrm>
           <a:prstGeom prst="rect">
             <a:avLst/>
           </a:prstGeom>
           <a:solidFill>
-            <a:srgbClr val="FF5C7A"/>
+            <a:srgbClr val="ED7623"/>
           </a:solidFill>
           <a:ln>
             <a:noFill/>
@@ -12712,7 +12877,7 @@
             <a:r>
               <a:rPr sz="1200" b="1">
                 <a:solidFill>
-                  <a:srgbClr val="FF5C7A"/>
+                  <a:srgbClr val="ED7623"/>
                 </a:solidFill>
                 <a:latin typeface="Helvetica Neue"/>
               </a:rPr>
@@ -12754,7 +12919,7 @@
             <a:r>
               <a:rPr sz="4000" b="1">
                 <a:solidFill>
-                  <a:srgbClr val="F2EFEA"/>
+                  <a:srgbClr val="11406E"/>
                 </a:solidFill>
                 <a:latin typeface="Helvetica Neue"/>
               </a:rPr>
@@ -12776,14 +12941,16 @@
           </a:xfrm>
           <a:prstGeom prst="roundRect">
             <a:avLst>
-              <a:gd name="adj" fmla="val 6000"/>
+              <a:gd name="adj" fmla="val 5000"/>
             </a:avLst>
           </a:prstGeom>
           <a:solidFill>
-            <a:srgbClr val="1A2027"/>
+            <a:srgbClr val="F5F3EF"/>
           </a:solidFill>
-          <a:ln>
-            <a:noFill/>
+          <a:ln w="11430">
+            <a:solidFill>
+              <a:srgbClr val="E3E0DA"/>
+            </a:solidFill>
           </a:ln>
           <a:effectLst/>
         </p:spPr>
@@ -12842,7 +13009,7 @@
             <a:r>
               <a:rPr sz="2100" b="1">
                 <a:solidFill>
-                  <a:srgbClr val="FF5C7A"/>
+                  <a:srgbClr val="ED7623"/>
                 </a:solidFill>
                 <a:latin typeface="Helvetica Neue"/>
               </a:rPr>
@@ -12884,7 +13051,7 @@
             <a:r>
               <a:rPr sz="1600" b="0">
                 <a:solidFill>
-                  <a:srgbClr val="F2EFEA"/>
+                  <a:srgbClr val="6E6E6E"/>
                 </a:solidFill>
                 <a:latin typeface="Helvetica Neue"/>
               </a:rPr>
@@ -12906,14 +13073,16 @@
           </a:xfrm>
           <a:prstGeom prst="roundRect">
             <a:avLst>
-              <a:gd name="adj" fmla="val 6000"/>
+              <a:gd name="adj" fmla="val 5000"/>
             </a:avLst>
           </a:prstGeom>
           <a:solidFill>
-            <a:srgbClr val="1A2027"/>
+            <a:srgbClr val="F5F3EF"/>
           </a:solidFill>
-          <a:ln>
-            <a:noFill/>
+          <a:ln w="11430">
+            <a:solidFill>
+              <a:srgbClr val="E3E0DA"/>
+            </a:solidFill>
           </a:ln>
           <a:effectLst/>
         </p:spPr>
@@ -12972,7 +13141,7 @@
             <a:r>
               <a:rPr sz="2100" b="1">
                 <a:solidFill>
-                  <a:srgbClr val="FF5C7A"/>
+                  <a:srgbClr val="ED7623"/>
                 </a:solidFill>
                 <a:latin typeface="Helvetica Neue"/>
               </a:rPr>
@@ -13014,7 +13183,7 @@
             <a:r>
               <a:rPr sz="1600" b="0">
                 <a:solidFill>
-                  <a:srgbClr val="F2EFEA"/>
+                  <a:srgbClr val="6E6E6E"/>
                 </a:solidFill>
                 <a:latin typeface="Helvetica Neue"/>
               </a:rPr>
@@ -13036,14 +13205,16 @@
           </a:xfrm>
           <a:prstGeom prst="roundRect">
             <a:avLst>
-              <a:gd name="adj" fmla="val 6000"/>
+              <a:gd name="adj" fmla="val 5000"/>
             </a:avLst>
           </a:prstGeom>
           <a:solidFill>
-            <a:srgbClr val="1A2027"/>
+            <a:srgbClr val="F5F3EF"/>
           </a:solidFill>
-          <a:ln>
-            <a:noFill/>
+          <a:ln w="11430">
+            <a:solidFill>
+              <a:srgbClr val="E3E0DA"/>
+            </a:solidFill>
           </a:ln>
           <a:effectLst/>
         </p:spPr>
@@ -13102,7 +13273,7 @@
             <a:r>
               <a:rPr sz="2100" b="1">
                 <a:solidFill>
-                  <a:srgbClr val="FF5C7A"/>
+                  <a:srgbClr val="ED7623"/>
                 </a:solidFill>
                 <a:latin typeface="Helvetica Neue"/>
               </a:rPr>
@@ -13144,7 +13315,7 @@
             <a:r>
               <a:rPr sz="1600" b="0">
                 <a:solidFill>
-                  <a:srgbClr val="F2EFEA"/>
+                  <a:srgbClr val="6E6E6E"/>
                 </a:solidFill>
                 <a:latin typeface="Helvetica Neue"/>
               </a:rPr>
@@ -13167,7 +13338,7 @@
     <p:bg>
       <p:bgPr>
         <a:solidFill>
-          <a:srgbClr val="101418"/>
+          <a:srgbClr val="FFFFFF"/>
         </a:solidFill>
         <a:effectLst/>
       </p:bgPr>
@@ -13188,13 +13359,13 @@
         <p:spPr>
           <a:xfrm>
             <a:off x="0" y="0"/>
-            <a:ext cx="155448" cy="6858000"/>
+            <a:ext cx="128016" cy="6858000"/>
           </a:xfrm>
           <a:prstGeom prst="rect">
             <a:avLst/>
           </a:prstGeom>
           <a:solidFill>
-            <a:srgbClr val="FF5C7A"/>
+            <a:srgbClr val="ED7623"/>
           </a:solidFill>
           <a:ln>
             <a:noFill/>
@@ -13253,7 +13424,7 @@
             <a:r>
               <a:rPr sz="9600" b="1">
                 <a:solidFill>
-                  <a:srgbClr val="FF5C7A"/>
+                  <a:srgbClr val="ED7623"/>
                 </a:solidFill>
                 <a:latin typeface="Helvetica Neue"/>
               </a:rPr>
@@ -13292,7 +13463,7 @@
             <a:r>
               <a:rPr sz="4400" b="1">
                 <a:solidFill>
-                  <a:srgbClr val="F2EFEA"/>
+                  <a:srgbClr val="11406E"/>
                 </a:solidFill>
                 <a:latin typeface="Helvetica Neue"/>
               </a:rPr>
@@ -13331,7 +13502,7 @@
             <a:r>
               <a:rPr sz="2000" b="0">
                 <a:solidFill>
-                  <a:srgbClr val="45E0C8"/>
+                  <a:srgbClr val="35789C"/>
                 </a:solidFill>
                 <a:latin typeface="Helvetica Neue"/>
               </a:rPr>
@@ -13353,11 +13524,168 @@
           </a:xfrm>
           <a:prstGeom prst="roundRect">
             <a:avLst>
-              <a:gd name="adj" fmla="val 6000"/>
+              <a:gd name="adj" fmla="val 5000"/>
             </a:avLst>
           </a:prstGeom>
           <a:solidFill>
-            <a:srgbClr val="1A2027"/>
+            <a:srgbClr val="F5F3EF"/>
+          </a:solidFill>
+          <a:ln w="11430">
+            <a:solidFill>
+              <a:srgbClr val="E3E0DA"/>
+            </a:solidFill>
+          </a:ln>
+          <a:effectLst/>
+        </p:spPr>
+        <p:style>
+          <a:lnRef idx="1">
+            <a:schemeClr val="accent1"/>
+          </a:lnRef>
+          <a:fillRef idx="3">
+            <a:schemeClr val="accent1"/>
+          </a:fillRef>
+          <a:effectRef idx="2">
+            <a:schemeClr val="accent1"/>
+          </a:effectRef>
+          <a:fontRef idx="minor">
+            <a:schemeClr val="lt1"/>
+          </a:fontRef>
+        </p:style>
+        <p:txBody>
+          <a:bodyPr rtlCol="0" anchor="ctr"/>
+          <a:lstStyle/>
+          <a:p>
+            <a:pPr algn="ctr"/>
+          </a:p>
+        </p:txBody>
+      </p:sp>
+      <p:sp>
+        <p:nvSpPr>
+          <p:cNvPr id="7" name="TextBox 6"/>
+          <p:cNvSpPr txBox="1"/>
+          <p:nvPr/>
+        </p:nvSpPr>
+        <p:spPr>
+          <a:xfrm>
+            <a:off x="2560320" y="3017520"/>
+            <a:ext cx="8046720" cy="1737360"/>
+          </a:xfrm>
+          <a:prstGeom prst="rect">
+            <a:avLst/>
+          </a:prstGeom>
+          <a:noFill/>
+        </p:spPr>
+        <p:txBody>
+          <a:bodyPr wrap="square" lIns="0" rIns="0" tIns="0" bIns="0">
+            <a:spAutoFit/>
+          </a:bodyPr>
+          <a:lstStyle/>
+          <a:p>
+            <a:pPr algn="l">
+              <a:lnSpc>
+                <a:spcPct val="135000"/>
+              </a:lnSpc>
+              <a:spcAft>
+                <a:spcPts val="400"/>
+              </a:spcAft>
+            </a:pPr>
+            <a:r>
+              <a:rPr sz="1900" b="0">
+                <a:solidFill>
+                  <a:srgbClr val="11406E"/>
+                </a:solidFill>
+                <a:latin typeface="Helvetica Neue"/>
+              </a:rPr>
+              <a:t>· Una primera frase que enganche</a:t>
+            </a:r>
+          </a:p>
+          <a:p>
+            <a:pPr algn="l">
+              <a:lnSpc>
+                <a:spcPct val="135000"/>
+              </a:lnSpc>
+              <a:spcAft>
+                <a:spcPts val="400"/>
+              </a:spcAft>
+            </a:pPr>
+            <a:r>
+              <a:rPr sz="1900" b="0">
+                <a:solidFill>
+                  <a:srgbClr val="11406E"/>
+                </a:solidFill>
+                <a:latin typeface="Helvetica Neue"/>
+              </a:rPr>
+              <a:t>· Una idea central, explicada con una comparación cotidiana</a:t>
+            </a:r>
+          </a:p>
+          <a:p>
+            <a:pPr algn="l">
+              <a:lnSpc>
+                <a:spcPct val="135000"/>
+              </a:lnSpc>
+              <a:spcAft>
+                <a:spcPts val="400"/>
+              </a:spcAft>
+            </a:pPr>
+            <a:r>
+              <a:rPr sz="1900" b="0">
+                <a:solidFill>
+                  <a:srgbClr val="11406E"/>
+                </a:solidFill>
+                <a:latin typeface="Helvetica Neue"/>
+              </a:rPr>
+              <a:t>· Un cierre que deje una pregunta</a:t>
+            </a:r>
+          </a:p>
+          <a:p>
+            <a:pPr algn="l">
+              <a:lnSpc>
+                <a:spcPct val="135000"/>
+              </a:lnSpc>
+              <a:spcAft>
+                <a:spcPts val="400"/>
+              </a:spcAft>
+            </a:pPr>
+          </a:p>
+          <a:p>
+            <a:pPr algn="l">
+              <a:lnSpc>
+                <a:spcPct val="135000"/>
+              </a:lnSpc>
+              <a:spcAft>
+                <a:spcPts val="400"/>
+              </a:spcAft>
+            </a:pPr>
+            <a:r>
+              <a:rPr sz="1500" b="0">
+                <a:solidFill>
+                  <a:srgbClr val="6E6E6E"/>
+                </a:solidFill>
+                <a:latin typeface="Helvetica Neue"/>
+              </a:rPr>
+              <a:t>Se habla a unas 150 palabras por minuto. El prompt está en las notas.</a:t>
+            </a:r>
+          </a:p>
+        </p:txBody>
+      </p:sp>
+      <p:sp>
+        <p:nvSpPr>
+          <p:cNvPr id="8" name="Rounded Rectangle 7"/>
+          <p:cNvSpPr/>
+          <p:nvPr/>
+        </p:nvSpPr>
+        <p:spPr>
+          <a:xfrm>
+            <a:off x="2103120" y="5166360"/>
+            <a:ext cx="8778240" cy="914400"/>
+          </a:xfrm>
+          <a:prstGeom prst="roundRect">
+            <a:avLst>
+              <a:gd name="adj" fmla="val 5000"/>
+            </a:avLst>
+          </a:prstGeom>
+          <a:solidFill>
+            <a:srgbClr val="FDF0E6"/>
           </a:solidFill>
           <a:ln>
             <a:noFill/>
@@ -13388,14 +13716,14 @@
       </p:sp>
       <p:sp>
         <p:nvSpPr>
-          <p:cNvPr id="7" name="TextBox 6"/>
+          <p:cNvPr id="9" name="TextBox 8"/>
           <p:cNvSpPr txBox="1"/>
           <p:nvPr/>
         </p:nvSpPr>
         <p:spPr>
           <a:xfrm>
-            <a:off x="2560320" y="3017520"/>
-            <a:ext cx="8046720" cy="1737360"/>
+            <a:off x="2560320" y="5413248"/>
+            <a:ext cx="8046720" cy="548640"/>
           </a:xfrm>
           <a:prstGeom prst="rect">
             <a:avLst/>
@@ -13409,161 +13737,6 @@
           <a:lstStyle/>
           <a:p>
             <a:pPr algn="l">
-              <a:lnSpc>
-                <a:spcPct val="135000"/>
-              </a:lnSpc>
-              <a:spcAft>
-                <a:spcPts val="400"/>
-              </a:spcAft>
-            </a:pPr>
-            <a:r>
-              <a:rPr sz="1900" b="0">
-                <a:solidFill>
-                  <a:srgbClr val="F2EFEA"/>
-                </a:solidFill>
-                <a:latin typeface="Helvetica Neue"/>
-              </a:rPr>
-              <a:t>· Una primera frase que enganche</a:t>
-            </a:r>
-          </a:p>
-          <a:p>
-            <a:pPr algn="l">
-              <a:lnSpc>
-                <a:spcPct val="135000"/>
-              </a:lnSpc>
-              <a:spcAft>
-                <a:spcPts val="400"/>
-              </a:spcAft>
-            </a:pPr>
-            <a:r>
-              <a:rPr sz="1900" b="0">
-                <a:solidFill>
-                  <a:srgbClr val="F2EFEA"/>
-                </a:solidFill>
-                <a:latin typeface="Helvetica Neue"/>
-              </a:rPr>
-              <a:t>· Una idea central, explicada con una comparación cotidiana</a:t>
-            </a:r>
-          </a:p>
-          <a:p>
-            <a:pPr algn="l">
-              <a:lnSpc>
-                <a:spcPct val="135000"/>
-              </a:lnSpc>
-              <a:spcAft>
-                <a:spcPts val="400"/>
-              </a:spcAft>
-            </a:pPr>
-            <a:r>
-              <a:rPr sz="1900" b="0">
-                <a:solidFill>
-                  <a:srgbClr val="F2EFEA"/>
-                </a:solidFill>
-                <a:latin typeface="Helvetica Neue"/>
-              </a:rPr>
-              <a:t>· Un cierre que deje una pregunta</a:t>
-            </a:r>
-          </a:p>
-          <a:p>
-            <a:pPr algn="l">
-              <a:lnSpc>
-                <a:spcPct val="135000"/>
-              </a:lnSpc>
-              <a:spcAft>
-                <a:spcPts val="400"/>
-              </a:spcAft>
-            </a:pPr>
-          </a:p>
-          <a:p>
-            <a:pPr algn="l">
-              <a:lnSpc>
-                <a:spcPct val="135000"/>
-              </a:lnSpc>
-              <a:spcAft>
-                <a:spcPts val="400"/>
-              </a:spcAft>
-            </a:pPr>
-            <a:r>
-              <a:rPr sz="1500" b="0">
-                <a:solidFill>
-                  <a:srgbClr val="8A94A0"/>
-                </a:solidFill>
-                <a:latin typeface="Helvetica Neue"/>
-              </a:rPr>
-              <a:t>80 palabras son unos 45 segundos. El prompt está en las notas.</a:t>
-            </a:r>
-          </a:p>
-        </p:txBody>
-      </p:sp>
-      <p:sp>
-        <p:nvSpPr>
-          <p:cNvPr id="8" name="Rounded Rectangle 7"/>
-          <p:cNvSpPr/>
-          <p:nvPr/>
-        </p:nvSpPr>
-        <p:spPr>
-          <a:xfrm>
-            <a:off x="2103120" y="5166360"/>
-            <a:ext cx="8778240" cy="914400"/>
-          </a:xfrm>
-          <a:prstGeom prst="roundRect">
-            <a:avLst>
-              <a:gd name="adj" fmla="val 6000"/>
-            </a:avLst>
-          </a:prstGeom>
-          <a:solidFill>
-            <a:srgbClr val="2A1A20"/>
-          </a:solidFill>
-          <a:ln>
-            <a:noFill/>
-          </a:ln>
-          <a:effectLst/>
-        </p:spPr>
-        <p:style>
-          <a:lnRef idx="1">
-            <a:schemeClr val="accent1"/>
-          </a:lnRef>
-          <a:fillRef idx="3">
-            <a:schemeClr val="accent1"/>
-          </a:fillRef>
-          <a:effectRef idx="2">
-            <a:schemeClr val="accent1"/>
-          </a:effectRef>
-          <a:fontRef idx="minor">
-            <a:schemeClr val="lt1"/>
-          </a:fontRef>
-        </p:style>
-        <p:txBody>
-          <a:bodyPr rtlCol="0" anchor="ctr"/>
-          <a:lstStyle/>
-          <a:p>
-            <a:pPr algn="ctr"/>
-          </a:p>
-        </p:txBody>
-      </p:sp>
-      <p:sp>
-        <p:nvSpPr>
-          <p:cNvPr id="9" name="TextBox 8"/>
-          <p:cNvSpPr txBox="1"/>
-          <p:nvPr/>
-        </p:nvSpPr>
-        <p:spPr>
-          <a:xfrm>
-            <a:off x="2560320" y="5413248"/>
-            <a:ext cx="8046720" cy="548640"/>
-          </a:xfrm>
-          <a:prstGeom prst="rect">
-            <a:avLst/>
-          </a:prstGeom>
-          <a:noFill/>
-        </p:spPr>
-        <p:txBody>
-          <a:bodyPr wrap="square" lIns="0" rIns="0" tIns="0" bIns="0">
-            <a:spAutoFit/>
-          </a:bodyPr>
-          <a:lstStyle/>
-          <a:p>
-            <a:pPr algn="l">
               <a:spcAft>
                 <a:spcPts val="600"/>
               </a:spcAft>
@@ -13571,11 +13744,11 @@
             <a:r>
               <a:rPr sz="1700" b="1">
                 <a:solidFill>
-                  <a:srgbClr val="FF5C7A"/>
-                </a:solidFill>
-                <a:latin typeface="Helvetica Neue"/>
-              </a:rPr>
-              <a:t>Pruébalo: léelo en voz alta. Si te trabas, está mal escrito.</a:t>
+                  <a:srgbClr val="ED7623"/>
+                </a:solidFill>
+                <a:latin typeface="Helvetica Neue"/>
+              </a:rPr>
+              <a:t>Pruébalo: léelo en voz alta y cronométrate. Si te trabas, está mal escrito.</a:t>
             </a:r>
           </a:p>
         </p:txBody>
@@ -13594,7 +13767,7 @@
     <p:bg>
       <p:bgPr>
         <a:solidFill>
-          <a:srgbClr val="101418"/>
+          <a:srgbClr val="FFFFFF"/>
         </a:solidFill>
         <a:effectLst/>
       </p:bgPr>
@@ -13615,13 +13788,13 @@
         <p:spPr>
           <a:xfrm>
             <a:off x="0" y="0"/>
-            <a:ext cx="155448" cy="6858000"/>
+            <a:ext cx="128016" cy="6858000"/>
           </a:xfrm>
           <a:prstGeom prst="rect">
             <a:avLst/>
           </a:prstGeom>
           <a:solidFill>
-            <a:srgbClr val="FF5C7A"/>
+            <a:srgbClr val="ED7623"/>
           </a:solidFill>
           <a:ln>
             <a:noFill/>
@@ -13680,7 +13853,7 @@
             <a:r>
               <a:rPr sz="1200" b="1">
                 <a:solidFill>
-                  <a:srgbClr val="45E0C8"/>
+                  <a:srgbClr val="ED7623"/>
                 </a:solidFill>
                 <a:latin typeface="Helvetica Neue"/>
               </a:rPr>
@@ -13722,7 +13895,7 @@
             <a:r>
               <a:rPr sz="3800" b="1">
                 <a:solidFill>
-                  <a:srgbClr val="F2EFEA"/>
+                  <a:srgbClr val="11406E"/>
                 </a:solidFill>
                 <a:latin typeface="Helvetica Neue"/>
               </a:rPr>
@@ -13764,7 +13937,7 @@
             <a:r>
               <a:rPr sz="2000" b="0">
                 <a:solidFill>
-                  <a:srgbClr val="8A94A0"/>
+                  <a:srgbClr val="6E6E6E"/>
                 </a:solidFill>
                 <a:latin typeface="Helvetica Neue"/>
               </a:rPr>
@@ -13786,14 +13959,16 @@
           </a:xfrm>
           <a:prstGeom prst="roundRect">
             <a:avLst>
-              <a:gd name="adj" fmla="val 6000"/>
+              <a:gd name="adj" fmla="val 5000"/>
             </a:avLst>
           </a:prstGeom>
           <a:solidFill>
-            <a:srgbClr val="1A2027"/>
+            <a:srgbClr val="F5F3EF"/>
           </a:solidFill>
-          <a:ln>
-            <a:noFill/>
+          <a:ln w="11430">
+            <a:solidFill>
+              <a:srgbClr val="E3E0DA"/>
+            </a:solidFill>
           </a:ln>
           <a:effectLst/>
         </p:spPr>
@@ -13849,7 +14024,7 @@
             <a:r>
               <a:rPr sz="2400" b="1">
                 <a:solidFill>
-                  <a:srgbClr val="45E0C8"/>
+                  <a:srgbClr val="35789C"/>
                 </a:solidFill>
                 <a:latin typeface="Helvetica Neue"/>
               </a:rPr>
@@ -13891,7 +14066,7 @@
             <a:r>
               <a:rPr sz="1600" b="0">
                 <a:solidFill>
-                  <a:srgbClr val="F2EFEA"/>
+                  <a:srgbClr val="6E6E6E"/>
                 </a:solidFill>
                 <a:latin typeface="Helvetica Neue"/>
               </a:rPr>
@@ -13913,14 +14088,16 @@
           </a:xfrm>
           <a:prstGeom prst="roundRect">
             <a:avLst>
-              <a:gd name="adj" fmla="val 6000"/>
+              <a:gd name="adj" fmla="val 5000"/>
             </a:avLst>
           </a:prstGeom>
           <a:solidFill>
-            <a:srgbClr val="1A2027"/>
+            <a:srgbClr val="F5F3EF"/>
           </a:solidFill>
-          <a:ln>
-            <a:noFill/>
+          <a:ln w="11430">
+            <a:solidFill>
+              <a:srgbClr val="E3E0DA"/>
+            </a:solidFill>
           </a:ln>
           <a:effectLst/>
         </p:spPr>
@@ -13976,7 +14153,7 @@
             <a:r>
               <a:rPr sz="2400" b="1">
                 <a:solidFill>
-                  <a:srgbClr val="45E0C8"/>
+                  <a:srgbClr val="35789C"/>
                 </a:solidFill>
                 <a:latin typeface="Helvetica Neue"/>
               </a:rPr>
@@ -14018,7 +14195,7 @@
             <a:r>
               <a:rPr sz="1600" b="0">
                 <a:solidFill>
-                  <a:srgbClr val="F2EFEA"/>
+                  <a:srgbClr val="6E6E6E"/>
                 </a:solidFill>
                 <a:latin typeface="Helvetica Neue"/>
               </a:rPr>
@@ -14057,11 +14234,11 @@
             <a:r>
               <a:rPr sz="1600" b="0">
                 <a:solidFill>
-                  <a:srgbClr val="FF5C7A"/>
-                </a:solidFill>
-                <a:latin typeface="Helvetica Neue"/>
-              </a:rPr>
-              <a:t>Después lo pules: «Limpia este dictado, quita las muletillas y déjalo en 80 palabras».</a:t>
+                  <a:srgbClr val="ED7623"/>
+                </a:solidFill>
+                <a:latin typeface="Helvetica Neue"/>
+              </a:rPr>
+              <a:t>Después lo pules: «Limpia este dictado, quita las muletillas y déjalo en 150 palabras».</a:t>
             </a:r>
           </a:p>
         </p:txBody>
@@ -14080,7 +14257,7 @@
     <p:bg>
       <p:bgPr>
         <a:solidFill>
-          <a:srgbClr val="101418"/>
+          <a:srgbClr val="FFFFFF"/>
         </a:solidFill>
         <a:effectLst/>
       </p:bgPr>
@@ -14101,13 +14278,13 @@
         <p:spPr>
           <a:xfrm>
             <a:off x="0" y="0"/>
-            <a:ext cx="155448" cy="6858000"/>
+            <a:ext cx="128016" cy="6858000"/>
           </a:xfrm>
           <a:prstGeom prst="rect">
             <a:avLst/>
           </a:prstGeom>
           <a:solidFill>
-            <a:srgbClr val="FF5C7A"/>
+            <a:srgbClr val="ED7623"/>
           </a:solidFill>
           <a:ln>
             <a:noFill/>
@@ -14166,7 +14343,7 @@
             <a:r>
               <a:rPr sz="9600" b="1">
                 <a:solidFill>
-                  <a:srgbClr val="FF5C7A"/>
+                  <a:srgbClr val="ED7623"/>
                 </a:solidFill>
                 <a:latin typeface="Helvetica Neue"/>
               </a:rPr>
@@ -14205,7 +14382,7 @@
             <a:r>
               <a:rPr sz="4400" b="1">
                 <a:solidFill>
-                  <a:srgbClr val="F2EFEA"/>
+                  <a:srgbClr val="11406E"/>
                 </a:solidFill>
                 <a:latin typeface="Helvetica Neue"/>
               </a:rPr>
@@ -14244,7 +14421,7 @@
             <a:r>
               <a:rPr sz="2000" b="0">
                 <a:solidFill>
-                  <a:srgbClr val="45E0C8"/>
+                  <a:srgbClr val="35789C"/>
                 </a:solidFill>
                 <a:latin typeface="Helvetica Neue"/>
               </a:rPr>
@@ -14266,11 +14443,139 @@
           </a:xfrm>
           <a:prstGeom prst="roundRect">
             <a:avLst>
-              <a:gd name="adj" fmla="val 6000"/>
+              <a:gd name="adj" fmla="val 5000"/>
             </a:avLst>
           </a:prstGeom>
           <a:solidFill>
-            <a:srgbClr val="1A2027"/>
+            <a:srgbClr val="F5F3EF"/>
+          </a:solidFill>
+          <a:ln w="11430">
+            <a:solidFill>
+              <a:srgbClr val="E3E0DA"/>
+            </a:solidFill>
+          </a:ln>
+          <a:effectLst/>
+        </p:spPr>
+        <p:style>
+          <a:lnRef idx="1">
+            <a:schemeClr val="accent1"/>
+          </a:lnRef>
+          <a:fillRef idx="3">
+            <a:schemeClr val="accent1"/>
+          </a:fillRef>
+          <a:effectRef idx="2">
+            <a:schemeClr val="accent1"/>
+          </a:effectRef>
+          <a:fontRef idx="minor">
+            <a:schemeClr val="lt1"/>
+          </a:fontRef>
+        </p:style>
+        <p:txBody>
+          <a:bodyPr rtlCol="0" anchor="ctr"/>
+          <a:lstStyle/>
+          <a:p>
+            <a:pPr algn="ctr"/>
+          </a:p>
+        </p:txBody>
+      </p:sp>
+      <p:sp>
+        <p:nvSpPr>
+          <p:cNvPr id="7" name="TextBox 6"/>
+          <p:cNvSpPr txBox="1"/>
+          <p:nvPr/>
+        </p:nvSpPr>
+        <p:spPr>
+          <a:xfrm>
+            <a:off x="2560320" y="3017520"/>
+            <a:ext cx="8046720" cy="1463040"/>
+          </a:xfrm>
+          <a:prstGeom prst="rect">
+            <a:avLst/>
+          </a:prstGeom>
+          <a:noFill/>
+        </p:spPr>
+        <p:txBody>
+          <a:bodyPr wrap="square" lIns="0" rIns="0" tIns="0" bIns="0">
+            <a:spAutoFit/>
+          </a:bodyPr>
+          <a:lstStyle/>
+          <a:p>
+            <a:pPr algn="l">
+              <a:lnSpc>
+                <a:spcPct val="135000"/>
+              </a:lnSpc>
+              <a:spcAft>
+                <a:spcPts val="400"/>
+              </a:spcAft>
+            </a:pPr>
+            <a:r>
+              <a:rPr sz="1900" b="0">
+                <a:solidFill>
+                  <a:srgbClr val="11406E"/>
+                </a:solidFill>
+                <a:latin typeface="Helvetica Neue"/>
+              </a:rPr>
+              <a:t>Pide la imagen en 16:9, sin personas y sin texto.</a:t>
+            </a:r>
+          </a:p>
+          <a:p>
+            <a:pPr algn="l">
+              <a:lnSpc>
+                <a:spcPct val="135000"/>
+              </a:lnSpc>
+              <a:spcAft>
+                <a:spcPts val="400"/>
+              </a:spcAft>
+            </a:pPr>
+            <a:r>
+              <a:rPr sz="1900" b="0">
+                <a:solidFill>
+                  <a:srgbClr val="11406E"/>
+                </a:solidFill>
+                <a:latin typeface="Helvetica Neue"/>
+              </a:rPr>
+              <a:t>Y pide algo que casi nadie pide: deja espacio libre a un lado</a:t>
+            </a:r>
+          </a:p>
+          <a:p>
+            <a:pPr algn="l">
+              <a:lnSpc>
+                <a:spcPct val="135000"/>
+              </a:lnSpc>
+              <a:spcAft>
+                <a:spcPts val="400"/>
+              </a:spcAft>
+            </a:pPr>
+            <a:r>
+              <a:rPr sz="1900" b="0">
+                <a:solidFill>
+                  <a:srgbClr val="11406E"/>
+                </a:solidFill>
+                <a:latin typeface="Helvetica Neue"/>
+              </a:rPr>
+              <a:t>para que quepa tu personaje.</a:t>
+            </a:r>
+          </a:p>
+        </p:txBody>
+      </p:sp>
+      <p:sp>
+        <p:nvSpPr>
+          <p:cNvPr id="8" name="Rounded Rectangle 7"/>
+          <p:cNvSpPr/>
+          <p:nvPr/>
+        </p:nvSpPr>
+        <p:spPr>
+          <a:xfrm>
+            <a:off x="2103120" y="4892040"/>
+            <a:ext cx="8778240" cy="1234440"/>
+          </a:xfrm>
+          <a:prstGeom prst="roundRect">
+            <a:avLst>
+              <a:gd name="adj" fmla="val 5000"/>
+            </a:avLst>
+          </a:prstGeom>
+          <a:solidFill>
+            <a:srgbClr val="ECF3F7"/>
           </a:solidFill>
           <a:ln>
             <a:noFill/>
@@ -14301,132 +14606,6 @@
       </p:sp>
       <p:sp>
         <p:nvSpPr>
-          <p:cNvPr id="7" name="TextBox 6"/>
-          <p:cNvSpPr txBox="1"/>
-          <p:nvPr/>
-        </p:nvSpPr>
-        <p:spPr>
-          <a:xfrm>
-            <a:off x="2560320" y="3017520"/>
-            <a:ext cx="8046720" cy="1463040"/>
-          </a:xfrm>
-          <a:prstGeom prst="rect">
-            <a:avLst/>
-          </a:prstGeom>
-          <a:noFill/>
-        </p:spPr>
-        <p:txBody>
-          <a:bodyPr wrap="square" lIns="0" rIns="0" tIns="0" bIns="0">
-            <a:spAutoFit/>
-          </a:bodyPr>
-          <a:lstStyle/>
-          <a:p>
-            <a:pPr algn="l">
-              <a:lnSpc>
-                <a:spcPct val="135000"/>
-              </a:lnSpc>
-              <a:spcAft>
-                <a:spcPts val="400"/>
-              </a:spcAft>
-            </a:pPr>
-            <a:r>
-              <a:rPr sz="1900" b="0">
-                <a:solidFill>
-                  <a:srgbClr val="F2EFEA"/>
-                </a:solidFill>
-                <a:latin typeface="Helvetica Neue"/>
-              </a:rPr>
-              <a:t>Pide la imagen en 16:9, sin personas y sin texto.</a:t>
-            </a:r>
-          </a:p>
-          <a:p>
-            <a:pPr algn="l">
-              <a:lnSpc>
-                <a:spcPct val="135000"/>
-              </a:lnSpc>
-              <a:spcAft>
-                <a:spcPts val="400"/>
-              </a:spcAft>
-            </a:pPr>
-            <a:r>
-              <a:rPr sz="1900" b="0">
-                <a:solidFill>
-                  <a:srgbClr val="F2EFEA"/>
-                </a:solidFill>
-                <a:latin typeface="Helvetica Neue"/>
-              </a:rPr>
-              <a:t>Y pide algo que casi nadie pide: deja espacio libre a un lado</a:t>
-            </a:r>
-          </a:p>
-          <a:p>
-            <a:pPr algn="l">
-              <a:lnSpc>
-                <a:spcPct val="135000"/>
-              </a:lnSpc>
-              <a:spcAft>
-                <a:spcPts val="400"/>
-              </a:spcAft>
-            </a:pPr>
-            <a:r>
-              <a:rPr sz="1900" b="0">
-                <a:solidFill>
-                  <a:srgbClr val="F2EFEA"/>
-                </a:solidFill>
-                <a:latin typeface="Helvetica Neue"/>
-              </a:rPr>
-              <a:t>para que quepa tu personaje.</a:t>
-            </a:r>
-          </a:p>
-        </p:txBody>
-      </p:sp>
-      <p:sp>
-        <p:nvSpPr>
-          <p:cNvPr id="8" name="Rounded Rectangle 7"/>
-          <p:cNvSpPr/>
-          <p:nvPr/>
-        </p:nvSpPr>
-        <p:spPr>
-          <a:xfrm>
-            <a:off x="2103120" y="4892040"/>
-            <a:ext cx="8778240" cy="1234440"/>
-          </a:xfrm>
-          <a:prstGeom prst="roundRect">
-            <a:avLst>
-              <a:gd name="adj" fmla="val 6000"/>
-            </a:avLst>
-          </a:prstGeom>
-          <a:solidFill>
-            <a:srgbClr val="142826"/>
-          </a:solidFill>
-          <a:ln>
-            <a:noFill/>
-          </a:ln>
-          <a:effectLst/>
-        </p:spPr>
-        <p:style>
-          <a:lnRef idx="1">
-            <a:schemeClr val="accent1"/>
-          </a:lnRef>
-          <a:fillRef idx="3">
-            <a:schemeClr val="accent1"/>
-          </a:fillRef>
-          <a:effectRef idx="2">
-            <a:schemeClr val="accent1"/>
-          </a:effectRef>
-          <a:fontRef idx="minor">
-            <a:schemeClr val="lt1"/>
-          </a:fontRef>
-        </p:style>
-        <p:txBody>
-          <a:bodyPr rtlCol="0" anchor="ctr"/>
-          <a:lstStyle/>
-          <a:p>
-            <a:pPr algn="ctr"/>
-          </a:p>
-        </p:txBody>
-      </p:sp>
-      <p:sp>
-        <p:nvSpPr>
           <p:cNvPr id="9" name="TextBox 8"/>
           <p:cNvSpPr txBox="1"/>
           <p:nvPr/>
@@ -14458,7 +14637,7 @@
             <a:r>
               <a:rPr sz="1700" b="0">
                 <a:solidFill>
-                  <a:srgbClr val="45E0C8"/>
+                  <a:srgbClr val="35789C"/>
                 </a:solidFill>
                 <a:latin typeface="Helvetica Neue"/>
               </a:rPr>
@@ -14477,7 +14656,7 @@
             <a:r>
               <a:rPr sz="1700" b="0">
                 <a:solidFill>
-                  <a:srgbClr val="45E0C8"/>
+                  <a:srgbClr val="35789C"/>
                 </a:solidFill>
                 <a:latin typeface="Helvetica Neue"/>
               </a:rPr>
@@ -14500,7 +14679,7 @@
     <p:bg>
       <p:bgPr>
         <a:solidFill>
-          <a:srgbClr val="101418"/>
+          <a:srgbClr val="FFFFFF"/>
         </a:solidFill>
         <a:effectLst/>
       </p:bgPr>
@@ -14521,13 +14700,13 @@
         <p:spPr>
           <a:xfrm>
             <a:off x="0" y="0"/>
-            <a:ext cx="155448" cy="6858000"/>
+            <a:ext cx="128016" cy="6858000"/>
           </a:xfrm>
           <a:prstGeom prst="rect">
             <a:avLst/>
           </a:prstGeom>
           <a:solidFill>
-            <a:srgbClr val="FF5C7A"/>
+            <a:srgbClr val="ED7623"/>
           </a:solidFill>
           <a:ln>
             <a:noFill/>
@@ -14586,7 +14765,7 @@
             <a:r>
               <a:rPr sz="9600" b="1">
                 <a:solidFill>
-                  <a:srgbClr val="FF5C7A"/>
+                  <a:srgbClr val="ED7623"/>
                 </a:solidFill>
                 <a:latin typeface="Helvetica Neue"/>
               </a:rPr>
@@ -14625,7 +14804,7 @@
             <a:r>
               <a:rPr sz="4400" b="1">
                 <a:solidFill>
-                  <a:srgbClr val="F2EFEA"/>
+                  <a:srgbClr val="11406E"/>
                 </a:solidFill>
                 <a:latin typeface="Helvetica Neue"/>
               </a:rPr>
@@ -14664,7 +14843,7 @@
             <a:r>
               <a:rPr sz="2000" b="0">
                 <a:solidFill>
-                  <a:srgbClr val="45E0C8"/>
+                  <a:srgbClr val="35789C"/>
                 </a:solidFill>
                 <a:latin typeface="Helvetica Neue"/>
               </a:rPr>
@@ -14686,11 +14865,249 @@
           </a:xfrm>
           <a:prstGeom prst="roundRect">
             <a:avLst>
-              <a:gd name="adj" fmla="val 6000"/>
+              <a:gd name="adj" fmla="val 5000"/>
             </a:avLst>
           </a:prstGeom>
           <a:solidFill>
-            <a:srgbClr val="1A2027"/>
+            <a:srgbClr val="F5F3EF"/>
+          </a:solidFill>
+          <a:ln w="11430">
+            <a:solidFill>
+              <a:srgbClr val="E3E0DA"/>
+            </a:solidFill>
+          </a:ln>
+          <a:effectLst/>
+        </p:spPr>
+        <p:style>
+          <a:lnRef idx="1">
+            <a:schemeClr val="accent1"/>
+          </a:lnRef>
+          <a:fillRef idx="3">
+            <a:schemeClr val="accent1"/>
+          </a:fillRef>
+          <a:effectRef idx="2">
+            <a:schemeClr val="accent1"/>
+          </a:effectRef>
+          <a:fontRef idx="minor">
+            <a:schemeClr val="lt1"/>
+          </a:fontRef>
+        </p:style>
+        <p:txBody>
+          <a:bodyPr rtlCol="0" anchor="ctr"/>
+          <a:lstStyle/>
+          <a:p>
+            <a:pPr algn="ctr"/>
+          </a:p>
+        </p:txBody>
+      </p:sp>
+      <p:sp>
+        <p:nvSpPr>
+          <p:cNvPr id="7" name="TextBox 6"/>
+          <p:cNvSpPr txBox="1"/>
+          <p:nvPr/>
+        </p:nvSpPr>
+        <p:spPr>
+          <a:xfrm>
+            <a:off x="2468880" y="2971800"/>
+            <a:ext cx="3566160" cy="1828800"/>
+          </a:xfrm>
+          <a:prstGeom prst="rect">
+            <a:avLst/>
+          </a:prstGeom>
+          <a:noFill/>
+        </p:spPr>
+        <p:txBody>
+          <a:bodyPr wrap="square" lIns="0" rIns="0" tIns="0" bIns="0">
+            <a:spAutoFit/>
+          </a:bodyPr>
+          <a:lstStyle/>
+          <a:p>
+            <a:pPr algn="l">
+              <a:lnSpc>
+                <a:spcPct val="130000"/>
+              </a:lnSpc>
+              <a:spcAft>
+                <a:spcPts val="300"/>
+              </a:spcAft>
+            </a:pPr>
+            <a:r>
+              <a:rPr sz="2200" b="1">
+                <a:solidFill>
+                  <a:srgbClr val="ED7623"/>
+                </a:solidFill>
+                <a:latin typeface="Helvetica Neue"/>
+              </a:rPr>
+              <a:t>Con tu foto</a:t>
+            </a:r>
+          </a:p>
+          <a:p>
+            <a:pPr algn="l">
+              <a:lnSpc>
+                <a:spcPct val="130000"/>
+              </a:lnSpc>
+              <a:spcAft>
+                <a:spcPts val="300"/>
+              </a:spcAft>
+            </a:pPr>
+          </a:p>
+          <a:p>
+            <a:pPr algn="l">
+              <a:lnSpc>
+                <a:spcPct val="130000"/>
+              </a:lnSpc>
+              <a:spcAft>
+                <a:spcPts val="300"/>
+              </a:spcAft>
+            </a:pPr>
+            <a:r>
+              <a:rPr sz="1500" b="0">
+                <a:solidFill>
+                  <a:srgbClr val="6E6E6E"/>
+                </a:solidFill>
+                <a:latin typeface="Helvetica Neue"/>
+              </a:rPr>
+              <a:t>Gemini toma tu cara como referencia y te devuelve el personaje con el vestuario que pidas.</a:t>
+            </a:r>
+          </a:p>
+        </p:txBody>
+      </p:sp>
+      <p:sp>
+        <p:nvSpPr>
+          <p:cNvPr id="8" name="Rounded Rectangle 7"/>
+          <p:cNvSpPr/>
+          <p:nvPr/>
+        </p:nvSpPr>
+        <p:spPr>
+          <a:xfrm>
+            <a:off x="6675120" y="2697480"/>
+            <a:ext cx="4206240" cy="2240280"/>
+          </a:xfrm>
+          <a:prstGeom prst="roundRect">
+            <a:avLst>
+              <a:gd name="adj" fmla="val 5000"/>
+            </a:avLst>
+          </a:prstGeom>
+          <a:solidFill>
+            <a:srgbClr val="F5F3EF"/>
+          </a:solidFill>
+          <a:ln w="11430">
+            <a:solidFill>
+              <a:srgbClr val="E3E0DA"/>
+            </a:solidFill>
+          </a:ln>
+          <a:effectLst/>
+        </p:spPr>
+        <p:style>
+          <a:lnRef idx="1">
+            <a:schemeClr val="accent1"/>
+          </a:lnRef>
+          <a:fillRef idx="3">
+            <a:schemeClr val="accent1"/>
+          </a:fillRef>
+          <a:effectRef idx="2">
+            <a:schemeClr val="accent1"/>
+          </a:effectRef>
+          <a:fontRef idx="minor">
+            <a:schemeClr val="lt1"/>
+          </a:fontRef>
+        </p:style>
+        <p:txBody>
+          <a:bodyPr rtlCol="0" anchor="ctr"/>
+          <a:lstStyle/>
+          <a:p>
+            <a:pPr algn="ctr"/>
+          </a:p>
+        </p:txBody>
+      </p:sp>
+      <p:sp>
+        <p:nvSpPr>
+          <p:cNvPr id="9" name="TextBox 8"/>
+          <p:cNvSpPr txBox="1"/>
+          <p:nvPr/>
+        </p:nvSpPr>
+        <p:spPr>
+          <a:xfrm>
+            <a:off x="7040880" y="2971800"/>
+            <a:ext cx="3566160" cy="1828800"/>
+          </a:xfrm>
+          <a:prstGeom prst="rect">
+            <a:avLst/>
+          </a:prstGeom>
+          <a:noFill/>
+        </p:spPr>
+        <p:txBody>
+          <a:bodyPr wrap="square" lIns="0" rIns="0" tIns="0" bIns="0">
+            <a:spAutoFit/>
+          </a:bodyPr>
+          <a:lstStyle/>
+          <a:p>
+            <a:pPr algn="l">
+              <a:lnSpc>
+                <a:spcPct val="130000"/>
+              </a:lnSpc>
+              <a:spcAft>
+                <a:spcPts val="300"/>
+              </a:spcAft>
+            </a:pPr>
+            <a:r>
+              <a:rPr sz="2200" b="1">
+                <a:solidFill>
+                  <a:srgbClr val="35789C"/>
+                </a:solidFill>
+                <a:latin typeface="Helvetica Neue"/>
+              </a:rPr>
+              <a:t>Sin tu foto</a:t>
+            </a:r>
+          </a:p>
+          <a:p>
+            <a:pPr algn="l">
+              <a:lnSpc>
+                <a:spcPct val="130000"/>
+              </a:lnSpc>
+              <a:spcAft>
+                <a:spcPts val="300"/>
+              </a:spcAft>
+            </a:pPr>
+          </a:p>
+          <a:p>
+            <a:pPr algn="l">
+              <a:lnSpc>
+                <a:spcPct val="130000"/>
+              </a:lnSpc>
+              <a:spcAft>
+                <a:spcPts val="300"/>
+              </a:spcAft>
+            </a:pPr>
+            <a:r>
+              <a:rPr sz="1500" b="0">
+                <a:solidFill>
+                  <a:srgbClr val="6E6E6E"/>
+                </a:solidFill>
+                <a:latin typeface="Helvetica Neue"/>
+              </a:rPr>
+              <a:t>Describes un personaje inventado y listo. Nadie está obligado a poner su cara.</a:t>
+            </a:r>
+          </a:p>
+        </p:txBody>
+      </p:sp>
+      <p:sp>
+        <p:nvSpPr>
+          <p:cNvPr id="10" name="Rounded Rectangle 9"/>
+          <p:cNvSpPr/>
+          <p:nvPr/>
+        </p:nvSpPr>
+        <p:spPr>
+          <a:xfrm>
+            <a:off x="2103120" y="5166360"/>
+            <a:ext cx="8778240" cy="914400"/>
+          </a:xfrm>
+          <a:prstGeom prst="roundRect">
+            <a:avLst>
+              <a:gd name="adj" fmla="val 5000"/>
+            </a:avLst>
+          </a:prstGeom>
+          <a:solidFill>
+            <a:srgbClr val="FDF0E6"/>
           </a:solidFill>
           <a:ln>
             <a:noFill/>
@@ -14721,14 +15138,14 @@
       </p:sp>
       <p:sp>
         <p:nvSpPr>
-          <p:cNvPr id="7" name="TextBox 6"/>
+          <p:cNvPr id="11" name="TextBox 10"/>
           <p:cNvSpPr txBox="1"/>
           <p:nvPr/>
         </p:nvSpPr>
         <p:spPr>
           <a:xfrm>
-            <a:off x="2468880" y="2971800"/>
-            <a:ext cx="3566160" cy="1828800"/>
+            <a:off x="2560320" y="5413248"/>
+            <a:ext cx="8046720" cy="548640"/>
           </a:xfrm>
           <a:prstGeom prst="rect">
             <a:avLst/>
@@ -14742,240 +15159,6 @@
           <a:lstStyle/>
           <a:p>
             <a:pPr algn="l">
-              <a:lnSpc>
-                <a:spcPct val="130000"/>
-              </a:lnSpc>
-              <a:spcAft>
-                <a:spcPts val="300"/>
-              </a:spcAft>
-            </a:pPr>
-            <a:r>
-              <a:rPr sz="2200" b="1">
-                <a:solidFill>
-                  <a:srgbClr val="FF5C7A"/>
-                </a:solidFill>
-                <a:latin typeface="Helvetica Neue"/>
-              </a:rPr>
-              <a:t>Con tu foto</a:t>
-            </a:r>
-          </a:p>
-          <a:p>
-            <a:pPr algn="l">
-              <a:lnSpc>
-                <a:spcPct val="130000"/>
-              </a:lnSpc>
-              <a:spcAft>
-                <a:spcPts val="300"/>
-              </a:spcAft>
-            </a:pPr>
-          </a:p>
-          <a:p>
-            <a:pPr algn="l">
-              <a:lnSpc>
-                <a:spcPct val="130000"/>
-              </a:lnSpc>
-              <a:spcAft>
-                <a:spcPts val="300"/>
-              </a:spcAft>
-            </a:pPr>
-            <a:r>
-              <a:rPr sz="1500" b="0">
-                <a:solidFill>
-                  <a:srgbClr val="F2EFEA"/>
-                </a:solidFill>
-                <a:latin typeface="Helvetica Neue"/>
-              </a:rPr>
-              <a:t>Gemini toma tu cara como referencia y te devuelve el personaje con el vestuario que pidas.</a:t>
-            </a:r>
-          </a:p>
-        </p:txBody>
-      </p:sp>
-      <p:sp>
-        <p:nvSpPr>
-          <p:cNvPr id="8" name="Rounded Rectangle 7"/>
-          <p:cNvSpPr/>
-          <p:nvPr/>
-        </p:nvSpPr>
-        <p:spPr>
-          <a:xfrm>
-            <a:off x="6675120" y="2697480"/>
-            <a:ext cx="4206240" cy="2240280"/>
-          </a:xfrm>
-          <a:prstGeom prst="roundRect">
-            <a:avLst>
-              <a:gd name="adj" fmla="val 6000"/>
-            </a:avLst>
-          </a:prstGeom>
-          <a:solidFill>
-            <a:srgbClr val="1A2027"/>
-          </a:solidFill>
-          <a:ln>
-            <a:noFill/>
-          </a:ln>
-          <a:effectLst/>
-        </p:spPr>
-        <p:style>
-          <a:lnRef idx="1">
-            <a:schemeClr val="accent1"/>
-          </a:lnRef>
-          <a:fillRef idx="3">
-            <a:schemeClr val="accent1"/>
-          </a:fillRef>
-          <a:effectRef idx="2">
-            <a:schemeClr val="accent1"/>
-          </a:effectRef>
-          <a:fontRef idx="minor">
-            <a:schemeClr val="lt1"/>
-          </a:fontRef>
-        </p:style>
-        <p:txBody>
-          <a:bodyPr rtlCol="0" anchor="ctr"/>
-          <a:lstStyle/>
-          <a:p>
-            <a:pPr algn="ctr"/>
-          </a:p>
-        </p:txBody>
-      </p:sp>
-      <p:sp>
-        <p:nvSpPr>
-          <p:cNvPr id="9" name="TextBox 8"/>
-          <p:cNvSpPr txBox="1"/>
-          <p:nvPr/>
-        </p:nvSpPr>
-        <p:spPr>
-          <a:xfrm>
-            <a:off x="7040880" y="2971800"/>
-            <a:ext cx="3566160" cy="1828800"/>
-          </a:xfrm>
-          <a:prstGeom prst="rect">
-            <a:avLst/>
-          </a:prstGeom>
-          <a:noFill/>
-        </p:spPr>
-        <p:txBody>
-          <a:bodyPr wrap="square" lIns="0" rIns="0" tIns="0" bIns="0">
-            <a:spAutoFit/>
-          </a:bodyPr>
-          <a:lstStyle/>
-          <a:p>
-            <a:pPr algn="l">
-              <a:lnSpc>
-                <a:spcPct val="130000"/>
-              </a:lnSpc>
-              <a:spcAft>
-                <a:spcPts val="300"/>
-              </a:spcAft>
-            </a:pPr>
-            <a:r>
-              <a:rPr sz="2200" b="1">
-                <a:solidFill>
-                  <a:srgbClr val="45E0C8"/>
-                </a:solidFill>
-                <a:latin typeface="Helvetica Neue"/>
-              </a:rPr>
-              <a:t>Sin tu foto</a:t>
-            </a:r>
-          </a:p>
-          <a:p>
-            <a:pPr algn="l">
-              <a:lnSpc>
-                <a:spcPct val="130000"/>
-              </a:lnSpc>
-              <a:spcAft>
-                <a:spcPts val="300"/>
-              </a:spcAft>
-            </a:pPr>
-          </a:p>
-          <a:p>
-            <a:pPr algn="l">
-              <a:lnSpc>
-                <a:spcPct val="130000"/>
-              </a:lnSpc>
-              <a:spcAft>
-                <a:spcPts val="300"/>
-              </a:spcAft>
-            </a:pPr>
-            <a:r>
-              <a:rPr sz="1500" b="0">
-                <a:solidFill>
-                  <a:srgbClr val="F2EFEA"/>
-                </a:solidFill>
-                <a:latin typeface="Helvetica Neue"/>
-              </a:rPr>
-              <a:t>Describes un personaje inventado y listo. Nadie está obligado a poner su cara.</a:t>
-            </a:r>
-          </a:p>
-        </p:txBody>
-      </p:sp>
-      <p:sp>
-        <p:nvSpPr>
-          <p:cNvPr id="10" name="Rounded Rectangle 9"/>
-          <p:cNvSpPr/>
-          <p:nvPr/>
-        </p:nvSpPr>
-        <p:spPr>
-          <a:xfrm>
-            <a:off x="2103120" y="5166360"/>
-            <a:ext cx="8778240" cy="914400"/>
-          </a:xfrm>
-          <a:prstGeom prst="roundRect">
-            <a:avLst>
-              <a:gd name="adj" fmla="val 6000"/>
-            </a:avLst>
-          </a:prstGeom>
-          <a:solidFill>
-            <a:srgbClr val="2A1A20"/>
-          </a:solidFill>
-          <a:ln>
-            <a:noFill/>
-          </a:ln>
-          <a:effectLst/>
-        </p:spPr>
-        <p:style>
-          <a:lnRef idx="1">
-            <a:schemeClr val="accent1"/>
-          </a:lnRef>
-          <a:fillRef idx="3">
-            <a:schemeClr val="accent1"/>
-          </a:fillRef>
-          <a:effectRef idx="2">
-            <a:schemeClr val="accent1"/>
-          </a:effectRef>
-          <a:fontRef idx="minor">
-            <a:schemeClr val="lt1"/>
-          </a:fontRef>
-        </p:style>
-        <p:txBody>
-          <a:bodyPr rtlCol="0" anchor="ctr"/>
-          <a:lstStyle/>
-          <a:p>
-            <a:pPr algn="ctr"/>
-          </a:p>
-        </p:txBody>
-      </p:sp>
-      <p:sp>
-        <p:nvSpPr>
-          <p:cNvPr id="11" name="TextBox 10"/>
-          <p:cNvSpPr txBox="1"/>
-          <p:nvPr/>
-        </p:nvSpPr>
-        <p:spPr>
-          <a:xfrm>
-            <a:off x="2560320" y="5413248"/>
-            <a:ext cx="8046720" cy="548640"/>
-          </a:xfrm>
-          <a:prstGeom prst="rect">
-            <a:avLst/>
-          </a:prstGeom>
-          <a:noFill/>
-        </p:spPr>
-        <p:txBody>
-          <a:bodyPr wrap="square" lIns="0" rIns="0" tIns="0" bIns="0">
-            <a:spAutoFit/>
-          </a:bodyPr>
-          <a:lstStyle/>
-          <a:p>
-            <a:pPr algn="l">
               <a:spcAft>
                 <a:spcPts val="600"/>
               </a:spcAft>
@@ -14983,7 +15166,7 @@
             <a:r>
               <a:rPr sz="1700" b="1">
                 <a:solidFill>
-                  <a:srgbClr val="FF5C7A"/>
+                  <a:srgbClr val="ED7623"/>
                 </a:solidFill>
                 <a:latin typeface="Helvetica Neue"/>
               </a:rPr>

--- a/_static/sesion06/S06_audio_imagen_video.pptx
+++ b/_static/sesion06/S06_audio_imagen_video.pptx
@@ -20,6 +20,7 @@
     <p:sldId id="268" r:id="rId20"/>
     <p:sldId id="269" r:id="rId21"/>
     <p:sldId id="270" r:id="rId22"/>
+    <p:sldId id="271" r:id="rId23"/>
   </p:sldIdLst>
   <p:sldSz cx="12191695" cy="6858000" type="screen4x3"/>
   <p:notesSz cx="6858000" cy="9144000"/>
@@ -516,13 +517,19 @@
           <a:lstStyle/>
           <a:p>
             <a:r>
-              <a:t>Bienvenida corta. Hoy la clase es un taller de producción: cada persona sale con un video de 60 a 90 segundos en el que su propio avatar explica algo de su carrera.</a:t>
+              <a:t>Bienvenida corta. Hoy es un taller de producción: cada persona sale con un video de un minuto en el que ella misma, con su cara y su voz, explica algo de su carrera.</a:t>
             </a:r>
           </a:p>
           <a:p/>
           <a:p>
             <a:r>
-              <a:t>Mostrar primero el ejemplo terminado (S06_ejemplo_que_es_la_IA.mp4) y después desarmarlo paso por paso. Que vean el resultado antes de entender el procedimiento.</a:t>
+              <a:t>Mostrar primero el ejemplo terminado y después desarmarlo. Que vean el resultado antes del procedimiento.</a:t>
+            </a:r>
+          </a:p>
+          <a:p/>
+          <a:p>
+            <a:r>
+              <a:t>AVISO QUE HAY QUE DAR DE ENTRADA: esto necesita cuenta de Gmail personal. La institucional de la Universidad no tiene Crear video; lo comprobé en UCaldas y en la UAM. Quien solo tenga la institucional va por la Ruta B, que está en la diapositiva 13 y funciona igual de bien.</a:t>
             </a:r>
           </a:p>
         </p:txBody>
@@ -592,46 +599,42 @@
           <a:lstStyle/>
           <a:p>
             <a:r>
-              <a:t>LA VOZ — tres rutas, las tres gratis:</a:t>
+              <a:t>UNIR LOS CLIPS.</a:t>
             </a:r>
           </a:p>
           <a:p/>
           <a:p>
             <a:r>
-              <a:t>RUTA A · Google AI Studio (aistudio.google.com), modo Generate speech.</a:t>
-            </a:r>
-          </a:p>
-          <a:p>
-            <a:r>
-              <a:t>Pegas el guion, eliges voz y escribes la indicación de estilo en el campo Style:</a:t>
-            </a:r>
-          </a:p>
-          <a:p>
-            <a:r>
-              <a:t>«Español latinoamericano, tono cercano y pausado, como quien le explica algo a un amigo. No leas como noticiero.»</a:t>
-            </a:r>
-          </a:p>
-          <a:p>
-            <a:r>
-              <a:t>COMPROBADO: las voces filtradas como "Spanish" piden clave de pago. Las voces genéricas (yo usé Gero, masculina, clara y amable) leen español perfectamente. Filtra por Gender, no por Language.</a:t>
+              <a:t>COMPROBADO: Gemini NO puede. Ejecuta código, pero su entorno no tiene herramientas de video, así que responde con un comando de terminal para que lo corras tú. Inútil aquí.</a:t>
             </a:r>
           </a:p>
           <a:p/>
           <a:p>
             <a:r>
-              <a:t>RUTA B · ElevenLabs. Plan gratuito de unos 10 minutos de audio al mes. Sin derechos comerciales: para una tarea está bien.</a:t>
+              <a:t>ChatGPT SÍ. Subes los clips y le dices:</a:t>
+            </a:r>
+          </a:p>
+          <a:p>
+            <a:r>
+              <a:t>«Une estos clips en un solo video, en este orden: clip1, clip2, clip3... Conserva el audio de cada uno. Déjame el archivo mp4 para descargar.»</a:t>
             </a:r>
           </a:p>
           <a:p/>
           <a:p>
             <a:r>
-              <a:t>RUTA C · Tu propia voz, grabada con el celular. Gratis, es tuya, y a veces suena mejor. Si quieres que el personaje suene como tú, esta es la ruta directa: clonar la voz cuesta plata, grabarla no.</a:t>
+              <a:t>Tarda unos quince segundos. Devuelve el MP4 completo, con el audio intacto y en 1280x720.</a:t>
             </a:r>
           </a:p>
           <a:p/>
           <a:p>
             <a:r>
-              <a:t>PRUEBA QUE SIEMPRE FUNCIONA: generar la misma frase con dos voces distintas y preguntarle al grupo a cuál le creen más.</a:t>
+              <a:t>Un detalle honesto: recodifica el video, así que pierde algo de calidad. Para la clase no se nota.</a:t>
+            </a:r>
+          </a:p>
+          <a:p/>
+          <a:p>
+            <a:r>
+              <a:t>ESTE ES UN BUEN MOMENTO PARA UNA PREGUNTA: ¿por qué una IA puede hacer esto y la otra no? Respuesta: no es "inteligencia", son las herramientas que le conectaron. Es la misma idea de la sesión del asistente.</a:t>
             </a:r>
           </a:p>
         </p:txBody>
@@ -701,45 +704,37 @@
           <a:lstStyle/>
           <a:p>
             <a:r>
-              <a:t>ESTE ES EL PASO FRÁGIL. Decirlo con todas las letras.</a:t>
+              <a:t>LA VOZ. Paso opcional: los clips ya vienen con voz.</a:t>
             </a:r>
           </a:p>
           <a:p/>
           <a:p>
             <a:r>
-              <a:t>Las herramientas de lip sync tienen cupos gratuitos muy pequeños y cambian cada mes. Al preparar esta clase, los órdenes de magnitud eran:</a:t>
-            </a:r>
-          </a:p>
-          <a:p>
-            <a:r>
-              <a:t>· HeyGen: unos pocos videos al mes, con marca de agua.</a:t>
-            </a:r>
-          </a:p>
-          <a:p>
-            <a:r>
-              <a:t>· Hedra: gratis pero con audio corto, de unos 20 segundos.</a:t>
-            </a:r>
-          </a:p>
-          <a:p>
-            <a:r>
-              <a:t>· Vidnoz: más cupo diario, siempre con marca de agua.</a:t>
-            </a:r>
-          </a:p>
-          <a:p>
-            <a:r>
-              <a:t>· Google Vids: avatares gratis para cuentas personales, pero el despliegue empezó por Estados Unidos.</a:t>
+              <a:t>Cuándo vale la pena hacerlo aparte: cuando la voz que eligió Veo no les gusta, o cuando quieren que suene igual en los seis clips (Veo puede variarla un poco entre uno y otro).</a:t>
             </a:r>
           </a:p>
           <a:p/>
           <a:p>
             <a:r>
-              <a:t>ESTRATEGIA: probar una. Si no funciona, la siguiente. Si ninguna funciona, el video se arma igual con el personaje quieto, un zoom lento y buenos subtítulos.</a:t>
+              <a:t>ELEVENLABS, capa gratuita: unos 10.000 créditos al mes, que son unos 10 minutos de audio. De sobra para un minuto. Tiene voces en español sin pedir tarjeta. No incluye licencia comercial: hay que mencionar la herramienta, cosa que ya hacen igual por la regla 2. Tampoco incluye clonación de voz: eso empieza en el plan de pago.</a:t>
             </a:r>
           </a:p>
           <a:p/>
           <a:p>
             <a:r>
-              <a:t>No dejar que nadie se quede veinte minutos peleando con un cupo.</a:t>
+              <a:t>GOOGLE AI STUDIO: ojo, las voces filtradas como "Spanish" piden clave de pago. Filtrar por Gender y usar una genérica: leen español perfectamente.</a:t>
+            </a:r>
+          </a:p>
+          <a:p/>
+          <a:p>
+            <a:r>
+              <a:t>LA RUTA MÁS DIRECTA SI QUIEREN QUE SUENE COMO ELLOS: grabarse. Clonar la voz cuesta plata; grabarla no.</a:t>
+            </a:r>
+          </a:p>
+          <a:p/>
+          <a:p>
+            <a:r>
+              <a:t>INDICACIÓN DE ESTILO: «Español latinoamericano, tono cercano y pausado, como quien le explica algo a un amigo. No leas como noticiero.»</a:t>
             </a:r>
           </a:p>
         </p:txBody>
@@ -809,48 +804,29 @@
           <a:lstStyle/>
           <a:p>
             <a:r>
-              <a:t>MONTAJE EN CAPCUT — el orden que funciona:</a:t>
-            </a:r>
-          </a:p>
-          <a:p>
-            <a:r>
-              <a:t>1. Importa el ambiente como fondo.</a:t>
-            </a:r>
-          </a:p>
-          <a:p>
-            <a:r>
-              <a:t>2. Encima, tu avatar. Si tiene fondo gris liso, usar «quitar fondo».</a:t>
-            </a:r>
-          </a:p>
-          <a:p>
-            <a:r>
-              <a:t>3. Debajo de todo, el audio de la voz.</a:t>
-            </a:r>
-          </a:p>
-          <a:p>
-            <a:r>
-              <a:t>4. Corta los silencios largos. Es lo que más mejora un video.</a:t>
-            </a:r>
-          </a:p>
-          <a:p>
-            <a:r>
-              <a:t>5. Subtítulos automáticos: CapCut los genera del audio. REVISARLOS: siempre hay dos o tres palabras mal.</a:t>
-            </a:r>
-          </a:p>
-          <a:p>
-            <a:r>
-              <a:t>6. Música de fondo al 10 o 15% del volumen. Si compite con la voz, está muy alta.</a:t>
-            </a:r>
-          </a:p>
-          <a:p>
-            <a:r>
-              <a:t>7. Un zoom lento sobre la imagen hace que una imagen quieta se vea viva.</a:t>
+              <a:t>LOS REMATES, en CapCut sobre el video ya unido. Opcional, pero sube mucho el resultado.</a:t>
             </a:r>
           </a:p>
           <a:p/>
           <a:p>
             <a:r>
-              <a:t>TRUCO: la mayoría pone la música muy alta y los subtítulos sin revisar. Esas dos cosas separan un video amateur de uno decente.</a:t>
+              <a:t>1. Subtítulos automáticos. CapCut los saca del audio. REVISARLOS: siempre hay dos o tres palabras mal, y los nombres propios casi nunca salen bien.</a:t>
+            </a:r>
+          </a:p>
+          <a:p>
+            <a:r>
+              <a:t>2. Música de fondo al 10 o 15 % del volumen. Si compite con la voz, está muy alta.</a:t>
+            </a:r>
+          </a:p>
+          <a:p>
+            <a:r>
+              <a:t>3. Cortar los silencios entre clip y clip: Veo suele dejar medio segundo muerto al final de cada uno.</a:t>
+            </a:r>
+          </a:p>
+          <a:p/>
+          <a:p>
+            <a:r>
+              <a:t>TRUCO PARA DECIR EN VOZ ALTA: música muy alta y subtítulos sin revisar son las dos marcas de un video amateur. Arreglar esas dos cosas sube el resultado más que cualquier efecto.</a:t>
             </a:r>
           </a:p>
         </p:txBody>
@@ -920,79 +896,45 @@
           <a:lstStyle/>
           <a:p>
             <a:r>
-              <a:t>EL EJEMPLO DEL DOCENTE: S06_ejemplo_que_es_la_IA.mp4, 33 segundos.</a:t>
-            </a:r>
-          </a:p>
-          <a:p>
-            <a:r>
-              <a:t>Desarmarlo en vivo, mostrando cada pieza por separado.</a:t>
+              <a:t>LA RUTA B. Esta diapositiva no es un adorno: es el plan para quien solo tenga la cuenta institucional o se quede sin cupo. En un salón de treinta, va a ser bastante gente.</a:t>
             </a:r>
           </a:p>
           <a:p/>
           <a:p>
             <a:r>
-              <a:t>Tema: qué es la inteligencia artificial y cómo se entrena, para gente de áreas no ingenieriles.</a:t>
+              <a:t>Importante decirlo sin dramatismo: el video sale bien igual. Lo que pesa es lo bien contado, no el movimiento.</a:t>
             </a:r>
           </a:p>
           <a:p/>
           <a:p>
             <a:r>
-              <a:t>PROMPT DEL GUION:</a:t>
-            </a:r>
-          </a:p>
-          <a:p>
-            <a:r>
-              <a:t>«Eres guionista de videos educativos. Escribe un guion de 80 palabras para un video de 60 segundos sobre qué es la inteligencia artificial y cómo se entrena. Para: personas que no son de ingeniería y nunca han visto cómo funciona por dentro. Explícalo con una comparación cotidiana, sin usar las palabras algoritmo, modelo ni red neuronal. Frases cortas, para decir en voz alta. Cierra con una pregunta.»</a:t>
+              <a:t>Los cuatro pasos:</a:t>
+            </a:r>
+          </a:p>
+          <a:p>
+            <a:r>
+              <a:t>1. AMBIENTE: «Genera una imagen horizontal 16:9 de [el lugar]. Fotografía realista, luz natural suave. Sin personas. Sin texto. Deja espacio libre en el lado derecho.»</a:t>
+            </a:r>
+          </a:p>
+          <a:p>
+            <a:r>
+              <a:t>2. PERSONAJE: «Con esta foto mía como referencia, genera un retrato de medio cuerpo del mismo personaje. Fondo gris liso y uniforme, sin sombras ni degradados. Formato vertical.» El fondo liso es lo que permite recortarlo.</a:t>
+            </a:r>
+          </a:p>
+          <a:p>
+            <a:r>
+              <a:t>3. VOZ: ElevenLabs con el guion completo.</a:t>
+            </a:r>
+          </a:p>
+          <a:p>
+            <a:r>
+              <a:t>4. MONTAJE en CapCut: ambiente de fondo, avatar encima con «quitar fondo», la voz debajo, subtítulos, y un zoom lento sobre la imagen para que algo quieto se vea vivo.</a:t>
             </a:r>
           </a:p>
           <a:p/>
           <a:p>
             <a:r>
-              <a:t>GUION QUE SALIÓ (81 palabras, 30 segundos de locución):</a:t>
-            </a:r>
-          </a:p>
-          <a:p>
-            <a:r>
-              <a:t>«¿Alguna vez le enseñaste algo a un niño mostrándole ejemplos? Así se entrena la inteligencia artificial. Nadie le explica las reglas. Le muestran miles de fotos de perros, hasta que reconoce uno que nunca había visto. Nadie le dijo: un perro tiene cuatro patas. Lo fue deduciendo de los ejemplos. Por eso aprende lo que le mostramos. Y también nuestros errores. Si solo le mostramos un tipo de perro, se equivoca con todos los demás. Entonces, ¿qué ejemplos le estamos mostrando?»</a:t>
-            </a:r>
-          </a:p>
-          <a:p/>
-          <a:p>
-            <a:r>
-              <a:t>OJO: pedí 60 segundos y me dio 80 palabras, que son 30. Ese es el punto de la cuenta de la diapositiva 6.</a:t>
-            </a:r>
-          </a:p>
-          <a:p/>
-          <a:p>
-            <a:r>
-              <a:t>PROMPT DEL AMBIENTE:</a:t>
-            </a:r>
-          </a:p>
-          <a:p>
-            <a:r>
-              <a:t>«Genera una imagen horizontal, formato 16:9, fotografía realista: un salón de clase universitario vacío con un tablero al fondo, luz natural suave que entra por ventanas laterales. Sin personas en la escena. Sin texto ni letreros. Deja espacio libre en el lado derecho de la imagen.»</a:t>
-            </a:r>
-          </a:p>
-          <a:p/>
-          <a:p>
-            <a:r>
-              <a:t>PROMPT DEL AVATAR (adjuntando mi foto):</a:t>
-            </a:r>
-          </a:p>
-          <a:p>
-            <a:r>
-              <a:t>«Con esta foto mía como referencia, genera un retrato de medio cuerpo del mismo personaje: ingeniero de sistemas, camisa oscura, expresión amable, mirando al frente. Fondo gris liso y uniforme, sin sombras ni degradados. Ilustración digital limpia. Formato vertical. Cabeza y hombros completos, sin cortar la coronilla.»</a:t>
-            </a:r>
-          </a:p>
-          <a:p/>
-          <a:p>
-            <a:r>
-              <a:t>INDICACIÓN DE VOZ (campo Style en AI Studio, voz Gero):</a:t>
-            </a:r>
-          </a:p>
-          <a:p>
-            <a:r>
-              <a:t>«Español latinoamericano, tono cercano y pausado, como quien le explica algo a un amigo. No leas como noticiero.»</a:t>
+              <a:t>Todo esto funciona en cualquier cuenta y sin cupos.</a:t>
             </a:r>
           </a:p>
         </p:txBody>
@@ -1062,60 +1004,66 @@
           <a:lstStyle/>
           <a:p>
             <a:r>
-              <a:t>EL ENCARGO. Leerlo y soltarlos a trabajar.</a:t>
+              <a:t>EL EJEMPLO. Desarmarlo en vivo mostrando las piezas.</a:t>
             </a:r>
           </a:p>
           <a:p/>
           <a:p>
             <a:r>
-              <a:t>Dos opciones de tema, para que nadie se quede en blanco:</a:t>
-            </a:r>
-          </a:p>
-          <a:p>
-            <a:r>
-              <a:t>· Qué hace alguien de tu carrera un día normal de trabajo.</a:t>
-            </a:r>
-          </a:p>
-          <a:p>
-            <a:r>
-              <a:t>· Un concepto que a ti te costó entender, explicado como te hubiera gustado que te lo explicaran.</a:t>
+              <a:t>Tema: qué es la inteligencia artificial y cómo se entrena, para gente de áreas no ingenieriles.</a:t>
             </a:r>
           </a:p>
           <a:p/>
           <a:p>
             <a:r>
-              <a:t>La segunda suele dar mejores videos: hay algo personal adentro.</a:t>
+              <a:t>EL GUION COMPLETO (150 palabras partidas en seis frases). Las dos primeras, que son las del ejemplo:</a:t>
+            </a:r>
+          </a:p>
+          <a:p>
+            <a:r>
+              <a:t>1. «¿Alguna vez le enseñaste algo a un niño mostrándole ejemplos? Así se entrena la inteligencia artificial.»</a:t>
+            </a:r>
+          </a:p>
+          <a:p>
+            <a:r>
+              <a:t>2. «Nadie le explica las reglas. Le muestran miles de fotos de perros, hasta que reconoce uno que nunca había visto.»</a:t>
+            </a:r>
+          </a:p>
+          <a:p>
+            <a:r>
+              <a:t>3. «Nadie le dijo que un perro tiene cuatro patas. Lo fue deduciendo de los ejemplos que le pusieron enfrente.»</a:t>
+            </a:r>
+          </a:p>
+          <a:p>
+            <a:r>
+              <a:t>4. «Por eso aprende lo que le mostramos. Y también aprende nuestros errores, sin que nadie se lo proponga.»</a:t>
+            </a:r>
+          </a:p>
+          <a:p>
+            <a:r>
+              <a:t>5. «Si solo le mostramos un tipo de perro, se equivoca con todos los demás. No por maldad: por falta de ejemplos.»</a:t>
+            </a:r>
+          </a:p>
+          <a:p>
+            <a:r>
+              <a:t>6. «Entonces la pregunta no es qué puede hacer la inteligencia artificial. Es qué ejemplos le estamos mostrando nosotros.»</a:t>
             </a:r>
           </a:p>
           <a:p/>
           <a:p>
             <a:r>
-              <a:t>Mientras circulas, lo que más vas a tener que decir:</a:t>
-            </a:r>
-          </a:p>
-          <a:p>
-            <a:r>
-              <a:t>· «Devuélvete al guion» — a quien empezó por la imagen.</a:t>
-            </a:r>
-          </a:p>
-          <a:p>
-            <a:r>
-              <a:t>· «Léelo en voz alta» — a quien escribió un guion que nadie puede decir.</a:t>
-            </a:r>
-          </a:p>
-          <a:p>
-            <a:r>
-              <a:t>· «Cuenta las palabras» — a quien tiene 60 y cree que le alcanzan para un minuto.</a:t>
-            </a:r>
-          </a:p>
-          <a:p>
-            <a:r>
-              <a:t>· «Bájale a la música» — a todos.</a:t>
-            </a:r>
-          </a:p>
-          <a:p>
-            <a:r>
-              <a:t>· «Revisa los subtítulos» — a todos.</a:t>
+              <a:t>PROMPT DE CADA CLIP (cambiando solo la frase):</a:t>
+            </a:r>
+          </a:p>
+          <a:p>
+            <a:r>
+              <a:t>«La persona de la foto, en plano medio dentro de un salón de clase universitario vacío con luz natural suave. Mira a la cámara y dice en español latinoamericano, tono cercano y pausado: «[la frase]». Cámara fija, sin texto en pantalla.»</a:t>
+            </a:r>
+          </a:p>
+          <a:p/>
+          <a:p>
+            <a:r>
+              <a:t>MOSTRAR QUE EL PERSONAJE SE MANTIENE: misma cara, misma camisa, mismo salón en los dos clips. Eso lo logra adjuntar la misma foto, nada más.</a:t>
             </a:r>
           </a:p>
         </p:txBody>
@@ -1185,6 +1133,135 @@
           <a:lstStyle/>
           <a:p>
             <a:r>
+              <a:t>EL ENCARGO. Leerlo y soltarlos a trabajar.</a:t>
+            </a:r>
+          </a:p>
+          <a:p/>
+          <a:p>
+            <a:r>
+              <a:t>Dos opciones de tema, para que nadie se quede en blanco:</a:t>
+            </a:r>
+          </a:p>
+          <a:p>
+            <a:r>
+              <a:t>· Qué hace alguien de tu carrera un día normal de trabajo.</a:t>
+            </a:r>
+          </a:p>
+          <a:p>
+            <a:r>
+              <a:t>· Un concepto que a ti te costó entender, explicado como te hubiera gustado que te lo explicaran.</a:t>
+            </a:r>
+          </a:p>
+          <a:p/>
+          <a:p>
+            <a:r>
+              <a:t>La segunda suele dar mejores videos: hay algo personal adentro.</a:t>
+            </a:r>
+          </a:p>
+          <a:p/>
+          <a:p>
+            <a:r>
+              <a:t>Mientras circulas, lo que más vas a tener que decir:</a:t>
+            </a:r>
+          </a:p>
+          <a:p>
+            <a:r>
+              <a:t>· «Devuélvete al guion» — a quien empezó por los clips.</a:t>
+            </a:r>
+          </a:p>
+          <a:p>
+            <a:r>
+              <a:t>· «Cuenta las palabras» — a quien metió cuarenta en una frase de diez segundos.</a:t>
+            </a:r>
+          </a:p>
+          <a:p>
+            <a:r>
+              <a:t>· «Crear video primero, la foto después» — a quien Gemini le contestó por escrito.</a:t>
+            </a:r>
+          </a:p>
+          <a:p>
+            <a:r>
+              <a:t>· «Es la misma foto en todos» — a quien le salieron seis personas distintas.</a:t>
+            </a:r>
+          </a:p>
+          <a:p>
+            <a:r>
+              <a:t>· «Revisa los subtítulos» — a todos.</a:t>
+            </a:r>
+          </a:p>
+          <a:p/>
+          <a:p>
+            <a:r>
+              <a:t>Y para quien no tenga cupo: Ruta B, sin drama.</a:t>
+            </a:r>
+          </a:p>
+        </p:txBody>
+      </p:sp>
+      <p:sp>
+        <p:nvSpPr>
+          <p:cNvPr id="4" name="Slide Number Placeholder 3"/>
+          <p:cNvSpPr>
+            <a:spLocks noGrp="1"/>
+          </p:cNvSpPr>
+          <p:nvPr>
+            <p:ph type="sldNum" idx="5" sz="quarter"/>
+          </p:nvPr>
+        </p:nvSpPr>
+        <p:spPr/>
+      </p:sp>
+    </p:spTree>
+  </p:cSld>
+  <p:clrMapOvr>
+    <a:masterClrMapping/>
+  </p:clrMapOvr>
+</p:notes>
+</file>
+
+<file path=ppt/notesSlides/notesSlide16.xml><?xml version="1.0" encoding="utf-8"?>
+<p:notes xmlns:a="http://schemas.openxmlformats.org/drawingml/2006/main" xmlns:p="http://schemas.openxmlformats.org/presentationml/2006/main" xmlns:r="http://schemas.openxmlformats.org/officeDocument/2006/relationships">
+  <p:cSld>
+    <p:spTree>
+      <p:nvGrpSpPr>
+        <p:cNvPr id="1" name=""/>
+        <p:cNvGrpSpPr/>
+        <p:nvPr/>
+      </p:nvGrpSpPr>
+      <p:grpSpPr>
+        <a:xfrm>
+          <a:off x="0" y="0"/>
+          <a:ext cx="0" cy="0"/>
+          <a:chOff x="0" y="0"/>
+          <a:chExt cx="0" cy="0"/>
+        </a:xfrm>
+      </p:grpSpPr>
+      <p:sp>
+        <p:nvSpPr>
+          <p:cNvPr id="2" name="Slide Image Placeholder 1"/>
+          <p:cNvSpPr>
+            <a:spLocks noGrp="1"/>
+          </p:cNvSpPr>
+          <p:nvPr>
+            <p:ph type="sldImg" idx="2"/>
+          </p:nvPr>
+        </p:nvSpPr>
+        <p:spPr/>
+      </p:sp>
+      <p:sp>
+        <p:nvSpPr>
+          <p:cNvPr id="3" name="Notes Placeholder 2"/>
+          <p:cNvSpPr>
+            <a:spLocks noGrp="1"/>
+          </p:cNvSpPr>
+          <p:nvPr>
+            <p:ph type="body" idx="3" sz="quarter"/>
+          </p:nvPr>
+        </p:nvSpPr>
+        <p:spPr/>
+        <p:txBody>
+          <a:bodyPr/>
+          <a:lstStyle/>
+          <a:p>
+            <a:r>
               <a:t>Cierre corto.</a:t>
             </a:r>
           </a:p>
@@ -1202,7 +1279,7 @@
           </a:p>
           <a:p>
             <a:r>
-              <a:t>· ¿Qué parte costó más? (casi siempre: el guion, no la tecnología)</a:t>
+              <a:t>· ¿Qué parte costó más? (casi siempre: partir el guion en seis, no la tecnología)</a:t>
             </a:r>
           </a:p>
           <a:p>
@@ -1212,13 +1289,13 @@
           </a:p>
           <a:p>
             <a:r>
-              <a:t>· ¿Dónde usarían esto fuera de la clase?</a:t>
+              <a:t>· Hoy pusiste tu cara a decir algo que tú escribiste. ¿Qué pasaría si alguien pusiera tu cara a decir algo que tú no escribiste?</a:t>
             </a:r>
           </a:p>
           <a:p/>
           <a:p>
             <a:r>
-              <a:t>La respuesta a la última suele ser lo mejor de la sesión.</a:t>
+              <a:t>La última conecta directo con la sesión de ética y deepfakes. Déjala sin responder; se responde la próxima clase.</a:t>
             </a:r>
           </a:p>
         </p:txBody>
@@ -1294,13 +1371,13 @@
           <a:p/>
           <a:p>
             <a:r>
-              <a:t>Reproducir el video de ejemplo completo: S06_ejemplo_que_es_la_IA.mp4, 33 segundos. Ahorra diez minutos de explicación.</a:t>
+              <a:t>Reproducir el ejemplo. Preguntar después: ¿cuántos videos distintos creen que hay aquí? La respuesta —seis clips pegados— es la agenda de la clase.</a:t>
             </a:r>
           </a:p>
           <a:p/>
           <a:p>
             <a:r>
-              <a:t>Pregunta después: ¿cuántas piezas distintas creen que tiene esto adentro? Ir recogiendo: guion, imagen, voz, movimiento, subtítulos. Esa lista es la agenda.</a:t>
+              <a:t>El punto pedagógico: no se hace un video de un minuto. Se hacen seis de diez segundos y se pegan. Eso es lo que lo vuelve alcanzable.</a:t>
             </a:r>
           </a:p>
         </p:txBody>
@@ -1370,19 +1447,19 @@
           <a:lstStyle/>
           <a:p>
             <a:r>
-              <a:t>El orden importa: cada paso alimenta al siguiente.</a:t>
+              <a:t>El camino completo. Cuatro pasos obligatorios y dos opcionales.</a:t>
             </a:r>
           </a:p>
           <a:p/>
           <a:p>
             <a:r>
-              <a:t>El guion primero, siempre. Es el error más común: empezar por la imagen bonita y después no saber qué decir.</a:t>
+              <a:t>Insistir en el orden: el guion primero, siempre. El error más común es empezar por la imagen bonita y después no saber qué decir.</a:t>
             </a:r>
           </a:p>
           <a:p/>
           <a:p>
             <a:r>
-              <a:t>Señalar que el paso 5 (hacerlo hablar) es el único que depende de herramientas con cupo limitado. Si falla, el video funciona igual con el personaje quieto y buenos subtítulos: no es un paso indispensable.</a:t>
+              <a:t>Los pasos 5 y 6 son mejoras, no requisitos. Un video con los cuatro primeros ya está terminado.</a:t>
             </a:r>
           </a:p>
         </p:txBody>
@@ -1452,25 +1529,34 @@
           <a:lstStyle/>
           <a:p>
             <a:r>
-              <a:t>Todas tienen capa gratuita. Dos advertencias que hay que decir en voz alta:</a:t>
+              <a:t>Tres herramientas, nada más. Y una advertencia que hay que dar en voz alta.</a:t>
             </a:r>
           </a:p>
           <a:p/>
           <a:p>
             <a:r>
-              <a:t>1) Los cupos gratis cambian cada mes. Lo que hoy da 10 videos, el otro mes da 3. Por eso la clase no depende de ninguna herramienta en particular.</a:t>
+              <a:t>COMPROBADO al preparar la clase:</a:t>
+            </a:r>
+          </a:p>
+          <a:p>
+            <a:r>
+              <a:t>· La cuenta institucional (UCaldas y UAM) NO tiene Crear video. El menú solo llega hasta Deep Research. Hace falta Gmail personal.</a:t>
+            </a:r>
+          </a:p>
+          <a:p>
+            <a:r>
+              <a:t>· El cupo no lo publica Google. En cuenta Pro son unos 3 videos al día. En gratuita puede ser poco o ninguno ese día.</a:t>
+            </a:r>
+          </a:p>
+          <a:p>
+            <a:r>
+              <a:t>· Gemini NO une videos: ejecuta código pero su entorno no tiene herramientas de video y te devuelve un comando de terminal. ChatGPT sí lo hace, en unos quince segundos.</a:t>
             </a:r>
           </a:p>
           <a:p/>
           <a:p>
             <a:r>
-              <a:t>2) Casi todas las capas gratuitas ponen marca de agua y no dan derechos comerciales. Para una tarea de clase está bien; para el portafolio de un cliente, no.</a:t>
-            </a:r>
-          </a:p>
-          <a:p/>
-          <a:p>
-            <a:r>
-              <a:t>DATO COMPROBADO al preparar la clase: en Google AI Studio las voces marcadas como españolas pedían clave de pago. Las voces genéricas leen español perfectamente y son las que usé en el ejemplo.</a:t>
+              <a:t>Por eso la Ruta B de la diapositiva 13 no es un adorno: es el plan para medio salón.</a:t>
             </a:r>
           </a:p>
         </p:txBody>
@@ -1540,7 +1626,7 @@
           <a:lstStyle/>
           <a:p>
             <a:r>
-              <a:t>Este bloque va antes de producir nada, no al final.</a:t>
+              <a:t>Este bloque va antes de producir nada.</a:t>
             </a:r>
           </a:p>
           <a:p/>
@@ -1561,13 +1647,19 @@
           </a:p>
           <a:p>
             <a:r>
-              <a:t>3. Nada confidencial en las herramientas: ni datos de pacientes, ni de clientes, ni de menores.</a:t>
+              <a:t>3. Nada confidencial en las herramientas.</a:t>
             </a:r>
           </a:p>
           <a:p/>
           <a:p>
             <a:r>
-              <a:t>Conectar con la sesión de ética que viene: hacer un deepfake de alguien sin su consentimiento puede ser delito en Colombia.</a:t>
+              <a:t>Esta sesión lo hace más urgente que antes: ahora adjuntan una foto y sale esa persona hablando. Es exactamente la mecánica de un deepfake. Por eso la regla 1 deja de ser abstracta.</a:t>
+            </a:r>
+          </a:p>
+          <a:p/>
+          <a:p>
+            <a:r>
+              <a:t>Conectar con la sesión de ética: hacerlo con la cara de otro sin su consentimiento puede ser delito en Colombia.</a:t>
             </a:r>
           </a:p>
         </p:txBody>
@@ -1637,7 +1729,7 @@
           <a:lstStyle/>
           <a:p>
             <a:r>
-              <a:t>PROMPT PARA EL GUION — proyéctalo y que lo adapten:</a:t>
+              <a:t>PROMPT PARA EL GUION:</a:t>
             </a:r>
           </a:p>
           <a:p/>
@@ -1669,13 +1761,25 @@
           <a:p/>
           <a:p>
             <a:r>
-              <a:t>LA CUENTA REAL: se habla a unas 150 palabras por minuto. 150 palabras = 1 minuto. 80 palabras = medio minuto. El video de ejemplo tiene 81 palabras y dura 30 segundos de locución: compruébalo con ellos.</a:t>
+              <a:t>Y ENSEGUIDA, EL QUE DE VERDAD IMPORTA HOY:</a:t>
             </a:r>
           </a:p>
           <a:p/>
           <a:p>
             <a:r>
-              <a:t>Después de generarlo: que lo LEAN EN VOZ ALTA y cronometren. Si se traban al leerlo, está mal escrito y hay que pedirle que lo simplifique.</a:t>
+              <a:t>«Parte este guion en 6 frases de unas 25 palabras cada una. Cada frase tiene que poder decirse sola en 10 segundos y entenderse sin la anterior. Numéralas.»</a:t>
+            </a:r>
+          </a:p>
+          <a:p/>
+          <a:p>
+            <a:r>
+              <a:t>LA CUENTA: se habla a unas 150 palabras por minuto. 150 palabras = 1 minuto = 6 clips de 10 segundos = 25 palabras por clip. Hacer la cuenta en el tablero con ellos; es lo que vuelve el encargo concreto.</a:t>
+            </a:r>
+          </a:p>
+          <a:p/>
+          <a:p>
+            <a:r>
+              <a:t>Que lean cada frase en voz alta y la cronometren. Si una no cabe en 10 segundos, hay que partirla.</a:t>
             </a:r>
           </a:p>
         </p:txBody>
@@ -1745,7 +1849,7 @@
           <a:lstStyle/>
           <a:p>
             <a:r>
-              <a:t>Esto es el "voz a texto" del título, y funciona mejor como truco que como tema.</a:t>
+              <a:t>Esto es el "voz a texto" del título y funciona mejor como truco que como tema.</a:t>
             </a:r>
           </a:p>
           <a:p/>
@@ -1757,13 +1861,7 @@
           <a:p/>
           <a:p>
             <a:r>
-              <a:t>Para quien habla mejor de lo que escribe, esto cambia la vida. Y el texto dictado suena natural al leerlo en voz alta, que es justo lo que necesita un guion.</a:t>
-            </a:r>
-          </a:p>
-          <a:p/>
-          <a:p>
-            <a:r>
-              <a:t>Otra ruta: grabar una nota de voz en el celular y subirla a Gemini pidiéndole la transcripción limpia.</a:t>
+              <a:t>Para quien habla mejor de lo que escribe, esto cambia la vida. Y el texto dictado suena natural al decirlo en voz alta, que es justo lo que necesita un guion.</a:t>
             </a:r>
           </a:p>
         </p:txBody>
@@ -1833,45 +1931,31 @@
           <a:lstStyle/>
           <a:p>
             <a:r>
-              <a:t>PROMPT PARA EL AMBIENTE — en Gemini:</a:t>
+              <a:t>LA FOTO. Parece el paso tonto y es el que decide si el video se ve bien o ridículo.</a:t>
             </a:r>
           </a:p>
           <a:p/>
           <a:p>
             <a:r>
-              <a:t>«Genera una imagen horizontal, formato 16:9, de [describe el lugar: un laboratorio de microbiología, una sala de audiencias, un taller de pintura, una planta de alimentos, una cancha de atletismo, un afloramiento rocoso].</a:t>
-            </a:r>
-          </a:p>
-          <a:p>
-            <a:r>
-              <a:t>Estilo: fotografía realista, luz natural suave, profundidad de campo.</a:t>
-            </a:r>
-          </a:p>
-          <a:p>
-            <a:r>
-              <a:t>Sin personas en la escena.</a:t>
-            </a:r>
-          </a:p>
-          <a:p>
-            <a:r>
-              <a:t>Sin texto ni letreros.</a:t>
-            </a:r>
-          </a:p>
-          <a:p>
-            <a:r>
-              <a:t>Deja espacio libre en el lado derecho para colocar un personaje después.»</a:t>
+              <a:t>La misma foto en los seis clips. Si cambian de foto, cambia la persona.</a:t>
             </a:r>
           </a:p>
           <a:p/>
           <a:p>
             <a:r>
-              <a:t>ESE ÚLTIMO RENGLÓN ES EL IMPORTANTE. Si no lo pides, la imagen queda llena y el avatar no cabe. AVISO HONESTO: al generar el ejemplo, Gemini llenó igual el lado derecho de pupitres. Si pasa, pídela otra vez o corre el avatar.</a:t>
+              <a:t>Qué pedirles: de frente, cara bien iluminada, sin gafas de sol, sin otras personas en la imagen. Una foto de documento sirve; una foto de fiesta no.</a:t>
             </a:r>
           </a:p>
           <a:p/>
           <a:p>
             <a:r>
-              <a:t>Variante: pedir tres propuestas y elegir. «Dame tres versiones: una de día, una de noche y una en interior.»</a:t>
+              <a:t>PARA QUIEN NO QUIERA PONER SU CARA: que no adjunte nada y describa un personaje inventado, repitiendo la MISMA descripción palabra por palabra en los seis clips. Queda menos consistente, pero funciona. Nadie está obligado.</a:t>
+            </a:r>
+          </a:p>
+          <a:p/>
+          <a:p>
+            <a:r>
+              <a:t>Aquí es donde conviene repetir la regla 1: la foto es tuya, de nadie más.</a:t>
             </a:r>
           </a:p>
         </p:txBody>
@@ -1941,45 +2025,50 @@
           <a:lstStyle/>
           <a:p>
             <a:r>
-              <a:t>PROMPT PARA EL AVATAR — en Gemini, adjuntando SU PROPIA FOTO:</a:t>
+              <a:t>EL PASO CENTRAL. Aquí se va la mayor parte de la clase.</a:t>
             </a:r>
           </a:p>
           <a:p/>
           <a:p>
             <a:r>
-              <a:t>«Con esta foto mía como referencia, genera un retrato de medio cuerpo del mismo personaje, mirando al frente, con expresión amable.</a:t>
-            </a:r>
-          </a:p>
-          <a:p>
-            <a:r>
-              <a:t>Vestuario: [bata de laboratorio / toga / ropa de taller / uniforme deportivo / camisa formal].</a:t>
-            </a:r>
-          </a:p>
-          <a:p>
-            <a:r>
-              <a:t>Fondo: gris liso y uniforme, sin sombras ni degradados.</a:t>
-            </a:r>
-          </a:p>
-          <a:p>
-            <a:r>
-              <a:t>Estilo: [ilustración digital limpia / fotografía realista].</a:t>
-            </a:r>
-          </a:p>
-          <a:p>
-            <a:r>
-              <a:t>Formato vertical. Hombros y cabeza completos, sin cortar la coronilla.»</a:t>
+              <a:t>PROMPT, uno por frase:</a:t>
+            </a:r>
+          </a:p>
+          <a:p>
+            <a:r>
+              <a:t>«La persona de la foto, en plano medio dentro de [el lugar: un laboratorio, una sala de audiencias, un taller, una cancha, un afloramiento rocoso], con luz natural suave.</a:t>
+            </a:r>
+          </a:p>
+          <a:p>
+            <a:r>
+              <a:t>Mira a la cámara y dice en español latinoamericano, tono cercano y pausado: «[una de tus frases]»</a:t>
+            </a:r>
+          </a:p>
+          <a:p>
+            <a:r>
+              <a:t>Cámara fija, sin texto en pantalla.»</a:t>
             </a:r>
           </a:p>
           <a:p/>
           <a:p>
             <a:r>
-              <a:t>POR QUÉ FONDO GRIS LISO Y SIN SOMBRAS: para poder recortarlo y montarlo sobre el ambiente del paso 2. Si el fondo tiene degradado, el recorte queda sucio. Este detalle sí cambia el resultado: compruébalo en vivo.</a:t>
+              <a:t>EL ERROR QUE VA A PASAR Y HAY QUE ANTICIPAR: si adjuntan la foto ANTES de activar Crear video, Gemini se sale del modo video y contesta por escrito. Me pasó dos veces al preparar la clase.</a:t>
+            </a:r>
+          </a:p>
+          <a:p>
+            <a:r>
+              <a:t>EL ORDEN ES: botón + → Crear video → DESPUÉS la foto → después el prompt.</a:t>
+            </a:r>
+          </a:p>
+          <a:p>
+            <a:r>
+              <a:t>Antes de enviar, que comprueben que abajo diga «Videos» y aparezca «Horizontal».</a:t>
             </a:r>
           </a:p>
           <a:p/>
           <a:p>
             <a:r>
-              <a:t>PARA QUIEN NO QUIERA USAR SU CARA: que describa un personaje inventado. «Un ingeniero de alimentos de unos 40 años, pelo corto, bata blanca.» Funciona igual. Nadie está obligado a poner su cara.</a:t>
+              <a:t>Cada clip tarda entre dos y cuatro minutos. Que los lancen seguidos, no de a uno esperando.</a:t>
             </a:r>
           </a:p>
         </p:txBody>
@@ -5256,7 +5345,7 @@
                 </a:solidFill>
                 <a:latin typeface="Helvetica Neue"/>
               </a:rPr>
-              <a:t>Audio, imagen y video con IA: haz que un personaje tuyo cuente lo que haces</a:t>
+              <a:t>Seis clips de diez segundos y un minuto de video con tu propia cara</a:t>
             </a:r>
           </a:p>
         </p:txBody>
@@ -5295,7 +5384,7 @@
                 </a:solidFill>
                 <a:latin typeface="Helvetica Neue"/>
               </a:rPr>
-              <a:t>🎙️</a:t>
+              <a:t>🎬</a:t>
             </a:r>
           </a:p>
           <a:p>
@@ -5311,7 +5400,7 @@
                 </a:solidFill>
                 <a:latin typeface="Helvetica Neue"/>
               </a:rPr>
-              <a:t>🖼️</a:t>
+              <a:t>🧑</a:t>
             </a:r>
           </a:p>
           <a:p>
@@ -5327,7 +5416,7 @@
                 </a:solidFill>
                 <a:latin typeface="Helvetica Neue"/>
               </a:rPr>
-              <a:t>🎬</a:t>
+              <a:t>🔗</a:t>
             </a:r>
           </a:p>
         </p:txBody>
@@ -5514,7 +5603,7 @@
                 </a:solidFill>
                 <a:latin typeface="Helvetica Neue"/>
               </a:rPr>
-              <a:t>La voz</a:t>
+              <a:t>Unirlos</a:t>
             </a:r>
           </a:p>
         </p:txBody>
@@ -5553,7 +5642,7 @@
                 </a:solidFill>
                 <a:latin typeface="Helvetica Neue"/>
               </a:rPr>
-              <a:t>Generada o tuya: las dos valen</a:t>
+              <a:t>Los seis en un solo archivo</a:t>
             </a:r>
           </a:p>
         </p:txBody>
@@ -5567,7 +5656,7 @@
         <p:spPr>
           <a:xfrm>
             <a:off x="2103120" y="2697480"/>
-            <a:ext cx="8778240" cy="1005840"/>
+            <a:ext cx="4206240" cy="2240280"/>
           </a:xfrm>
           <a:prstGeom prst="roundRect">
             <a:avLst>
@@ -5614,8 +5703,8 @@
         </p:nvSpPr>
         <p:spPr>
           <a:xfrm>
-            <a:off x="2423160" y="2898648"/>
-            <a:ext cx="548640" cy="548640"/>
+            <a:off x="2468880" y="2971800"/>
+            <a:ext cx="3566160" cy="1828800"/>
           </a:xfrm>
           <a:prstGeom prst="rect">
             <a:avLst/>
@@ -5629,89 +5718,40 @@
           <a:lstStyle/>
           <a:p>
             <a:pPr algn="l">
-              <a:spcAft>
-                <a:spcPts val="600"/>
-              </a:spcAft>
-            </a:pPr>
-            <a:r>
-              <a:rPr sz="2600" b="1">
-                <a:solidFill>
-                  <a:srgbClr val="ED7623"/>
-                </a:solidFill>
-                <a:latin typeface="Helvetica Neue"/>
-              </a:rPr>
-              <a:t>A</a:t>
-            </a:r>
-          </a:p>
-        </p:txBody>
-      </p:sp>
-      <p:sp>
-        <p:nvSpPr>
-          <p:cNvPr id="8" name="TextBox 7"/>
-          <p:cNvSpPr txBox="1"/>
-          <p:nvPr/>
-        </p:nvSpPr>
-        <p:spPr>
-          <a:xfrm>
-            <a:off x="3108960" y="2871216"/>
-            <a:ext cx="3017520" cy="457200"/>
-          </a:xfrm>
-          <a:prstGeom prst="rect">
-            <a:avLst/>
-          </a:prstGeom>
-          <a:noFill/>
-        </p:spPr>
-        <p:txBody>
-          <a:bodyPr wrap="square" lIns="0" rIns="0" tIns="0" bIns="0">
-            <a:spAutoFit/>
-          </a:bodyPr>
-          <a:lstStyle/>
-          <a:p>
-            <a:pPr algn="l">
-              <a:spcAft>
-                <a:spcPts val="600"/>
-              </a:spcAft>
-            </a:pPr>
-            <a:r>
-              <a:rPr sz="2000" b="1">
-                <a:solidFill>
-                  <a:srgbClr val="11406E"/>
-                </a:solidFill>
-                <a:latin typeface="Helvetica Neue"/>
-              </a:rPr>
-              <a:t>Google AI Studio</a:t>
-            </a:r>
-          </a:p>
-        </p:txBody>
-      </p:sp>
-      <p:sp>
-        <p:nvSpPr>
-          <p:cNvPr id="9" name="TextBox 8"/>
-          <p:cNvSpPr txBox="1"/>
-          <p:nvPr/>
-        </p:nvSpPr>
-        <p:spPr>
-          <a:xfrm>
-            <a:off x="6217920" y="2926080"/>
-            <a:ext cx="4480560" cy="548640"/>
-          </a:xfrm>
-          <a:prstGeom prst="rect">
-            <a:avLst/>
-          </a:prstGeom>
-          <a:noFill/>
-        </p:spPr>
-        <p:txBody>
-          <a:bodyPr wrap="square" lIns="0" rIns="0" tIns="0" bIns="0">
-            <a:spAutoFit/>
-          </a:bodyPr>
-          <a:lstStyle/>
-          <a:p>
-            <a:pPr algn="l">
               <a:lnSpc>
-                <a:spcPct val="120000"/>
+                <a:spcPct val="130000"/>
               </a:lnSpc>
               <a:spcAft>
-                <a:spcPts val="600"/>
+                <a:spcPts val="300"/>
+              </a:spcAft>
+            </a:pPr>
+            <a:r>
+              <a:rPr sz="2200" b="1">
+                <a:solidFill>
+                  <a:srgbClr val="35789C"/>
+                </a:solidFill>
+                <a:latin typeface="Helvetica Neue"/>
+              </a:rPr>
+              <a:t>Gemini  ✕</a:t>
+            </a:r>
+          </a:p>
+          <a:p>
+            <a:pPr algn="l">
+              <a:lnSpc>
+                <a:spcPct val="130000"/>
+              </a:lnSpc>
+              <a:spcAft>
+                <a:spcPts val="300"/>
+              </a:spcAft>
+            </a:pPr>
+          </a:p>
+          <a:p>
+            <a:pPr algn="l">
+              <a:lnSpc>
+                <a:spcPct val="130000"/>
+              </a:lnSpc>
+              <a:spcAft>
+                <a:spcPts val="300"/>
               </a:spcAft>
             </a:pPr>
             <a:r>
@@ -5721,21 +5761,21 @@
                 </a:solidFill>
                 <a:latin typeface="Helvetica Neue"/>
               </a:rPr>
-              <a:t>Pegas el guion, eliges voz y escribes la indicación de estilo</a:t>
-            </a:r>
-          </a:p>
-        </p:txBody>
-      </p:sp>
-      <p:sp>
-        <p:nvSpPr>
-          <p:cNvPr id="10" name="Rounded Rectangle 9"/>
+              <a:t>Ejecuta código, pero sin herramientas de video. Te devuelve un comando de terminal.</a:t>
+            </a:r>
+          </a:p>
+        </p:txBody>
+      </p:sp>
+      <p:sp>
+        <p:nvSpPr>
+          <p:cNvPr id="8" name="Rounded Rectangle 7"/>
           <p:cNvSpPr/>
           <p:nvPr/>
         </p:nvSpPr>
         <p:spPr>
           <a:xfrm>
-            <a:off x="2103120" y="3886200"/>
-            <a:ext cx="8778240" cy="1005840"/>
+            <a:off x="6675120" y="2697480"/>
+            <a:ext cx="4206240" cy="2240280"/>
           </a:xfrm>
           <a:prstGeom prst="roundRect">
             <a:avLst>
@@ -5776,14 +5816,14 @@
       </p:sp>
       <p:sp>
         <p:nvSpPr>
-          <p:cNvPr id="11" name="TextBox 10"/>
+          <p:cNvPr id="9" name="TextBox 8"/>
           <p:cNvSpPr txBox="1"/>
           <p:nvPr/>
         </p:nvSpPr>
         <p:spPr>
           <a:xfrm>
-            <a:off x="2423160" y="4087368"/>
-            <a:ext cx="548640" cy="548640"/>
+            <a:off x="7040880" y="2971800"/>
+            <a:ext cx="3566160" cy="1828800"/>
           </a:xfrm>
           <a:prstGeom prst="rect">
             <a:avLst/>
@@ -5797,89 +5837,40 @@
           <a:lstStyle/>
           <a:p>
             <a:pPr algn="l">
-              <a:spcAft>
-                <a:spcPts val="600"/>
-              </a:spcAft>
-            </a:pPr>
-            <a:r>
-              <a:rPr sz="2600" b="1">
+              <a:lnSpc>
+                <a:spcPct val="130000"/>
+              </a:lnSpc>
+              <a:spcAft>
+                <a:spcPts val="300"/>
+              </a:spcAft>
+            </a:pPr>
+            <a:r>
+              <a:rPr sz="2200" b="1">
                 <a:solidFill>
                   <a:srgbClr val="ED7623"/>
                 </a:solidFill>
                 <a:latin typeface="Helvetica Neue"/>
               </a:rPr>
-              <a:t>B</a:t>
-            </a:r>
-          </a:p>
-        </p:txBody>
-      </p:sp>
-      <p:sp>
-        <p:nvSpPr>
-          <p:cNvPr id="12" name="TextBox 11"/>
-          <p:cNvSpPr txBox="1"/>
-          <p:nvPr/>
-        </p:nvSpPr>
-        <p:spPr>
-          <a:xfrm>
-            <a:off x="3108960" y="4059936"/>
-            <a:ext cx="3017520" cy="457200"/>
-          </a:xfrm>
-          <a:prstGeom prst="rect">
-            <a:avLst/>
-          </a:prstGeom>
-          <a:noFill/>
-        </p:spPr>
-        <p:txBody>
-          <a:bodyPr wrap="square" lIns="0" rIns="0" tIns="0" bIns="0">
-            <a:spAutoFit/>
-          </a:bodyPr>
-          <a:lstStyle/>
-          <a:p>
-            <a:pPr algn="l">
-              <a:spcAft>
-                <a:spcPts val="600"/>
-              </a:spcAft>
-            </a:pPr>
-            <a:r>
-              <a:rPr sz="2000" b="1">
-                <a:solidFill>
-                  <a:srgbClr val="11406E"/>
-                </a:solidFill>
-                <a:latin typeface="Helvetica Neue"/>
-              </a:rPr>
-              <a:t>ElevenLabs</a:t>
-            </a:r>
-          </a:p>
-        </p:txBody>
-      </p:sp>
-      <p:sp>
-        <p:nvSpPr>
-          <p:cNvPr id="13" name="TextBox 12"/>
-          <p:cNvSpPr txBox="1"/>
-          <p:nvPr/>
-        </p:nvSpPr>
-        <p:spPr>
-          <a:xfrm>
-            <a:off x="6217920" y="4114800"/>
-            <a:ext cx="4480560" cy="548640"/>
-          </a:xfrm>
-          <a:prstGeom prst="rect">
-            <a:avLst/>
-          </a:prstGeom>
-          <a:noFill/>
-        </p:spPr>
-        <p:txBody>
-          <a:bodyPr wrap="square" lIns="0" rIns="0" tIns="0" bIns="0">
-            <a:spAutoFit/>
-          </a:bodyPr>
-          <a:lstStyle/>
+              <a:t>ChatGPT  ✓</a:t>
+            </a:r>
+          </a:p>
           <a:p>
             <a:pPr algn="l">
               <a:lnSpc>
-                <a:spcPct val="120000"/>
+                <a:spcPct val="130000"/>
               </a:lnSpc>
               <a:spcAft>
-                <a:spcPts val="600"/>
+                <a:spcPts val="300"/>
+              </a:spcAft>
+            </a:pPr>
+          </a:p>
+          <a:p>
+            <a:pPr algn="l">
+              <a:lnSpc>
+                <a:spcPct val="130000"/>
+              </a:lnSpc>
+              <a:spcAft>
+                <a:spcPts val="300"/>
               </a:spcAft>
             </a:pPr>
             <a:r>
@@ -5889,21 +5880,21 @@
                 </a:solidFill>
                 <a:latin typeface="Helvetica Neue"/>
               </a:rPr>
-              <a:t>Plan gratis: unos 10 minutos de audio al mes</a:t>
-            </a:r>
-          </a:p>
-        </p:txBody>
-      </p:sp>
-      <p:sp>
-        <p:nvSpPr>
-          <p:cNvPr id="14" name="Rounded Rectangle 13"/>
+              <a:t>Subes los clips, le pides que los una. Quince segundos y te da el MP4.</a:t>
+            </a:r>
+          </a:p>
+        </p:txBody>
+      </p:sp>
+      <p:sp>
+        <p:nvSpPr>
+          <p:cNvPr id="10" name="Rounded Rectangle 9"/>
           <p:cNvSpPr/>
           <p:nvPr/>
         </p:nvSpPr>
         <p:spPr>
           <a:xfrm>
-            <a:off x="2103120" y="5074920"/>
-            <a:ext cx="8778240" cy="1005840"/>
+            <a:off x="2103120" y="5166360"/>
+            <a:ext cx="8778240" cy="914400"/>
           </a:xfrm>
           <a:prstGeom prst="roundRect">
             <a:avLst>
@@ -5911,12 +5902,10 @@
             </a:avLst>
           </a:prstGeom>
           <a:solidFill>
-            <a:srgbClr val="F5F3EF"/>
+            <a:srgbClr val="ECF3F7"/>
           </a:solidFill>
-          <a:ln w="11430">
-            <a:solidFill>
-              <a:srgbClr val="E3E0DA"/>
-            </a:solidFill>
+          <a:ln>
+            <a:noFill/>
           </a:ln>
           <a:effectLst/>
         </p:spPr>
@@ -5944,14 +5933,14 @@
       </p:sp>
       <p:sp>
         <p:nvSpPr>
-          <p:cNvPr id="15" name="TextBox 14"/>
+          <p:cNvPr id="11" name="TextBox 10"/>
           <p:cNvSpPr txBox="1"/>
           <p:nvPr/>
         </p:nvSpPr>
         <p:spPr>
           <a:xfrm>
-            <a:off x="2423160" y="5276088"/>
-            <a:ext cx="548640" cy="548640"/>
+            <a:off x="2560320" y="5413248"/>
+            <a:ext cx="8046720" cy="548640"/>
           </a:xfrm>
           <a:prstGeom prst="rect">
             <a:avLst/>
@@ -5970,133 +5959,13 @@
               </a:spcAft>
             </a:pPr>
             <a:r>
-              <a:rPr sz="2600" b="1">
-                <a:solidFill>
-                  <a:srgbClr val="ED7623"/>
-                </a:solidFill>
-                <a:latin typeface="Helvetica Neue"/>
-              </a:rPr>
-              <a:t>C</a:t>
-            </a:r>
-          </a:p>
-        </p:txBody>
-      </p:sp>
-      <p:sp>
-        <p:nvSpPr>
-          <p:cNvPr id="16" name="TextBox 15"/>
-          <p:cNvSpPr txBox="1"/>
-          <p:nvPr/>
-        </p:nvSpPr>
-        <p:spPr>
-          <a:xfrm>
-            <a:off x="3108960" y="5248656"/>
-            <a:ext cx="3017520" cy="457200"/>
-          </a:xfrm>
-          <a:prstGeom prst="rect">
-            <a:avLst/>
-          </a:prstGeom>
-          <a:noFill/>
-        </p:spPr>
-        <p:txBody>
-          <a:bodyPr wrap="square" lIns="0" rIns="0" tIns="0" bIns="0">
-            <a:spAutoFit/>
-          </a:bodyPr>
-          <a:lstStyle/>
-          <a:p>
-            <a:pPr algn="l">
-              <a:spcAft>
-                <a:spcPts val="600"/>
-              </a:spcAft>
-            </a:pPr>
-            <a:r>
-              <a:rPr sz="2000" b="1">
-                <a:solidFill>
-                  <a:srgbClr val="11406E"/>
-                </a:solidFill>
-                <a:latin typeface="Helvetica Neue"/>
-              </a:rPr>
-              <a:t>Tu propia voz</a:t>
-            </a:r>
-          </a:p>
-        </p:txBody>
-      </p:sp>
-      <p:sp>
-        <p:nvSpPr>
-          <p:cNvPr id="17" name="TextBox 16"/>
-          <p:cNvSpPr txBox="1"/>
-          <p:nvPr/>
-        </p:nvSpPr>
-        <p:spPr>
-          <a:xfrm>
-            <a:off x="6217920" y="5303520"/>
-            <a:ext cx="4480560" cy="548640"/>
-          </a:xfrm>
-          <a:prstGeom prst="rect">
-            <a:avLst/>
-          </a:prstGeom>
-          <a:noFill/>
-        </p:spPr>
-        <p:txBody>
-          <a:bodyPr wrap="square" lIns="0" rIns="0" tIns="0" bIns="0">
-            <a:spAutoFit/>
-          </a:bodyPr>
-          <a:lstStyle/>
-          <a:p>
-            <a:pPr algn="l">
-              <a:lnSpc>
-                <a:spcPct val="120000"/>
-              </a:lnSpc>
-              <a:spcAft>
-                <a:spcPts val="600"/>
-              </a:spcAft>
-            </a:pPr>
-            <a:r>
-              <a:rPr sz="1500" b="0">
-                <a:solidFill>
-                  <a:srgbClr val="6E6E6E"/>
-                </a:solidFill>
-                <a:latin typeface="Helvetica Neue"/>
-              </a:rPr>
-              <a:t>El celular. Gratis, tuya, y a veces suena mejor</a:t>
-            </a:r>
-          </a:p>
-        </p:txBody>
-      </p:sp>
-      <p:sp>
-        <p:nvSpPr>
-          <p:cNvPr id="18" name="TextBox 17"/>
-          <p:cNvSpPr txBox="1"/>
-          <p:nvPr/>
-        </p:nvSpPr>
-        <p:spPr>
-          <a:xfrm>
-            <a:off x="2103120" y="6309360"/>
-            <a:ext cx="8778240" cy="457200"/>
-          </a:xfrm>
-          <a:prstGeom prst="rect">
-            <a:avLst/>
-          </a:prstGeom>
-          <a:noFill/>
-        </p:spPr>
-        <p:txBody>
-          <a:bodyPr wrap="square" lIns="0" rIns="0" tIns="0" bIns="0">
-            <a:spAutoFit/>
-          </a:bodyPr>
-          <a:lstStyle/>
-          <a:p>
-            <a:pPr algn="l">
-              <a:spcAft>
-                <a:spcPts val="600"/>
-              </a:spcAft>
-            </a:pPr>
-            <a:r>
-              <a:rPr sz="1500" b="0">
-                <a:solidFill>
-                  <a:srgbClr val="6E6E6E"/>
-                </a:solidFill>
-                <a:latin typeface="Helvetica Neue"/>
-              </a:rPr>
-              <a:t>Filtra las voces por Gender, no por Language: las de español piden clave de pago.</a:t>
+              <a:rPr sz="1600" b="1">
+                <a:solidFill>
+                  <a:srgbClr val="35789C"/>
+                </a:solidFill>
+                <a:latin typeface="Helvetica Neue"/>
+              </a:rPr>
+              <a:t>¿Por qué una puede y la otra no? No es inteligencia: son las herramientas que le conectaron.</a:t>
             </a:r>
           </a:p>
         </p:txBody>
@@ -6244,7 +6113,7 @@
                 </a:solidFill>
                 <a:latin typeface="Helvetica Neue"/>
               </a:rPr>
-              <a:t>Que hable</a:t>
+              <a:t>La voz</a:t>
             </a:r>
           </a:p>
         </p:txBody>
@@ -6283,30 +6152,34 @@
                 </a:solidFill>
                 <a:latin typeface="Helvetica Neue"/>
               </a:rPr>
-              <a:t>Imagen + voz = personaje que mueve la boca</a:t>
-            </a:r>
-          </a:p>
-        </p:txBody>
-      </p:sp>
-      <p:sp>
-        <p:nvSpPr>
-          <p:cNvPr id="6" name="Rectangle 5"/>
+              <a:t>Opcional: los clips ya vienen con voz</a:t>
+            </a:r>
+          </a:p>
+        </p:txBody>
+      </p:sp>
+      <p:sp>
+        <p:nvSpPr>
+          <p:cNvPr id="6" name="Rounded Rectangle 5"/>
           <p:cNvSpPr/>
           <p:nvPr/>
         </p:nvSpPr>
         <p:spPr>
           <a:xfrm>
-            <a:off x="2103120" y="3182112"/>
-            <a:ext cx="8778240" cy="20116"/>
-          </a:xfrm>
-          <a:prstGeom prst="rect">
-            <a:avLst/>
+            <a:off x="2103120" y="2697480"/>
+            <a:ext cx="8778240" cy="1005840"/>
+          </a:xfrm>
+          <a:prstGeom prst="roundRect">
+            <a:avLst>
+              <a:gd name="adj" fmla="val 5000"/>
+            </a:avLst>
           </a:prstGeom>
           <a:solidFill>
-            <a:srgbClr val="ED7623"/>
+            <a:srgbClr val="F5F3EF"/>
           </a:solidFill>
-          <a:ln>
-            <a:noFill/>
+          <a:ln w="11430">
+            <a:solidFill>
+              <a:srgbClr val="E3E0DA"/>
+            </a:solidFill>
           </a:ln>
           <a:effectLst/>
         </p:spPr>
@@ -6340,8 +6213,8 @@
         </p:nvSpPr>
         <p:spPr>
           <a:xfrm>
-            <a:off x="2103120" y="2697480"/>
-            <a:ext cx="3017520" cy="548640"/>
+            <a:off x="2423160" y="2898648"/>
+            <a:ext cx="548640" cy="548640"/>
           </a:xfrm>
           <a:prstGeom prst="rect">
             <a:avLst/>
@@ -6355,21 +6228,18 @@
           <a:lstStyle/>
           <a:p>
             <a:pPr algn="l">
-              <a:lnSpc>
-                <a:spcPct val="112000"/>
-              </a:lnSpc>
-              <a:spcAft>
-                <a:spcPts val="0"/>
-              </a:spcAft>
-            </a:pPr>
-            <a:r>
-              <a:rPr sz="1600" b="1">
-                <a:solidFill>
-                  <a:srgbClr val="35789C"/>
-                </a:solidFill>
-                <a:latin typeface="Helvetica Neue"/>
-              </a:rPr>
-              <a:t>HERRAMIENTA</a:t>
+              <a:spcAft>
+                <a:spcPts val="600"/>
+              </a:spcAft>
+            </a:pPr>
+            <a:r>
+              <a:rPr sz="2600" b="1">
+                <a:solidFill>
+                  <a:srgbClr val="ED7623"/>
+                </a:solidFill>
+                <a:latin typeface="Helvetica Neue"/>
+              </a:rPr>
+              <a:t>A</a:t>
             </a:r>
           </a:p>
         </p:txBody>
@@ -6382,8 +6252,8 @@
         </p:nvSpPr>
         <p:spPr>
           <a:xfrm>
-            <a:off x="5120640" y="2697480"/>
-            <a:ext cx="5760720" cy="548640"/>
+            <a:off x="3108960" y="2871216"/>
+            <a:ext cx="3017520" cy="457200"/>
           </a:xfrm>
           <a:prstGeom prst="rect">
             <a:avLst/>
@@ -6397,21 +6267,18 @@
           <a:lstStyle/>
           <a:p>
             <a:pPr algn="l">
-              <a:lnSpc>
-                <a:spcPct val="112000"/>
-              </a:lnSpc>
-              <a:spcAft>
-                <a:spcPts val="0"/>
-              </a:spcAft>
-            </a:pPr>
-            <a:r>
-              <a:rPr sz="1600" b="1">
-                <a:solidFill>
-                  <a:srgbClr val="35789C"/>
-                </a:solidFill>
-                <a:latin typeface="Helvetica Neue"/>
-              </a:rPr>
-              <a:t>CÓMO ES SU CAPA GRATIS</a:t>
+              <a:spcAft>
+                <a:spcPts val="600"/>
+              </a:spcAft>
+            </a:pPr>
+            <a:r>
+              <a:rPr sz="2000" b="1">
+                <a:solidFill>
+                  <a:srgbClr val="11406E"/>
+                </a:solidFill>
+                <a:latin typeface="Helvetica Neue"/>
+              </a:rPr>
+              <a:t>ElevenLabs</a:t>
             </a:r>
           </a:p>
         </p:txBody>
@@ -6424,8 +6291,8 @@
         </p:nvSpPr>
         <p:spPr>
           <a:xfrm>
-            <a:off x="2103120" y="3246120"/>
-            <a:ext cx="3017520" cy="548640"/>
+            <a:off x="6217920" y="2926080"/>
+            <a:ext cx="4480560" cy="548640"/>
           </a:xfrm>
           <a:prstGeom prst="rect">
             <a:avLst/>
@@ -6440,85 +6307,47 @@
           <a:p>
             <a:pPr algn="l">
               <a:lnSpc>
-                <a:spcPct val="112000"/>
+                <a:spcPct val="120000"/>
               </a:lnSpc>
               <a:spcAft>
-                <a:spcPts val="0"/>
-              </a:spcAft>
-            </a:pPr>
-            <a:r>
-              <a:rPr sz="1600" b="1">
-                <a:solidFill>
-                  <a:srgbClr val="ED7623"/>
-                </a:solidFill>
-                <a:latin typeface="Helvetica Neue"/>
-              </a:rPr>
-              <a:t>HeyGen</a:t>
-            </a:r>
-          </a:p>
-        </p:txBody>
-      </p:sp>
-      <p:sp>
-        <p:nvSpPr>
-          <p:cNvPr id="10" name="TextBox 9"/>
-          <p:cNvSpPr txBox="1"/>
-          <p:nvPr/>
-        </p:nvSpPr>
-        <p:spPr>
-          <a:xfrm>
-            <a:off x="5120640" y="3246120"/>
-            <a:ext cx="5760720" cy="548640"/>
-          </a:xfrm>
-          <a:prstGeom prst="rect">
-            <a:avLst/>
-          </a:prstGeom>
-          <a:noFill/>
-        </p:spPr>
-        <p:txBody>
-          <a:bodyPr wrap="square" lIns="0" rIns="0" tIns="0" bIns="0">
-            <a:spAutoFit/>
-          </a:bodyPr>
-          <a:lstStyle/>
-          <a:p>
-            <a:pPr algn="l">
-              <a:lnSpc>
-                <a:spcPct val="112000"/>
-              </a:lnSpc>
-              <a:spcAft>
-                <a:spcPts val="0"/>
-              </a:spcAft>
-            </a:pPr>
-            <a:r>
-              <a:rPr sz="1600" b="0">
+                <a:spcPts val="600"/>
+              </a:spcAft>
+            </a:pPr>
+            <a:r>
+              <a:rPr sz="1500" b="0">
                 <a:solidFill>
                   <a:srgbClr val="6E6E6E"/>
                 </a:solidFill>
                 <a:latin typeface="Helvetica Neue"/>
               </a:rPr>
-              <a:t>Pocos videos al mes, con marca de agua</a:t>
-            </a:r>
-          </a:p>
-        </p:txBody>
-      </p:sp>
-      <p:sp>
-        <p:nvSpPr>
-          <p:cNvPr id="11" name="Rectangle 10"/>
+              <a:t>Gratis: ~10 min al mes. Voces en español sin pedir tarjeta</a:t>
+            </a:r>
+          </a:p>
+        </p:txBody>
+      </p:sp>
+      <p:sp>
+        <p:nvSpPr>
+          <p:cNvPr id="10" name="Rounded Rectangle 9"/>
           <p:cNvSpPr/>
           <p:nvPr/>
         </p:nvSpPr>
         <p:spPr>
           <a:xfrm>
-            <a:off x="2103120" y="3730752"/>
-            <a:ext cx="8778240" cy="7315"/>
-          </a:xfrm>
-          <a:prstGeom prst="rect">
-            <a:avLst/>
+            <a:off x="2103120" y="3886200"/>
+            <a:ext cx="8778240" cy="1005840"/>
+          </a:xfrm>
+          <a:prstGeom prst="roundRect">
+            <a:avLst>
+              <a:gd name="adj" fmla="val 5000"/>
+            </a:avLst>
           </a:prstGeom>
           <a:solidFill>
-            <a:srgbClr val="E3E0DA"/>
+            <a:srgbClr val="F5F3EF"/>
           </a:solidFill>
-          <a:ln>
-            <a:noFill/>
+          <a:ln w="11430">
+            <a:solidFill>
+              <a:srgbClr val="E3E0DA"/>
+            </a:solidFill>
           </a:ln>
           <a:effectLst/>
         </p:spPr>
@@ -6546,14 +6375,14 @@
       </p:sp>
       <p:sp>
         <p:nvSpPr>
-          <p:cNvPr id="12" name="TextBox 11"/>
+          <p:cNvPr id="11" name="TextBox 10"/>
           <p:cNvSpPr txBox="1"/>
           <p:nvPr/>
         </p:nvSpPr>
         <p:spPr>
           <a:xfrm>
-            <a:off x="2103120" y="3794760"/>
-            <a:ext cx="3017520" cy="548640"/>
+            <a:off x="2423160" y="4087368"/>
+            <a:ext cx="548640" cy="548640"/>
           </a:xfrm>
           <a:prstGeom prst="rect">
             <a:avLst/>
@@ -6567,35 +6396,32 @@
           <a:lstStyle/>
           <a:p>
             <a:pPr algn="l">
-              <a:lnSpc>
-                <a:spcPct val="112000"/>
-              </a:lnSpc>
-              <a:spcAft>
-                <a:spcPts val="0"/>
-              </a:spcAft>
-            </a:pPr>
-            <a:r>
-              <a:rPr sz="1600" b="1">
+              <a:spcAft>
+                <a:spcPts val="600"/>
+              </a:spcAft>
+            </a:pPr>
+            <a:r>
+              <a:rPr sz="2600" b="1">
                 <a:solidFill>
                   <a:srgbClr val="ED7623"/>
                 </a:solidFill>
                 <a:latin typeface="Helvetica Neue"/>
               </a:rPr>
-              <a:t>Hedra</a:t>
-            </a:r>
-          </a:p>
-        </p:txBody>
-      </p:sp>
-      <p:sp>
-        <p:nvSpPr>
-          <p:cNvPr id="13" name="TextBox 12"/>
+              <a:t>B</a:t>
+            </a:r>
+          </a:p>
+        </p:txBody>
+      </p:sp>
+      <p:sp>
+        <p:nvSpPr>
+          <p:cNvPr id="12" name="TextBox 11"/>
           <p:cNvSpPr txBox="1"/>
           <p:nvPr/>
         </p:nvSpPr>
         <p:spPr>
           <a:xfrm>
-            <a:off x="5120640" y="3794760"/>
-            <a:ext cx="5760720" cy="548640"/>
+            <a:off x="3108960" y="4059936"/>
+            <a:ext cx="3017520" cy="457200"/>
           </a:xfrm>
           <a:prstGeom prst="rect">
             <a:avLst/>
@@ -6609,44 +6435,87 @@
           <a:lstStyle/>
           <a:p>
             <a:pPr algn="l">
+              <a:spcAft>
+                <a:spcPts val="600"/>
+              </a:spcAft>
+            </a:pPr>
+            <a:r>
+              <a:rPr sz="2000" b="1">
+                <a:solidFill>
+                  <a:srgbClr val="11406E"/>
+                </a:solidFill>
+                <a:latin typeface="Helvetica Neue"/>
+              </a:rPr>
+              <a:t>Google AI Studio</a:t>
+            </a:r>
+          </a:p>
+        </p:txBody>
+      </p:sp>
+      <p:sp>
+        <p:nvSpPr>
+          <p:cNvPr id="13" name="TextBox 12"/>
+          <p:cNvSpPr txBox="1"/>
+          <p:nvPr/>
+        </p:nvSpPr>
+        <p:spPr>
+          <a:xfrm>
+            <a:off x="6217920" y="4114800"/>
+            <a:ext cx="4480560" cy="548640"/>
+          </a:xfrm>
+          <a:prstGeom prst="rect">
+            <a:avLst/>
+          </a:prstGeom>
+          <a:noFill/>
+        </p:spPr>
+        <p:txBody>
+          <a:bodyPr wrap="square" lIns="0" rIns="0" tIns="0" bIns="0">
+            <a:spAutoFit/>
+          </a:bodyPr>
+          <a:lstStyle/>
+          <a:p>
+            <a:pPr algn="l">
               <a:lnSpc>
-                <a:spcPct val="112000"/>
+                <a:spcPct val="120000"/>
               </a:lnSpc>
               <a:spcAft>
-                <a:spcPts val="0"/>
-              </a:spcAft>
-            </a:pPr>
-            <a:r>
-              <a:rPr sz="1600" b="0">
+                <a:spcPts val="600"/>
+              </a:spcAft>
+            </a:pPr>
+            <a:r>
+              <a:rPr sz="1500" b="0">
                 <a:solidFill>
                   <a:srgbClr val="6E6E6E"/>
                 </a:solidFill>
                 <a:latin typeface="Helvetica Neue"/>
               </a:rPr>
-              <a:t>Gratis, pero con audio corto</a:t>
-            </a:r>
-          </a:p>
-        </p:txBody>
-      </p:sp>
-      <p:sp>
-        <p:nvSpPr>
-          <p:cNvPr id="14" name="Rectangle 13"/>
+              <a:t>Filtra por Gender, no por Language: las de español cobran</a:t>
+            </a:r>
+          </a:p>
+        </p:txBody>
+      </p:sp>
+      <p:sp>
+        <p:nvSpPr>
+          <p:cNvPr id="14" name="Rounded Rectangle 13"/>
           <p:cNvSpPr/>
           <p:nvPr/>
         </p:nvSpPr>
         <p:spPr>
           <a:xfrm>
-            <a:off x="2103120" y="4279392"/>
-            <a:ext cx="8778240" cy="7315"/>
-          </a:xfrm>
-          <a:prstGeom prst="rect">
-            <a:avLst/>
+            <a:off x="2103120" y="5074920"/>
+            <a:ext cx="8778240" cy="1005840"/>
+          </a:xfrm>
+          <a:prstGeom prst="roundRect">
+            <a:avLst>
+              <a:gd name="adj" fmla="val 5000"/>
+            </a:avLst>
           </a:prstGeom>
           <a:solidFill>
-            <a:srgbClr val="E3E0DA"/>
+            <a:srgbClr val="F5F3EF"/>
           </a:solidFill>
-          <a:ln>
-            <a:noFill/>
+          <a:ln w="11430">
+            <a:solidFill>
+              <a:srgbClr val="E3E0DA"/>
+            </a:solidFill>
           </a:ln>
           <a:effectLst/>
         </p:spPr>
@@ -6680,8 +6549,8 @@
         </p:nvSpPr>
         <p:spPr>
           <a:xfrm>
-            <a:off x="2103120" y="4343400"/>
-            <a:ext cx="3017520" cy="548640"/>
+            <a:off x="2423160" y="5276088"/>
+            <a:ext cx="548640" cy="548640"/>
           </a:xfrm>
           <a:prstGeom prst="rect">
             <a:avLst/>
@@ -6695,21 +6564,18 @@
           <a:lstStyle/>
           <a:p>
             <a:pPr algn="l">
-              <a:lnSpc>
-                <a:spcPct val="112000"/>
-              </a:lnSpc>
-              <a:spcAft>
-                <a:spcPts val="0"/>
-              </a:spcAft>
-            </a:pPr>
-            <a:r>
-              <a:rPr sz="1600" b="1">
+              <a:spcAft>
+                <a:spcPts val="600"/>
+              </a:spcAft>
+            </a:pPr>
+            <a:r>
+              <a:rPr sz="2600" b="1">
                 <a:solidFill>
                   <a:srgbClr val="ED7623"/>
                 </a:solidFill>
                 <a:latin typeface="Helvetica Neue"/>
               </a:rPr>
-              <a:t>Vidnoz</a:t>
+              <a:t>C</a:t>
             </a:r>
           </a:p>
         </p:txBody>
@@ -6722,8 +6588,8 @@
         </p:nvSpPr>
         <p:spPr>
           <a:xfrm>
-            <a:off x="5120640" y="4343400"/>
-            <a:ext cx="5760720" cy="548640"/>
+            <a:off x="3108960" y="5248656"/>
+            <a:ext cx="3017520" cy="457200"/>
           </a:xfrm>
           <a:prstGeom prst="rect">
             <a:avLst/>
@@ -6737,79 +6603,32 @@
           <a:lstStyle/>
           <a:p>
             <a:pPr algn="l">
-              <a:lnSpc>
-                <a:spcPct val="112000"/>
-              </a:lnSpc>
-              <a:spcAft>
-                <a:spcPts val="0"/>
-              </a:spcAft>
-            </a:pPr>
-            <a:r>
-              <a:rPr sz="1600" b="0">
-                <a:solidFill>
-                  <a:srgbClr val="6E6E6E"/>
-                </a:solidFill>
-                <a:latin typeface="Helvetica Neue"/>
-              </a:rPr>
-              <a:t>Más cupo diario, siempre con marca de agua</a:t>
-            </a:r>
-          </a:p>
-        </p:txBody>
-      </p:sp>
-      <p:sp>
-        <p:nvSpPr>
-          <p:cNvPr id="17" name="Rectangle 16"/>
-          <p:cNvSpPr/>
-          <p:nvPr/>
-        </p:nvSpPr>
-        <p:spPr>
-          <a:xfrm>
-            <a:off x="2103120" y="4828031"/>
-            <a:ext cx="8778240" cy="7315"/>
-          </a:xfrm>
-          <a:prstGeom prst="rect">
-            <a:avLst/>
-          </a:prstGeom>
-          <a:solidFill>
-            <a:srgbClr val="E3E0DA"/>
-          </a:solidFill>
-          <a:ln>
-            <a:noFill/>
-          </a:ln>
-          <a:effectLst/>
-        </p:spPr>
-        <p:style>
-          <a:lnRef idx="1">
-            <a:schemeClr val="accent1"/>
-          </a:lnRef>
-          <a:fillRef idx="3">
-            <a:schemeClr val="accent1"/>
-          </a:fillRef>
-          <a:effectRef idx="2">
-            <a:schemeClr val="accent1"/>
-          </a:effectRef>
-          <a:fontRef idx="minor">
-            <a:schemeClr val="lt1"/>
-          </a:fontRef>
-        </p:style>
-        <p:txBody>
-          <a:bodyPr rtlCol="0" anchor="ctr"/>
-          <a:lstStyle/>
-          <a:p>
-            <a:pPr algn="ctr"/>
-          </a:p>
-        </p:txBody>
-      </p:sp>
-      <p:sp>
-        <p:nvSpPr>
-          <p:cNvPr id="18" name="TextBox 17"/>
+              <a:spcAft>
+                <a:spcPts val="600"/>
+              </a:spcAft>
+            </a:pPr>
+            <a:r>
+              <a:rPr sz="2000" b="1">
+                <a:solidFill>
+                  <a:srgbClr val="11406E"/>
+                </a:solidFill>
+                <a:latin typeface="Helvetica Neue"/>
+              </a:rPr>
+              <a:t>Tu propia voz</a:t>
+            </a:r>
+          </a:p>
+        </p:txBody>
+      </p:sp>
+      <p:sp>
+        <p:nvSpPr>
+          <p:cNvPr id="17" name="TextBox 16"/>
           <p:cNvSpPr txBox="1"/>
           <p:nvPr/>
         </p:nvSpPr>
         <p:spPr>
           <a:xfrm>
-            <a:off x="2103120" y="4892040"/>
-            <a:ext cx="3017520" cy="548640"/>
+            <a:off x="6217920" y="5303520"/>
+            <a:ext cx="4480560" cy="548640"/>
           </a:xfrm>
           <a:prstGeom prst="rect">
             <a:avLst/>
@@ -6824,34 +6643,34 @@
           <a:p>
             <a:pPr algn="l">
               <a:lnSpc>
-                <a:spcPct val="112000"/>
+                <a:spcPct val="120000"/>
               </a:lnSpc>
               <a:spcAft>
-                <a:spcPts val="0"/>
-              </a:spcAft>
-            </a:pPr>
-            <a:r>
-              <a:rPr sz="1600" b="1">
-                <a:solidFill>
-                  <a:srgbClr val="ED7623"/>
-                </a:solidFill>
-                <a:latin typeface="Helvetica Neue"/>
-              </a:rPr>
-              <a:t>Google Vids</a:t>
-            </a:r>
-          </a:p>
-        </p:txBody>
-      </p:sp>
-      <p:sp>
-        <p:nvSpPr>
-          <p:cNvPr id="19" name="TextBox 18"/>
+                <a:spcPts val="600"/>
+              </a:spcAft>
+            </a:pPr>
+            <a:r>
+              <a:rPr sz="1500" b="0">
+                <a:solidFill>
+                  <a:srgbClr val="6E6E6E"/>
+                </a:solidFill>
+                <a:latin typeface="Helvetica Neue"/>
+              </a:rPr>
+              <a:t>Grabarla es gratis. Clonarla cuesta</a:t>
+            </a:r>
+          </a:p>
+        </p:txBody>
+      </p:sp>
+      <p:sp>
+        <p:nvSpPr>
+          <p:cNvPr id="18" name="TextBox 17"/>
           <p:cNvSpPr txBox="1"/>
           <p:nvPr/>
         </p:nvSpPr>
         <p:spPr>
           <a:xfrm>
-            <a:off x="5120640" y="4892040"/>
-            <a:ext cx="5760720" cy="548640"/>
+            <a:off x="2103120" y="6309360"/>
+            <a:ext cx="8778240" cy="457200"/>
           </a:xfrm>
           <a:prstGeom prst="rect">
             <a:avLst/>
@@ -6865,106 +6684,18 @@
           <a:lstStyle/>
           <a:p>
             <a:pPr algn="l">
-              <a:lnSpc>
-                <a:spcPct val="112000"/>
-              </a:lnSpc>
-              <a:spcAft>
-                <a:spcPts val="0"/>
-              </a:spcAft>
-            </a:pPr>
-            <a:r>
-              <a:rPr sz="1600" b="0">
+              <a:spcAft>
+                <a:spcPts val="600"/>
+              </a:spcAft>
+            </a:pPr>
+            <a:r>
+              <a:rPr sz="1500" b="0">
                 <a:solidFill>
                   <a:srgbClr val="6E6E6E"/>
                 </a:solidFill>
                 <a:latin typeface="Helvetica Neue"/>
               </a:rPr>
-              <a:t>Avatares gratis, pero el despliegue va por países</a:t>
-            </a:r>
-          </a:p>
-        </p:txBody>
-      </p:sp>
-      <p:sp>
-        <p:nvSpPr>
-          <p:cNvPr id="20" name="Rounded Rectangle 19"/>
-          <p:cNvSpPr/>
-          <p:nvPr/>
-        </p:nvSpPr>
-        <p:spPr>
-          <a:xfrm>
-            <a:off x="2103120" y="5440680"/>
-            <a:ext cx="8778240" cy="960120"/>
-          </a:xfrm>
-          <a:prstGeom prst="roundRect">
-            <a:avLst>
-              <a:gd name="adj" fmla="val 5000"/>
-            </a:avLst>
-          </a:prstGeom>
-          <a:solidFill>
-            <a:srgbClr val="FDF0E6"/>
-          </a:solidFill>
-          <a:ln>
-            <a:noFill/>
-          </a:ln>
-          <a:effectLst/>
-        </p:spPr>
-        <p:style>
-          <a:lnRef idx="1">
-            <a:schemeClr val="accent1"/>
-          </a:lnRef>
-          <a:fillRef idx="3">
-            <a:schemeClr val="accent1"/>
-          </a:fillRef>
-          <a:effectRef idx="2">
-            <a:schemeClr val="accent1"/>
-          </a:effectRef>
-          <a:fontRef idx="minor">
-            <a:schemeClr val="lt1"/>
-          </a:fontRef>
-        </p:style>
-        <p:txBody>
-          <a:bodyPr rtlCol="0" anchor="ctr"/>
-          <a:lstStyle/>
-          <a:p>
-            <a:pPr algn="ctr"/>
-          </a:p>
-        </p:txBody>
-      </p:sp>
-      <p:sp>
-        <p:nvSpPr>
-          <p:cNvPr id="21" name="TextBox 20"/>
-          <p:cNvSpPr txBox="1"/>
-          <p:nvPr/>
-        </p:nvSpPr>
-        <p:spPr>
-          <a:xfrm>
-            <a:off x="2514600" y="5687568"/>
-            <a:ext cx="8138160" cy="548640"/>
-          </a:xfrm>
-          <a:prstGeom prst="rect">
-            <a:avLst/>
-          </a:prstGeom>
-          <a:noFill/>
-        </p:spPr>
-        <p:txBody>
-          <a:bodyPr wrap="square" lIns="0" rIns="0" tIns="0" bIns="0">
-            <a:spAutoFit/>
-          </a:bodyPr>
-          <a:lstStyle/>
-          <a:p>
-            <a:pPr algn="l">
-              <a:spcAft>
-                <a:spcPts val="600"/>
-              </a:spcAft>
-            </a:pPr>
-            <a:r>
-              <a:rPr sz="1700" b="1">
-                <a:solidFill>
-                  <a:srgbClr val="ED7623"/>
-                </a:solidFill>
-                <a:latin typeface="Helvetica Neue"/>
-              </a:rPr>
-              <a:t>Este paso es opcional. Si ninguna te funciona hoy, el video queda bien igual.</a:t>
+              <a:t>Hazlo aparte solo si la voz de los clips no te gusta o te suena distinta entre uno y otro.</a:t>
             </a:r>
           </a:p>
         </p:txBody>
@@ -7112,7 +6843,7 @@
                 </a:solidFill>
                 <a:latin typeface="Helvetica Neue"/>
               </a:rPr>
-              <a:t>El montaje</a:t>
+              <a:t>Los remates</a:t>
             </a:r>
           </a:p>
         </p:txBody>
@@ -7151,7 +6882,7 @@
                 </a:solidFill>
                 <a:latin typeface="Helvetica Neue"/>
               </a:rPr>
-              <a:t>CapCut: todo junto</a:t>
+              <a:t>En CapCut, sobre el video ya unido</a:t>
             </a:r>
           </a:p>
         </p:txBody>
@@ -7165,7 +6896,7 @@
         <p:spPr>
           <a:xfrm>
             <a:off x="2103120" y="2697480"/>
-            <a:ext cx="4160520" cy="868680"/>
+            <a:ext cx="8778240" cy="822960"/>
           </a:xfrm>
           <a:prstGeom prst="roundRect">
             <a:avLst>
@@ -7212,7 +6943,7 @@
         </p:nvSpPr>
         <p:spPr>
           <a:xfrm>
-            <a:off x="2423160" y="2825496"/>
+            <a:off x="2468880" y="2825496"/>
             <a:ext cx="457200" cy="548640"/>
           </a:xfrm>
           <a:prstGeom prst="rect">
@@ -7232,7 +6963,7 @@
               </a:spcAft>
             </a:pPr>
             <a:r>
-              <a:rPr sz="2200" b="1">
+              <a:rPr sz="2400" b="1">
                 <a:solidFill>
                   <a:srgbClr val="ED7623"/>
                 </a:solidFill>
@@ -7251,8 +6982,8 @@
         </p:nvSpPr>
         <p:spPr>
           <a:xfrm>
-            <a:off x="2971800" y="2880360"/>
-            <a:ext cx="3108960" cy="548640"/>
+            <a:off x="3108960" y="2880360"/>
+            <a:ext cx="7498079" cy="548640"/>
           </a:xfrm>
           <a:prstGeom prst="rect">
             <a:avLst/>
@@ -7274,13 +7005,13 @@
               </a:spcAft>
             </a:pPr>
             <a:r>
-              <a:rPr sz="1550" b="0">
+              <a:rPr sz="1800" b="0">
                 <a:solidFill>
                   <a:srgbClr val="11406E"/>
                 </a:solidFill>
                 <a:latin typeface="Helvetica Neue"/>
               </a:rPr>
-              <a:t>Ambiente de fondo</a:t>
+              <a:t>Subtítulos automáticos — y revisarlos</a:t>
             </a:r>
           </a:p>
         </p:txBody>
@@ -7293,8 +7024,8 @@
         </p:nvSpPr>
         <p:spPr>
           <a:xfrm>
-            <a:off x="6583680" y="2697480"/>
-            <a:ext cx="4160520" cy="868680"/>
+            <a:off x="2103120" y="3703320"/>
+            <a:ext cx="8778240" cy="822960"/>
           </a:xfrm>
           <a:prstGeom prst="roundRect">
             <a:avLst>
@@ -7341,7 +7072,7 @@
         </p:nvSpPr>
         <p:spPr>
           <a:xfrm>
-            <a:off x="6903720" y="2825496"/>
+            <a:off x="2468880" y="3831336"/>
             <a:ext cx="457200" cy="548640"/>
           </a:xfrm>
           <a:prstGeom prst="rect">
@@ -7361,7 +7092,7 @@
               </a:spcAft>
             </a:pPr>
             <a:r>
-              <a:rPr sz="2200" b="1">
+              <a:rPr sz="2400" b="1">
                 <a:solidFill>
                   <a:srgbClr val="ED7623"/>
                 </a:solidFill>
@@ -7380,8 +7111,8 @@
         </p:nvSpPr>
         <p:spPr>
           <a:xfrm>
-            <a:off x="7452360" y="2880360"/>
-            <a:ext cx="3108960" cy="548640"/>
+            <a:off x="3108960" y="3886200"/>
+            <a:ext cx="7498079" cy="548640"/>
           </a:xfrm>
           <a:prstGeom prst="rect">
             <a:avLst/>
@@ -7403,13 +7134,13 @@
               </a:spcAft>
             </a:pPr>
             <a:r>
-              <a:rPr sz="1550" b="0">
+              <a:rPr sz="1800" b="0">
                 <a:solidFill>
                   <a:srgbClr val="11406E"/>
                 </a:solidFill>
                 <a:latin typeface="Helvetica Neue"/>
               </a:rPr>
-              <a:t>Avatar encima, sin fondo</a:t>
+              <a:t>Música de fondo al 10 o 15 % del volumen</a:t>
             </a:r>
           </a:p>
         </p:txBody>
@@ -7422,8 +7153,8 @@
         </p:nvSpPr>
         <p:spPr>
           <a:xfrm>
-            <a:off x="2103120" y="3794760"/>
-            <a:ext cx="4160520" cy="868680"/>
+            <a:off x="2103120" y="4709160"/>
+            <a:ext cx="8778240" cy="822960"/>
           </a:xfrm>
           <a:prstGeom prst="roundRect">
             <a:avLst>
@@ -7470,7 +7201,7 @@
         </p:nvSpPr>
         <p:spPr>
           <a:xfrm>
-            <a:off x="2423160" y="3922776"/>
+            <a:off x="2468880" y="4837176"/>
             <a:ext cx="457200" cy="548640"/>
           </a:xfrm>
           <a:prstGeom prst="rect">
@@ -7490,7 +7221,7 @@
               </a:spcAft>
             </a:pPr>
             <a:r>
-              <a:rPr sz="2200" b="1">
+              <a:rPr sz="2400" b="1">
                 <a:solidFill>
                   <a:srgbClr val="ED7623"/>
                 </a:solidFill>
@@ -7509,8 +7240,8 @@
         </p:nvSpPr>
         <p:spPr>
           <a:xfrm>
-            <a:off x="2971800" y="3977640"/>
-            <a:ext cx="3108960" cy="548640"/>
+            <a:off x="3108960" y="4892040"/>
+            <a:ext cx="7498079" cy="548640"/>
           </a:xfrm>
           <a:prstGeom prst="rect">
             <a:avLst/>
@@ -7532,13 +7263,13 @@
               </a:spcAft>
             </a:pPr>
             <a:r>
-              <a:rPr sz="1550" b="0">
+              <a:rPr sz="1800" b="0">
                 <a:solidFill>
                   <a:srgbClr val="11406E"/>
                 </a:solidFill>
                 <a:latin typeface="Helvetica Neue"/>
               </a:rPr>
-              <a:t>La voz debajo de todo</a:t>
+              <a:t>Cortar el silencio entre clip y clip</a:t>
             </a:r>
           </a:p>
         </p:txBody>
@@ -7551,395 +7282,8 @@
         </p:nvSpPr>
         <p:spPr>
           <a:xfrm>
-            <a:off x="6583680" y="3794760"/>
-            <a:ext cx="4160520" cy="868680"/>
-          </a:xfrm>
-          <a:prstGeom prst="roundRect">
-            <a:avLst>
-              <a:gd name="adj" fmla="val 5000"/>
-            </a:avLst>
-          </a:prstGeom>
-          <a:solidFill>
-            <a:srgbClr val="F5F3EF"/>
-          </a:solidFill>
-          <a:ln w="11430">
-            <a:solidFill>
-              <a:srgbClr val="E3E0DA"/>
-            </a:solidFill>
-          </a:ln>
-          <a:effectLst/>
-        </p:spPr>
-        <p:style>
-          <a:lnRef idx="1">
-            <a:schemeClr val="accent1"/>
-          </a:lnRef>
-          <a:fillRef idx="3">
-            <a:schemeClr val="accent1"/>
-          </a:fillRef>
-          <a:effectRef idx="2">
-            <a:schemeClr val="accent1"/>
-          </a:effectRef>
-          <a:fontRef idx="minor">
-            <a:schemeClr val="lt1"/>
-          </a:fontRef>
-        </p:style>
-        <p:txBody>
-          <a:bodyPr rtlCol="0" anchor="ctr"/>
-          <a:lstStyle/>
-          <a:p>
-            <a:pPr algn="ctr"/>
-          </a:p>
-        </p:txBody>
-      </p:sp>
-      <p:sp>
-        <p:nvSpPr>
-          <p:cNvPr id="16" name="TextBox 15"/>
-          <p:cNvSpPr txBox="1"/>
-          <p:nvPr/>
-        </p:nvSpPr>
-        <p:spPr>
-          <a:xfrm>
-            <a:off x="6903720" y="3922776"/>
-            <a:ext cx="457200" cy="548640"/>
-          </a:xfrm>
-          <a:prstGeom prst="rect">
-            <a:avLst/>
-          </a:prstGeom>
-          <a:noFill/>
-        </p:spPr>
-        <p:txBody>
-          <a:bodyPr wrap="square" lIns="0" rIns="0" tIns="0" bIns="0">
-            <a:spAutoFit/>
-          </a:bodyPr>
-          <a:lstStyle/>
-          <a:p>
-            <a:pPr algn="l">
-              <a:spcAft>
-                <a:spcPts val="600"/>
-              </a:spcAft>
-            </a:pPr>
-            <a:r>
-              <a:rPr sz="2200" b="1">
-                <a:solidFill>
-                  <a:srgbClr val="ED7623"/>
-                </a:solidFill>
-                <a:latin typeface="Helvetica Neue"/>
-              </a:rPr>
-              <a:t>4</a:t>
-            </a:r>
-          </a:p>
-        </p:txBody>
-      </p:sp>
-      <p:sp>
-        <p:nvSpPr>
-          <p:cNvPr id="17" name="TextBox 16"/>
-          <p:cNvSpPr txBox="1"/>
-          <p:nvPr/>
-        </p:nvSpPr>
-        <p:spPr>
-          <a:xfrm>
-            <a:off x="7452360" y="3977640"/>
-            <a:ext cx="3108960" cy="548640"/>
-          </a:xfrm>
-          <a:prstGeom prst="rect">
-            <a:avLst/>
-          </a:prstGeom>
-          <a:noFill/>
-        </p:spPr>
-        <p:txBody>
-          <a:bodyPr wrap="square" lIns="0" rIns="0" tIns="0" bIns="0">
-            <a:spAutoFit/>
-          </a:bodyPr>
-          <a:lstStyle/>
-          <a:p>
-            <a:pPr algn="l">
-              <a:lnSpc>
-                <a:spcPct val="115000"/>
-              </a:lnSpc>
-              <a:spcAft>
-                <a:spcPts val="600"/>
-              </a:spcAft>
-            </a:pPr>
-            <a:r>
-              <a:rPr sz="1550" b="0">
-                <a:solidFill>
-                  <a:srgbClr val="11406E"/>
-                </a:solidFill>
-                <a:latin typeface="Helvetica Neue"/>
-              </a:rPr>
-              <a:t>Cortar los silencios largos</a:t>
-            </a:r>
-          </a:p>
-        </p:txBody>
-      </p:sp>
-      <p:sp>
-        <p:nvSpPr>
-          <p:cNvPr id="18" name="Rounded Rectangle 17"/>
-          <p:cNvSpPr/>
-          <p:nvPr/>
-        </p:nvSpPr>
-        <p:spPr>
-          <a:xfrm>
-            <a:off x="2103120" y="4892040"/>
-            <a:ext cx="4160520" cy="868680"/>
-          </a:xfrm>
-          <a:prstGeom prst="roundRect">
-            <a:avLst>
-              <a:gd name="adj" fmla="val 5000"/>
-            </a:avLst>
-          </a:prstGeom>
-          <a:solidFill>
-            <a:srgbClr val="F5F3EF"/>
-          </a:solidFill>
-          <a:ln w="11430">
-            <a:solidFill>
-              <a:srgbClr val="E3E0DA"/>
-            </a:solidFill>
-          </a:ln>
-          <a:effectLst/>
-        </p:spPr>
-        <p:style>
-          <a:lnRef idx="1">
-            <a:schemeClr val="accent1"/>
-          </a:lnRef>
-          <a:fillRef idx="3">
-            <a:schemeClr val="accent1"/>
-          </a:fillRef>
-          <a:effectRef idx="2">
-            <a:schemeClr val="accent1"/>
-          </a:effectRef>
-          <a:fontRef idx="minor">
-            <a:schemeClr val="lt1"/>
-          </a:fontRef>
-        </p:style>
-        <p:txBody>
-          <a:bodyPr rtlCol="0" anchor="ctr"/>
-          <a:lstStyle/>
-          <a:p>
-            <a:pPr algn="ctr"/>
-          </a:p>
-        </p:txBody>
-      </p:sp>
-      <p:sp>
-        <p:nvSpPr>
-          <p:cNvPr id="19" name="TextBox 18"/>
-          <p:cNvSpPr txBox="1"/>
-          <p:nvPr/>
-        </p:nvSpPr>
-        <p:spPr>
-          <a:xfrm>
-            <a:off x="2423160" y="5020055"/>
-            <a:ext cx="457200" cy="548640"/>
-          </a:xfrm>
-          <a:prstGeom prst="rect">
-            <a:avLst/>
-          </a:prstGeom>
-          <a:noFill/>
-        </p:spPr>
-        <p:txBody>
-          <a:bodyPr wrap="square" lIns="0" rIns="0" tIns="0" bIns="0">
-            <a:spAutoFit/>
-          </a:bodyPr>
-          <a:lstStyle/>
-          <a:p>
-            <a:pPr algn="l">
-              <a:spcAft>
-                <a:spcPts val="600"/>
-              </a:spcAft>
-            </a:pPr>
-            <a:r>
-              <a:rPr sz="2200" b="1">
-                <a:solidFill>
-                  <a:srgbClr val="ED7623"/>
-                </a:solidFill>
-                <a:latin typeface="Helvetica Neue"/>
-              </a:rPr>
-              <a:t>5</a:t>
-            </a:r>
-          </a:p>
-        </p:txBody>
-      </p:sp>
-      <p:sp>
-        <p:nvSpPr>
-          <p:cNvPr id="20" name="TextBox 19"/>
-          <p:cNvSpPr txBox="1"/>
-          <p:nvPr/>
-        </p:nvSpPr>
-        <p:spPr>
-          <a:xfrm>
-            <a:off x="2971800" y="5074920"/>
-            <a:ext cx="3108960" cy="548640"/>
-          </a:xfrm>
-          <a:prstGeom prst="rect">
-            <a:avLst/>
-          </a:prstGeom>
-          <a:noFill/>
-        </p:spPr>
-        <p:txBody>
-          <a:bodyPr wrap="square" lIns="0" rIns="0" tIns="0" bIns="0">
-            <a:spAutoFit/>
-          </a:bodyPr>
-          <a:lstStyle/>
-          <a:p>
-            <a:pPr algn="l">
-              <a:lnSpc>
-                <a:spcPct val="115000"/>
-              </a:lnSpc>
-              <a:spcAft>
-                <a:spcPts val="600"/>
-              </a:spcAft>
-            </a:pPr>
-            <a:r>
-              <a:rPr sz="1550" b="0">
-                <a:solidFill>
-                  <a:srgbClr val="11406E"/>
-                </a:solidFill>
-                <a:latin typeface="Helvetica Neue"/>
-              </a:rPr>
-              <a:t>Subtítulos automáticos, y revisarlos</a:t>
-            </a:r>
-          </a:p>
-        </p:txBody>
-      </p:sp>
-      <p:sp>
-        <p:nvSpPr>
-          <p:cNvPr id="21" name="Rounded Rectangle 20"/>
-          <p:cNvSpPr/>
-          <p:nvPr/>
-        </p:nvSpPr>
-        <p:spPr>
-          <a:xfrm>
-            <a:off x="6583680" y="4892040"/>
-            <a:ext cx="4160520" cy="868680"/>
-          </a:xfrm>
-          <a:prstGeom prst="roundRect">
-            <a:avLst>
-              <a:gd name="adj" fmla="val 5000"/>
-            </a:avLst>
-          </a:prstGeom>
-          <a:solidFill>
-            <a:srgbClr val="F5F3EF"/>
-          </a:solidFill>
-          <a:ln w="11430">
-            <a:solidFill>
-              <a:srgbClr val="E3E0DA"/>
-            </a:solidFill>
-          </a:ln>
-          <a:effectLst/>
-        </p:spPr>
-        <p:style>
-          <a:lnRef idx="1">
-            <a:schemeClr val="accent1"/>
-          </a:lnRef>
-          <a:fillRef idx="3">
-            <a:schemeClr val="accent1"/>
-          </a:fillRef>
-          <a:effectRef idx="2">
-            <a:schemeClr val="accent1"/>
-          </a:effectRef>
-          <a:fontRef idx="minor">
-            <a:schemeClr val="lt1"/>
-          </a:fontRef>
-        </p:style>
-        <p:txBody>
-          <a:bodyPr rtlCol="0" anchor="ctr"/>
-          <a:lstStyle/>
-          <a:p>
-            <a:pPr algn="ctr"/>
-          </a:p>
-        </p:txBody>
-      </p:sp>
-      <p:sp>
-        <p:nvSpPr>
-          <p:cNvPr id="22" name="TextBox 21"/>
-          <p:cNvSpPr txBox="1"/>
-          <p:nvPr/>
-        </p:nvSpPr>
-        <p:spPr>
-          <a:xfrm>
-            <a:off x="6903720" y="5020055"/>
-            <a:ext cx="457200" cy="548640"/>
-          </a:xfrm>
-          <a:prstGeom prst="rect">
-            <a:avLst/>
-          </a:prstGeom>
-          <a:noFill/>
-        </p:spPr>
-        <p:txBody>
-          <a:bodyPr wrap="square" lIns="0" rIns="0" tIns="0" bIns="0">
-            <a:spAutoFit/>
-          </a:bodyPr>
-          <a:lstStyle/>
-          <a:p>
-            <a:pPr algn="l">
-              <a:spcAft>
-                <a:spcPts val="600"/>
-              </a:spcAft>
-            </a:pPr>
-            <a:r>
-              <a:rPr sz="2200" b="1">
-                <a:solidFill>
-                  <a:srgbClr val="ED7623"/>
-                </a:solidFill>
-                <a:latin typeface="Helvetica Neue"/>
-              </a:rPr>
-              <a:t>6</a:t>
-            </a:r>
-          </a:p>
-        </p:txBody>
-      </p:sp>
-      <p:sp>
-        <p:nvSpPr>
-          <p:cNvPr id="23" name="TextBox 22"/>
-          <p:cNvSpPr txBox="1"/>
-          <p:nvPr/>
-        </p:nvSpPr>
-        <p:spPr>
-          <a:xfrm>
-            <a:off x="7452360" y="5074920"/>
-            <a:ext cx="3108960" cy="548640"/>
-          </a:xfrm>
-          <a:prstGeom prst="rect">
-            <a:avLst/>
-          </a:prstGeom>
-          <a:noFill/>
-        </p:spPr>
-        <p:txBody>
-          <a:bodyPr wrap="square" lIns="0" rIns="0" tIns="0" bIns="0">
-            <a:spAutoFit/>
-          </a:bodyPr>
-          <a:lstStyle/>
-          <a:p>
-            <a:pPr algn="l">
-              <a:lnSpc>
-                <a:spcPct val="115000"/>
-              </a:lnSpc>
-              <a:spcAft>
-                <a:spcPts val="600"/>
-              </a:spcAft>
-            </a:pPr>
-            <a:r>
-              <a:rPr sz="1550" b="0">
-                <a:solidFill>
-                  <a:srgbClr val="11406E"/>
-                </a:solidFill>
-                <a:latin typeface="Helvetica Neue"/>
-              </a:rPr>
-              <a:t>Música baja · zoom lento sobre la imagen</a:t>
-            </a:r>
-          </a:p>
-        </p:txBody>
-      </p:sp>
-      <p:sp>
-        <p:nvSpPr>
-          <p:cNvPr id="24" name="Rounded Rectangle 23"/>
-          <p:cNvSpPr/>
-          <p:nvPr/>
-        </p:nvSpPr>
-        <p:spPr>
-          <a:xfrm>
-            <a:off x="2103120" y="5943600"/>
-            <a:ext cx="8778240" cy="713232"/>
+            <a:off x="2103120" y="5806440"/>
+            <a:ext cx="8778240" cy="777240"/>
           </a:xfrm>
           <a:prstGeom prst="roundRect">
             <a:avLst>
@@ -7978,13 +7322,13 @@
       </p:sp>
       <p:sp>
         <p:nvSpPr>
-          <p:cNvPr id="25" name="TextBox 24"/>
+          <p:cNvPr id="16" name="TextBox 15"/>
           <p:cNvSpPr txBox="1"/>
           <p:nvPr/>
         </p:nvSpPr>
         <p:spPr>
           <a:xfrm>
-            <a:off x="2514600" y="6117336"/>
+            <a:off x="2514600" y="6007608"/>
             <a:ext cx="8138160" cy="457200"/>
           </a:xfrm>
           <a:prstGeom prst="rect">
@@ -8115,11 +7459,11 @@
             <a:r>
               <a:rPr sz="1200" b="1">
                 <a:solidFill>
-                  <a:srgbClr val="ED7623"/>
-                </a:solidFill>
-                <a:latin typeface="Helvetica Neue"/>
-              </a:rPr>
-              <a:t>EL EJEMPLO</a:t>
+                  <a:srgbClr val="35789C"/>
+                </a:solidFill>
+                <a:latin typeface="Helvetica Neue"/>
+              </a:rPr>
+              <a:t>SI NO TIENES CUPO DE VIDEO</a:t>
             </a:r>
           </a:p>
         </p:txBody>
@@ -8161,7 +7505,7 @@
                 </a:solidFill>
                 <a:latin typeface="Helvetica Neue"/>
               </a:rPr>
-              <a:t>Un ingeniero de sistemas explicando la IA</a:t>
+              <a:t>Ruta B: funciona en cualquier cuenta</a:t>
             </a:r>
           </a:p>
         </p:txBody>
@@ -8194,13 +7538,13 @@
               </a:spcAft>
             </a:pPr>
             <a:r>
-              <a:rPr sz="2000" b="0">
+              <a:rPr sz="1900" b="0">
                 <a:solidFill>
                   <a:srgbClr val="6E6E6E"/>
                 </a:solidFill>
                 <a:latin typeface="Helvetica Neue"/>
               </a:rPr>
-              <a:t>A gente que no es de ingeniería y nunca ha visto cómo funciona por dentro.</a:t>
+              <a:t>Sale un video quieto pero bien contado. Y lo bien contado pesa más que el movimiento.</a:t>
             </a:r>
           </a:p>
         </p:txBody>
@@ -8213,7 +7557,7 @@
         </p:nvSpPr>
         <p:spPr>
           <a:xfrm>
-            <a:off x="822960" y="2971800"/>
+            <a:off x="822960" y="2926080"/>
             <a:ext cx="10607040" cy="731520"/>
           </a:xfrm>
           <a:prstGeom prst="roundRect">
@@ -8261,8 +7605,8 @@
         </p:nvSpPr>
         <p:spPr>
           <a:xfrm>
-            <a:off x="1188720" y="3118104"/>
-            <a:ext cx="2194560" cy="457200"/>
+            <a:off x="1188720" y="3054096"/>
+            <a:ext cx="457200" cy="548640"/>
           </a:xfrm>
           <a:prstGeom prst="rect">
             <a:avLst/>
@@ -8281,13 +7625,13 @@
               </a:spcAft>
             </a:pPr>
             <a:r>
-              <a:rPr sz="1900" b="1">
+              <a:rPr sz="2200" b="1">
                 <a:solidFill>
                   <a:srgbClr val="ED7623"/>
                 </a:solidFill>
                 <a:latin typeface="Helvetica Neue"/>
               </a:rPr>
-              <a:t>Guion</a:t>
+              <a:t>1</a:t>
             </a:r>
           </a:p>
         </p:txBody>
@@ -8300,8 +7644,8 @@
         </p:nvSpPr>
         <p:spPr>
           <a:xfrm>
-            <a:off x="3566160" y="3145536"/>
-            <a:ext cx="7498079" cy="457200"/>
+            <a:off x="1828800" y="3099816"/>
+            <a:ext cx="2011680" cy="457200"/>
           </a:xfrm>
           <a:prstGeom prst="rect">
             <a:avLst/>
@@ -8320,26 +7664,65 @@
               </a:spcAft>
             </a:pPr>
             <a:r>
-              <a:rPr sz="1600" b="0">
+              <a:rPr sz="1800" b="1">
+                <a:solidFill>
+                  <a:srgbClr val="11406E"/>
+                </a:solidFill>
+                <a:latin typeface="Helvetica Neue"/>
+              </a:rPr>
+              <a:t>Ambiente</a:t>
+            </a:r>
+          </a:p>
+        </p:txBody>
+      </p:sp>
+      <p:sp>
+        <p:nvSpPr>
+          <p:cNvPr id="9" name="TextBox 8"/>
+          <p:cNvSpPr txBox="1"/>
+          <p:nvPr/>
+        </p:nvSpPr>
+        <p:spPr>
+          <a:xfrm>
+            <a:off x="3931920" y="3118104"/>
+            <a:ext cx="7132320" cy="457200"/>
+          </a:xfrm>
+          <a:prstGeom prst="rect">
+            <a:avLst/>
+          </a:prstGeom>
+          <a:noFill/>
+        </p:spPr>
+        <p:txBody>
+          <a:bodyPr wrap="square" lIns="0" rIns="0" tIns="0" bIns="0">
+            <a:spAutoFit/>
+          </a:bodyPr>
+          <a:lstStyle/>
+          <a:p>
+            <a:pPr algn="l">
+              <a:spcAft>
+                <a:spcPts val="600"/>
+              </a:spcAft>
+            </a:pPr>
+            <a:r>
+              <a:rPr sz="1500" b="0">
                 <a:solidFill>
                   <a:srgbClr val="6E6E6E"/>
                 </a:solidFill>
                 <a:latin typeface="Helvetica Neue"/>
               </a:rPr>
-              <a:t>81 palabras, sin decir «algoritmo» ni «modelo»</a:t>
-            </a:r>
-          </a:p>
-        </p:txBody>
-      </p:sp>
-      <p:sp>
-        <p:nvSpPr>
-          <p:cNvPr id="9" name="Rounded Rectangle 8"/>
+              <a:t>Una imagen 16:9 del lugar, sin personas y con espacio libre a un lado</a:t>
+            </a:r>
+          </a:p>
+        </p:txBody>
+      </p:sp>
+      <p:sp>
+        <p:nvSpPr>
+          <p:cNvPr id="10" name="Rounded Rectangle 9"/>
           <p:cNvSpPr/>
           <p:nvPr/>
         </p:nvSpPr>
         <p:spPr>
           <a:xfrm>
-            <a:off x="822960" y="3840480"/>
+            <a:off x="822960" y="3794760"/>
             <a:ext cx="10607040" cy="731520"/>
           </a:xfrm>
           <a:prstGeom prst="roundRect">
@@ -8381,14 +7764,14 @@
       </p:sp>
       <p:sp>
         <p:nvSpPr>
-          <p:cNvPr id="10" name="TextBox 9"/>
+          <p:cNvPr id="11" name="TextBox 10"/>
           <p:cNvSpPr txBox="1"/>
           <p:nvPr/>
         </p:nvSpPr>
         <p:spPr>
           <a:xfrm>
-            <a:off x="1188720" y="3986784"/>
-            <a:ext cx="2194560" cy="457200"/>
+            <a:off x="1188720" y="3922776"/>
+            <a:ext cx="457200" cy="548640"/>
           </a:xfrm>
           <a:prstGeom prst="rect">
             <a:avLst/>
@@ -8407,27 +7790,27 @@
               </a:spcAft>
             </a:pPr>
             <a:r>
-              <a:rPr sz="1900" b="1">
+              <a:rPr sz="2200" b="1">
                 <a:solidFill>
                   <a:srgbClr val="ED7623"/>
                 </a:solidFill>
                 <a:latin typeface="Helvetica Neue"/>
               </a:rPr>
-              <a:t>Ambiente</a:t>
-            </a:r>
-          </a:p>
-        </p:txBody>
-      </p:sp>
-      <p:sp>
-        <p:nvSpPr>
-          <p:cNvPr id="11" name="TextBox 10"/>
+              <a:t>2</a:t>
+            </a:r>
+          </a:p>
+        </p:txBody>
+      </p:sp>
+      <p:sp>
+        <p:nvSpPr>
+          <p:cNvPr id="12" name="TextBox 11"/>
           <p:cNvSpPr txBox="1"/>
           <p:nvPr/>
         </p:nvSpPr>
         <p:spPr>
           <a:xfrm>
-            <a:off x="3566160" y="4014216"/>
-            <a:ext cx="7498079" cy="457200"/>
+            <a:off x="1828800" y="3968496"/>
+            <a:ext cx="2011680" cy="457200"/>
           </a:xfrm>
           <a:prstGeom prst="rect">
             <a:avLst/>
@@ -8446,26 +7829,65 @@
               </a:spcAft>
             </a:pPr>
             <a:r>
-              <a:rPr sz="1600" b="0">
+              <a:rPr sz="1800" b="1">
+                <a:solidFill>
+                  <a:srgbClr val="11406E"/>
+                </a:solidFill>
+                <a:latin typeface="Helvetica Neue"/>
+              </a:rPr>
+              <a:t>Personaje</a:t>
+            </a:r>
+          </a:p>
+        </p:txBody>
+      </p:sp>
+      <p:sp>
+        <p:nvSpPr>
+          <p:cNvPr id="13" name="TextBox 12"/>
+          <p:cNvSpPr txBox="1"/>
+          <p:nvPr/>
+        </p:nvSpPr>
+        <p:spPr>
+          <a:xfrm>
+            <a:off x="3931920" y="3986784"/>
+            <a:ext cx="7132320" cy="457200"/>
+          </a:xfrm>
+          <a:prstGeom prst="rect">
+            <a:avLst/>
+          </a:prstGeom>
+          <a:noFill/>
+        </p:spPr>
+        <p:txBody>
+          <a:bodyPr wrap="square" lIns="0" rIns="0" tIns="0" bIns="0">
+            <a:spAutoFit/>
+          </a:bodyPr>
+          <a:lstStyle/>
+          <a:p>
+            <a:pPr algn="l">
+              <a:spcAft>
+                <a:spcPts val="600"/>
+              </a:spcAft>
+            </a:pPr>
+            <a:r>
+              <a:rPr sz="1500" b="0">
                 <a:solidFill>
                   <a:srgbClr val="6E6E6E"/>
                 </a:solidFill>
                 <a:latin typeface="Helvetica Neue"/>
               </a:rPr>
-              <a:t>Un salón vacío, con espacio libre a la derecha</a:t>
-            </a:r>
-          </a:p>
-        </p:txBody>
-      </p:sp>
-      <p:sp>
-        <p:nvSpPr>
-          <p:cNvPr id="12" name="Rounded Rectangle 11"/>
+              <a:t>Tu foto → retrato con fondo gris liso, para poder recortarlo</a:t>
+            </a:r>
+          </a:p>
+        </p:txBody>
+      </p:sp>
+      <p:sp>
+        <p:nvSpPr>
+          <p:cNvPr id="14" name="Rounded Rectangle 13"/>
           <p:cNvSpPr/>
           <p:nvPr/>
         </p:nvSpPr>
         <p:spPr>
           <a:xfrm>
-            <a:off x="822960" y="4709160"/>
+            <a:off x="822960" y="4663440"/>
             <a:ext cx="10607040" cy="731520"/>
           </a:xfrm>
           <a:prstGeom prst="roundRect">
@@ -8507,14 +7929,14 @@
       </p:sp>
       <p:sp>
         <p:nvSpPr>
-          <p:cNvPr id="13" name="TextBox 12"/>
+          <p:cNvPr id="15" name="TextBox 14"/>
           <p:cNvSpPr txBox="1"/>
           <p:nvPr/>
         </p:nvSpPr>
         <p:spPr>
           <a:xfrm>
-            <a:off x="1188720" y="4855464"/>
-            <a:ext cx="2194560" cy="457200"/>
+            <a:off x="1188720" y="4791455"/>
+            <a:ext cx="457200" cy="548640"/>
           </a:xfrm>
           <a:prstGeom prst="rect">
             <a:avLst/>
@@ -8533,27 +7955,27 @@
               </a:spcAft>
             </a:pPr>
             <a:r>
-              <a:rPr sz="1900" b="1">
+              <a:rPr sz="2200" b="1">
                 <a:solidFill>
                   <a:srgbClr val="ED7623"/>
                 </a:solidFill>
                 <a:latin typeface="Helvetica Neue"/>
               </a:rPr>
-              <a:t>Avatar</a:t>
-            </a:r>
-          </a:p>
-        </p:txBody>
-      </p:sp>
-      <p:sp>
-        <p:nvSpPr>
-          <p:cNvPr id="14" name="TextBox 13"/>
+              <a:t>3</a:t>
+            </a:r>
+          </a:p>
+        </p:txBody>
+      </p:sp>
+      <p:sp>
+        <p:nvSpPr>
+          <p:cNvPr id="16" name="TextBox 15"/>
           <p:cNvSpPr txBox="1"/>
           <p:nvPr/>
         </p:nvSpPr>
         <p:spPr>
           <a:xfrm>
-            <a:off x="3566160" y="4882896"/>
-            <a:ext cx="7498079" cy="457200"/>
+            <a:off x="1828800" y="4837176"/>
+            <a:ext cx="2011680" cy="457200"/>
           </a:xfrm>
           <a:prstGeom prst="rect">
             <a:avLst/>
@@ -8572,26 +7994,65 @@
               </a:spcAft>
             </a:pPr>
             <a:r>
-              <a:rPr sz="1600" b="0">
+              <a:rPr sz="1800" b="1">
+                <a:solidFill>
+                  <a:srgbClr val="11406E"/>
+                </a:solidFill>
+                <a:latin typeface="Helvetica Neue"/>
+              </a:rPr>
+              <a:t>Voz</a:t>
+            </a:r>
+          </a:p>
+        </p:txBody>
+      </p:sp>
+      <p:sp>
+        <p:nvSpPr>
+          <p:cNvPr id="17" name="TextBox 16"/>
+          <p:cNvSpPr txBox="1"/>
+          <p:nvPr/>
+        </p:nvSpPr>
+        <p:spPr>
+          <a:xfrm>
+            <a:off x="3931920" y="4855464"/>
+            <a:ext cx="7132320" cy="457200"/>
+          </a:xfrm>
+          <a:prstGeom prst="rect">
+            <a:avLst/>
+          </a:prstGeom>
+          <a:noFill/>
+        </p:spPr>
+        <p:txBody>
+          <a:bodyPr wrap="square" lIns="0" rIns="0" tIns="0" bIns="0">
+            <a:spAutoFit/>
+          </a:bodyPr>
+          <a:lstStyle/>
+          <a:p>
+            <a:pPr algn="l">
+              <a:spcAft>
+                <a:spcPts val="600"/>
+              </a:spcAft>
+            </a:pPr>
+            <a:r>
+              <a:rPr sz="1500" b="0">
                 <a:solidFill>
                   <a:srgbClr val="6E6E6E"/>
                 </a:solidFill>
                 <a:latin typeface="Helvetica Neue"/>
               </a:rPr>
-              <a:t>Mi foto → ingeniero de sistemas, fondo gris</a:t>
-            </a:r>
-          </a:p>
-        </p:txBody>
-      </p:sp>
-      <p:sp>
-        <p:nvSpPr>
-          <p:cNvPr id="15" name="Rounded Rectangle 14"/>
+              <a:t>ElevenLabs, con el guion completo</a:t>
+            </a:r>
+          </a:p>
+        </p:txBody>
+      </p:sp>
+      <p:sp>
+        <p:nvSpPr>
+          <p:cNvPr id="18" name="Rounded Rectangle 17"/>
           <p:cNvSpPr/>
           <p:nvPr/>
         </p:nvSpPr>
         <p:spPr>
           <a:xfrm>
-            <a:off x="822960" y="5577840"/>
+            <a:off x="822960" y="5532120"/>
             <a:ext cx="10607040" cy="731520"/>
           </a:xfrm>
           <a:prstGeom prst="roundRect">
@@ -8633,14 +8094,14 @@
       </p:sp>
       <p:sp>
         <p:nvSpPr>
-          <p:cNvPr id="16" name="TextBox 15"/>
+          <p:cNvPr id="19" name="TextBox 18"/>
           <p:cNvSpPr txBox="1"/>
           <p:nvPr/>
         </p:nvSpPr>
         <p:spPr>
           <a:xfrm>
-            <a:off x="1188720" y="5724144"/>
-            <a:ext cx="2194560" cy="457200"/>
+            <a:off x="1188720" y="5660136"/>
+            <a:ext cx="457200" cy="548640"/>
           </a:xfrm>
           <a:prstGeom prst="rect">
             <a:avLst/>
@@ -8659,27 +8120,27 @@
               </a:spcAft>
             </a:pPr>
             <a:r>
-              <a:rPr sz="1900" b="1">
+              <a:rPr sz="2200" b="1">
                 <a:solidFill>
                   <a:srgbClr val="ED7623"/>
                 </a:solidFill>
                 <a:latin typeface="Helvetica Neue"/>
               </a:rPr>
-              <a:t>Voz</a:t>
-            </a:r>
-          </a:p>
-        </p:txBody>
-      </p:sp>
-      <p:sp>
-        <p:nvSpPr>
-          <p:cNvPr id="17" name="TextBox 16"/>
+              <a:t>4</a:t>
+            </a:r>
+          </a:p>
+        </p:txBody>
+      </p:sp>
+      <p:sp>
+        <p:nvSpPr>
+          <p:cNvPr id="20" name="TextBox 19"/>
           <p:cNvSpPr txBox="1"/>
           <p:nvPr/>
         </p:nvSpPr>
         <p:spPr>
           <a:xfrm>
-            <a:off x="3566160" y="5751576"/>
-            <a:ext cx="7498079" cy="457200"/>
+            <a:off x="1828800" y="5705856"/>
+            <a:ext cx="2011680" cy="457200"/>
           </a:xfrm>
           <a:prstGeom prst="rect">
             <a:avLst/>
@@ -8698,27 +8159,27 @@
               </a:spcAft>
             </a:pPr>
             <a:r>
-              <a:rPr sz="1600" b="0">
-                <a:solidFill>
-                  <a:srgbClr val="6E6E6E"/>
-                </a:solidFill>
-                <a:latin typeface="Helvetica Neue"/>
-              </a:rPr>
-              <a:t>Cercana y pausada. No de noticiero</a:t>
-            </a:r>
-          </a:p>
-        </p:txBody>
-      </p:sp>
-      <p:sp>
-        <p:nvSpPr>
-          <p:cNvPr id="18" name="TextBox 17"/>
+              <a:rPr sz="1800" b="1">
+                <a:solidFill>
+                  <a:srgbClr val="11406E"/>
+                </a:solidFill>
+                <a:latin typeface="Helvetica Neue"/>
+              </a:rPr>
+              <a:t>Montaje</a:t>
+            </a:r>
+          </a:p>
+        </p:txBody>
+      </p:sp>
+      <p:sp>
+        <p:nvSpPr>
+          <p:cNvPr id="21" name="TextBox 20"/>
           <p:cNvSpPr txBox="1"/>
           <p:nvPr/>
         </p:nvSpPr>
         <p:spPr>
           <a:xfrm>
-            <a:off x="822960" y="6400800"/>
-            <a:ext cx="10515600" cy="365760"/>
+            <a:off x="3931920" y="5724144"/>
+            <a:ext cx="7132320" cy="457200"/>
           </a:xfrm>
           <a:prstGeom prst="rect">
             <a:avLst/>
@@ -8737,13 +8198,52 @@
               </a:spcAft>
             </a:pPr>
             <a:r>
+              <a:rPr sz="1500" b="0">
+                <a:solidFill>
+                  <a:srgbClr val="6E6E6E"/>
+                </a:solidFill>
+                <a:latin typeface="Helvetica Neue"/>
+              </a:rPr>
+              <a:t>CapCut: fondo, avatar sin fondo, voz, subtítulos y zoom lento</a:t>
+            </a:r>
+          </a:p>
+        </p:txBody>
+      </p:sp>
+      <p:sp>
+        <p:nvSpPr>
+          <p:cNvPr id="22" name="TextBox 21"/>
+          <p:cNvSpPr txBox="1"/>
+          <p:nvPr/>
+        </p:nvSpPr>
+        <p:spPr>
+          <a:xfrm>
+            <a:off x="822960" y="6446520"/>
+            <a:ext cx="10515600" cy="365760"/>
+          </a:xfrm>
+          <a:prstGeom prst="rect">
+            <a:avLst/>
+          </a:prstGeom>
+          <a:noFill/>
+        </p:spPr>
+        <p:txBody>
+          <a:bodyPr wrap="square" lIns="0" rIns="0" tIns="0" bIns="0">
+            <a:spAutoFit/>
+          </a:bodyPr>
+          <a:lstStyle/>
+          <a:p>
+            <a:pPr algn="l">
+              <a:spcAft>
+                <a:spcPts val="600"/>
+              </a:spcAft>
+            </a:pPr>
+            <a:r>
               <a:rPr sz="1400" b="0">
                 <a:solidFill>
                   <a:srgbClr val="6E6E6E"/>
                 </a:solidFill>
                 <a:latin typeface="Helvetica Neue"/>
               </a:rPr>
-              <a:t>Los cuatro prompts completos y el guion que salió están en las notas.</a:t>
+              <a:t>Los prompts completos están en las notas.</a:t>
             </a:r>
           </a:p>
         </p:txBody>
@@ -8852,7 +8352,7 @@
                 </a:solidFill>
                 <a:latin typeface="Helvetica Neue"/>
               </a:rPr>
-              <a:t>TU TURNO</a:t>
+              <a:t>EL EJEMPLO</a:t>
             </a:r>
           </a:p>
         </p:txBody>
@@ -8888,27 +8388,66 @@
               </a:spcAft>
             </a:pPr>
             <a:r>
-              <a:rPr sz="4000" b="1">
+              <a:rPr sz="3600" b="1">
                 <a:solidFill>
                   <a:srgbClr val="11406E"/>
                 </a:solidFill>
                 <a:latin typeface="Helvetica Neue"/>
               </a:rPr>
-              <a:t>Elige uno de los dos</a:t>
-            </a:r>
-          </a:p>
-        </p:txBody>
-      </p:sp>
-      <p:sp>
-        <p:nvSpPr>
-          <p:cNvPr id="5" name="Rounded Rectangle 4"/>
+              <a:t>Dos clips, el mismo personaje</a:t>
+            </a:r>
+          </a:p>
+        </p:txBody>
+      </p:sp>
+      <p:sp>
+        <p:nvSpPr>
+          <p:cNvPr id="5" name="TextBox 4"/>
+          <p:cNvSpPr txBox="1"/>
+          <p:nvPr/>
+        </p:nvSpPr>
+        <p:spPr>
+          <a:xfrm>
+            <a:off x="822960" y="2103120"/>
+            <a:ext cx="10515600" cy="640080"/>
+          </a:xfrm>
+          <a:prstGeom prst="rect">
+            <a:avLst/>
+          </a:prstGeom>
+          <a:noFill/>
+        </p:spPr>
+        <p:txBody>
+          <a:bodyPr wrap="square" lIns="0" rIns="0" tIns="0" bIns="0">
+            <a:spAutoFit/>
+          </a:bodyPr>
+          <a:lstStyle/>
+          <a:p>
+            <a:pPr algn="l">
+              <a:spcAft>
+                <a:spcPts val="600"/>
+              </a:spcAft>
+            </a:pPr>
+            <a:r>
+              <a:rPr sz="1900" b="0">
+                <a:solidFill>
+                  <a:srgbClr val="6E6E6E"/>
+                </a:solidFill>
+                <a:latin typeface="Helvetica Neue"/>
+              </a:rPr>
+              <a:t>Misma cara, misma camisa, mismo salón. Lo único que lo logra es adjuntar la misma foto.</a:t>
+            </a:r>
+          </a:p>
+        </p:txBody>
+      </p:sp>
+      <p:sp>
+        <p:nvSpPr>
+          <p:cNvPr id="6" name="Rounded Rectangle 5"/>
           <p:cNvSpPr/>
           <p:nvPr/>
         </p:nvSpPr>
         <p:spPr>
           <a:xfrm>
-            <a:off x="822960" y="2377440"/>
-            <a:ext cx="5029200" cy="2377440"/>
+            <a:off x="822960" y="2971800"/>
+            <a:ext cx="10607040" cy="731520"/>
           </a:xfrm>
           <a:prstGeom prst="roundRect">
             <a:avLst>
@@ -8949,14 +8488,14 @@
       </p:sp>
       <p:sp>
         <p:nvSpPr>
-          <p:cNvPr id="6" name="TextBox 5"/>
+          <p:cNvPr id="7" name="TextBox 6"/>
           <p:cNvSpPr txBox="1"/>
           <p:nvPr/>
         </p:nvSpPr>
         <p:spPr>
           <a:xfrm>
-            <a:off x="1234440" y="2697480"/>
-            <a:ext cx="4206240" cy="822960"/>
+            <a:off x="1188720" y="3118104"/>
+            <a:ext cx="2194560" cy="457200"/>
           </a:xfrm>
           <a:prstGeom prst="rect">
             <a:avLst/>
@@ -8970,35 +8509,32 @@
           <a:lstStyle/>
           <a:p>
             <a:pPr algn="l">
-              <a:lnSpc>
-                <a:spcPct val="110000"/>
-              </a:lnSpc>
               <a:spcAft>
                 <a:spcPts val="600"/>
               </a:spcAft>
             </a:pPr>
             <a:r>
-              <a:rPr sz="2300" b="1">
-                <a:solidFill>
-                  <a:srgbClr val="35789C"/>
-                </a:solidFill>
-                <a:latin typeface="Helvetica Neue"/>
-              </a:rPr>
-              <a:t>Qué hago en mi carrera</a:t>
-            </a:r>
-          </a:p>
-        </p:txBody>
-      </p:sp>
-      <p:sp>
-        <p:nvSpPr>
-          <p:cNvPr id="7" name="TextBox 6"/>
+              <a:rPr sz="1900" b="1">
+                <a:solidFill>
+                  <a:srgbClr val="ED7623"/>
+                </a:solidFill>
+                <a:latin typeface="Helvetica Neue"/>
+              </a:rPr>
+              <a:t>Clip 1</a:t>
+            </a:r>
+          </a:p>
+        </p:txBody>
+      </p:sp>
+      <p:sp>
+        <p:nvSpPr>
+          <p:cNvPr id="8" name="TextBox 7"/>
           <p:cNvSpPr txBox="1"/>
           <p:nvPr/>
         </p:nvSpPr>
         <p:spPr>
           <a:xfrm>
-            <a:off x="1234440" y="3657600"/>
-            <a:ext cx="4206240" cy="1188720"/>
+            <a:off x="3566160" y="3145536"/>
+            <a:ext cx="7498079" cy="457200"/>
           </a:xfrm>
           <a:prstGeom prst="rect">
             <a:avLst/>
@@ -9012,35 +8548,32 @@
           <a:lstStyle/>
           <a:p>
             <a:pPr algn="l">
-              <a:lnSpc>
-                <a:spcPct val="130000"/>
-              </a:lnSpc>
               <a:spcAft>
                 <a:spcPts val="600"/>
               </a:spcAft>
             </a:pPr>
             <a:r>
-              <a:rPr sz="1600" b="0">
+              <a:rPr sz="1550" b="0">
                 <a:solidFill>
                   <a:srgbClr val="6E6E6E"/>
                 </a:solidFill>
                 <a:latin typeface="Helvetica Neue"/>
               </a:rPr>
-              <a:t>Un día normal de trabajo de alguien de tu programa. Lo que nadie se imagina que haces.</a:t>
-            </a:r>
-          </a:p>
-        </p:txBody>
-      </p:sp>
-      <p:sp>
-        <p:nvSpPr>
-          <p:cNvPr id="8" name="Rounded Rectangle 7"/>
+              <a:t>«¿Alguna vez le enseñaste algo a un niño mostrándole ejemplos?»</a:t>
+            </a:r>
+          </a:p>
+        </p:txBody>
+      </p:sp>
+      <p:sp>
+        <p:nvSpPr>
+          <p:cNvPr id="9" name="Rounded Rectangle 8"/>
           <p:cNvSpPr/>
           <p:nvPr/>
         </p:nvSpPr>
         <p:spPr>
           <a:xfrm>
-            <a:off x="6217920" y="2377440"/>
-            <a:ext cx="5029200" cy="2377440"/>
+            <a:off x="822960" y="3840480"/>
+            <a:ext cx="10607040" cy="731520"/>
           </a:xfrm>
           <a:prstGeom prst="roundRect">
             <a:avLst>
@@ -9081,14 +8614,14 @@
       </p:sp>
       <p:sp>
         <p:nvSpPr>
-          <p:cNvPr id="9" name="TextBox 8"/>
+          <p:cNvPr id="10" name="TextBox 9"/>
           <p:cNvSpPr txBox="1"/>
           <p:nvPr/>
         </p:nvSpPr>
         <p:spPr>
           <a:xfrm>
-            <a:off x="6629400" y="2697480"/>
-            <a:ext cx="4206240" cy="822960"/>
+            <a:off x="1188720" y="3986784"/>
+            <a:ext cx="2194560" cy="457200"/>
           </a:xfrm>
           <a:prstGeom prst="rect">
             <a:avLst/>
@@ -9102,35 +8635,32 @@
           <a:lstStyle/>
           <a:p>
             <a:pPr algn="l">
-              <a:lnSpc>
-                <a:spcPct val="110000"/>
-              </a:lnSpc>
               <a:spcAft>
                 <a:spcPts val="600"/>
               </a:spcAft>
             </a:pPr>
             <a:r>
-              <a:rPr sz="2300" b="1">
-                <a:solidFill>
-                  <a:srgbClr val="35789C"/>
-                </a:solidFill>
-                <a:latin typeface="Helvetica Neue"/>
-              </a:rPr>
-              <a:t>Lo que me costó entender</a:t>
-            </a:r>
-          </a:p>
-        </p:txBody>
-      </p:sp>
-      <p:sp>
-        <p:nvSpPr>
-          <p:cNvPr id="10" name="TextBox 9"/>
+              <a:rPr sz="1900" b="1">
+                <a:solidFill>
+                  <a:srgbClr val="ED7623"/>
+                </a:solidFill>
+                <a:latin typeface="Helvetica Neue"/>
+              </a:rPr>
+              <a:t>Clip 2</a:t>
+            </a:r>
+          </a:p>
+        </p:txBody>
+      </p:sp>
+      <p:sp>
+        <p:nvSpPr>
+          <p:cNvPr id="11" name="TextBox 10"/>
           <p:cNvSpPr txBox="1"/>
           <p:nvPr/>
         </p:nvSpPr>
         <p:spPr>
           <a:xfrm>
-            <a:off x="6629400" y="3657600"/>
-            <a:ext cx="4206240" cy="1188720"/>
+            <a:off x="3566160" y="4014216"/>
+            <a:ext cx="7498079" cy="457200"/>
           </a:xfrm>
           <a:prstGeom prst="rect">
             <a:avLst/>
@@ -9144,35 +8674,32 @@
           <a:lstStyle/>
           <a:p>
             <a:pPr algn="l">
-              <a:lnSpc>
-                <a:spcPct val="130000"/>
-              </a:lnSpc>
               <a:spcAft>
                 <a:spcPts val="600"/>
               </a:spcAft>
             </a:pPr>
             <a:r>
-              <a:rPr sz="1600" b="0">
+              <a:rPr sz="1550" b="0">
                 <a:solidFill>
                   <a:srgbClr val="6E6E6E"/>
                 </a:solidFill>
                 <a:latin typeface="Helvetica Neue"/>
               </a:rPr>
-              <a:t>Un concepto que te costó, explicado como te hubiera gustado que te lo explicaran.</a:t>
-            </a:r>
-          </a:p>
-        </p:txBody>
-      </p:sp>
-      <p:sp>
-        <p:nvSpPr>
-          <p:cNvPr id="11" name="Rounded Rectangle 10"/>
+              <a:t>«Nadie le explica las reglas. Le muestran miles de fotos de perros...»</a:t>
+            </a:r>
+          </a:p>
+        </p:txBody>
+      </p:sp>
+      <p:sp>
+        <p:nvSpPr>
+          <p:cNvPr id="12" name="Rounded Rectangle 11"/>
           <p:cNvSpPr/>
           <p:nvPr/>
         </p:nvSpPr>
         <p:spPr>
           <a:xfrm>
-            <a:off x="822960" y="5029200"/>
-            <a:ext cx="10515600" cy="1097280"/>
+            <a:off x="822960" y="4709160"/>
+            <a:ext cx="10607040" cy="731520"/>
           </a:xfrm>
           <a:prstGeom prst="roundRect">
             <a:avLst>
@@ -9180,10 +8707,12 @@
             </a:avLst>
           </a:prstGeom>
           <a:solidFill>
-            <a:srgbClr val="FDF0E6"/>
+            <a:srgbClr val="F5F3EF"/>
           </a:solidFill>
-          <a:ln>
-            <a:noFill/>
+          <a:ln w="11430">
+            <a:solidFill>
+              <a:srgbClr val="E3E0DA"/>
+            </a:solidFill>
           </a:ln>
           <a:effectLst/>
         </p:spPr>
@@ -9211,14 +8740,14 @@
       </p:sp>
       <p:sp>
         <p:nvSpPr>
-          <p:cNvPr id="12" name="TextBox 11"/>
+          <p:cNvPr id="13" name="TextBox 12"/>
           <p:cNvSpPr txBox="1"/>
           <p:nvPr/>
         </p:nvSpPr>
         <p:spPr>
           <a:xfrm>
-            <a:off x="1234440" y="5257800"/>
-            <a:ext cx="9692640" cy="822960"/>
+            <a:off x="1188720" y="4855464"/>
+            <a:ext cx="2194560" cy="457200"/>
           </a:xfrm>
           <a:prstGeom prst="rect">
             <a:avLst/>
@@ -9232,40 +8761,222 @@
           <a:lstStyle/>
           <a:p>
             <a:pPr algn="l">
-              <a:lnSpc>
-                <a:spcPct val="125000"/>
-              </a:lnSpc>
-              <a:spcAft>
-                <a:spcPts val="200"/>
-              </a:spcAft>
-            </a:pPr>
-            <a:r>
-              <a:rPr sz="2000" b="1">
+              <a:spcAft>
+                <a:spcPts val="600"/>
+              </a:spcAft>
+            </a:pPr>
+            <a:r>
+              <a:rPr sz="1900" b="1">
                 <a:solidFill>
                   <a:srgbClr val="ED7623"/>
                 </a:solidFill>
                 <a:latin typeface="Helvetica Neue"/>
               </a:rPr>
-              <a:t>60 a 90 segundos. Con tu personaje, tu ambiente y tu voz.</a:t>
-            </a:r>
-          </a:p>
-          <a:p>
-            <a:pPr algn="l">
-              <a:lnSpc>
-                <a:spcPct val="125000"/>
-              </a:lnSpc>
-              <a:spcAft>
-                <a:spcPts val="200"/>
-              </a:spcAft>
-            </a:pPr>
-            <a:r>
-              <a:rPr sz="1600" b="0">
+              <a:t>Lo que cambia</a:t>
+            </a:r>
+          </a:p>
+        </p:txBody>
+      </p:sp>
+      <p:sp>
+        <p:nvSpPr>
+          <p:cNvPr id="14" name="TextBox 13"/>
+          <p:cNvSpPr txBox="1"/>
+          <p:nvPr/>
+        </p:nvSpPr>
+        <p:spPr>
+          <a:xfrm>
+            <a:off x="3566160" y="4882896"/>
+            <a:ext cx="7498079" cy="457200"/>
+          </a:xfrm>
+          <a:prstGeom prst="rect">
+            <a:avLst/>
+          </a:prstGeom>
+          <a:noFill/>
+        </p:spPr>
+        <p:txBody>
+          <a:bodyPr wrap="square" lIns="0" rIns="0" tIns="0" bIns="0">
+            <a:spAutoFit/>
+          </a:bodyPr>
+          <a:lstStyle/>
+          <a:p>
+            <a:pPr algn="l">
+              <a:spcAft>
+                <a:spcPts val="600"/>
+              </a:spcAft>
+            </a:pPr>
+            <a:r>
+              <a:rPr sz="1550" b="0">
                 <a:solidFill>
                   <a:srgbClr val="6E6E6E"/>
                 </a:solidFill>
                 <a:latin typeface="Helvetica Neue"/>
               </a:rPr>
-              <a:t>Y al final, una línea diciendo qué hiciste con IA.</a:t>
+              <a:t>Solo la frase del prompt. Todo lo demás, idéntico.</a:t>
+            </a:r>
+          </a:p>
+        </p:txBody>
+      </p:sp>
+      <p:sp>
+        <p:nvSpPr>
+          <p:cNvPr id="15" name="Rounded Rectangle 14"/>
+          <p:cNvSpPr/>
+          <p:nvPr/>
+        </p:nvSpPr>
+        <p:spPr>
+          <a:xfrm>
+            <a:off x="822960" y="5577840"/>
+            <a:ext cx="10607040" cy="731520"/>
+          </a:xfrm>
+          <a:prstGeom prst="roundRect">
+            <a:avLst>
+              <a:gd name="adj" fmla="val 5000"/>
+            </a:avLst>
+          </a:prstGeom>
+          <a:solidFill>
+            <a:srgbClr val="F5F3EF"/>
+          </a:solidFill>
+          <a:ln w="11430">
+            <a:solidFill>
+              <a:srgbClr val="E3E0DA"/>
+            </a:solidFill>
+          </a:ln>
+          <a:effectLst/>
+        </p:spPr>
+        <p:style>
+          <a:lnRef idx="1">
+            <a:schemeClr val="accent1"/>
+          </a:lnRef>
+          <a:fillRef idx="3">
+            <a:schemeClr val="accent1"/>
+          </a:fillRef>
+          <a:effectRef idx="2">
+            <a:schemeClr val="accent1"/>
+          </a:effectRef>
+          <a:fontRef idx="minor">
+            <a:schemeClr val="lt1"/>
+          </a:fontRef>
+        </p:style>
+        <p:txBody>
+          <a:bodyPr rtlCol="0" anchor="ctr"/>
+          <a:lstStyle/>
+          <a:p>
+            <a:pPr algn="ctr"/>
+          </a:p>
+        </p:txBody>
+      </p:sp>
+      <p:sp>
+        <p:nvSpPr>
+          <p:cNvPr id="16" name="TextBox 15"/>
+          <p:cNvSpPr txBox="1"/>
+          <p:nvPr/>
+        </p:nvSpPr>
+        <p:spPr>
+          <a:xfrm>
+            <a:off x="1188720" y="5724144"/>
+            <a:ext cx="2194560" cy="457200"/>
+          </a:xfrm>
+          <a:prstGeom prst="rect">
+            <a:avLst/>
+          </a:prstGeom>
+          <a:noFill/>
+        </p:spPr>
+        <p:txBody>
+          <a:bodyPr wrap="square" lIns="0" rIns="0" tIns="0" bIns="0">
+            <a:spAutoFit/>
+          </a:bodyPr>
+          <a:lstStyle/>
+          <a:p>
+            <a:pPr algn="l">
+              <a:spcAft>
+                <a:spcPts val="600"/>
+              </a:spcAft>
+            </a:pPr>
+            <a:r>
+              <a:rPr sz="1900" b="1">
+                <a:solidFill>
+                  <a:srgbClr val="ED7623"/>
+                </a:solidFill>
+                <a:latin typeface="Helvetica Neue"/>
+              </a:rPr>
+              <a:t>Lo que los une</a:t>
+            </a:r>
+          </a:p>
+        </p:txBody>
+      </p:sp>
+      <p:sp>
+        <p:nvSpPr>
+          <p:cNvPr id="17" name="TextBox 16"/>
+          <p:cNvSpPr txBox="1"/>
+          <p:nvPr/>
+        </p:nvSpPr>
+        <p:spPr>
+          <a:xfrm>
+            <a:off x="3566160" y="5751576"/>
+            <a:ext cx="7498079" cy="457200"/>
+          </a:xfrm>
+          <a:prstGeom prst="rect">
+            <a:avLst/>
+          </a:prstGeom>
+          <a:noFill/>
+        </p:spPr>
+        <p:txBody>
+          <a:bodyPr wrap="square" lIns="0" rIns="0" tIns="0" bIns="0">
+            <a:spAutoFit/>
+          </a:bodyPr>
+          <a:lstStyle/>
+          <a:p>
+            <a:pPr algn="l">
+              <a:spcAft>
+                <a:spcPts val="600"/>
+              </a:spcAft>
+            </a:pPr>
+            <a:r>
+              <a:rPr sz="1550" b="0">
+                <a:solidFill>
+                  <a:srgbClr val="6E6E6E"/>
+                </a:solidFill>
+                <a:latin typeface="Helvetica Neue"/>
+              </a:rPr>
+              <a:t>ChatGPT, en quince segundos.</a:t>
+            </a:r>
+          </a:p>
+        </p:txBody>
+      </p:sp>
+      <p:sp>
+        <p:nvSpPr>
+          <p:cNvPr id="18" name="TextBox 17"/>
+          <p:cNvSpPr txBox="1"/>
+          <p:nvPr/>
+        </p:nvSpPr>
+        <p:spPr>
+          <a:xfrm>
+            <a:off x="822960" y="6400800"/>
+            <a:ext cx="10515600" cy="365760"/>
+          </a:xfrm>
+          <a:prstGeom prst="rect">
+            <a:avLst/>
+          </a:prstGeom>
+          <a:noFill/>
+        </p:spPr>
+        <p:txBody>
+          <a:bodyPr wrap="square" lIns="0" rIns="0" tIns="0" bIns="0">
+            <a:spAutoFit/>
+          </a:bodyPr>
+          <a:lstStyle/>
+          <a:p>
+            <a:pPr algn="l">
+              <a:spcAft>
+                <a:spcPts val="600"/>
+              </a:spcAft>
+            </a:pPr>
+            <a:r>
+              <a:rPr sz="1400" b="0">
+                <a:solidFill>
+                  <a:srgbClr val="6E6E6E"/>
+                </a:solidFill>
+                <a:latin typeface="Helvetica Neue"/>
+              </a:rPr>
+              <a:t>El guion completo de seis frases está en las notas.</a:t>
             </a:r>
           </a:p>
         </p:txBody>
@@ -9342,14 +9053,95 @@
       </p:sp>
       <p:sp>
         <p:nvSpPr>
-          <p:cNvPr id="3" name="Rounded Rectangle 2"/>
+          <p:cNvPr id="3" name="TextBox 2"/>
+          <p:cNvSpPr txBox="1"/>
+          <p:nvPr/>
+        </p:nvSpPr>
+        <p:spPr>
+          <a:xfrm>
+            <a:off x="822960" y="502920"/>
+            <a:ext cx="10515600" cy="365760"/>
+          </a:xfrm>
+          <a:prstGeom prst="rect">
+            <a:avLst/>
+          </a:prstGeom>
+          <a:noFill/>
+        </p:spPr>
+        <p:txBody>
+          <a:bodyPr wrap="square" lIns="0" rIns="0" tIns="0" bIns="0">
+            <a:spAutoFit/>
+          </a:bodyPr>
+          <a:lstStyle/>
+          <a:p>
+            <a:pPr algn="l">
+              <a:spcAft>
+                <a:spcPts val="600"/>
+              </a:spcAft>
+            </a:pPr>
+            <a:r>
+              <a:rPr sz="1200" b="1">
+                <a:solidFill>
+                  <a:srgbClr val="ED7623"/>
+                </a:solidFill>
+                <a:latin typeface="Helvetica Neue"/>
+              </a:rPr>
+              <a:t>TU TURNO</a:t>
+            </a:r>
+          </a:p>
+        </p:txBody>
+      </p:sp>
+      <p:sp>
+        <p:nvSpPr>
+          <p:cNvPr id="4" name="TextBox 3"/>
+          <p:cNvSpPr txBox="1"/>
+          <p:nvPr/>
+        </p:nvSpPr>
+        <p:spPr>
+          <a:xfrm>
+            <a:off x="822960" y="960120"/>
+            <a:ext cx="10607040" cy="1188720"/>
+          </a:xfrm>
+          <a:prstGeom prst="rect">
+            <a:avLst/>
+          </a:prstGeom>
+          <a:noFill/>
+        </p:spPr>
+        <p:txBody>
+          <a:bodyPr wrap="square" lIns="0" rIns="0" tIns="0" bIns="0">
+            <a:spAutoFit/>
+          </a:bodyPr>
+          <a:lstStyle/>
+          <a:p>
+            <a:pPr algn="l">
+              <a:lnSpc>
+                <a:spcPct val="105000"/>
+              </a:lnSpc>
+              <a:spcAft>
+                <a:spcPts val="600"/>
+              </a:spcAft>
+            </a:pPr>
+            <a:r>
+              <a:rPr sz="4000" b="1">
+                <a:solidFill>
+                  <a:srgbClr val="11406E"/>
+                </a:solidFill>
+                <a:latin typeface="Helvetica Neue"/>
+              </a:rPr>
+              <a:t>Elige uno de los dos</a:t>
+            </a:r>
+          </a:p>
+        </p:txBody>
+      </p:sp>
+      <p:sp>
+        <p:nvSpPr>
+          <p:cNvPr id="5" name="Rounded Rectangle 4"/>
           <p:cNvSpPr/>
           <p:nvPr/>
         </p:nvSpPr>
         <p:spPr>
           <a:xfrm>
-            <a:off x="822960" y="1600200"/>
-            <a:ext cx="10607040" cy="3200400"/>
+            <a:off x="822960" y="2377440"/>
+            <a:ext cx="5029200" cy="2377440"/>
           </a:xfrm>
           <a:prstGeom prst="roundRect">
             <a:avLst>
@@ -9390,14 +9182,14 @@
       </p:sp>
       <p:sp>
         <p:nvSpPr>
-          <p:cNvPr id="4" name="TextBox 3"/>
+          <p:cNvPr id="6" name="TextBox 5"/>
           <p:cNvSpPr txBox="1"/>
           <p:nvPr/>
         </p:nvSpPr>
         <p:spPr>
           <a:xfrm>
-            <a:off x="1371600" y="2103120"/>
-            <a:ext cx="9509760" cy="1554480"/>
+            <a:off x="1234440" y="2697480"/>
+            <a:ext cx="4206240" cy="822960"/>
           </a:xfrm>
           <a:prstGeom prst="rect">
             <a:avLst/>
@@ -9412,22 +9204,444 @@
           <a:p>
             <a:pPr algn="l">
               <a:lnSpc>
-                <a:spcPct val="100000"/>
+                <a:spcPct val="110000"/>
               </a:lnSpc>
               <a:spcAft>
-                <a:spcPts val="0"/>
-              </a:spcAft>
-            </a:pPr>
-            <a:r>
-              <a:rPr sz="4000" b="1">
-                <a:solidFill>
-                  <a:srgbClr val="11406E"/>
-                </a:solidFill>
-                <a:latin typeface="Helvetica Neue"/>
-              </a:rPr>
-              <a:t>Lo difícil nunca</a:t>
-            </a:r>
-          </a:p>
+                <a:spcPts val="600"/>
+              </a:spcAft>
+            </a:pPr>
+            <a:r>
+              <a:rPr sz="2300" b="1">
+                <a:solidFill>
+                  <a:srgbClr val="35789C"/>
+                </a:solidFill>
+                <a:latin typeface="Helvetica Neue"/>
+              </a:rPr>
+              <a:t>Qué hago en mi carrera</a:t>
+            </a:r>
+          </a:p>
+        </p:txBody>
+      </p:sp>
+      <p:sp>
+        <p:nvSpPr>
+          <p:cNvPr id="7" name="TextBox 6"/>
+          <p:cNvSpPr txBox="1"/>
+          <p:nvPr/>
+        </p:nvSpPr>
+        <p:spPr>
+          <a:xfrm>
+            <a:off x="1234440" y="3657600"/>
+            <a:ext cx="4206240" cy="1188720"/>
+          </a:xfrm>
+          <a:prstGeom prst="rect">
+            <a:avLst/>
+          </a:prstGeom>
+          <a:noFill/>
+        </p:spPr>
+        <p:txBody>
+          <a:bodyPr wrap="square" lIns="0" rIns="0" tIns="0" bIns="0">
+            <a:spAutoFit/>
+          </a:bodyPr>
+          <a:lstStyle/>
+          <a:p>
+            <a:pPr algn="l">
+              <a:lnSpc>
+                <a:spcPct val="130000"/>
+              </a:lnSpc>
+              <a:spcAft>
+                <a:spcPts val="600"/>
+              </a:spcAft>
+            </a:pPr>
+            <a:r>
+              <a:rPr sz="1600" b="0">
+                <a:solidFill>
+                  <a:srgbClr val="6E6E6E"/>
+                </a:solidFill>
+                <a:latin typeface="Helvetica Neue"/>
+              </a:rPr>
+              <a:t>Un día normal de trabajo de alguien de tu programa. Lo que nadie se imagina que haces.</a:t>
+            </a:r>
+          </a:p>
+        </p:txBody>
+      </p:sp>
+      <p:sp>
+        <p:nvSpPr>
+          <p:cNvPr id="8" name="Rounded Rectangle 7"/>
+          <p:cNvSpPr/>
+          <p:nvPr/>
+        </p:nvSpPr>
+        <p:spPr>
+          <a:xfrm>
+            <a:off x="6217920" y="2377440"/>
+            <a:ext cx="5029200" cy="2377440"/>
+          </a:xfrm>
+          <a:prstGeom prst="roundRect">
+            <a:avLst>
+              <a:gd name="adj" fmla="val 5000"/>
+            </a:avLst>
+          </a:prstGeom>
+          <a:solidFill>
+            <a:srgbClr val="F5F3EF"/>
+          </a:solidFill>
+          <a:ln w="11430">
+            <a:solidFill>
+              <a:srgbClr val="E3E0DA"/>
+            </a:solidFill>
+          </a:ln>
+          <a:effectLst/>
+        </p:spPr>
+        <p:style>
+          <a:lnRef idx="1">
+            <a:schemeClr val="accent1"/>
+          </a:lnRef>
+          <a:fillRef idx="3">
+            <a:schemeClr val="accent1"/>
+          </a:fillRef>
+          <a:effectRef idx="2">
+            <a:schemeClr val="accent1"/>
+          </a:effectRef>
+          <a:fontRef idx="minor">
+            <a:schemeClr val="lt1"/>
+          </a:fontRef>
+        </p:style>
+        <p:txBody>
+          <a:bodyPr rtlCol="0" anchor="ctr"/>
+          <a:lstStyle/>
+          <a:p>
+            <a:pPr algn="ctr"/>
+          </a:p>
+        </p:txBody>
+      </p:sp>
+      <p:sp>
+        <p:nvSpPr>
+          <p:cNvPr id="9" name="TextBox 8"/>
+          <p:cNvSpPr txBox="1"/>
+          <p:nvPr/>
+        </p:nvSpPr>
+        <p:spPr>
+          <a:xfrm>
+            <a:off x="6629400" y="2697480"/>
+            <a:ext cx="4206240" cy="822960"/>
+          </a:xfrm>
+          <a:prstGeom prst="rect">
+            <a:avLst/>
+          </a:prstGeom>
+          <a:noFill/>
+        </p:spPr>
+        <p:txBody>
+          <a:bodyPr wrap="square" lIns="0" rIns="0" tIns="0" bIns="0">
+            <a:spAutoFit/>
+          </a:bodyPr>
+          <a:lstStyle/>
+          <a:p>
+            <a:pPr algn="l">
+              <a:lnSpc>
+                <a:spcPct val="110000"/>
+              </a:lnSpc>
+              <a:spcAft>
+                <a:spcPts val="600"/>
+              </a:spcAft>
+            </a:pPr>
+            <a:r>
+              <a:rPr sz="2300" b="1">
+                <a:solidFill>
+                  <a:srgbClr val="35789C"/>
+                </a:solidFill>
+                <a:latin typeface="Helvetica Neue"/>
+              </a:rPr>
+              <a:t>Lo que me costó entender</a:t>
+            </a:r>
+          </a:p>
+        </p:txBody>
+      </p:sp>
+      <p:sp>
+        <p:nvSpPr>
+          <p:cNvPr id="10" name="TextBox 9"/>
+          <p:cNvSpPr txBox="1"/>
+          <p:nvPr/>
+        </p:nvSpPr>
+        <p:spPr>
+          <a:xfrm>
+            <a:off x="6629400" y="3657600"/>
+            <a:ext cx="4206240" cy="1188720"/>
+          </a:xfrm>
+          <a:prstGeom prst="rect">
+            <a:avLst/>
+          </a:prstGeom>
+          <a:noFill/>
+        </p:spPr>
+        <p:txBody>
+          <a:bodyPr wrap="square" lIns="0" rIns="0" tIns="0" bIns="0">
+            <a:spAutoFit/>
+          </a:bodyPr>
+          <a:lstStyle/>
+          <a:p>
+            <a:pPr algn="l">
+              <a:lnSpc>
+                <a:spcPct val="130000"/>
+              </a:lnSpc>
+              <a:spcAft>
+                <a:spcPts val="600"/>
+              </a:spcAft>
+            </a:pPr>
+            <a:r>
+              <a:rPr sz="1600" b="0">
+                <a:solidFill>
+                  <a:srgbClr val="6E6E6E"/>
+                </a:solidFill>
+                <a:latin typeface="Helvetica Neue"/>
+              </a:rPr>
+              <a:t>Un concepto que te costó, explicado como te hubiera gustado que te lo explicaran.</a:t>
+            </a:r>
+          </a:p>
+        </p:txBody>
+      </p:sp>
+      <p:sp>
+        <p:nvSpPr>
+          <p:cNvPr id="11" name="Rounded Rectangle 10"/>
+          <p:cNvSpPr/>
+          <p:nvPr/>
+        </p:nvSpPr>
+        <p:spPr>
+          <a:xfrm>
+            <a:off x="822960" y="5029200"/>
+            <a:ext cx="10515600" cy="1097280"/>
+          </a:xfrm>
+          <a:prstGeom prst="roundRect">
+            <a:avLst>
+              <a:gd name="adj" fmla="val 5000"/>
+            </a:avLst>
+          </a:prstGeom>
+          <a:solidFill>
+            <a:srgbClr val="FDF0E6"/>
+          </a:solidFill>
+          <a:ln>
+            <a:noFill/>
+          </a:ln>
+          <a:effectLst/>
+        </p:spPr>
+        <p:style>
+          <a:lnRef idx="1">
+            <a:schemeClr val="accent1"/>
+          </a:lnRef>
+          <a:fillRef idx="3">
+            <a:schemeClr val="accent1"/>
+          </a:fillRef>
+          <a:effectRef idx="2">
+            <a:schemeClr val="accent1"/>
+          </a:effectRef>
+          <a:fontRef idx="minor">
+            <a:schemeClr val="lt1"/>
+          </a:fontRef>
+        </p:style>
+        <p:txBody>
+          <a:bodyPr rtlCol="0" anchor="ctr"/>
+          <a:lstStyle/>
+          <a:p>
+            <a:pPr algn="ctr"/>
+          </a:p>
+        </p:txBody>
+      </p:sp>
+      <p:sp>
+        <p:nvSpPr>
+          <p:cNvPr id="12" name="TextBox 11"/>
+          <p:cNvSpPr txBox="1"/>
+          <p:nvPr/>
+        </p:nvSpPr>
+        <p:spPr>
+          <a:xfrm>
+            <a:off x="1234440" y="5257800"/>
+            <a:ext cx="9692640" cy="822960"/>
+          </a:xfrm>
+          <a:prstGeom prst="rect">
+            <a:avLst/>
+          </a:prstGeom>
+          <a:noFill/>
+        </p:spPr>
+        <p:txBody>
+          <a:bodyPr wrap="square" lIns="0" rIns="0" tIns="0" bIns="0">
+            <a:spAutoFit/>
+          </a:bodyPr>
+          <a:lstStyle/>
+          <a:p>
+            <a:pPr algn="l">
+              <a:lnSpc>
+                <a:spcPct val="125000"/>
+              </a:lnSpc>
+              <a:spcAft>
+                <a:spcPts val="200"/>
+              </a:spcAft>
+            </a:pPr>
+            <a:r>
+              <a:rPr sz="2000" b="1">
+                <a:solidFill>
+                  <a:srgbClr val="ED7623"/>
+                </a:solidFill>
+                <a:latin typeface="Helvetica Neue"/>
+              </a:rPr>
+              <a:t>Un minuto: seis frases, seis clips, un archivo.</a:t>
+            </a:r>
+          </a:p>
+          <a:p>
+            <a:pPr algn="l">
+              <a:lnSpc>
+                <a:spcPct val="125000"/>
+              </a:lnSpc>
+              <a:spcAft>
+                <a:spcPts val="200"/>
+              </a:spcAft>
+            </a:pPr>
+            <a:r>
+              <a:rPr sz="1600" b="0">
+                <a:solidFill>
+                  <a:srgbClr val="6E6E6E"/>
+                </a:solidFill>
+                <a:latin typeface="Helvetica Neue"/>
+              </a:rPr>
+              <a:t>Y una línea diciendo qué hiciste con IA.</a:t>
+            </a:r>
+          </a:p>
+        </p:txBody>
+      </p:sp>
+    </p:spTree>
+  </p:cSld>
+  <p:clrMapOvr>
+    <a:masterClrMapping/>
+  </p:clrMapOvr>
+</p:sld>
+</file>
+
+<file path=ppt/slides/slide16.xml><?xml version="1.0" encoding="utf-8"?>
+<p:sld xmlns:a="http://schemas.openxmlformats.org/drawingml/2006/main" xmlns:p="http://schemas.openxmlformats.org/presentationml/2006/main" xmlns:r="http://schemas.openxmlformats.org/officeDocument/2006/relationships">
+  <p:cSld>
+    <p:bg>
+      <p:bgPr>
+        <a:solidFill>
+          <a:srgbClr val="FFFFFF"/>
+        </a:solidFill>
+        <a:effectLst/>
+      </p:bgPr>
+    </p:bg>
+    <p:spTree>
+      <p:nvGrpSpPr>
+        <p:cNvPr id="1" name=""/>
+        <p:cNvGrpSpPr/>
+        <p:nvPr/>
+      </p:nvGrpSpPr>
+      <p:grpSpPr/>
+      <p:sp>
+        <p:nvSpPr>
+          <p:cNvPr id="2" name="Rectangle 1"/>
+          <p:cNvSpPr/>
+          <p:nvPr/>
+        </p:nvSpPr>
+        <p:spPr>
+          <a:xfrm>
+            <a:off x="0" y="0"/>
+            <a:ext cx="128016" cy="6858000"/>
+          </a:xfrm>
+          <a:prstGeom prst="rect">
+            <a:avLst/>
+          </a:prstGeom>
+          <a:solidFill>
+            <a:srgbClr val="ED7623"/>
+          </a:solidFill>
+          <a:ln>
+            <a:noFill/>
+          </a:ln>
+          <a:effectLst/>
+        </p:spPr>
+        <p:style>
+          <a:lnRef idx="1">
+            <a:schemeClr val="accent1"/>
+          </a:lnRef>
+          <a:fillRef idx="3">
+            <a:schemeClr val="accent1"/>
+          </a:fillRef>
+          <a:effectRef idx="2">
+            <a:schemeClr val="accent1"/>
+          </a:effectRef>
+          <a:fontRef idx="minor">
+            <a:schemeClr val="lt1"/>
+          </a:fontRef>
+        </p:style>
+        <p:txBody>
+          <a:bodyPr rtlCol="0" anchor="ctr"/>
+          <a:lstStyle/>
+          <a:p>
+            <a:pPr algn="ctr"/>
+          </a:p>
+        </p:txBody>
+      </p:sp>
+      <p:sp>
+        <p:nvSpPr>
+          <p:cNvPr id="3" name="Rounded Rectangle 2"/>
+          <p:cNvSpPr/>
+          <p:nvPr/>
+        </p:nvSpPr>
+        <p:spPr>
+          <a:xfrm>
+            <a:off x="822960" y="1600200"/>
+            <a:ext cx="10607040" cy="3200400"/>
+          </a:xfrm>
+          <a:prstGeom prst="roundRect">
+            <a:avLst>
+              <a:gd name="adj" fmla="val 5000"/>
+            </a:avLst>
+          </a:prstGeom>
+          <a:solidFill>
+            <a:srgbClr val="F5F3EF"/>
+          </a:solidFill>
+          <a:ln w="11430">
+            <a:solidFill>
+              <a:srgbClr val="E3E0DA"/>
+            </a:solidFill>
+          </a:ln>
+          <a:effectLst/>
+        </p:spPr>
+        <p:style>
+          <a:lnRef idx="1">
+            <a:schemeClr val="accent1"/>
+          </a:lnRef>
+          <a:fillRef idx="3">
+            <a:schemeClr val="accent1"/>
+          </a:fillRef>
+          <a:effectRef idx="2">
+            <a:schemeClr val="accent1"/>
+          </a:effectRef>
+          <a:fontRef idx="minor">
+            <a:schemeClr val="lt1"/>
+          </a:fontRef>
+        </p:style>
+        <p:txBody>
+          <a:bodyPr rtlCol="0" anchor="ctr"/>
+          <a:lstStyle/>
+          <a:p>
+            <a:pPr algn="ctr"/>
+          </a:p>
+        </p:txBody>
+      </p:sp>
+      <p:sp>
+        <p:nvSpPr>
+          <p:cNvPr id="4" name="TextBox 3"/>
+          <p:cNvSpPr txBox="1"/>
+          <p:nvPr/>
+        </p:nvSpPr>
+        <p:spPr>
+          <a:xfrm>
+            <a:off x="1371600" y="2103120"/>
+            <a:ext cx="9509760" cy="1554480"/>
+          </a:xfrm>
+          <a:prstGeom prst="rect">
+            <a:avLst/>
+          </a:prstGeom>
+          <a:noFill/>
+        </p:spPr>
+        <p:txBody>
+          <a:bodyPr wrap="square" lIns="0" rIns="0" tIns="0" bIns="0">
+            <a:spAutoFit/>
+          </a:bodyPr>
+          <a:lstStyle/>
           <a:p>
             <a:pPr algn="l">
               <a:lnSpc>
@@ -9440,6 +9654,25 @@
             <a:r>
               <a:rPr sz="4000" b="1">
                 <a:solidFill>
+                  <a:srgbClr val="11406E"/>
+                </a:solidFill>
+                <a:latin typeface="Helvetica Neue"/>
+              </a:rPr>
+              <a:t>Lo difícil nunca</a:t>
+            </a:r>
+          </a:p>
+          <a:p>
+            <a:pPr algn="l">
+              <a:lnSpc>
+                <a:spcPct val="100000"/>
+              </a:lnSpc>
+              <a:spcAft>
+                <a:spcPts val="0"/>
+              </a:spcAft>
+            </a:pPr>
+            <a:r>
+              <a:rPr sz="4000" b="1">
+                <a:solidFill>
                   <a:srgbClr val="ED7623"/>
                 </a:solidFill>
                 <a:latin typeface="Helvetica Neue"/>
@@ -9486,7 +9719,7 @@
                 </a:solidFill>
                 <a:latin typeface="Helvetica Neue"/>
               </a:rPr>
-              <a:t>Fue decidir qué valía la pena contar, y decirlo en ciento cincuenta palabras.</a:t>
+              <a:t>Fue decidir qué valía la pena contar, y decirlo en seis frases.</a:t>
             </a:r>
           </a:p>
         </p:txBody>
@@ -9739,7 +9972,7 @@
                 </a:solidFill>
                 <a:latin typeface="Helvetica Neue"/>
               </a:rPr>
-              <a:t>Un video de 60 a 90 segundos</a:t>
+              <a:t>Un minuto, en seis pedazos</a:t>
             </a:r>
           </a:p>
         </p:txBody>
@@ -9781,7 +10014,7 @@
                 </a:solidFill>
                 <a:latin typeface="Helvetica Neue"/>
               </a:rPr>
-              <a:t>Un personaje tuyo, en un lugar que tú elegiste, con una voz que tú escogiste,</a:t>
+              <a:t>Nadie hace un video de un minuto de una sola vez.</a:t>
             </a:r>
           </a:p>
           <a:p>
@@ -9800,7 +10033,7 @@
                 </a:solidFill>
                 <a:latin typeface="Helvetica Neue"/>
               </a:rPr>
-              <a:t>explicando algo de tu carrera a alguien que no sabe nada del tema.</a:t>
+              <a:t>Se hacen seis de diez segundos y se pegan. Así sí se puede.</a:t>
             </a:r>
           </a:p>
         </p:txBody>
@@ -9890,7 +10123,7 @@
                 </a:solidFill>
                 <a:latin typeface="Helvetica Neue"/>
               </a:rPr>
-              <a:t>🎬 Guion</a:t>
+              <a:t>📝 Guion</a:t>
             </a:r>
           </a:p>
         </p:txBody>
@@ -9904,7 +10137,7 @@
         <p:spPr>
           <a:xfrm>
             <a:off x="1143000" y="4846320"/>
-            <a:ext cx="1920240" cy="457200"/>
+            <a:ext cx="1920240" cy="548640"/>
           </a:xfrm>
           <a:prstGeom prst="rect">
             <a:avLst/>
@@ -9918,6 +10151,9 @@
           <a:lstStyle/>
           <a:p>
             <a:pPr algn="l">
+              <a:lnSpc>
+                <a:spcPct val="120000"/>
+              </a:lnSpc>
               <a:spcAft>
                 <a:spcPts val="600"/>
               </a:spcAft>
@@ -9929,7 +10165,7 @@
                 </a:solidFill>
                 <a:latin typeface="Helvetica Neue"/>
               </a:rPr>
-              <a:t>lo que se dice</a:t>
+              <a:t>partido en 6 frases</a:t>
             </a:r>
           </a:p>
         </p:txBody>
@@ -10019,7 +10255,7 @@
                 </a:solidFill>
                 <a:latin typeface="Helvetica Neue"/>
               </a:rPr>
-              <a:t>🖼️ Ambiente</a:t>
+              <a:t>🧑 Tu foto</a:t>
             </a:r>
           </a:p>
         </p:txBody>
@@ -10033,7 +10269,7 @@
         <p:spPr>
           <a:xfrm>
             <a:off x="3840480" y="4846320"/>
-            <a:ext cx="1920240" cy="457200"/>
+            <a:ext cx="1920240" cy="548640"/>
           </a:xfrm>
           <a:prstGeom prst="rect">
             <a:avLst/>
@@ -10047,6 +10283,9 @@
           <a:lstStyle/>
           <a:p>
             <a:pPr algn="l">
+              <a:lnSpc>
+                <a:spcPct val="120000"/>
+              </a:lnSpc>
               <a:spcAft>
                 <a:spcPts val="600"/>
               </a:spcAft>
@@ -10058,7 +10297,7 @@
                 </a:solidFill>
                 <a:latin typeface="Helvetica Neue"/>
               </a:rPr>
-              <a:t>dónde ocurre</a:t>
+              <a:t>la misma en todos</a:t>
             </a:r>
           </a:p>
         </p:txBody>
@@ -10148,7 +10387,7 @@
                 </a:solidFill>
                 <a:latin typeface="Helvetica Neue"/>
               </a:rPr>
-              <a:t>🧑 Avatar</a:t>
+              <a:t>🎬 6 clips</a:t>
             </a:r>
           </a:p>
         </p:txBody>
@@ -10162,7 +10401,7 @@
         <p:spPr>
           <a:xfrm>
             <a:off x="6537960" y="4846320"/>
-            <a:ext cx="1920240" cy="457200"/>
+            <a:ext cx="1920240" cy="548640"/>
           </a:xfrm>
           <a:prstGeom prst="rect">
             <a:avLst/>
@@ -10176,6 +10415,9 @@
           <a:lstStyle/>
           <a:p>
             <a:pPr algn="l">
+              <a:lnSpc>
+                <a:spcPct val="120000"/>
+              </a:lnSpc>
               <a:spcAft>
                 <a:spcPts val="600"/>
               </a:spcAft>
@@ -10187,7 +10429,7 @@
                 </a:solidFill>
                 <a:latin typeface="Helvetica Neue"/>
               </a:rPr>
-              <a:t>quién lo dice</a:t>
+              <a:t>10 segundos cada uno</a:t>
             </a:r>
           </a:p>
         </p:txBody>
@@ -10277,7 +10519,7 @@
                 </a:solidFill>
                 <a:latin typeface="Helvetica Neue"/>
               </a:rPr>
-              <a:t>🎙️ Voz</a:t>
+              <a:t>🔗 Unirlos</a:t>
             </a:r>
           </a:p>
         </p:txBody>
@@ -10291,7 +10533,7 @@
         <p:spPr>
           <a:xfrm>
             <a:off x="9235440" y="4846320"/>
-            <a:ext cx="1920240" cy="457200"/>
+            <a:ext cx="1920240" cy="548640"/>
           </a:xfrm>
           <a:prstGeom prst="rect">
             <a:avLst/>
@@ -10305,6 +10547,9 @@
           <a:lstStyle/>
           <a:p>
             <a:pPr algn="l">
+              <a:lnSpc>
+                <a:spcPct val="120000"/>
+              </a:lnSpc>
               <a:spcAft>
                 <a:spcPts val="600"/>
               </a:spcAft>
@@ -10316,7 +10561,7 @@
                 </a:solidFill>
                 <a:latin typeface="Helvetica Neue"/>
               </a:rPr>
-              <a:t>cómo suena</a:t>
+              <a:t>en ChatGPT</a:t>
             </a:r>
           </a:p>
         </p:txBody>
@@ -10467,7 +10712,7 @@
                 </a:solidFill>
                 <a:latin typeface="Helvetica Neue"/>
               </a:rPr>
-              <a:t>Seis pasos, en este orden</a:t>
+              <a:t>Cuatro pasos, y dos de remate</a:t>
             </a:r>
           </a:p>
         </p:txBody>
@@ -10568,7 +10813,7 @@
         <p:spPr>
           <a:xfrm>
             <a:off x="1737360" y="2487168"/>
-            <a:ext cx="2194560" cy="457200"/>
+            <a:ext cx="2286000" cy="457200"/>
           </a:xfrm>
           <a:prstGeom prst="rect">
             <a:avLst/>
@@ -10593,7 +10838,7 @@
                 </a:solidFill>
                 <a:latin typeface="Helvetica Neue"/>
               </a:rPr>
-              <a:t>Guion</a:t>
+              <a:t>El guion</a:t>
             </a:r>
           </a:p>
         </p:txBody>
@@ -10635,7 +10880,7 @@
                 </a:solidFill>
                 <a:latin typeface="Helvetica Neue"/>
               </a:rPr>
-              <a:t>Qué vas a decir y en qué orden</a:t>
+              <a:t>Partido en seis frases de 25 palabras</a:t>
             </a:r>
           </a:p>
         </p:txBody>
@@ -10736,7 +10981,7 @@
         <p:spPr>
           <a:xfrm>
             <a:off x="5349240" y="2487168"/>
-            <a:ext cx="2194560" cy="457200"/>
+            <a:ext cx="2286000" cy="457200"/>
           </a:xfrm>
           <a:prstGeom prst="rect">
             <a:avLst/>
@@ -10761,7 +11006,7 @@
                 </a:solidFill>
                 <a:latin typeface="Helvetica Neue"/>
               </a:rPr>
-              <a:t>Ambiente</a:t>
+              <a:t>Tu foto</a:t>
             </a:r>
           </a:p>
         </p:txBody>
@@ -10803,7 +11048,7 @@
                 </a:solidFill>
                 <a:latin typeface="Helvetica Neue"/>
               </a:rPr>
-              <a:t>La imagen del lugar donde ocurre</a:t>
+              <a:t>Una sola, de frente. La misma siempre</a:t>
             </a:r>
           </a:p>
         </p:txBody>
@@ -10904,7 +11149,7 @@
         <p:spPr>
           <a:xfrm>
             <a:off x="8961120" y="2487168"/>
-            <a:ext cx="2194560" cy="457200"/>
+            <a:ext cx="2286000" cy="457200"/>
           </a:xfrm>
           <a:prstGeom prst="rect">
             <a:avLst/>
@@ -10929,7 +11174,7 @@
                 </a:solidFill>
                 <a:latin typeface="Helvetica Neue"/>
               </a:rPr>
-              <a:t>Avatar</a:t>
+              <a:t>Los clips</a:t>
             </a:r>
           </a:p>
         </p:txBody>
@@ -10971,7 +11216,7 @@
                 </a:solidFill>
                 <a:latin typeface="Helvetica Neue"/>
               </a:rPr>
-              <a:t>Tu personaje, a partir de tu propia foto</a:t>
+              <a:t>Uno por frase, en Gemini</a:t>
             </a:r>
           </a:p>
         </p:txBody>
@@ -11072,7 +11317,7 @@
         <p:spPr>
           <a:xfrm>
             <a:off x="1737360" y="4453127"/>
-            <a:ext cx="2194560" cy="457200"/>
+            <a:ext cx="2286000" cy="457200"/>
           </a:xfrm>
           <a:prstGeom prst="rect">
             <a:avLst/>
@@ -11097,7 +11342,7 @@
                 </a:solidFill>
                 <a:latin typeface="Helvetica Neue"/>
               </a:rPr>
-              <a:t>Voz</a:t>
+              <a:t>Unirlos</a:t>
             </a:r>
           </a:p>
         </p:txBody>
@@ -11139,7 +11384,7 @@
                 </a:solidFill>
                 <a:latin typeface="Helvetica Neue"/>
               </a:rPr>
-              <a:t>La narración, generada o grabada</a:t>
+              <a:t>En ChatGPT, en un solo archivo</a:t>
             </a:r>
           </a:p>
         </p:txBody>
@@ -11222,7 +11467,7 @@
             <a:r>
               <a:rPr sz="3400" b="1">
                 <a:solidFill>
-                  <a:srgbClr val="ED7623"/>
+                  <a:srgbClr val="35789C"/>
                 </a:solidFill>
                 <a:latin typeface="Helvetica Neue"/>
               </a:rPr>
@@ -11240,7 +11485,7 @@
         <p:spPr>
           <a:xfrm>
             <a:off x="5349240" y="4453127"/>
-            <a:ext cx="2194560" cy="457200"/>
+            <a:ext cx="2286000" cy="457200"/>
           </a:xfrm>
           <a:prstGeom prst="rect">
             <a:avLst/>
@@ -11259,13 +11504,13 @@
               </a:spcAft>
             </a:pPr>
             <a:r>
-              <a:rPr sz="2100" b="1">
+              <a:rPr sz="1600" b="1">
                 <a:solidFill>
                   <a:srgbClr val="11406E"/>
                 </a:solidFill>
                 <a:latin typeface="Helvetica Neue"/>
               </a:rPr>
-              <a:t>Movimiento</a:t>
+              <a:t>La voz  (opcional)</a:t>
             </a:r>
           </a:p>
         </p:txBody>
@@ -11307,7 +11552,7 @@
                 </a:solidFill>
                 <a:latin typeface="Helvetica Neue"/>
               </a:rPr>
-              <a:t>Que el personaje hable (opcional)</a:t>
+              <a:t>Otra narración encima</a:t>
             </a:r>
           </a:p>
         </p:txBody>
@@ -11390,7 +11635,7 @@
             <a:r>
               <a:rPr sz="3400" b="1">
                 <a:solidFill>
-                  <a:srgbClr val="ED7623"/>
+                  <a:srgbClr val="35789C"/>
                 </a:solidFill>
                 <a:latin typeface="Helvetica Neue"/>
               </a:rPr>
@@ -11408,7 +11653,7 @@
         <p:spPr>
           <a:xfrm>
             <a:off x="8961120" y="4453127"/>
-            <a:ext cx="2194560" cy="457200"/>
+            <a:ext cx="2286000" cy="457200"/>
           </a:xfrm>
           <a:prstGeom prst="rect">
             <a:avLst/>
@@ -11427,13 +11672,13 @@
               </a:spcAft>
             </a:pPr>
             <a:r>
-              <a:rPr sz="2100" b="1">
+              <a:rPr sz="1600" b="1">
                 <a:solidFill>
                   <a:srgbClr val="11406E"/>
                 </a:solidFill>
                 <a:latin typeface="Helvetica Neue"/>
               </a:rPr>
-              <a:t>Montaje</a:t>
+              <a:t>Remates  (opcional)</a:t>
             </a:r>
           </a:p>
         </p:txBody>
@@ -11475,7 +11720,7 @@
                 </a:solidFill>
                 <a:latin typeface="Helvetica Neue"/>
               </a:rPr>
-              <a:t>Todo junto, con subtítulos y música</a:t>
+              <a:t>Subtítulos y música</a:t>
             </a:r>
           </a:p>
         </p:txBody>
@@ -11584,7 +11829,7 @@
                 </a:solidFill>
                 <a:latin typeface="Helvetica Neue"/>
               </a:rPr>
-              <a:t>TODO GRATIS</a:t>
+              <a:t>LAS HERRAMIENTAS</a:t>
             </a:r>
           </a:p>
         </p:txBody>
@@ -11626,7 +11871,7 @@
                 </a:solidFill>
                 <a:latin typeface="Helvetica Neue"/>
               </a:rPr>
-              <a:t>Las herramientas del día</a:t>
+              <a:t>Tres, y una advertencia</a:t>
             </a:r>
           </a:p>
         </p:txBody>
@@ -11639,7 +11884,7 @@
         </p:nvSpPr>
         <p:spPr>
           <a:xfrm>
-            <a:off x="822960" y="2651760"/>
+            <a:off x="822960" y="2606040"/>
             <a:ext cx="10607040" cy="20116"/>
           </a:xfrm>
           <a:prstGeom prst="rect">
@@ -11683,8 +11928,8 @@
         </p:nvSpPr>
         <p:spPr>
           <a:xfrm>
-            <a:off x="822960" y="2148840"/>
-            <a:ext cx="3291840" cy="566928"/>
+            <a:off x="822960" y="2103120"/>
+            <a:ext cx="4572000" cy="566928"/>
           </a:xfrm>
           <a:prstGeom prst="rect">
             <a:avLst/>
@@ -11706,7 +11951,7 @@
               </a:spcAft>
             </a:pPr>
             <a:r>
-              <a:rPr sz="1600" b="1">
+              <a:rPr sz="1700" b="1">
                 <a:solidFill>
                   <a:srgbClr val="35789C"/>
                 </a:solidFill>
@@ -11725,8 +11970,8 @@
         </p:nvSpPr>
         <p:spPr>
           <a:xfrm>
-            <a:off x="4114800" y="2148840"/>
-            <a:ext cx="3840480" cy="566928"/>
+            <a:off x="5394960" y="2103120"/>
+            <a:ext cx="6035040" cy="566928"/>
           </a:xfrm>
           <a:prstGeom prst="rect">
             <a:avLst/>
@@ -11748,13 +11993,13 @@
               </a:spcAft>
             </a:pPr>
             <a:r>
-              <a:rPr sz="1600" b="1">
+              <a:rPr sz="1700" b="1">
                 <a:solidFill>
                   <a:srgbClr val="35789C"/>
                 </a:solidFill>
                 <a:latin typeface="Helvetica Neue"/>
               </a:rPr>
-              <a:t>PRINCIPAL</a:t>
+              <a:t>HERRAMIENTA</a:t>
             </a:r>
           </a:p>
         </p:txBody>
@@ -11767,8 +12012,8 @@
         </p:nvSpPr>
         <p:spPr>
           <a:xfrm>
-            <a:off x="7955279" y="2148840"/>
-            <a:ext cx="3474720" cy="566928"/>
+            <a:off x="822960" y="2670048"/>
+            <a:ext cx="4572000" cy="566928"/>
           </a:xfrm>
           <a:prstGeom prst="rect">
             <a:avLst/>
@@ -11790,13 +12035,13 @@
               </a:spcAft>
             </a:pPr>
             <a:r>
-              <a:rPr sz="1600" b="1">
-                <a:solidFill>
-                  <a:srgbClr val="35789C"/>
-                </a:solidFill>
-                <a:latin typeface="Helvetica Neue"/>
-              </a:rPr>
-              <a:t>ALTERNATIVA</a:t>
+              <a:rPr sz="1700" b="1">
+                <a:solidFill>
+                  <a:srgbClr val="ED7623"/>
+                </a:solidFill>
+                <a:latin typeface="Helvetica Neue"/>
+              </a:rPr>
+              <a:t>Guion</a:t>
             </a:r>
           </a:p>
         </p:txBody>
@@ -11809,8 +12054,8 @@
         </p:nvSpPr>
         <p:spPr>
           <a:xfrm>
-            <a:off x="822960" y="2715768"/>
-            <a:ext cx="3291840" cy="566928"/>
+            <a:off x="5394960" y="2670048"/>
+            <a:ext cx="6035040" cy="566928"/>
           </a:xfrm>
           <a:prstGeom prst="rect">
             <a:avLst/>
@@ -11832,49 +12077,7 @@
               </a:spcAft>
             </a:pPr>
             <a:r>
-              <a:rPr sz="1600" b="1">
-                <a:solidFill>
-                  <a:srgbClr val="ED7623"/>
-                </a:solidFill>
-                <a:latin typeface="Helvetica Neue"/>
-              </a:rPr>
-              <a:t>Guion</a:t>
-            </a:r>
-          </a:p>
-        </p:txBody>
-      </p:sp>
-      <p:sp>
-        <p:nvSpPr>
-          <p:cNvPr id="10" name="TextBox 9"/>
-          <p:cNvSpPr txBox="1"/>
-          <p:nvPr/>
-        </p:nvSpPr>
-        <p:spPr>
-          <a:xfrm>
-            <a:off x="4114800" y="2715768"/>
-            <a:ext cx="3840480" cy="566928"/>
-          </a:xfrm>
-          <a:prstGeom prst="rect">
-            <a:avLst/>
-          </a:prstGeom>
-          <a:noFill/>
-        </p:spPr>
-        <p:txBody>
-          <a:bodyPr wrap="square" lIns="0" rIns="0" tIns="0" bIns="0">
-            <a:spAutoFit/>
-          </a:bodyPr>
-          <a:lstStyle/>
-          <a:p>
-            <a:pPr algn="l">
-              <a:lnSpc>
-                <a:spcPct val="112000"/>
-              </a:lnSpc>
-              <a:spcAft>
-                <a:spcPts val="0"/>
-              </a:spcAft>
-            </a:pPr>
-            <a:r>
-              <a:rPr sz="1600" b="0">
+              <a:rPr sz="1700" b="0">
                 <a:solidFill>
                   <a:srgbClr val="6E6E6E"/>
                 </a:solidFill>
@@ -11887,55 +12090,13 @@
       </p:sp>
       <p:sp>
         <p:nvSpPr>
-          <p:cNvPr id="11" name="TextBox 10"/>
-          <p:cNvSpPr txBox="1"/>
-          <p:nvPr/>
-        </p:nvSpPr>
-        <p:spPr>
-          <a:xfrm>
-            <a:off x="7955279" y="2715768"/>
-            <a:ext cx="3474720" cy="566928"/>
-          </a:xfrm>
-          <a:prstGeom prst="rect">
-            <a:avLst/>
-          </a:prstGeom>
-          <a:noFill/>
-        </p:spPr>
-        <p:txBody>
-          <a:bodyPr wrap="square" lIns="0" rIns="0" tIns="0" bIns="0">
-            <a:spAutoFit/>
-          </a:bodyPr>
-          <a:lstStyle/>
-          <a:p>
-            <a:pPr algn="l">
-              <a:lnSpc>
-                <a:spcPct val="112000"/>
-              </a:lnSpc>
-              <a:spcAft>
-                <a:spcPts val="0"/>
-              </a:spcAft>
-            </a:pPr>
-            <a:r>
-              <a:rPr sz="1600" b="0">
-                <a:solidFill>
-                  <a:srgbClr val="6E6E6E"/>
-                </a:solidFill>
-                <a:latin typeface="Helvetica Neue"/>
-              </a:rPr>
-              <a:t>ChatGPT o Claude</a:t>
-            </a:r>
-          </a:p>
-        </p:txBody>
-      </p:sp>
-      <p:sp>
-        <p:nvSpPr>
-          <p:cNvPr id="12" name="Rectangle 11"/>
+          <p:cNvPr id="10" name="Rectangle 9"/>
           <p:cNvSpPr/>
           <p:nvPr/>
         </p:nvSpPr>
         <p:spPr>
           <a:xfrm>
-            <a:off x="822960" y="3218688"/>
+            <a:off x="822960" y="3172968"/>
             <a:ext cx="10607040" cy="7315"/>
           </a:xfrm>
           <a:prstGeom prst="rect">
@@ -11973,14 +12134,14 @@
       </p:sp>
       <p:sp>
         <p:nvSpPr>
-          <p:cNvPr id="13" name="TextBox 12"/>
+          <p:cNvPr id="11" name="TextBox 10"/>
           <p:cNvSpPr txBox="1"/>
           <p:nvPr/>
         </p:nvSpPr>
         <p:spPr>
           <a:xfrm>
-            <a:off x="822960" y="3282696"/>
-            <a:ext cx="3291840" cy="566928"/>
+            <a:off x="822960" y="3236976"/>
+            <a:ext cx="4572000" cy="566928"/>
           </a:xfrm>
           <a:prstGeom prst="rect">
             <a:avLst/>
@@ -12002,27 +12163,27 @@
               </a:spcAft>
             </a:pPr>
             <a:r>
-              <a:rPr sz="1600" b="1">
+              <a:rPr sz="1700" b="1">
                 <a:solidFill>
                   <a:srgbClr val="ED7623"/>
                 </a:solidFill>
                 <a:latin typeface="Helvetica Neue"/>
               </a:rPr>
-              <a:t>Voz a texto</a:t>
-            </a:r>
-          </a:p>
-        </p:txBody>
-      </p:sp>
-      <p:sp>
-        <p:nvSpPr>
-          <p:cNvPr id="14" name="TextBox 13"/>
+              <a:t>Los seis clips</a:t>
+            </a:r>
+          </a:p>
+        </p:txBody>
+      </p:sp>
+      <p:sp>
+        <p:nvSpPr>
+          <p:cNvPr id="12" name="TextBox 11"/>
           <p:cNvSpPr txBox="1"/>
           <p:nvPr/>
         </p:nvSpPr>
         <p:spPr>
           <a:xfrm>
-            <a:off x="4114800" y="3282696"/>
-            <a:ext cx="3840480" cy="566928"/>
+            <a:off x="5394960" y="3236976"/>
+            <a:ext cx="6035040" cy="566928"/>
           </a:xfrm>
           <a:prstGeom prst="rect">
             <a:avLst/>
@@ -12044,68 +12205,26 @@
               </a:spcAft>
             </a:pPr>
             <a:r>
-              <a:rPr sz="1600" b="0">
+              <a:rPr sz="1700" b="0">
                 <a:solidFill>
                   <a:srgbClr val="6E6E6E"/>
                 </a:solidFill>
                 <a:latin typeface="Helvetica Neue"/>
               </a:rPr>
-              <a:t>Dictado por voz de Google Docs</a:t>
-            </a:r>
-          </a:p>
-        </p:txBody>
-      </p:sp>
-      <p:sp>
-        <p:nvSpPr>
-          <p:cNvPr id="15" name="TextBox 14"/>
-          <p:cNvSpPr txBox="1"/>
-          <p:nvPr/>
-        </p:nvSpPr>
-        <p:spPr>
-          <a:xfrm>
-            <a:off x="7955279" y="3282696"/>
-            <a:ext cx="3474720" cy="566928"/>
-          </a:xfrm>
-          <a:prstGeom prst="rect">
-            <a:avLst/>
-          </a:prstGeom>
-          <a:noFill/>
-        </p:spPr>
-        <p:txBody>
-          <a:bodyPr wrap="square" lIns="0" rIns="0" tIns="0" bIns="0">
-            <a:spAutoFit/>
-          </a:bodyPr>
-          <a:lstStyle/>
-          <a:p>
-            <a:pPr algn="l">
-              <a:lnSpc>
-                <a:spcPct val="112000"/>
-              </a:lnSpc>
-              <a:spcAft>
-                <a:spcPts val="0"/>
-              </a:spcAft>
-            </a:pPr>
-            <a:r>
-              <a:rPr sz="1600" b="0">
-                <a:solidFill>
-                  <a:srgbClr val="6E6E6E"/>
-                </a:solidFill>
-                <a:latin typeface="Helvetica Neue"/>
-              </a:rPr>
-              <a:t>Subir el audio a Gemini</a:t>
-            </a:r>
-          </a:p>
-        </p:txBody>
-      </p:sp>
-      <p:sp>
-        <p:nvSpPr>
-          <p:cNvPr id="16" name="Rectangle 15"/>
+              <a:t>Gemini → Crear video</a:t>
+            </a:r>
+          </a:p>
+        </p:txBody>
+      </p:sp>
+      <p:sp>
+        <p:nvSpPr>
+          <p:cNvPr id="13" name="Rectangle 12"/>
           <p:cNvSpPr/>
           <p:nvPr/>
         </p:nvSpPr>
         <p:spPr>
           <a:xfrm>
-            <a:off x="822960" y="3785615"/>
+            <a:off x="822960" y="3739896"/>
             <a:ext cx="10607040" cy="7315"/>
           </a:xfrm>
           <a:prstGeom prst="rect">
@@ -12143,14 +12262,14 @@
       </p:sp>
       <p:sp>
         <p:nvSpPr>
-          <p:cNvPr id="17" name="TextBox 16"/>
+          <p:cNvPr id="14" name="TextBox 13"/>
           <p:cNvSpPr txBox="1"/>
           <p:nvPr/>
         </p:nvSpPr>
         <p:spPr>
           <a:xfrm>
-            <a:off x="822960" y="3849624"/>
-            <a:ext cx="3291840" cy="566928"/>
+            <a:off x="822960" y="3803904"/>
+            <a:ext cx="4572000" cy="566928"/>
           </a:xfrm>
           <a:prstGeom prst="rect">
             <a:avLst/>
@@ -12172,27 +12291,27 @@
               </a:spcAft>
             </a:pPr>
             <a:r>
-              <a:rPr sz="1600" b="1">
+              <a:rPr sz="1700" b="1">
                 <a:solidFill>
                   <a:srgbClr val="ED7623"/>
                 </a:solidFill>
                 <a:latin typeface="Helvetica Neue"/>
               </a:rPr>
-              <a:t>Imagen</a:t>
-            </a:r>
-          </a:p>
-        </p:txBody>
-      </p:sp>
-      <p:sp>
-        <p:nvSpPr>
-          <p:cNvPr id="18" name="TextBox 17"/>
+              <a:t>Unirlos</a:t>
+            </a:r>
+          </a:p>
+        </p:txBody>
+      </p:sp>
+      <p:sp>
+        <p:nvSpPr>
+          <p:cNvPr id="15" name="TextBox 14"/>
           <p:cNvSpPr txBox="1"/>
           <p:nvPr/>
         </p:nvSpPr>
         <p:spPr>
           <a:xfrm>
-            <a:off x="4114800" y="3849624"/>
-            <a:ext cx="3840480" cy="566928"/>
+            <a:off x="5394960" y="3803904"/>
+            <a:ext cx="6035040" cy="566928"/>
           </a:xfrm>
           <a:prstGeom prst="rect">
             <a:avLst/>
@@ -12214,68 +12333,26 @@
               </a:spcAft>
             </a:pPr>
             <a:r>
-              <a:rPr sz="1600" b="0">
+              <a:rPr sz="1700" b="0">
                 <a:solidFill>
                   <a:srgbClr val="6E6E6E"/>
                 </a:solidFill>
                 <a:latin typeface="Helvetica Neue"/>
               </a:rPr>
-              <a:t>Gemini</a:t>
-            </a:r>
-          </a:p>
-        </p:txBody>
-      </p:sp>
-      <p:sp>
-        <p:nvSpPr>
-          <p:cNvPr id="19" name="TextBox 18"/>
-          <p:cNvSpPr txBox="1"/>
-          <p:nvPr/>
-        </p:nvSpPr>
-        <p:spPr>
-          <a:xfrm>
-            <a:off x="7955279" y="3849624"/>
-            <a:ext cx="3474720" cy="566928"/>
-          </a:xfrm>
-          <a:prstGeom prst="rect">
-            <a:avLst/>
-          </a:prstGeom>
-          <a:noFill/>
-        </p:spPr>
-        <p:txBody>
-          <a:bodyPr wrap="square" lIns="0" rIns="0" tIns="0" bIns="0">
-            <a:spAutoFit/>
-          </a:bodyPr>
-          <a:lstStyle/>
-          <a:p>
-            <a:pPr algn="l">
-              <a:lnSpc>
-                <a:spcPct val="112000"/>
-              </a:lnSpc>
-              <a:spcAft>
-                <a:spcPts val="0"/>
-              </a:spcAft>
-            </a:pPr>
-            <a:r>
-              <a:rPr sz="1600" b="0">
-                <a:solidFill>
-                  <a:srgbClr val="6E6E6E"/>
-                </a:solidFill>
-                <a:latin typeface="Helvetica Neue"/>
-              </a:rPr>
-              <a:t>Bing Image Creator · Ideogram</a:t>
-            </a:r>
-          </a:p>
-        </p:txBody>
-      </p:sp>
-      <p:sp>
-        <p:nvSpPr>
-          <p:cNvPr id="20" name="Rectangle 19"/>
+              <a:t>ChatGPT</a:t>
+            </a:r>
+          </a:p>
+        </p:txBody>
+      </p:sp>
+      <p:sp>
+        <p:nvSpPr>
+          <p:cNvPr id="16" name="Rectangle 15"/>
           <p:cNvSpPr/>
           <p:nvPr/>
         </p:nvSpPr>
         <p:spPr>
           <a:xfrm>
-            <a:off x="822960" y="4352544"/>
+            <a:off x="822960" y="4306824"/>
             <a:ext cx="10607040" cy="7315"/>
           </a:xfrm>
           <a:prstGeom prst="rect">
@@ -12313,14 +12390,14 @@
       </p:sp>
       <p:sp>
         <p:nvSpPr>
-          <p:cNvPr id="21" name="TextBox 20"/>
+          <p:cNvPr id="17" name="TextBox 16"/>
           <p:cNvSpPr txBox="1"/>
           <p:nvPr/>
         </p:nvSpPr>
         <p:spPr>
           <a:xfrm>
-            <a:off x="822960" y="4416552"/>
-            <a:ext cx="3291840" cy="566928"/>
+            <a:off x="822960" y="4370832"/>
+            <a:ext cx="4572000" cy="566928"/>
           </a:xfrm>
           <a:prstGeom prst="rect">
             <a:avLst/>
@@ -12342,27 +12419,27 @@
               </a:spcAft>
             </a:pPr>
             <a:r>
-              <a:rPr sz="1600" b="1">
+              <a:rPr sz="1700" b="1">
                 <a:solidFill>
                   <a:srgbClr val="ED7623"/>
                 </a:solidFill>
                 <a:latin typeface="Helvetica Neue"/>
               </a:rPr>
-              <a:t>Texto a voz</a:t>
-            </a:r>
-          </a:p>
-        </p:txBody>
-      </p:sp>
-      <p:sp>
-        <p:nvSpPr>
-          <p:cNvPr id="22" name="TextBox 21"/>
+              <a:t>Voz aparte (opcional)</a:t>
+            </a:r>
+          </a:p>
+        </p:txBody>
+      </p:sp>
+      <p:sp>
+        <p:nvSpPr>
+          <p:cNvPr id="18" name="TextBox 17"/>
           <p:cNvSpPr txBox="1"/>
           <p:nvPr/>
         </p:nvSpPr>
         <p:spPr>
           <a:xfrm>
-            <a:off x="4114800" y="4416552"/>
-            <a:ext cx="3840480" cy="566928"/>
+            <a:off x="5394960" y="4370832"/>
+            <a:ext cx="6035040" cy="566928"/>
           </a:xfrm>
           <a:prstGeom prst="rect">
             <a:avLst/>
@@ -12384,68 +12461,26 @@
               </a:spcAft>
             </a:pPr>
             <a:r>
-              <a:rPr sz="1600" b="0">
+              <a:rPr sz="1700" b="0">
                 <a:solidFill>
                   <a:srgbClr val="6E6E6E"/>
                 </a:solidFill>
                 <a:latin typeface="Helvetica Neue"/>
               </a:rPr>
-              <a:t>Google AI Studio (Gemini TTS)</a:t>
-            </a:r>
-          </a:p>
-        </p:txBody>
-      </p:sp>
-      <p:sp>
-        <p:nvSpPr>
-          <p:cNvPr id="23" name="TextBox 22"/>
-          <p:cNvSpPr txBox="1"/>
-          <p:nvPr/>
-        </p:nvSpPr>
-        <p:spPr>
-          <a:xfrm>
-            <a:off x="7955279" y="4416552"/>
-            <a:ext cx="3474720" cy="566928"/>
-          </a:xfrm>
-          <a:prstGeom prst="rect">
-            <a:avLst/>
-          </a:prstGeom>
-          <a:noFill/>
-        </p:spPr>
-        <p:txBody>
-          <a:bodyPr wrap="square" lIns="0" rIns="0" tIns="0" bIns="0">
-            <a:spAutoFit/>
-          </a:bodyPr>
-          <a:lstStyle/>
-          <a:p>
-            <a:pPr algn="l">
-              <a:lnSpc>
-                <a:spcPct val="112000"/>
-              </a:lnSpc>
-              <a:spcAft>
-                <a:spcPts val="0"/>
-              </a:spcAft>
-            </a:pPr>
-            <a:r>
-              <a:rPr sz="1600" b="0">
-                <a:solidFill>
-                  <a:srgbClr val="6E6E6E"/>
-                </a:solidFill>
-                <a:latin typeface="Helvetica Neue"/>
-              </a:rPr>
-              <a:t>ElevenLabs · TTSMaker</a:t>
-            </a:r>
-          </a:p>
-        </p:txBody>
-      </p:sp>
-      <p:sp>
-        <p:nvSpPr>
-          <p:cNvPr id="24" name="Rectangle 23"/>
+              <a:t>ElevenLabs</a:t>
+            </a:r>
+          </a:p>
+        </p:txBody>
+      </p:sp>
+      <p:sp>
+        <p:nvSpPr>
+          <p:cNvPr id="19" name="Rectangle 18"/>
           <p:cNvSpPr/>
           <p:nvPr/>
         </p:nvSpPr>
         <p:spPr>
           <a:xfrm>
-            <a:off x="822960" y="4919472"/>
+            <a:off x="822960" y="4873752"/>
             <a:ext cx="10607040" cy="7315"/>
           </a:xfrm>
           <a:prstGeom prst="rect">
@@ -12483,14 +12518,14 @@
       </p:sp>
       <p:sp>
         <p:nvSpPr>
-          <p:cNvPr id="25" name="TextBox 24"/>
+          <p:cNvPr id="20" name="TextBox 19"/>
           <p:cNvSpPr txBox="1"/>
           <p:nvPr/>
         </p:nvSpPr>
         <p:spPr>
           <a:xfrm>
-            <a:off x="822960" y="4983480"/>
-            <a:ext cx="3291840" cy="566928"/>
+            <a:off x="822960" y="4937760"/>
+            <a:ext cx="4572000" cy="566928"/>
           </a:xfrm>
           <a:prstGeom prst="rect">
             <a:avLst/>
@@ -12512,27 +12547,27 @@
               </a:spcAft>
             </a:pPr>
             <a:r>
-              <a:rPr sz="1600" b="1">
+              <a:rPr sz="1700" b="1">
                 <a:solidFill>
                   <a:srgbClr val="ED7623"/>
                 </a:solidFill>
                 <a:latin typeface="Helvetica Neue"/>
               </a:rPr>
-              <a:t>Que el avatar hable</a:t>
-            </a:r>
-          </a:p>
-        </p:txBody>
-      </p:sp>
-      <p:sp>
-        <p:nvSpPr>
-          <p:cNvPr id="26" name="TextBox 25"/>
+              <a:t>Subtítulos y música (opcional)</a:t>
+            </a:r>
+          </a:p>
+        </p:txBody>
+      </p:sp>
+      <p:sp>
+        <p:nvSpPr>
+          <p:cNvPr id="21" name="TextBox 20"/>
           <p:cNvSpPr txBox="1"/>
           <p:nvPr/>
         </p:nvSpPr>
         <p:spPr>
           <a:xfrm>
-            <a:off x="4114800" y="4983480"/>
-            <a:ext cx="3840480" cy="566928"/>
+            <a:off x="5394960" y="4937760"/>
+            <a:ext cx="6035040" cy="566928"/>
           </a:xfrm>
           <a:prstGeom prst="rect">
             <a:avLst/>
@@ -12554,75 +12589,35 @@
               </a:spcAft>
             </a:pPr>
             <a:r>
-              <a:rPr sz="1600" b="0">
+              <a:rPr sz="1700" b="0">
                 <a:solidFill>
                   <a:srgbClr val="6E6E6E"/>
                 </a:solidFill>
                 <a:latin typeface="Helvetica Neue"/>
               </a:rPr>
-              <a:t>HeyGen</a:t>
-            </a:r>
-          </a:p>
-        </p:txBody>
-      </p:sp>
-      <p:sp>
-        <p:nvSpPr>
-          <p:cNvPr id="27" name="TextBox 26"/>
-          <p:cNvSpPr txBox="1"/>
-          <p:nvPr/>
-        </p:nvSpPr>
-        <p:spPr>
-          <a:xfrm>
-            <a:off x="7955279" y="4983480"/>
-            <a:ext cx="3474720" cy="566928"/>
-          </a:xfrm>
-          <a:prstGeom prst="rect">
-            <a:avLst/>
-          </a:prstGeom>
-          <a:noFill/>
-        </p:spPr>
-        <p:txBody>
-          <a:bodyPr wrap="square" lIns="0" rIns="0" tIns="0" bIns="0">
-            <a:spAutoFit/>
-          </a:bodyPr>
-          <a:lstStyle/>
-          <a:p>
-            <a:pPr algn="l">
-              <a:lnSpc>
-                <a:spcPct val="112000"/>
-              </a:lnSpc>
-              <a:spcAft>
-                <a:spcPts val="0"/>
-              </a:spcAft>
-            </a:pPr>
-            <a:r>
-              <a:rPr sz="1600" b="0">
-                <a:solidFill>
-                  <a:srgbClr val="6E6E6E"/>
-                </a:solidFill>
-                <a:latin typeface="Helvetica Neue"/>
-              </a:rPr>
-              <a:t>Hedra · Vidnoz · Google Vids</a:t>
-            </a:r>
-          </a:p>
-        </p:txBody>
-      </p:sp>
-      <p:sp>
-        <p:nvSpPr>
-          <p:cNvPr id="28" name="Rectangle 27"/>
+              <a:t>CapCut</a:t>
+            </a:r>
+          </a:p>
+        </p:txBody>
+      </p:sp>
+      <p:sp>
+        <p:nvSpPr>
+          <p:cNvPr id="22" name="Rounded Rectangle 21"/>
           <p:cNvSpPr/>
           <p:nvPr/>
         </p:nvSpPr>
         <p:spPr>
           <a:xfrm>
-            <a:off x="822960" y="5486400"/>
-            <a:ext cx="10607040" cy="7315"/>
-          </a:xfrm>
-          <a:prstGeom prst="rect">
-            <a:avLst/>
+            <a:off x="822960" y="5532120"/>
+            <a:ext cx="10607040" cy="1005840"/>
+          </a:xfrm>
+          <a:prstGeom prst="roundRect">
+            <a:avLst>
+              <a:gd name="adj" fmla="val 5000"/>
+            </a:avLst>
           </a:prstGeom>
           <a:solidFill>
-            <a:srgbClr val="E3E0DA"/>
+            <a:srgbClr val="FDF0E6"/>
           </a:solidFill>
           <a:ln>
             <a:noFill/>
@@ -12653,14 +12648,14 @@
       </p:sp>
       <p:sp>
         <p:nvSpPr>
-          <p:cNvPr id="29" name="TextBox 28"/>
+          <p:cNvPr id="23" name="TextBox 22"/>
           <p:cNvSpPr txBox="1"/>
           <p:nvPr/>
         </p:nvSpPr>
         <p:spPr>
           <a:xfrm>
-            <a:off x="822960" y="5550408"/>
-            <a:ext cx="3291840" cy="566928"/>
+            <a:off x="1234440" y="5760720"/>
+            <a:ext cx="9875520" cy="640080"/>
           </a:xfrm>
           <a:prstGeom prst="rect">
             <a:avLst/>
@@ -12675,104 +12670,39 @@
           <a:p>
             <a:pPr algn="l">
               <a:lnSpc>
-                <a:spcPct val="112000"/>
+                <a:spcPct val="125000"/>
               </a:lnSpc>
               <a:spcAft>
-                <a:spcPts val="0"/>
-              </a:spcAft>
-            </a:pPr>
-            <a:r>
-              <a:rPr sz="1600" b="1">
+                <a:spcPts val="200"/>
+              </a:spcAft>
+            </a:pPr>
+            <a:r>
+              <a:rPr sz="1700" b="1">
                 <a:solidFill>
                   <a:srgbClr val="ED7623"/>
                 </a:solidFill>
                 <a:latin typeface="Helvetica Neue"/>
               </a:rPr>
-              <a:t>Montaje</a:t>
-            </a:r>
-          </a:p>
-        </p:txBody>
-      </p:sp>
-      <p:sp>
-        <p:nvSpPr>
-          <p:cNvPr id="30" name="TextBox 29"/>
-          <p:cNvSpPr txBox="1"/>
-          <p:nvPr/>
-        </p:nvSpPr>
-        <p:spPr>
-          <a:xfrm>
-            <a:off x="4114800" y="5550408"/>
-            <a:ext cx="3840480" cy="566928"/>
-          </a:xfrm>
-          <a:prstGeom prst="rect">
-            <a:avLst/>
-          </a:prstGeom>
-          <a:noFill/>
-        </p:spPr>
-        <p:txBody>
-          <a:bodyPr wrap="square" lIns="0" rIns="0" tIns="0" bIns="0">
-            <a:spAutoFit/>
-          </a:bodyPr>
-          <a:lstStyle/>
+              <a:t>La cuenta de la Universidad no tiene Crear video: hace falta Gmail personal.</a:t>
+            </a:r>
+          </a:p>
           <a:p>
             <a:pPr algn="l">
               <a:lnSpc>
-                <a:spcPct val="112000"/>
+                <a:spcPct val="125000"/>
               </a:lnSpc>
               <a:spcAft>
-                <a:spcPts val="0"/>
-              </a:spcAft>
-            </a:pPr>
-            <a:r>
-              <a:rPr sz="1600" b="0">
+                <a:spcPts val="200"/>
+              </a:spcAft>
+            </a:pPr>
+            <a:r>
+              <a:rPr sz="1500" b="0">
                 <a:solidFill>
                   <a:srgbClr val="6E6E6E"/>
                 </a:solidFill>
                 <a:latin typeface="Helvetica Neue"/>
               </a:rPr>
-              <a:t>CapCut</a:t>
-            </a:r>
-          </a:p>
-        </p:txBody>
-      </p:sp>
-      <p:sp>
-        <p:nvSpPr>
-          <p:cNvPr id="31" name="TextBox 30"/>
-          <p:cNvSpPr txBox="1"/>
-          <p:nvPr/>
-        </p:nvSpPr>
-        <p:spPr>
-          <a:xfrm>
-            <a:off x="7955279" y="5550408"/>
-            <a:ext cx="3474720" cy="566928"/>
-          </a:xfrm>
-          <a:prstGeom prst="rect">
-            <a:avLst/>
-          </a:prstGeom>
-          <a:noFill/>
-        </p:spPr>
-        <p:txBody>
-          <a:bodyPr wrap="square" lIns="0" rIns="0" tIns="0" bIns="0">
-            <a:spAutoFit/>
-          </a:bodyPr>
-          <a:lstStyle/>
-          <a:p>
-            <a:pPr algn="l">
-              <a:lnSpc>
-                <a:spcPct val="112000"/>
-              </a:lnSpc>
-              <a:spcAft>
-                <a:spcPts val="0"/>
-              </a:spcAft>
-            </a:pPr>
-            <a:r>
-              <a:rPr sz="1600" b="0">
-                <a:solidFill>
-                  <a:srgbClr val="6E6E6E"/>
-                </a:solidFill>
-                <a:latin typeface="Helvetica Neue"/>
-              </a:rPr>
-              <a:t>Clipchamp · Canva</a:t>
+              <a:t>Y el cupo cambia cada mes. Por eso existe la Ruta B.</a:t>
             </a:r>
           </a:p>
         </p:txBody>
@@ -13055,7 +12985,7 @@
                 </a:solidFill>
                 <a:latin typeface="Helvetica Neue"/>
               </a:rPr>
-              <a:t>Solo las tuyas. De nadie más, aunque sea un chiste, aunque sea tu amigo.</a:t>
+              <a:t>Solo las tuyas. Adjuntar la foto de otro es hacer un deepfake de esa persona.</a:t>
             </a:r>
           </a:p>
         </p:txBody>
@@ -13506,7 +13436,7 @@
                 </a:solidFill>
                 <a:latin typeface="Helvetica Neue"/>
               </a:rPr>
-              <a:t>Primero qué se dice. Siempre.</a:t>
+              <a:t>Y enseguida, partirlo en seis</a:t>
             </a:r>
           </a:p>
         </p:txBody>
@@ -13520,7 +13450,7 @@
         <p:spPr>
           <a:xfrm>
             <a:off x="2103120" y="2697480"/>
-            <a:ext cx="8778240" cy="2194560"/>
+            <a:ext cx="8778240" cy="2103120"/>
           </a:xfrm>
           <a:prstGeom prst="roundRect">
             <a:avLst>
@@ -13568,7 +13498,7 @@
         <p:spPr>
           <a:xfrm>
             <a:off x="2560320" y="3017520"/>
-            <a:ext cx="8046720" cy="1737360"/>
+            <a:ext cx="8046720" cy="1645920"/>
           </a:xfrm>
           <a:prstGeom prst="rect">
             <a:avLst/>
@@ -13590,13 +13520,13 @@
               </a:spcAft>
             </a:pPr>
             <a:r>
-              <a:rPr sz="1900" b="0">
+              <a:rPr sz="2400" b="1">
                 <a:solidFill>
                   <a:srgbClr val="11406E"/>
                 </a:solidFill>
                 <a:latin typeface="Helvetica Neue"/>
               </a:rPr>
-              <a:t>· Una primera frase que enganche</a:t>
+              <a:t>150 palabras  =  1 minuto</a:t>
             </a:r>
           </a:p>
           <a:p>
@@ -13609,13 +13539,13 @@
               </a:spcAft>
             </a:pPr>
             <a:r>
-              <a:rPr sz="1900" b="0">
-                <a:solidFill>
-                  <a:srgbClr val="11406E"/>
-                </a:solidFill>
-                <a:latin typeface="Helvetica Neue"/>
-              </a:rPr>
-              <a:t>· Una idea central, explicada con una comparación cotidiana</a:t>
+              <a:rPr sz="2400" b="1">
+                <a:solidFill>
+                  <a:srgbClr val="ED7623"/>
+                </a:solidFill>
+                <a:latin typeface="Helvetica Neue"/>
+              </a:rPr>
+              <a:t>6 clips de 10 segundos  =  25 palabras cada uno</a:t>
             </a:r>
           </a:p>
           <a:p>
@@ -13627,15 +13557,6 @@
                 <a:spcPts val="400"/>
               </a:spcAft>
             </a:pPr>
-            <a:r>
-              <a:rPr sz="1900" b="0">
-                <a:solidFill>
-                  <a:srgbClr val="11406E"/>
-                </a:solidFill>
-                <a:latin typeface="Helvetica Neue"/>
-              </a:rPr>
-              <a:t>· Un cierre que deje una pregunta</a:t>
-            </a:r>
           </a:p>
           <a:p>
             <a:pPr algn="l">
@@ -13646,24 +13567,14 @@
                 <a:spcPts val="400"/>
               </a:spcAft>
             </a:pPr>
-          </a:p>
-          <a:p>
-            <a:pPr algn="l">
-              <a:lnSpc>
-                <a:spcPct val="135000"/>
-              </a:lnSpc>
-              <a:spcAft>
-                <a:spcPts val="400"/>
-              </a:spcAft>
-            </a:pPr>
-            <a:r>
-              <a:rPr sz="1500" b="0">
+            <a:r>
+              <a:rPr sz="1600" b="0">
                 <a:solidFill>
                   <a:srgbClr val="6E6E6E"/>
                 </a:solidFill>
                 <a:latin typeface="Helvetica Neue"/>
               </a:rPr>
-              <a:t>Se habla a unas 150 palabras por minuto. El prompt está en las notas.</a:t>
+              <a:t>Cada frase tiene que entenderse sola, sin la anterior.</a:t>
             </a:r>
           </a:p>
         </p:txBody>
@@ -13676,8 +13587,8 @@
         </p:nvSpPr>
         <p:spPr>
           <a:xfrm>
-            <a:off x="2103120" y="5166360"/>
-            <a:ext cx="8778240" cy="914400"/>
+            <a:off x="2103120" y="5074920"/>
+            <a:ext cx="8778240" cy="1005840"/>
           </a:xfrm>
           <a:prstGeom prst="roundRect">
             <a:avLst>
@@ -13722,8 +13633,8 @@
         </p:nvSpPr>
         <p:spPr>
           <a:xfrm>
-            <a:off x="2560320" y="5413248"/>
-            <a:ext cx="8046720" cy="548640"/>
+            <a:off x="2560320" y="5303520"/>
+            <a:ext cx="8046720" cy="640080"/>
           </a:xfrm>
           <a:prstGeom prst="rect">
             <a:avLst/>
@@ -13737,8 +13648,11 @@
           <a:lstStyle/>
           <a:p>
             <a:pPr algn="l">
-              <a:spcAft>
-                <a:spcPts val="600"/>
+              <a:lnSpc>
+                <a:spcPct val="125000"/>
+              </a:lnSpc>
+              <a:spcAft>
+                <a:spcPts val="200"/>
               </a:spcAft>
             </a:pPr>
             <a:r>
@@ -13748,7 +13662,26 @@
                 </a:solidFill>
                 <a:latin typeface="Helvetica Neue"/>
               </a:rPr>
-              <a:t>Pruébalo: léelo en voz alta y cronométrate. Si te trabas, está mal escrito.</a:t>
+              <a:t>Lee cada frase en voz alta y cronométrala.</a:t>
+            </a:r>
+          </a:p>
+          <a:p>
+            <a:pPr algn="l">
+              <a:lnSpc>
+                <a:spcPct val="125000"/>
+              </a:lnSpc>
+              <a:spcAft>
+                <a:spcPts val="200"/>
+              </a:spcAft>
+            </a:pPr>
+            <a:r>
+              <a:rPr sz="1500" b="0">
+                <a:solidFill>
+                  <a:srgbClr val="6E6E6E"/>
+                </a:solidFill>
+                <a:latin typeface="Helvetica Neue"/>
+              </a:rPr>
+              <a:t>Si no cabe en diez segundos, pártela.</a:t>
             </a:r>
           </a:p>
         </p:txBody>
@@ -14386,7 +14319,7 @@
                 </a:solidFill>
                 <a:latin typeface="Helvetica Neue"/>
               </a:rPr>
-              <a:t>El ambiente</a:t>
+              <a:t>Tu foto</a:t>
             </a:r>
           </a:p>
         </p:txBody>
@@ -14425,7 +14358,7 @@
                 </a:solidFill>
                 <a:latin typeface="Helvetica Neue"/>
               </a:rPr>
-              <a:t>El lugar donde ocurre lo que cuentas</a:t>
+              <a:t>La misma en los seis clips</a:t>
             </a:r>
           </a:p>
         </p:txBody>
@@ -14439,7 +14372,7 @@
         <p:spPr>
           <a:xfrm>
             <a:off x="2103120" y="2697480"/>
-            <a:ext cx="8778240" cy="1920240"/>
+            <a:ext cx="4206240" cy="2240280"/>
           </a:xfrm>
           <a:prstGeom prst="roundRect">
             <a:avLst>
@@ -14486,8 +14419,8 @@
         </p:nvSpPr>
         <p:spPr>
           <a:xfrm>
-            <a:off x="2560320" y="3017520"/>
-            <a:ext cx="8046720" cy="1463040"/>
+            <a:off x="2468880" y="2971800"/>
+            <a:ext cx="3566160" cy="1828800"/>
           </a:xfrm>
           <a:prstGeom prst="rect">
             <a:avLst/>
@@ -14502,58 +14435,49 @@
           <a:p>
             <a:pPr algn="l">
               <a:lnSpc>
-                <a:spcPct val="135000"/>
+                <a:spcPct val="130000"/>
               </a:lnSpc>
               <a:spcAft>
-                <a:spcPts val="400"/>
-              </a:spcAft>
-            </a:pPr>
-            <a:r>
-              <a:rPr sz="1900" b="0">
-                <a:solidFill>
-                  <a:srgbClr val="11406E"/>
-                </a:solidFill>
-                <a:latin typeface="Helvetica Neue"/>
-              </a:rPr>
-              <a:t>Pide la imagen en 16:9, sin personas y sin texto.</a:t>
+                <a:spcPts val="300"/>
+              </a:spcAft>
+            </a:pPr>
+            <a:r>
+              <a:rPr sz="2200" b="1">
+                <a:solidFill>
+                  <a:srgbClr val="ED7623"/>
+                </a:solidFill>
+                <a:latin typeface="Helvetica Neue"/>
+              </a:rPr>
+              <a:t>Qué sirve</a:t>
             </a:r>
           </a:p>
           <a:p>
             <a:pPr algn="l">
               <a:lnSpc>
-                <a:spcPct val="135000"/>
+                <a:spcPct val="130000"/>
               </a:lnSpc>
               <a:spcAft>
-                <a:spcPts val="400"/>
-              </a:spcAft>
-            </a:pPr>
-            <a:r>
-              <a:rPr sz="1900" b="0">
-                <a:solidFill>
-                  <a:srgbClr val="11406E"/>
-                </a:solidFill>
-                <a:latin typeface="Helvetica Neue"/>
-              </a:rPr>
-              <a:t>Y pide algo que casi nadie pide: deja espacio libre a un lado</a:t>
-            </a:r>
+                <a:spcPts val="300"/>
+              </a:spcAft>
+            </a:pPr>
           </a:p>
           <a:p>
             <a:pPr algn="l">
               <a:lnSpc>
-                <a:spcPct val="135000"/>
+                <a:spcPct val="130000"/>
               </a:lnSpc>
               <a:spcAft>
-                <a:spcPts val="400"/>
-              </a:spcAft>
-            </a:pPr>
-            <a:r>
-              <a:rPr sz="1900" b="0">
-                <a:solidFill>
-                  <a:srgbClr val="11406E"/>
-                </a:solidFill>
-                <a:latin typeface="Helvetica Neue"/>
-              </a:rPr>
-              <a:t>para que quepa tu personaje.</a:t>
+                <a:spcPts val="300"/>
+              </a:spcAft>
+            </a:pPr>
+            <a:r>
+              <a:rPr sz="1500" b="0">
+                <a:solidFill>
+                  <a:srgbClr val="6E6E6E"/>
+                </a:solidFill>
+                <a:latin typeface="Helvetica Neue"/>
+              </a:rPr>
+              <a:t>De frente, cara bien iluminada, sin gafas de sol, sin otras personas.</a:t>
             </a:r>
           </a:p>
         </p:txBody>
@@ -14566,8 +14490,8 @@
         </p:nvSpPr>
         <p:spPr>
           <a:xfrm>
-            <a:off x="2103120" y="4892040"/>
-            <a:ext cx="8778240" cy="1234440"/>
+            <a:off x="6675120" y="2697480"/>
+            <a:ext cx="4206240" cy="2240280"/>
           </a:xfrm>
           <a:prstGeom prst="roundRect">
             <a:avLst>
@@ -14575,7 +14499,126 @@
             </a:avLst>
           </a:prstGeom>
           <a:solidFill>
-            <a:srgbClr val="ECF3F7"/>
+            <a:srgbClr val="F5F3EF"/>
+          </a:solidFill>
+          <a:ln w="11430">
+            <a:solidFill>
+              <a:srgbClr val="E3E0DA"/>
+            </a:solidFill>
+          </a:ln>
+          <a:effectLst/>
+        </p:spPr>
+        <p:style>
+          <a:lnRef idx="1">
+            <a:schemeClr val="accent1"/>
+          </a:lnRef>
+          <a:fillRef idx="3">
+            <a:schemeClr val="accent1"/>
+          </a:fillRef>
+          <a:effectRef idx="2">
+            <a:schemeClr val="accent1"/>
+          </a:effectRef>
+          <a:fontRef idx="minor">
+            <a:schemeClr val="lt1"/>
+          </a:fontRef>
+        </p:style>
+        <p:txBody>
+          <a:bodyPr rtlCol="0" anchor="ctr"/>
+          <a:lstStyle/>
+          <a:p>
+            <a:pPr algn="ctr"/>
+          </a:p>
+        </p:txBody>
+      </p:sp>
+      <p:sp>
+        <p:nvSpPr>
+          <p:cNvPr id="9" name="TextBox 8"/>
+          <p:cNvSpPr txBox="1"/>
+          <p:nvPr/>
+        </p:nvSpPr>
+        <p:spPr>
+          <a:xfrm>
+            <a:off x="7040880" y="2971800"/>
+            <a:ext cx="3566160" cy="1828800"/>
+          </a:xfrm>
+          <a:prstGeom prst="rect">
+            <a:avLst/>
+          </a:prstGeom>
+          <a:noFill/>
+        </p:spPr>
+        <p:txBody>
+          <a:bodyPr wrap="square" lIns="0" rIns="0" tIns="0" bIns="0">
+            <a:spAutoFit/>
+          </a:bodyPr>
+          <a:lstStyle/>
+          <a:p>
+            <a:pPr algn="l">
+              <a:lnSpc>
+                <a:spcPct val="130000"/>
+              </a:lnSpc>
+              <a:spcAft>
+                <a:spcPts val="300"/>
+              </a:spcAft>
+            </a:pPr>
+            <a:r>
+              <a:rPr sz="2200" b="1">
+                <a:solidFill>
+                  <a:srgbClr val="35789C"/>
+                </a:solidFill>
+                <a:latin typeface="Helvetica Neue"/>
+              </a:rPr>
+              <a:t>Sin tu cara</a:t>
+            </a:r>
+          </a:p>
+          <a:p>
+            <a:pPr algn="l">
+              <a:lnSpc>
+                <a:spcPct val="130000"/>
+              </a:lnSpc>
+              <a:spcAft>
+                <a:spcPts val="300"/>
+              </a:spcAft>
+            </a:pPr>
+          </a:p>
+          <a:p>
+            <a:pPr algn="l">
+              <a:lnSpc>
+                <a:spcPct val="130000"/>
+              </a:lnSpc>
+              <a:spcAft>
+                <a:spcPts val="300"/>
+              </a:spcAft>
+            </a:pPr>
+            <a:r>
+              <a:rPr sz="1500" b="0">
+                <a:solidFill>
+                  <a:srgbClr val="6E6E6E"/>
+                </a:solidFill>
+                <a:latin typeface="Helvetica Neue"/>
+              </a:rPr>
+              <a:t>No adjuntes nada y describe un personaje. La misma descripción en los seis.</a:t>
+            </a:r>
+          </a:p>
+        </p:txBody>
+      </p:sp>
+      <p:sp>
+        <p:nvSpPr>
+          <p:cNvPr id="10" name="Rounded Rectangle 9"/>
+          <p:cNvSpPr/>
+          <p:nvPr/>
+        </p:nvSpPr>
+        <p:spPr>
+          <a:xfrm>
+            <a:off x="2103120" y="5166360"/>
+            <a:ext cx="8778240" cy="914400"/>
+          </a:xfrm>
+          <a:prstGeom prst="roundRect">
+            <a:avLst>
+              <a:gd name="adj" fmla="val 5000"/>
+            </a:avLst>
+          </a:prstGeom>
+          <a:solidFill>
+            <a:srgbClr val="FDF0E6"/>
           </a:solidFill>
           <a:ln>
             <a:noFill/>
@@ -14606,14 +14649,14 @@
       </p:sp>
       <p:sp>
         <p:nvSpPr>
-          <p:cNvPr id="9" name="TextBox 8"/>
+          <p:cNvPr id="11" name="TextBox 10"/>
           <p:cNvSpPr txBox="1"/>
           <p:nvPr/>
         </p:nvSpPr>
         <p:spPr>
           <a:xfrm>
-            <a:off x="2560320" y="5120640"/>
-            <a:ext cx="8046720" cy="914400"/>
+            <a:off x="2560320" y="5413248"/>
+            <a:ext cx="8046720" cy="548640"/>
           </a:xfrm>
           <a:prstGeom prst="rect">
             <a:avLst/>
@@ -14627,40 +14670,18 @@
           <a:lstStyle/>
           <a:p>
             <a:pPr algn="l">
-              <a:lnSpc>
-                <a:spcPct val="130000"/>
-              </a:lnSpc>
-              <a:spcAft>
-                <a:spcPts val="200"/>
-              </a:spcAft>
-            </a:pPr>
-            <a:r>
-              <a:rPr sz="1700" b="0">
-                <a:solidFill>
-                  <a:srgbClr val="35789C"/>
-                </a:solidFill>
-                <a:latin typeface="Helvetica Neue"/>
-              </a:rPr>
-              <a:t>Un laboratorio · una sala de audiencias · un taller de pintura</a:t>
-            </a:r>
-          </a:p>
-          <a:p>
-            <a:pPr algn="l">
-              <a:lnSpc>
-                <a:spcPct val="130000"/>
-              </a:lnSpc>
-              <a:spcAft>
-                <a:spcPts val="200"/>
-              </a:spcAft>
-            </a:pPr>
-            <a:r>
-              <a:rPr sz="1700" b="0">
-                <a:solidFill>
-                  <a:srgbClr val="35789C"/>
-                </a:solidFill>
-                <a:latin typeface="Helvetica Neue"/>
-              </a:rPr>
-              <a:t>una planta de alimentos · una cancha · un afloramiento rocoso</a:t>
+              <a:spcAft>
+                <a:spcPts val="600"/>
+              </a:spcAft>
+            </a:pPr>
+            <a:r>
+              <a:rPr sz="1700" b="1">
+                <a:solidFill>
+                  <a:srgbClr val="ED7623"/>
+                </a:solidFill>
+                <a:latin typeface="Helvetica Neue"/>
+              </a:rPr>
+              <a:t>Si cambias de foto entre clips, cambias de persona.</a:t>
             </a:r>
           </a:p>
         </p:txBody>
@@ -14808,7 +14829,7 @@
                 </a:solidFill>
                 <a:latin typeface="Helvetica Neue"/>
               </a:rPr>
-              <a:t>Tu avatar</a:t>
+              <a:t>Los clips</a:t>
             </a:r>
           </a:p>
         </p:txBody>
@@ -14847,7 +14868,7 @@
                 </a:solidFill>
                 <a:latin typeface="Helvetica Neue"/>
               </a:rPr>
-              <a:t>Tu personaje, a partir de tu propia foto</a:t>
+              <a:t>Uno por frase. Diez segundos, con voz incluida</a:t>
             </a:r>
           </a:p>
         </p:txBody>
@@ -14861,7 +14882,7 @@
         <p:spPr>
           <a:xfrm>
             <a:off x="2103120" y="2697480"/>
-            <a:ext cx="4206240" cy="2240280"/>
+            <a:ext cx="8778240" cy="1828800"/>
           </a:xfrm>
           <a:prstGeom prst="roundRect">
             <a:avLst>
@@ -14908,8 +14929,8 @@
         </p:nvSpPr>
         <p:spPr>
           <a:xfrm>
-            <a:off x="2468880" y="2971800"/>
-            <a:ext cx="3566160" cy="1828800"/>
+            <a:off x="2560320" y="2971800"/>
+            <a:ext cx="8046720" cy="1371600"/>
           </a:xfrm>
           <a:prstGeom prst="rect">
             <a:avLst/>
@@ -14924,39 +14945,39 @@
           <a:p>
             <a:pPr algn="l">
               <a:lnSpc>
-                <a:spcPct val="130000"/>
+                <a:spcPct val="135000"/>
               </a:lnSpc>
               <a:spcAft>
-                <a:spcPts val="300"/>
-              </a:spcAft>
-            </a:pPr>
-            <a:r>
-              <a:rPr sz="2200" b="1">
-                <a:solidFill>
-                  <a:srgbClr val="ED7623"/>
-                </a:solidFill>
-                <a:latin typeface="Helvetica Neue"/>
-              </a:rPr>
-              <a:t>Con tu foto</a:t>
+                <a:spcPts val="400"/>
+              </a:spcAft>
+            </a:pPr>
+            <a:r>
+              <a:rPr sz="1900" b="1">
+                <a:solidFill>
+                  <a:srgbClr val="11406E"/>
+                </a:solidFill>
+                <a:latin typeface="Helvetica Neue"/>
+              </a:rPr>
+              <a:t>Botón +  →  Crear video  →  adjuntas la foto  →  escribes el prompt</a:t>
             </a:r>
           </a:p>
           <a:p>
             <a:pPr algn="l">
               <a:lnSpc>
-                <a:spcPct val="130000"/>
+                <a:spcPct val="135000"/>
               </a:lnSpc>
               <a:spcAft>
-                <a:spcPts val="300"/>
+                <a:spcPts val="400"/>
               </a:spcAft>
             </a:pPr>
           </a:p>
           <a:p>
             <a:pPr algn="l">
               <a:lnSpc>
-                <a:spcPct val="130000"/>
+                <a:spcPct val="135000"/>
               </a:lnSpc>
               <a:spcAft>
-                <a:spcPts val="300"/>
+                <a:spcPts val="400"/>
               </a:spcAft>
             </a:pPr>
             <a:r>
@@ -14966,7 +14987,7 @@
                 </a:solidFill>
                 <a:latin typeface="Helvetica Neue"/>
               </a:rPr>
-              <a:t>Gemini toma tu cara como referencia y te devuelve el personaje con el vestuario que pidas.</a:t>
+              <a:t>Dos a cuatro minutos por clip. El prompt completo está en las notas.</a:t>
             </a:r>
           </a:p>
         </p:txBody>
@@ -14979,127 +15000,8 @@
         </p:nvSpPr>
         <p:spPr>
           <a:xfrm>
-            <a:off x="6675120" y="2697480"/>
-            <a:ext cx="4206240" cy="2240280"/>
-          </a:xfrm>
-          <a:prstGeom prst="roundRect">
-            <a:avLst>
-              <a:gd name="adj" fmla="val 5000"/>
-            </a:avLst>
-          </a:prstGeom>
-          <a:solidFill>
-            <a:srgbClr val="F5F3EF"/>
-          </a:solidFill>
-          <a:ln w="11430">
-            <a:solidFill>
-              <a:srgbClr val="E3E0DA"/>
-            </a:solidFill>
-          </a:ln>
-          <a:effectLst/>
-        </p:spPr>
-        <p:style>
-          <a:lnRef idx="1">
-            <a:schemeClr val="accent1"/>
-          </a:lnRef>
-          <a:fillRef idx="3">
-            <a:schemeClr val="accent1"/>
-          </a:fillRef>
-          <a:effectRef idx="2">
-            <a:schemeClr val="accent1"/>
-          </a:effectRef>
-          <a:fontRef idx="minor">
-            <a:schemeClr val="lt1"/>
-          </a:fontRef>
-        </p:style>
-        <p:txBody>
-          <a:bodyPr rtlCol="0" anchor="ctr"/>
-          <a:lstStyle/>
-          <a:p>
-            <a:pPr algn="ctr"/>
-          </a:p>
-        </p:txBody>
-      </p:sp>
-      <p:sp>
-        <p:nvSpPr>
-          <p:cNvPr id="9" name="TextBox 8"/>
-          <p:cNvSpPr txBox="1"/>
-          <p:nvPr/>
-        </p:nvSpPr>
-        <p:spPr>
-          <a:xfrm>
-            <a:off x="7040880" y="2971800"/>
-            <a:ext cx="3566160" cy="1828800"/>
-          </a:xfrm>
-          <a:prstGeom prst="rect">
-            <a:avLst/>
-          </a:prstGeom>
-          <a:noFill/>
-        </p:spPr>
-        <p:txBody>
-          <a:bodyPr wrap="square" lIns="0" rIns="0" tIns="0" bIns="0">
-            <a:spAutoFit/>
-          </a:bodyPr>
-          <a:lstStyle/>
-          <a:p>
-            <a:pPr algn="l">
-              <a:lnSpc>
-                <a:spcPct val="130000"/>
-              </a:lnSpc>
-              <a:spcAft>
-                <a:spcPts val="300"/>
-              </a:spcAft>
-            </a:pPr>
-            <a:r>
-              <a:rPr sz="2200" b="1">
-                <a:solidFill>
-                  <a:srgbClr val="35789C"/>
-                </a:solidFill>
-                <a:latin typeface="Helvetica Neue"/>
-              </a:rPr>
-              <a:t>Sin tu foto</a:t>
-            </a:r>
-          </a:p>
-          <a:p>
-            <a:pPr algn="l">
-              <a:lnSpc>
-                <a:spcPct val="130000"/>
-              </a:lnSpc>
-              <a:spcAft>
-                <a:spcPts val="300"/>
-              </a:spcAft>
-            </a:pPr>
-          </a:p>
-          <a:p>
-            <a:pPr algn="l">
-              <a:lnSpc>
-                <a:spcPct val="130000"/>
-              </a:lnSpc>
-              <a:spcAft>
-                <a:spcPts val="300"/>
-              </a:spcAft>
-            </a:pPr>
-            <a:r>
-              <a:rPr sz="1500" b="0">
-                <a:solidFill>
-                  <a:srgbClr val="6E6E6E"/>
-                </a:solidFill>
-                <a:latin typeface="Helvetica Neue"/>
-              </a:rPr>
-              <a:t>Describes un personaje inventado y listo. Nadie está obligado a poner su cara.</a:t>
-            </a:r>
-          </a:p>
-        </p:txBody>
-      </p:sp>
-      <p:sp>
-        <p:nvSpPr>
-          <p:cNvPr id="10" name="Rounded Rectangle 9"/>
-          <p:cNvSpPr/>
-          <p:nvPr/>
-        </p:nvSpPr>
-        <p:spPr>
-          <a:xfrm>
-            <a:off x="2103120" y="5166360"/>
-            <a:ext cx="8778240" cy="914400"/>
+            <a:off x="2103120" y="4800600"/>
+            <a:ext cx="8778240" cy="1325880"/>
           </a:xfrm>
           <a:prstGeom prst="roundRect">
             <a:avLst>
@@ -15138,14 +15040,14 @@
       </p:sp>
       <p:sp>
         <p:nvSpPr>
-          <p:cNvPr id="11" name="TextBox 10"/>
+          <p:cNvPr id="9" name="TextBox 8"/>
           <p:cNvSpPr txBox="1"/>
           <p:nvPr/>
         </p:nvSpPr>
         <p:spPr>
           <a:xfrm>
-            <a:off x="2560320" y="5413248"/>
-            <a:ext cx="8046720" cy="548640"/>
+            <a:off x="2560320" y="5029200"/>
+            <a:ext cx="8046720" cy="1005840"/>
           </a:xfrm>
           <a:prstGeom prst="rect">
             <a:avLst/>
@@ -15159,8 +15061,11 @@
           <a:lstStyle/>
           <a:p>
             <a:pPr algn="l">
-              <a:spcAft>
-                <a:spcPts val="600"/>
+              <a:lnSpc>
+                <a:spcPct val="130000"/>
+              </a:lnSpc>
+              <a:spcAft>
+                <a:spcPts val="200"/>
               </a:spcAft>
             </a:pPr>
             <a:r>
@@ -15170,7 +15075,45 @@
                 </a:solidFill>
                 <a:latin typeface="Helvetica Neue"/>
               </a:rPr>
-              <a:t>Pide fondo gris liso: es lo que te deja recortarlo y montarlo sobre el ambiente.</a:t>
+              <a:t>El orden importa: primero Crear video, después la foto.</a:t>
+            </a:r>
+          </a:p>
+          <a:p>
+            <a:pPr algn="l">
+              <a:lnSpc>
+                <a:spcPct val="130000"/>
+              </a:lnSpc>
+              <a:spcAft>
+                <a:spcPts val="200"/>
+              </a:spcAft>
+            </a:pPr>
+            <a:r>
+              <a:rPr sz="1500" b="0">
+                <a:solidFill>
+                  <a:srgbClr val="6E6E6E"/>
+                </a:solidFill>
+                <a:latin typeface="Helvetica Neue"/>
+              </a:rPr>
+              <a:t>Al revés, Gemini se sale del modo video y te contesta por escrito.</a:t>
+            </a:r>
+          </a:p>
+          <a:p>
+            <a:pPr algn="l">
+              <a:lnSpc>
+                <a:spcPct val="130000"/>
+              </a:lnSpc>
+              <a:spcAft>
+                <a:spcPts val="200"/>
+              </a:spcAft>
+            </a:pPr>
+            <a:r>
+              <a:rPr sz="1500" b="0">
+                <a:solidFill>
+                  <a:srgbClr val="6E6E6E"/>
+                </a:solidFill>
+                <a:latin typeface="Helvetica Neue"/>
+              </a:rPr>
+              <a:t>Antes de enviar, comprueba que abajo diga «Videos».</a:t>
             </a:r>
           </a:p>
         </p:txBody>

--- a/_static/sesion06/S06_audio_imagen_video.pptx
+++ b/_static/sesion06/S06_audio_imagen_video.pptx
@@ -1557,6 +1557,28 @@
           <a:p>
             <a:r>
               <a:t>Por eso la Ruta B de la diapositiva 13 no es un adorno: es el plan para medio salón.</a:t>
+            </a:r>
+          </a:p>
+          <a:p/>
+          <a:p>
+            <a:r>
+              <a:t>SI ALGUIEN PREGUNTA POR OTRAS RUTAS, las dos obvias están descartadas y lo comprobé:</a:t>
+            </a:r>
+          </a:p>
+          <a:p>
+            <a:r>
+              <a:t>· SORA (OpenAI) ya no existe. Lo descontinuaron el 26 de abril de 2026, web y app; la API se apaga el 24 de septiembre de 2026. Está en el centro de ayuda de OpenAI.</a:t>
+            </a:r>
+          </a:p>
+          <a:p>
+            <a:r>
+              <a:t>· GOOGLE AI STUDIO sí tiene generación de video, pero es de pago: el único modelo de la categoría Video está marcado "Paid" y cuesta unos 7,50 dólares por salida. El nivel gratuito de AI Studio cubre texto y audio —por eso la voz sí funciona ahí— pero no video.</a:t>
+            </a:r>
+          </a:p>
+          <a:p/>
+          <a:p>
+            <a:r>
+              <a:t>O sea: para video gratis, la app de Gemini con cuenta personal es la única puerta. No hay plan C.</a:t>
             </a:r>
           </a:p>
         </p:txBody>

--- a/_static/sesion06/S06_audio_imagen_video.pptx
+++ b/_static/sesion06/S06_audio_imagen_video.pptx
@@ -529,7 +529,13 @@
           <a:p/>
           <a:p>
             <a:r>
-              <a:t>AVISO QUE HAY QUE DAR DE ENTRADA: esto necesita cuenta de Gmail personal. La institucional de la Universidad no tiene Crear video; lo comprobé en UCaldas y en la UAM. Quien solo tenga la institucional va por la Ruta B, que está en la diapositiva 13 y funciona igual de bien.</a:t>
+              <a:t>AVISO QUE HAY QUE DAR DE ENTRADA: esto necesita cuenta de Google personal; la institucional no sirve para generar video (comprobado en UCaldas y en la UAM).</a:t>
+            </a:r>
+          </a:p>
+          <a:p/>
+          <a:p>
+            <a:r>
+              <a:t>Y OJO CON DÓNDE: en la app de Gemini, Crear video solo aparece con plan de pago. En cuenta gratuita NO está; lo comprobé. La puerta gratuita es Google Flow: 50 créditos diarios según la página de precios de Google. Verifícalo tú antes de la clase. Si no sirve ese día, Ruta B (diapositiva 13).</a:t>
             </a:r>
           </a:p>
         </p:txBody>
@@ -616,7 +622,7 @@
           </a:p>
           <a:p>
             <a:r>
-              <a:t>«Une estos clips en un solo video, en este orden: clip1, clip2, clip3... Conserva el audio de cada uno. Déjame el archivo mp4 para descargar.»</a:t>
+              <a:t>«Une estos clips en un solo video, en este orden: clip1, clip2, clip3. Conserva el audio de cada uno. Déjame el archivo mp4 para descargar.»</a:t>
             </a:r>
           </a:p>
           <a:p/>
@@ -710,7 +716,7 @@
           <a:p/>
           <a:p>
             <a:r>
-              <a:t>Cuándo vale la pena hacerlo aparte: cuando la voz que eligió Veo no les gusta, o cuando quieren que suene igual en los seis clips (Veo puede variarla un poco entre uno y otro).</a:t>
+              <a:t>Cuándo vale la pena hacerlo aparte: cuando la voz que eligió Veo no les gusta, o cuando quieren que suene igual en los tres clips (Veo puede variarla un poco entre uno y otro).</a:t>
             </a:r>
           </a:p>
           <a:p/>
@@ -896,7 +902,7 @@
           <a:lstStyle/>
           <a:p>
             <a:r>
-              <a:t>LA RUTA B. Esta diapositiva no es un adorno: es el plan para quien solo tenga la cuenta institucional o se quede sin cupo. En un salón de treinta, va a ser bastante gente.</a:t>
+              <a:t>LA RUTA B. Esta diapositiva no es un adorno: es el plan para quien solo tenga la cuenta institucional, se quede sin créditos, o para todo el salón si Flow no funciona ese día.</a:t>
             </a:r>
           </a:p>
           <a:p/>
@@ -1016,7 +1022,7 @@
           <a:p/>
           <a:p>
             <a:r>
-              <a:t>EL GUION COMPLETO (150 palabras partidas en seis frases). Las dos primeras, que son las del ejemplo:</a:t>
+              <a:t>EL GUION COMPLETO. El ejemplo que se proyecta son las dos primeras frases; a ellos se les piden tres. Dejo las seis por si quieres mostrar la versión larga:</a:t>
             </a:r>
           </a:p>
           <a:p>
@@ -1064,6 +1070,12 @@
           <a:p>
             <a:r>
               <a:t>MOSTRAR QUE EL PERSONAJE SE MANTIENE: misma cara, misma camisa, mismo salón en los dos clips. Eso lo logra adjuntar la misma foto, nada más.</a:t>
+            </a:r>
+          </a:p>
+          <a:p/>
+          <a:p>
+            <a:r>
+              <a:t>Si quieres las tres frases justas para el encargo de clase, usa la 1, la 2 y la 6: enganchan, explican y cierran con pregunta.</a:t>
             </a:r>
           </a:p>
         </p:txBody>
@@ -1181,7 +1193,12 @@
           </a:p>
           <a:p>
             <a:r>
-              <a:t>· «Es la misma foto en todos» — a quien le salieron seis personas distintas.</a:t>
+              <a:t>· «Es la misma foto en todos» — a quien le salieron tres personas distintas.</a:t>
+            </a:r>
+          </a:p>
+          <a:p>
+            <a:r>
+              <a:t>· «Prueba Flow» — a quien no le aparece Crear video en Gemini.</a:t>
             </a:r>
           </a:p>
           <a:p>
@@ -1279,7 +1296,7 @@
           </a:p>
           <a:p>
             <a:r>
-              <a:t>· ¿Qué parte costó más? (casi siempre: partir el guion en seis, no la tecnología)</a:t>
+              <a:t>· ¿Qué parte costó más? (casi siempre: partir el guion, no la tecnología)</a:t>
             </a:r>
           </a:p>
           <a:p>
@@ -1371,13 +1388,19 @@
           <a:p/>
           <a:p>
             <a:r>
-              <a:t>Reproducir el ejemplo. Preguntar después: ¿cuántos videos distintos creen que hay aquí? La respuesta —seis clips pegados— es la agenda de la clase.</a:t>
+              <a:t>Reproducir el ejemplo. Preguntar después: ¿cuántos videos distintos creen que hay aquí? La respuesta —son clips pegados— es la agenda de la clase.</a:t>
             </a:r>
           </a:p>
           <a:p/>
           <a:p>
             <a:r>
-              <a:t>El punto pedagógico: no se hace un video de un minuto. Se hacen seis de diez segundos y se pegan. Eso es lo que lo vuelve alcanzable.</a:t>
+              <a:t>El punto pedagógico: no se hace un video de corrido. Se hacen pedazos de diez segundos y se pegan. Eso es lo que lo vuelve alcanzable.</a:t>
+            </a:r>
+          </a:p>
+          <a:p/>
+          <a:p>
+            <a:r>
+              <a:t>POR QUÉ TRES Y NO SEIS: cada clip tarda de dos a cuatro minutos en generarse y el cupo gratuito es limitado. Tres clips caben en la sesión y se llevan el video terminado; seis dejan a media clase sin acabar. Quien tenga cupo y ganas, que haga seis.</a:t>
             </a:r>
           </a:p>
         </p:txBody>
@@ -1535,28 +1558,38 @@
           <a:p/>
           <a:p>
             <a:r>
-              <a:t>COMPROBADO al preparar la clase:</a:t>
-            </a:r>
-          </a:p>
-          <a:p>
-            <a:r>
-              <a:t>· La cuenta institucional (UCaldas y UAM) NO tiene Crear video. El menú solo llega hasta Deep Research. Hace falta Gmail personal.</a:t>
-            </a:r>
-          </a:p>
-          <a:p>
-            <a:r>
-              <a:t>· El cupo no lo publica Google. En cuenta Pro son unos 3 videos al día. En gratuita puede ser poco o ninguno ese día.</a:t>
-            </a:r>
-          </a:p>
-          <a:p>
-            <a:r>
-              <a:t>· Gemini NO une videos: ejecuta código pero su entorno no tiene herramientas de video y te devuelve un comando de terminal. ChatGPT sí lo hace, en unos quince segundos.</a:t>
+              <a:t>COMPROBADO al preparar la clase, cuenta por cuenta:</a:t>
+            </a:r>
+          </a:p>
+          <a:p>
+            <a:r>
+              <a:t>· Institucional (UCaldas y UAM): NO tiene Crear video. El menú llega hasta Deep Research.</a:t>
+            </a:r>
+          </a:p>
+          <a:p>
+            <a:r>
+              <a:t>· Gmail personal GRATUITA: tampoco. Crear video no aparece en el menú. Esto fue una sorpresa y cambió el diseño de la clase.</a:t>
+            </a:r>
+          </a:p>
+          <a:p>
+            <a:r>
+              <a:t>· Gmail personal con plan PRO: sí lo tiene, unos 3 videos al día.</a:t>
+            </a:r>
+          </a:p>
+          <a:p>
+            <a:r>
+              <a:t>· GOOGLE FLOW (flow.google.com): según la página de precios de Google, cualquier cuenta de Google tiene 50 créditos diarios gratis, con Veo 3.1, avatares y personajes. No alcancé a completar la prueba de punta a punta porque Flow pedía volver a iniciar sesión. VERIFÍCALO TÚ ANTES DE LA CLASE: son dos minutos y decide por dónde corre la sesión.</a:t>
+            </a:r>
+          </a:p>
+          <a:p>
+            <a:r>
+              <a:t>· Gemini NO une videos: ejecuta código pero sin herramientas de video, y devuelve un comando de terminal. ChatGPT sí, en unos quince segundos.</a:t>
             </a:r>
           </a:p>
           <a:p/>
           <a:p>
             <a:r>
-              <a:t>Por eso la Ruta B de la diapositiva 13 no es un adorno: es el plan para medio salón.</a:t>
+              <a:t>Por eso la Ruta B de la diapositiva 13 no es un adorno.</a:t>
             </a:r>
           </a:p>
           <a:p/>
@@ -1757,7 +1790,7 @@
           <a:p/>
           <a:p>
             <a:r>
-              <a:t>«Eres guionista de videos educativos cortos. Escríbeme un guion de 150 palabras para un video de 60 segundos.</a:t>
+              <a:t>«Eres guionista de videos educativos cortos. Escríbeme un guion de 75 palabras para un video de 30 segundos.</a:t>
             </a:r>
           </a:p>
           <a:p>
@@ -1789,13 +1822,13 @@
           <a:p/>
           <a:p>
             <a:r>
-              <a:t>«Parte este guion en 6 frases de unas 25 palabras cada una. Cada frase tiene que poder decirse sola en 10 segundos y entenderse sin la anterior. Numéralas.»</a:t>
+              <a:t>«Parte este guion en 3 frases de unas 25 palabras cada una. Cada frase tiene que poder decirse sola en 10 segundos y entenderse sin la anterior. Numéralas.»</a:t>
             </a:r>
           </a:p>
           <a:p/>
           <a:p>
             <a:r>
-              <a:t>LA CUENTA: se habla a unas 150 palabras por minuto. 150 palabras = 1 minuto = 6 clips de 10 segundos = 25 palabras por clip. Hacer la cuenta en el tablero con ellos; es lo que vuelve el encargo concreto.</a:t>
+              <a:t>LA CUENTA: se habla a unas 150 palabras por minuto, o sea 25 palabras cada 10 segundos. Tres clips = 75 palabras = 30 segundos. Hacer la cuenta en el tablero con ellos; es lo que vuelve el encargo concreto.</a:t>
             </a:r>
           </a:p>
           <a:p/>
@@ -1959,7 +1992,7 @@
           <a:p/>
           <a:p>
             <a:r>
-              <a:t>La misma foto en los seis clips. Si cambian de foto, cambia la persona.</a:t>
+              <a:t>La misma foto en los tres clips. Si cambian de foto, cambia la persona.</a:t>
             </a:r>
           </a:p>
           <a:p/>
@@ -1971,7 +2004,7 @@
           <a:p/>
           <a:p>
             <a:r>
-              <a:t>PARA QUIEN NO QUIERA PONER SU CARA: que no adjunte nada y describa un personaje inventado, repitiendo la MISMA descripción palabra por palabra en los seis clips. Queda menos consistente, pero funciona. Nadie está obligado.</a:t>
+              <a:t>PARA QUIEN NO QUIERA PONER SU CARA: que no adjunte nada y describa un personaje inventado, repitiendo la MISMA descripción palabra por palabra en los tres clips. Queda menos consistente, pero funciona. Nadie está obligado.</a:t>
             </a:r>
           </a:p>
           <a:p/>
@@ -2053,6 +2086,22 @@
           <a:p/>
           <a:p>
             <a:r>
+              <a:t>DOS PUERTAS, el mismo prompt en las dos:</a:t>
+            </a:r>
+          </a:p>
+          <a:p>
+            <a:r>
+              <a:t>· GOOGLE FLOW (flow.google.com): entras con la cuenta de Google y tienes 50 créditos diarios gratis. Es la puerta que debería servirle a todo el salón.</a:t>
+            </a:r>
+          </a:p>
+          <a:p>
+            <a:r>
+              <a:t>· APP DE GEMINI: botón + → Crear video. Solo aparece con plan de pago; en cuenta gratuita no está.</a:t>
+            </a:r>
+          </a:p>
+          <a:p/>
+          <a:p>
+            <a:r>
               <a:t>PROMPT, uno por frase:</a:t>
             </a:r>
           </a:p>
@@ -2074,7 +2123,7 @@
           <a:p/>
           <a:p>
             <a:r>
-              <a:t>EL ERROR QUE VA A PASAR Y HAY QUE ANTICIPAR: si adjuntan la foto ANTES de activar Crear video, Gemini se sale del modo video y contesta por escrito. Me pasó dos veces al preparar la clase.</a:t>
+              <a:t>EL ERROR QUE VA A PASAR Y HAY QUE ANTICIPAR (solo en la app de Gemini): si adjuntan la foto ANTES de activar Crear video, Gemini se sale del modo video y contesta por escrito. Me pasó dos veces al preparar la clase.</a:t>
             </a:r>
           </a:p>
           <a:p>
@@ -5367,7 +5416,7 @@
                 </a:solidFill>
                 <a:latin typeface="Helvetica Neue"/>
               </a:rPr>
-              <a:t>Seis clips de diez segundos y un minuto de video con tu propia cara</a:t>
+              <a:t>Tres clips de diez segundos y medio minuto de video con tu propia cara</a:t>
             </a:r>
           </a:p>
         </p:txBody>
@@ -5664,7 +5713,7 @@
                 </a:solidFill>
                 <a:latin typeface="Helvetica Neue"/>
               </a:rPr>
-              <a:t>Los seis en un solo archivo</a:t>
+              <a:t>Los tres en un solo archivo</a:t>
             </a:r>
           </a:p>
         </p:txBody>
@@ -8998,7 +9047,7 @@
                 </a:solidFill>
                 <a:latin typeface="Helvetica Neue"/>
               </a:rPr>
-              <a:t>El guion completo de seis frases está en las notas.</a:t>
+              <a:t>El guion completo está en las notas. A ti te piden tres frases.</a:t>
             </a:r>
           </a:p>
         </p:txBody>
@@ -9501,7 +9550,7 @@
                 </a:solidFill>
                 <a:latin typeface="Helvetica Neue"/>
               </a:rPr>
-              <a:t>Un minuto: seis frases, seis clips, un archivo.</a:t>
+              <a:t>Treinta segundos: tres frases, tres clips, un archivo.</a:t>
             </a:r>
           </a:p>
           <a:p>
@@ -9741,7 +9790,7 @@
                 </a:solidFill>
                 <a:latin typeface="Helvetica Neue"/>
               </a:rPr>
-              <a:t>Fue decidir qué valía la pena contar, y decirlo en seis frases.</a:t>
+              <a:t>Fue decidir qué valía la pena contar, y decirlo en tres frases.</a:t>
             </a:r>
           </a:p>
         </p:txBody>
@@ -9994,7 +10043,7 @@
                 </a:solidFill>
                 <a:latin typeface="Helvetica Neue"/>
               </a:rPr>
-              <a:t>Un minuto, en seis pedazos</a:t>
+              <a:t>Medio minuto, en tres pedazos</a:t>
             </a:r>
           </a:p>
         </p:txBody>
@@ -10036,7 +10085,7 @@
                 </a:solidFill>
                 <a:latin typeface="Helvetica Neue"/>
               </a:rPr>
-              <a:t>Nadie hace un video de un minuto de una sola vez.</a:t>
+              <a:t>Nadie hace un video de corrido de una sola vez.</a:t>
             </a:r>
           </a:p>
           <a:p>
@@ -10055,7 +10104,7 @@
                 </a:solidFill>
                 <a:latin typeface="Helvetica Neue"/>
               </a:rPr>
-              <a:t>Se hacen seis de diez segundos y se pegan. Así sí se puede.</a:t>
+              <a:t>Se hacen tres de diez segundos y se pegan. Así sí se puede.</a:t>
             </a:r>
           </a:p>
         </p:txBody>
@@ -10187,7 +10236,7 @@
                 </a:solidFill>
                 <a:latin typeface="Helvetica Neue"/>
               </a:rPr>
-              <a:t>partido en 6 frases</a:t>
+              <a:t>partido en 3 frases</a:t>
             </a:r>
           </a:p>
         </p:txBody>
@@ -10409,7 +10458,7 @@
                 </a:solidFill>
                 <a:latin typeface="Helvetica Neue"/>
               </a:rPr>
-              <a:t>🎬 6 clips</a:t>
+              <a:t>🎬 3 clips</a:t>
             </a:r>
           </a:p>
         </p:txBody>
@@ -10902,7 +10951,7 @@
                 </a:solidFill>
                 <a:latin typeface="Helvetica Neue"/>
               </a:rPr>
-              <a:t>Partido en seis frases de 25 palabras</a:t>
+              <a:t>Partido en tres frases de 25 palabras</a:t>
             </a:r>
           </a:p>
         </p:txBody>
@@ -11238,7 +11287,7 @@
                 </a:solidFill>
                 <a:latin typeface="Helvetica Neue"/>
               </a:rPr>
-              <a:t>Uno por frase, en Gemini</a:t>
+              <a:t>Uno por frase, en Flow o Gemini</a:t>
             </a:r>
           </a:p>
         </p:txBody>
@@ -12191,7 +12240,7 @@
                 </a:solidFill>
                 <a:latin typeface="Helvetica Neue"/>
               </a:rPr>
-              <a:t>Los seis clips</a:t>
+              <a:t>Los tres clips</a:t>
             </a:r>
           </a:p>
         </p:txBody>
@@ -12233,7 +12282,7 @@
                 </a:solidFill>
                 <a:latin typeface="Helvetica Neue"/>
               </a:rPr>
-              <a:t>Gemini → Crear video</a:t>
+              <a:t>Google Flow (gratis) o Gemini (plan de pago)</a:t>
             </a:r>
           </a:p>
         </p:txBody>
@@ -12705,7 +12754,7 @@
                 </a:solidFill>
                 <a:latin typeface="Helvetica Neue"/>
               </a:rPr>
-              <a:t>La cuenta de la Universidad no tiene Crear video: hace falta Gmail personal.</a:t>
+              <a:t>En la app de Gemini, Crear video solo aparece con plan de pago.</a:t>
             </a:r>
           </a:p>
           <a:p>
@@ -12724,7 +12773,7 @@
                 </a:solidFill>
                 <a:latin typeface="Helvetica Neue"/>
               </a:rPr>
-              <a:t>Y el cupo cambia cada mes. Por eso existe la Ruta B.</a:t>
+              <a:t>La puerta gratuita es Google Flow. Y si falla, la Ruta B siempre sirve.</a:t>
             </a:r>
           </a:p>
         </p:txBody>
@@ -13458,7 +13507,7 @@
                 </a:solidFill>
                 <a:latin typeface="Helvetica Neue"/>
               </a:rPr>
-              <a:t>Y enseguida, partirlo en seis</a:t>
+              <a:t>Y enseguida, partirlo en tres</a:t>
             </a:r>
           </a:p>
         </p:txBody>
@@ -13548,7 +13597,7 @@
                 </a:solidFill>
                 <a:latin typeface="Helvetica Neue"/>
               </a:rPr>
-              <a:t>150 palabras  =  1 minuto</a:t>
+              <a:t>Se habla a 150 palabras por minuto</a:t>
             </a:r>
           </a:p>
           <a:p>
@@ -13567,7 +13616,7 @@
                 </a:solidFill>
                 <a:latin typeface="Helvetica Neue"/>
               </a:rPr>
-              <a:t>6 clips de 10 segundos  =  25 palabras cada uno</a:t>
+              <a:t>3 clips × 10 segundos  =  75 palabras</a:t>
             </a:r>
           </a:p>
           <a:p>
@@ -14193,7 +14242,7 @@
                 </a:solidFill>
                 <a:latin typeface="Helvetica Neue"/>
               </a:rPr>
-              <a:t>Después lo pules: «Limpia este dictado, quita las muletillas y déjalo en 150 palabras».</a:t>
+              <a:t>Después lo pules: «Limpia este dictado, quita las muletillas y déjalo en 75 palabras».</a:t>
             </a:r>
           </a:p>
         </p:txBody>
@@ -14380,7 +14429,7 @@
                 </a:solidFill>
                 <a:latin typeface="Helvetica Neue"/>
               </a:rPr>
-              <a:t>La misma en los seis clips</a:t>
+              <a:t>La misma en los tres clips</a:t>
             </a:r>
           </a:p>
         </p:txBody>
@@ -14618,7 +14667,7 @@
                 </a:solidFill>
                 <a:latin typeface="Helvetica Neue"/>
               </a:rPr>
-              <a:t>No adjuntes nada y describe un personaje. La misma descripción en los seis.</a:t>
+              <a:t>No adjuntes nada y describe un personaje. La misma descripción en los tres.</a:t>
             </a:r>
           </a:p>
         </p:txBody>
@@ -14890,7 +14939,7 @@
                 </a:solidFill>
                 <a:latin typeface="Helvetica Neue"/>
               </a:rPr>
-              <a:t>Uno por frase. Diez segundos, con voz incluida</a:t>
+              <a:t>Tres, uno por frase. Diez segundos cada uno, con voz incluida</a:t>
             </a:r>
           </a:p>
         </p:txBody>
@@ -14976,11 +15025,11 @@
             <a:r>
               <a:rPr sz="1900" b="1">
                 <a:solidFill>
-                  <a:srgbClr val="11406E"/>
-                </a:solidFill>
-                <a:latin typeface="Helvetica Neue"/>
-              </a:rPr>
-              <a:t>Botón +  →  Crear video  →  adjuntas la foto  →  escribes el prompt</a:t>
+                  <a:srgbClr val="ED7623"/>
+                </a:solidFill>
+                <a:latin typeface="Helvetica Neue"/>
+              </a:rPr>
+              <a:t>Google Flow — gratis, 50 créditos diarios</a:t>
             </a:r>
           </a:p>
           <a:p>
@@ -14992,6 +15041,15 @@
                 <a:spcPts val="400"/>
               </a:spcAft>
             </a:pPr>
+            <a:r>
+              <a:rPr sz="1900" b="1">
+                <a:solidFill>
+                  <a:srgbClr val="35789C"/>
+                </a:solidFill>
+                <a:latin typeface="Helvetica Neue"/>
+              </a:rPr>
+              <a:t>App de Gemini — solo con plan de pago</a:t>
+            </a:r>
           </a:p>
           <a:p>
             <a:pPr algn="l">
@@ -15002,6 +15060,16 @@
                 <a:spcPts val="400"/>
               </a:spcAft>
             </a:pPr>
+          </a:p>
+          <a:p>
+            <a:pPr algn="l">
+              <a:lnSpc>
+                <a:spcPct val="135000"/>
+              </a:lnSpc>
+              <a:spcAft>
+                <a:spcPts val="400"/>
+              </a:spcAft>
+            </a:pPr>
             <a:r>
               <a:rPr sz="1500" b="0">
                 <a:solidFill>
@@ -15009,7 +15077,7 @@
                 </a:solidFill>
                 <a:latin typeface="Helvetica Neue"/>
               </a:rPr>
-              <a:t>Dos a cuatro minutos por clip. El prompt completo está en las notas.</a:t>
+              <a:t>Dos a cuatro minutos por clip. Lánzalos seguidos. El prompt está en las notas.</a:t>
             </a:r>
           </a:p>
         </p:txBody>
@@ -15097,7 +15165,7 @@
                 </a:solidFill>
                 <a:latin typeface="Helvetica Neue"/>
               </a:rPr>
-              <a:t>El orden importa: primero Crear video, después la foto.</a:t>
+              <a:t>En la app de Gemini: primero Crear video, después la foto.</a:t>
             </a:r>
           </a:p>
           <a:p>
@@ -15116,7 +15184,7 @@
                 </a:solidFill>
                 <a:latin typeface="Helvetica Neue"/>
               </a:rPr>
-              <a:t>Al revés, Gemini se sale del modo video y te contesta por escrito.</a:t>
+              <a:t>Al revés se sale del modo video y te contesta por escrito.</a:t>
             </a:r>
           </a:p>
           <a:p>

--- a/_static/sesion06/S06_audio_imagen_video.pptx
+++ b/_static/sesion06/S06_audio_imagen_video.pptx
@@ -1400,7 +1400,13 @@
           <a:p/>
           <a:p>
             <a:r>
-              <a:t>POR QUÉ TRES Y NO SEIS: cada clip tarda de dos a cuatro minutos en generarse y el cupo gratuito es limitado. Tres clips caben en la sesión y se llevan el video terminado; seis dejan a media clase sin acabar. Quien tenga cupo y ganas, que haga seis.</a:t>
+              <a:t>POR QUÉ TRES Y NO SEIS: no es una decisión pedagógica, es aritmética. Flow da 50 créditos gratis al día y cada clip de 10 segundos cuesta 15. Son tres clips, ni uno más.</a:t>
+            </a:r>
+          </a:p>
+          <a:p/>
+          <a:p>
+            <a:r>
+              <a:t>APROVECHA ESO: como no hay créditos para ensayar, el guion TIENE que estar bien antes de generar. Es el mejor argumento que vas a tener para que no se salten el paso 1.</a:t>
             </a:r>
           </a:p>
         </p:txBody>
@@ -1578,7 +1584,12 @@
           </a:p>
           <a:p>
             <a:r>
-              <a:t>· GOOGLE FLOW (flow.google.com): según la página de precios de Google, cualquier cuenta de Google tiene 50 créditos diarios gratis, con Veo 3.1, avatares y personajes. No alcancé a completar la prueba de punta a punta porque Flow pedía volver a iniciar sesión. VERIFÍCALO TÚ ANTES DE LA CLASE: son dos minutos y decide por dónde corre la sesión.</a:t>
+              <a:t>· GOOGLE FLOW (flow.google.com): PROBADO de punta a punta en una cuenta de Google gratuita, sin suscripción. Funciona. 50 créditos diarios que se renuevan a las 12:35 a.m. Un clip de 10 segundos con Omni 1.1 Flash cuesta 15 créditos: alcanza para TRES clips al día, exactamente el encargo. El clip sale en 720p con audio; 1080p y 4K piden plan.</a:t>
+            </a:r>
+          </a:p>
+          <a:p>
+            <a:r>
+              <a:t>· OJO CON EL MODELO EN FLOW: por defecto usa Veo 3.1 Lite, que solo llega a 8 segundos, y falló tres veces seguidas con un error genérico. Hay que pedir Omni 1.1 Flash explícitamente («usa omni»). Decírselo a los estudiantes de entrada, o van a perder clips en errores.</a:t>
             </a:r>
           </a:p>
           <a:p>
@@ -2091,12 +2102,24 @@
           </a:p>
           <a:p>
             <a:r>
-              <a:t>· GOOGLE FLOW (flow.google.com): entras con la cuenta de Google y tienes 50 créditos diarios gratis. Es la puerta que debería servirle a todo el salón.</a:t>
-            </a:r>
-          </a:p>
-          <a:p>
-            <a:r>
-              <a:t>· APP DE GEMINI: botón + → Crear video. Solo aparece con plan de pago; en cuenta gratuita no está.</a:t>
+              <a:t>· GOOGLE FLOW (flow.google.com): entras con la cuenta de Google y escribes el prompt. 50 créditos diarios; cada clip cuesta 15. Es la puerta de todo el salón.</a:t>
+            </a:r>
+          </a:p>
+          <a:p>
+            <a:r>
+              <a:t>· APP DE GEMINI: botón + → Crear video. Solo con plan de pago.</a:t>
+            </a:r>
+          </a:p>
+          <a:p/>
+          <a:p>
+            <a:r>
+              <a:t>EN FLOW HAY QUE PEDIR EL MODELO POR SU NOMBRE: el que usa por defecto (Veo 3.1 Lite) solo llega a 8 segundos y al probarlo falló tres veces. Hay que decirle «usa omni» para que use Omni 1.1 Flash y dé los 10 segundos. Dilo antes de soltarlos, o van a quemar créditos en errores.</a:t>
+            </a:r>
+          </a:p>
+          <a:p/>
+          <a:p>
+            <a:r>
+              <a:t>PARA DESCARGAR: menú ⋮ del clip → Descargar → 720p. Las de 1080p y 4K piden plan.</a:t>
             </a:r>
           </a:p>
           <a:p/>
@@ -12754,7 +12777,7 @@
                 </a:solidFill>
                 <a:latin typeface="Helvetica Neue"/>
               </a:rPr>
-              <a:t>En la app de Gemini, Crear video solo aparece con plan de pago.</a:t>
+              <a:t>La puerta gratuita es Google Flow: 50 créditos al día, 15 por clip.</a:t>
             </a:r>
           </a:p>
           <a:p>
@@ -12773,7 +12796,7 @@
                 </a:solidFill>
                 <a:latin typeface="Helvetica Neue"/>
               </a:rPr>
-              <a:t>La puerta gratuita es Google Flow. Y si falla, la Ruta B siempre sirve.</a:t>
+              <a:t>Te alcanza para tres clips. Ni uno de sobra: el guion tiene que estar listo antes.</a:t>
             </a:r>
           </a:p>
         </p:txBody>
@@ -15029,7 +15052,7 @@
                 </a:solidFill>
                 <a:latin typeface="Helvetica Neue"/>
               </a:rPr>
-              <a:t>Google Flow — gratis, 50 créditos diarios</a:t>
+              <a:t>Google Flow — 50 créditos al día, 15 por clip</a:t>
             </a:r>
           </a:p>
           <a:p>
@@ -15048,7 +15071,7 @@
                 </a:solidFill>
                 <a:latin typeface="Helvetica Neue"/>
               </a:rPr>
-              <a:t>App de Gemini — solo con plan de pago</a:t>
+              <a:t>Pídele «usa omni» o te dará solo 8 segundos</a:t>
             </a:r>
           </a:p>
           <a:p>

--- a/_static/sesion06/S06_audio_imagen_video.pptx
+++ b/_static/sesion06/S06_audio_imagen_video.pptx
@@ -535,7 +535,7 @@
           <a:p/>
           <a:p>
             <a:r>
-              <a:t>Y OJO CON DÓNDE: en la app de Gemini, Crear video solo aparece con plan de pago. En cuenta gratuita NO está; lo comprobé. La puerta gratuita es Google Flow: 50 créditos diarios según la página de precios de Google. Verifícalo tú antes de la clase. Si no sirve ese día, Ruta B (diapositiva 13).</a:t>
+              <a:t>Y OJO CON DÓNDE: en la app de Gemini, Crear video solo aparece con plan de pago; en cuenta gratuita NO está. La herramienta de la clase es GOOGLE FLOW (flow.google.com): probado en cuenta gratuita, 50 créditos diarios. Flow hace las tres cosas: el personaje, los clips y el montaje.</a:t>
             </a:r>
           </a:p>
         </p:txBody>
@@ -605,42 +605,41 @@
           <a:lstStyle/>
           <a:p>
             <a:r>
-              <a:t>UNIR LOS CLIPS.</a:t>
+              <a:t>UNIR LOS CLIPS. Hay dos caminos y conviene enseñar el primero.</a:t>
             </a:r>
           </a:p>
           <a:p/>
           <a:p>
             <a:r>
-              <a:t>COMPROBADO: Gemini NO puede. Ejecuta código, pero su entorno no tiene herramientas de video, así que responde con un comando de terminal para que lo corras tú. Inútil aquí.</a:t>
+              <a:t>EN FLOW, que es lo más simple: al abrir un clip aparece una línea de tiempo abajo. El botón + al final del clip ofrece «Agregar clip». Van añadiendo los cuatro en orden y descargan el resultado. Todo en la misma herramienta, sin salir.</a:t>
             </a:r>
           </a:p>
           <a:p/>
           <a:p>
             <a:r>
-              <a:t>ChatGPT SÍ. Subes los clips y le dices:</a:t>
-            </a:r>
-          </a:p>
-          <a:p>
-            <a:r>
-              <a:t>«Une estos clips en un solo video, en este orden: clip1, clip2, clip3. Conserva el audio de cada uno. Déjame el archivo mp4 para descargar.»</a:t>
+              <a:t>DESCARGA: menú ⋮ del clip → Descargar → 720p. Las de 1080p y 4K piden plan.</a:t>
             </a:r>
           </a:p>
           <a:p/>
           <a:p>
             <a:r>
-              <a:t>Tarda unos quince segundos. Devuelve el MP4 completo, con el audio intacto y en 1280x720.</a:t>
+              <a:t>SI EL MONTAJE DE FLOW NO LES APARECE O FALLA, ChatGPT los une igual de bien:</a:t>
+            </a:r>
+          </a:p>
+          <a:p>
+            <a:r>
+              <a:t>«Une estos clips en un solo video, en este orden: clip1, clip2, clip3, clip4. Conserva el audio de cada uno. Déjame el archivo mp4 para descargar.»</a:t>
+            </a:r>
+          </a:p>
+          <a:p>
+            <a:r>
+              <a:t>Tarda unos quince segundos. Recodifica, así que pierde algo de calidad: no se nota.</a:t>
             </a:r>
           </a:p>
           <a:p/>
           <a:p>
             <a:r>
-              <a:t>Un detalle honesto: recodifica el video, así que pierde algo de calidad. Para la clase no se nota.</a:t>
-            </a:r>
-          </a:p>
-          <a:p/>
-          <a:p>
-            <a:r>
-              <a:t>ESTE ES UN BUEN MOMENTO PARA UNA PREGUNTA: ¿por qué una IA puede hacer esto y la otra no? Respuesta: no es "inteligencia", son las herramientas que le conectaron. Es la misma idea de la sesión del asistente.</a:t>
+              <a:t>DATO PARA UNA BUENA PREGUNTA: Gemini NO puede unir videos (ejecuta código pero sin herramientas de video, y devuelve un comando de terminal), ChatGPT SÍ. ¿Por qué una IA puede y la otra no? No es «inteligencia»: son las herramientas que le conectaron. Es la misma idea de la sesión del asistente.</a:t>
             </a:r>
           </a:p>
         </p:txBody>
@@ -710,37 +709,35 @@
           <a:lstStyle/>
           <a:p>
             <a:r>
-              <a:t>LA VOZ. Paso opcional: los clips ya vienen con voz.</a:t>
+              <a:t>LOS REMATES, en CapCut sobre el video ya unido. Opcional, pero sube mucho el resultado.</a:t>
             </a:r>
           </a:p>
           <a:p/>
           <a:p>
             <a:r>
-              <a:t>Cuándo vale la pena hacerlo aparte: cuando la voz que eligió Veo no les gusta, o cuando quieren que suene igual en los tres clips (Veo puede variarla un poco entre uno y otro).</a:t>
+              <a:t>1. Subtítulos automáticos. CapCut los saca del audio. REVISARLOS: siempre hay dos o tres palabras mal, y los nombres propios casi nunca salen bien.</a:t>
+            </a:r>
+          </a:p>
+          <a:p>
+            <a:r>
+              <a:t>2. Música de fondo al 10 o 15 % del volumen. Si compite con la voz, está muy alta.</a:t>
+            </a:r>
+          </a:p>
+          <a:p>
+            <a:r>
+              <a:t>3. Cortar los silencios entre clip y clip.</a:t>
             </a:r>
           </a:p>
           <a:p/>
           <a:p>
             <a:r>
-              <a:t>ELEVENLABS, capa gratuita: unos 10.000 créditos al mes, que son unos 10 minutos de audio. De sobra para un minuto. Tiene voces en español sin pedir tarjeta. No incluye licencia comercial: hay que mencionar la herramienta, cosa que ya hacen igual por la regla 2. Tampoco incluye clonación de voz: eso empieza en el plan de pago.</a:t>
+              <a:t>TRUCO PARA DECIR EN VOZ ALTA: música muy alta y subtítulos sin revisar son las dos marcas de un video amateur. Arreglar esas dos cosas sube el resultado más que cualquier efecto.</a:t>
             </a:r>
           </a:p>
           <a:p/>
           <a:p>
             <a:r>
-              <a:t>GOOGLE AI STUDIO: ojo, las voces filtradas como "Spanish" piden clave de pago. Filtrar por Gender y usar una genérica: leen español perfectamente.</a:t>
-            </a:r>
-          </a:p>
-          <a:p/>
-          <a:p>
-            <a:r>
-              <a:t>LA RUTA MÁS DIRECTA SI QUIEREN QUE SUENE COMO ELLOS: grabarse. Clonar la voz cuesta plata; grabarla no.</a:t>
-            </a:r>
-          </a:p>
-          <a:p/>
-          <a:p>
-            <a:r>
-              <a:t>INDICACIÓN DE ESTILO: «Español latinoamericano, tono cercano y pausado, como quien le explica algo a un amigo. No leas como noticiero.»</a:t>
+              <a:t>NOTA SOBRE LA VOZ: ya no hace falta un paso aparte. La voz va asignada al personaje desde el paso 2, y por eso suena igual en los cuatro clips. Si alguien quiere otra voz encima, ElevenLabs da unos 10 minutos gratis al mes, pero no es necesario.</a:t>
             </a:r>
           </a:p>
         </p:txBody>
@@ -810,29 +807,46 @@
           <a:lstStyle/>
           <a:p>
             <a:r>
-              <a:t>LOS REMATES, en CapCut sobre el video ya unido. Opcional, pero sube mucho el resultado.</a:t>
+              <a:t>LOS AVATARES DE FLOW. Vale la pena mencionarlo porque lo van a ver en el menú y van a preguntar.</a:t>
             </a:r>
           </a:p>
           <a:p/>
           <a:p>
             <a:r>
-              <a:t>1. Subtítulos automáticos. CapCut los saca del audio. REVISARLOS: siempre hay dos o tres palabras mal, y los nombres propios casi nunca salen bien.</a:t>
-            </a:r>
-          </a:p>
-          <a:p>
-            <a:r>
-              <a:t>2. Música de fondo al 10 o 15 % del volumen. Si compite con la voz, está muy alta.</a:t>
-            </a:r>
-          </a:p>
-          <a:p>
-            <a:r>
-              <a:t>3. Cortar los silencios entre clip y clip: Veo suele dejar medio segundo muerto al final de cada uno.</a:t>
+              <a:t>Flow tiene una opción de Avatares que graba tu cara Y TU VOZ con una videoselfie, y después te pone a ti en los videos. Suena perfecta para esta sesión. El titular que usa Google es, literalmente, «Tu rostro, tu voz, tu historia».</a:t>
             </a:r>
           </a:p>
           <a:p/>
           <a:p>
             <a:r>
-              <a:t>TRUCO PARA DECIR EN VOZ ALTA: música muy alta y subtítulos sin revisar son las dos marcas de un video amateur. Arreglar esas dos cosas sube el resultado más que cualquier efecto.</a:t>
+              <a:t>PERO NO SIRVE TODAVÍA, y lo dice la propia herramienta:</a:t>
+            </a:r>
+          </a:p>
+          <a:p>
+            <a:r>
+              <a:t>· Es una función EXPERIMENTAL.</a:t>
+            </a:r>
+          </a:p>
+          <a:p>
+            <a:r>
+              <a:t>· El registro SOLO ESTÁ DISPONIBLE EN INGLÉS.</a:t>
+            </a:r>
+          </a:p>
+          <a:p>
+            <a:r>
+              <a:t>· Avisa que «es posible que requiera varios intentos».</a:t>
+            </a:r>
+          </a:p>
+          <a:p/>
+          <a:p>
+            <a:r>
+              <a:t>Con treinta estudiantes y una hora, es inviable. Personajes hace el trabajo y es gratis.</a:t>
+            </a:r>
+          </a:p>
+          <a:p/>
+          <a:p>
+            <a:r>
+              <a:t>ESTE ES UN BUEN MOMENTO PARA UN PUNTO DE FONDO: estas herramientas cambian cada mes. Esta sesión se rehízo tres veces mientras se preparaba, porque lo que funcionaba una semana dejaba de funcionar la siguiente. No es un defecto de la clase: es el estado real del campo, y aprender a verificar antes de confiar es parte de lo que se llevan.</a:t>
             </a:r>
           </a:p>
         </p:txBody>
@@ -902,7 +916,7 @@
           <a:lstStyle/>
           <a:p>
             <a:r>
-              <a:t>LA RUTA B. Esta diapositiva no es un adorno: es el plan para quien solo tenga la cuenta institucional, se quede sin créditos, o para todo el salón si Flow no funciona ese día.</a:t>
+              <a:t>LA RUTA B. El plan para quien se quede sin créditos o para todo el salón si Flow no funciona ese día. Con 50 créditos y 10 por clip hay margen, pero los errores de Veo Lite se comen intentos.</a:t>
             </a:r>
           </a:p>
           <a:p/>
@@ -1022,7 +1036,7 @@
           <a:p/>
           <a:p>
             <a:r>
-              <a:t>EL GUION COMPLETO. El ejemplo que se proyecta son las dos primeras frases; a ellos se les piden tres. Dejo las seis por si quieres mostrar la versión larga:</a:t>
+              <a:t>EL GUION COMPLETO. El ejemplo que se proyecta son las dos primeras frases; a ellos se les piden cuatro. Dejo las seis por si quieres mostrar la versión larga:</a:t>
             </a:r>
           </a:p>
           <a:p>
@@ -1075,7 +1089,13 @@
           <a:p/>
           <a:p>
             <a:r>
-              <a:t>Si quieres las tres frases justas para el encargo de clase, usa la 1, la 2 y la 6: enganchan, explican y cierran con pregunta.</a:t>
+              <a:t>Si quieres las cuatro frases justas para el encargo de clase, usa la 1, la 2, la 5 y la 6: enganchan, explican, muestran la consecuencia y cierran con pregunta.</a:t>
+            </a:r>
+          </a:p>
+          <a:p/>
+          <a:p>
+            <a:r>
+              <a:t>OJO AL DESARMARLO: el ejemplo está hecho con la app de Gemini adjuntando una foto en cada clip, que era la ruta anterior. Ellos van a usar Personajes en Flow, que es más fácil. Dilo, para que no intenten copiar el procedimiento del ejemplo.</a:t>
             </a:r>
           </a:p>
         </p:txBody>
@@ -1188,17 +1208,17 @@
           </a:p>
           <a:p>
             <a:r>
-              <a:t>· «Crear video primero, la foto después» — a quien Gemini le contestó por escrito.</a:t>
-            </a:r>
-          </a:p>
-          <a:p>
-            <a:r>
-              <a:t>· «Es la misma foto en todos» — a quien le salieron tres personas distintas.</a:t>
-            </a:r>
-          </a:p>
-          <a:p>
-            <a:r>
-              <a:t>· «Prueba Flow» — a quien no le aparece Crear video en Gemini.</a:t>
+              <a:t>· «Adjunta el personaje, no lo escribas» — a quien le salieron personas distintas.</a:t>
+            </a:r>
+          </a:p>
+          <a:p>
+            <a:r>
+              <a:t>· «Dale Reintentar» — a quien le salió «Se produjo un error». Pasa seguido.</a:t>
+            </a:r>
+          </a:p>
+          <a:p>
+            <a:r>
+              <a:t>· «¿Dónde creaste el personaje?» — a quien le sale siempre el mismo fondo equivocado.</a:t>
             </a:r>
           </a:p>
           <a:p>
@@ -1400,13 +1420,13 @@
           <a:p/>
           <a:p>
             <a:r>
-              <a:t>POR QUÉ TRES Y NO SEIS: no es una decisión pedagógica, es aritmética. Flow da 50 créditos gratis al día y cada clip de 10 segundos cuesta 15. Son tres clips, ni uno más.</a:t>
+              <a:t>POR QUÉ CUATRO DE OCHO: es aritmética. Flow da 50 créditos gratis al día y un clip de 8 segundos cuesta 10. Cuatro clips son 40 y queda uno de repuesto, que se va a necesitar porque la herramienta falla seguido.</a:t>
             </a:r>
           </a:p>
           <a:p/>
           <a:p>
             <a:r>
-              <a:t>APROVECHA ESO: como no hay créditos para ensayar, el guion TIENE que estar bien antes de generar. Es el mejor argumento que vas a tener para que no se salten el paso 1.</a:t>
+              <a:t>APROVECHA ESO: el repuesto es para los errores, no para ensayar guiones. Como no hay créditos para probar a ver qué sale, el guion TIENE que estar bien antes de generar. Es el mejor argumento que vas a tener para que no se salten el paso 1.</a:t>
             </a:r>
           </a:p>
         </p:txBody>
@@ -1584,12 +1604,22 @@
           </a:p>
           <a:p>
             <a:r>
-              <a:t>· GOOGLE FLOW (flow.google.com): PROBADO de punta a punta en una cuenta de Google gratuita, sin suscripción. Funciona. 50 créditos diarios que se renuevan a las 12:35 a.m. Un clip de 10 segundos con Omni 1.1 Flash cuesta 15 créditos: alcanza para TRES clips al día, exactamente el encargo. El clip sale en 720p con audio; 1080p y 4K piden plan.</a:t>
-            </a:r>
-          </a:p>
-          <a:p>
-            <a:r>
-              <a:t>· OJO CON EL MODELO EN FLOW: por defecto usa Veo 3.1 Lite, que solo llega a 8 segundos, y falló tres veces seguidas con un error genérico. Hay que pedir Omni 1.1 Flash explícitamente («usa omni»). Decírselo a los estudiantes de entrada, o van a perder clips en errores.</a:t>
+              <a:t>· GOOGLE FLOW (flow.google.com): PROBADO de punta a punta en una cuenta de Google gratuita. 50 créditos diarios, se renuevan pasada la medianoche. Costos reales medidos: Veo 3.1 Lite (8 s) = 10 créditos; Omni 1.1 Flash (10 s) = 15. CREAR UN PERSONAJE NO GASTA NADA. Salida 720p con audio; 1080p y 4K piden plan.</a:t>
+            </a:r>
+          </a:p>
+          <a:p>
+            <a:r>
+              <a:t>· POR ESO EL ENCARGO ES DE CUATRO CLIPS DE OCHO: 40 créditos y queda uno de repuesto.</a:t>
+            </a:r>
+          </a:p>
+          <a:p>
+            <a:r>
+              <a:t>· VEO 3.1 LITE FALLA SEGUIDO: me dio «Se produjo un error» cuatro veces. Se le da Reintentar y suele salir. Si se pone imposible, escribir «usa omni» cambia a Omni 1.1 Flash, más confiable pero a 15 créditos (solo alcanzan tres clips).</a:t>
+            </a:r>
+          </a:p>
+          <a:p>
+            <a:r>
+              <a:t>· FLOW UNE LOS CLIPS SOLO: al abrir un clip hay una línea de tiempo con «+ → Agregar clip». Por eso ChatGPT queda de respaldo, no de paso obligatorio.</a:t>
             </a:r>
           </a:p>
           <a:p>
@@ -1801,7 +1831,7 @@
           <a:p/>
           <a:p>
             <a:r>
-              <a:t>«Eres guionista de videos educativos cortos. Escríbeme un guion de 75 palabras para un video de 30 segundos.</a:t>
+              <a:t>«Eres guionista de videos educativos cortos. Escríbeme un guion de 80 palabras para un video de 32 segundos.</a:t>
             </a:r>
           </a:p>
           <a:p>
@@ -1833,13 +1863,13 @@
           <a:p/>
           <a:p>
             <a:r>
-              <a:t>«Parte este guion en 3 frases de unas 25 palabras cada una. Cada frase tiene que poder decirse sola en 10 segundos y entenderse sin la anterior. Numéralas.»</a:t>
+              <a:t>«Parte este guion en 4 frases de unas 20 palabras cada una. Cada frase tiene que poder decirse sola en 8 segundos y entenderse sin la anterior. Numéralas.»</a:t>
             </a:r>
           </a:p>
           <a:p/>
           <a:p>
             <a:r>
-              <a:t>LA CUENTA: se habla a unas 150 palabras por minuto, o sea 25 palabras cada 10 segundos. Tres clips = 75 palabras = 30 segundos. Hacer la cuenta en el tablero con ellos; es lo que vuelve el encargo concreto.</a:t>
+              <a:t>LA CUENTA: se habla a unas 150 palabras por minuto, o sea 20 palabras cada 8 segundos. Cuatro clips = 80 palabras = 32 segundos. Hacer la cuenta en el tablero con ellos; es lo que vuelve el encargo concreto.</a:t>
             </a:r>
           </a:p>
           <a:p/>
@@ -1997,25 +2027,45 @@
           <a:lstStyle/>
           <a:p>
             <a:r>
-              <a:t>LA FOTO. Parece el paso tonto y es el que decide si el video se ve bien o ridículo.</a:t>
+              <a:t>EL PERSONAJE. Este paso es nuevo y es el que más mejora el resultado.</a:t>
             </a:r>
           </a:p>
           <a:p/>
           <a:p>
             <a:r>
-              <a:t>La misma foto en los tres clips. Si cambian de foto, cambia la persona.</a:t>
+              <a:t>En Flow, menú lateral → Personajes. CREARLO NO GASTA CRÉDITOS, así que pueden ensayar hasta que les guste. Decirlo en voz alta: es la única parte de la clase donde pueden experimentar sin costo.</a:t>
             </a:r>
           </a:p>
           <a:p/>
           <a:p>
             <a:r>
-              <a:t>Qué pedirles: de frente, cara bien iluminada, sin gafas de sol, sin otras personas en la imagen. Una foto de documento sirve; una foto de fiesta no.</a:t>
+              <a:t>DOS FORMAS:</a:t>
+            </a:r>
+          </a:p>
+          <a:p>
+            <a:r>
+              <a:t>· Con su foto: botón Subir, una foto de frente, bien iluminada, sin gafas de sol.</a:t>
+            </a:r>
+          </a:p>
+          <a:p>
+            <a:r>
+              <a:t>· Describiéndolo: escriben cómo es y Flow lo dibuja. Para quien no quiera poner su cara, y queda igual de consistente.</a:t>
             </a:r>
           </a:p>
           <a:p/>
           <a:p>
             <a:r>
-              <a:t>PARA QUIEN NO QUIERA PONER SU CARA: que no adjunte nada y describa un personaje inventado, repitiendo la MISMA descripción palabra por palabra en los tres clips. Queda menos consistente, pero funciona. Nadie está obligado.</a:t>
+              <a:t>DOS COSAS QUE HAY QUE HACER ANTES DE GASTAR UN CRÉDITO:</a:t>
+            </a:r>
+          </a:p>
+          <a:p>
+            <a:r>
+              <a:t>1. ASIGNARLE UNA VOZ. El botón «Selecciona una voz» deja elegir voz y escribir cómo debe sonar: «español latinoamericano, tono cercano y pausado, como quien le explica algo a un amigo». Así suena igual en los cuatro clips, que era justo el problema de la versión anterior.</a:t>
+            </a:r>
+          </a:p>
+          <a:p>
+            <a:r>
+              <a:t>2. CREARLO EN EL LUGAR CORRECTO. COMPROBADO: el personaje arrastra consigo el escenario donde se creó. Lo creé en una oficina, pedí un salón de clase, y salió en la oficina. Si quieren un laboratorio, el personaje hay que crearlo en el laboratorio.</a:t>
             </a:r>
           </a:p>
           <a:p/>
@@ -2097,72 +2147,57 @@
           <a:p/>
           <a:p>
             <a:r>
-              <a:t>DOS PUERTAS, el mismo prompt en las dos:</a:t>
-            </a:r>
-          </a:p>
-          <a:p>
-            <a:r>
-              <a:t>· GOOGLE FLOW (flow.google.com): entras con la cuenta de Google y escribes el prompt. 50 créditos diarios; cada clip cuesta 15. Es la puerta de todo el salón.</a:t>
-            </a:r>
-          </a:p>
-          <a:p>
-            <a:r>
-              <a:t>· APP DE GEMINI: botón + → Crear video. Solo con plan de pago.</a:t>
+              <a:t>PARA CADA CLIP, EN FLOW:</a:t>
+            </a:r>
+          </a:p>
+          <a:p>
+            <a:r>
+              <a:t>1. Botón + debajo del cuadro de texto.</a:t>
+            </a:r>
+          </a:p>
+          <a:p>
+            <a:r>
+              <a:t>2. Eligen su personaje de la lista y le dan «Agregar a la instrucción».</a:t>
+            </a:r>
+          </a:p>
+          <a:p>
+            <a:r>
+              <a:t>3. Escriben el prompt.</a:t>
             </a:r>
           </a:p>
           <a:p/>
           <a:p>
             <a:r>
-              <a:t>EN FLOW HAY QUE PEDIR EL MODELO POR SU NOMBRE: el que usa por defecto (Veo 3.1 Lite) solo llega a 8 segundos y al probarlo falló tres veces. Hay que decirle «usa omni» para que use Omni 1.1 Flash y dé los 10 segundos. Dilo antes de soltarlos, o van a quemar créditos en errores.</a:t>
+              <a:t>PROMPT (solo cambia la frase):</a:t>
+            </a:r>
+          </a:p>
+          <a:p>
+            <a:r>
+              <a:t>«Este personaje mira a la cámara y dice en español latinoamericano, tono cercano y pausado: "[una de sus frases]". Plano medio. Cámara fija. Sin texto en pantalla.»</a:t>
             </a:r>
           </a:p>
           <a:p/>
           <a:p>
             <a:r>
-              <a:t>PARA DESCARGAR: menú ⋮ del clip → Descargar → 720p. Las de 1080p y 4K piden plan.</a:t>
+              <a:t>EL ERROR QUE VA A PASAR Y HAY QUE ANTICIPAR: si solo ESCRIBEN «usa el personaje que acabo de crear», Flow genera OTRA PERSONA. Lo comprobé: salió un señor parecido pero con otra cara. Hay que ADJUNTARLO con el botón +. Cuando está bien, Flow responde que va a generar «utilizando la entidad del personaje referenciada»: que lo verifiquen en esa frase.</a:t>
             </a:r>
           </a:p>
           <a:p/>
           <a:p>
             <a:r>
-              <a:t>PROMPT, uno por frase:</a:t>
-            </a:r>
-          </a:p>
-          <a:p>
-            <a:r>
-              <a:t>«La persona de la foto, en plano medio dentro de [el lugar: un laboratorio, una sala de audiencias, un taller, una cancha, un afloramiento rocoso], con luz natural suave.</a:t>
-            </a:r>
-          </a:p>
-          <a:p>
-            <a:r>
-              <a:t>Mira a la cámara y dice en español latinoamericano, tono cercano y pausado: «[una de tus frases]»</a:t>
-            </a:r>
-          </a:p>
-          <a:p>
-            <a:r>
-              <a:t>Cámara fija, sin texto en pantalla.»</a:t>
+              <a:t>LOS CRÉDITOS: 50 al día, 10 por clip de 8 segundos. Cuatro clips y queda uno de repuesto.</a:t>
             </a:r>
           </a:p>
           <a:p/>
           <a:p>
             <a:r>
-              <a:t>EL ERROR QUE VA A PASAR Y HAY QUE ANTICIPAR (solo en la app de Gemini): si adjuntan la foto ANTES de activar Crear video, Gemini se sale del modo video y contesta por escrito. Me pasó dos veces al preparar la clase.</a:t>
-            </a:r>
-          </a:p>
-          <a:p>
-            <a:r>
-              <a:t>EL ORDEN ES: botón + → Crear video → DESPUÉS la foto → después el prompt.</a:t>
-            </a:r>
-          </a:p>
-          <a:p>
-            <a:r>
-              <a:t>Antes de enviar, que comprueben que abajo diga «Videos» y aparezca «Horizontal».</a:t>
+              <a:t>VEO 3.1 LITE FALLA SEGUIDO: «Se produjo un error» me salió cuatro veces. Se le da Reintentar. Si se pone imposible, escribir «usa omni» cambia a Omni 1.1 Flash (más confiable, 10 segundos, pero 15 créditos: solo alcanzan tres clips). Advertirlo ANTES de soltarlos.</a:t>
             </a:r>
           </a:p>
           <a:p/>
           <a:p>
             <a:r>
-              <a:t>Cada clip tarda entre dos y cuatro minutos. Que los lancen seguidos, no de a uno esperando.</a:t>
+              <a:t>Cada clip tarda de dos a cuatro minutos. Que los lancen seguidos, no de a uno esperando.</a:t>
             </a:r>
           </a:p>
         </p:txBody>
@@ -5439,7 +5474,7 @@
                 </a:solidFill>
                 <a:latin typeface="Helvetica Neue"/>
               </a:rPr>
-              <a:t>Tres clips de diez segundos y medio minuto de video con tu propia cara</a:t>
+              <a:t>Cuatro clips de ocho segundos y medio minuto de video con un personaje tuyo</a:t>
             </a:r>
           </a:p>
         </p:txBody>
@@ -5736,7 +5771,7 @@
                 </a:solidFill>
                 <a:latin typeface="Helvetica Neue"/>
               </a:rPr>
-              <a:t>Los tres en un solo archivo</a:t>
+              <a:t>Los cuatro en un solo archivo</a:t>
             </a:r>
           </a:p>
         </p:txBody>
@@ -5822,11 +5857,11 @@
             <a:r>
               <a:rPr sz="2200" b="1">
                 <a:solidFill>
-                  <a:srgbClr val="35789C"/>
-                </a:solidFill>
-                <a:latin typeface="Helvetica Neue"/>
-              </a:rPr>
-              <a:t>Gemini  ✕</a:t>
+                  <a:srgbClr val="ED7623"/>
+                </a:solidFill>
+                <a:latin typeface="Helvetica Neue"/>
+              </a:rPr>
+              <a:t>En Flow</a:t>
             </a:r>
           </a:p>
           <a:p>
@@ -5855,7 +5890,7 @@
                 </a:solidFill>
                 <a:latin typeface="Helvetica Neue"/>
               </a:rPr>
-              <a:t>Ejecuta código, pero sin herramientas de video. Te devuelve un comando de terminal.</a:t>
+              <a:t>Abres un clip, y en la línea de tiempo: + → Agregar clip. Sin salir de la herramienta.</a:t>
             </a:r>
           </a:p>
         </p:txBody>
@@ -5941,11 +5976,11 @@
             <a:r>
               <a:rPr sz="2200" b="1">
                 <a:solidFill>
-                  <a:srgbClr val="ED7623"/>
-                </a:solidFill>
-                <a:latin typeface="Helvetica Neue"/>
-              </a:rPr>
-              <a:t>ChatGPT  ✓</a:t>
+                  <a:srgbClr val="35789C"/>
+                </a:solidFill>
+                <a:latin typeface="Helvetica Neue"/>
+              </a:rPr>
+              <a:t>En ChatGPT</a:t>
             </a:r>
           </a:p>
           <a:p>
@@ -5974,7 +6009,7 @@
                 </a:solidFill>
                 <a:latin typeface="Helvetica Neue"/>
               </a:rPr>
-              <a:t>Subes los clips, le pides que los una. Quince segundos y te da el MP4.</a:t>
+              <a:t>Si lo de Flow falla: subes los clips y le pides que los una. Quince segundos.</a:t>
             </a:r>
           </a:p>
         </p:txBody>
@@ -6053,13 +6088,13 @@
               </a:spcAft>
             </a:pPr>
             <a:r>
-              <a:rPr sz="1600" b="1">
+              <a:rPr sz="1500" b="1">
                 <a:solidFill>
                   <a:srgbClr val="35789C"/>
                 </a:solidFill>
                 <a:latin typeface="Helvetica Neue"/>
               </a:rPr>
-              <a:t>¿Por qué una puede y la otra no? No es inteligencia: son las herramientas que le conectaron.</a:t>
+              <a:t>Gemini no puede unir videos y ChatGPT sí. No es inteligencia: son las herramientas que le conectaron.</a:t>
             </a:r>
           </a:p>
         </p:txBody>
@@ -6207,7 +6242,7 @@
                 </a:solidFill>
                 <a:latin typeface="Helvetica Neue"/>
               </a:rPr>
-              <a:t>La voz</a:t>
+              <a:t>Los remates</a:t>
             </a:r>
           </a:p>
         </p:txBody>
@@ -6246,7 +6281,7 @@
                 </a:solidFill>
                 <a:latin typeface="Helvetica Neue"/>
               </a:rPr>
-              <a:t>Opcional: los clips ya vienen con voz</a:t>
+              <a:t>En CapCut, sobre el video ya unido</a:t>
             </a:r>
           </a:p>
         </p:txBody>
@@ -6260,7 +6295,7 @@
         <p:spPr>
           <a:xfrm>
             <a:off x="2103120" y="2697480"/>
-            <a:ext cx="8778240" cy="1005840"/>
+            <a:ext cx="8778240" cy="822960"/>
           </a:xfrm>
           <a:prstGeom prst="roundRect">
             <a:avLst>
@@ -6307,8 +6342,8 @@
         </p:nvSpPr>
         <p:spPr>
           <a:xfrm>
-            <a:off x="2423160" y="2898648"/>
-            <a:ext cx="548640" cy="548640"/>
+            <a:off x="2468880" y="2825496"/>
+            <a:ext cx="457200" cy="548640"/>
           </a:xfrm>
           <a:prstGeom prst="rect">
             <a:avLst/>
@@ -6327,13 +6362,13 @@
               </a:spcAft>
             </a:pPr>
             <a:r>
-              <a:rPr sz="2600" b="1">
+              <a:rPr sz="2400" b="1">
                 <a:solidFill>
                   <a:srgbClr val="ED7623"/>
                 </a:solidFill>
                 <a:latin typeface="Helvetica Neue"/>
               </a:rPr>
-              <a:t>A</a:t>
+              <a:t>1</a:t>
             </a:r>
           </a:p>
         </p:txBody>
@@ -6346,8 +6381,8 @@
         </p:nvSpPr>
         <p:spPr>
           <a:xfrm>
-            <a:off x="3108960" y="2871216"/>
-            <a:ext cx="3017520" cy="457200"/>
+            <a:off x="3108960" y="2880360"/>
+            <a:ext cx="7498079" cy="548640"/>
           </a:xfrm>
           <a:prstGeom prst="rect">
             <a:avLst/>
@@ -6361,74 +6396,35 @@
           <a:lstStyle/>
           <a:p>
             <a:pPr algn="l">
+              <a:lnSpc>
+                <a:spcPct val="115000"/>
+              </a:lnSpc>
               <a:spcAft>
                 <a:spcPts val="600"/>
               </a:spcAft>
             </a:pPr>
             <a:r>
-              <a:rPr sz="2000" b="1">
+              <a:rPr sz="1800" b="0">
                 <a:solidFill>
                   <a:srgbClr val="11406E"/>
                 </a:solidFill>
                 <a:latin typeface="Helvetica Neue"/>
               </a:rPr>
-              <a:t>ElevenLabs</a:t>
-            </a:r>
-          </a:p>
-        </p:txBody>
-      </p:sp>
-      <p:sp>
-        <p:nvSpPr>
-          <p:cNvPr id="9" name="TextBox 8"/>
-          <p:cNvSpPr txBox="1"/>
-          <p:nvPr/>
-        </p:nvSpPr>
-        <p:spPr>
-          <a:xfrm>
-            <a:off x="6217920" y="2926080"/>
-            <a:ext cx="4480560" cy="548640"/>
-          </a:xfrm>
-          <a:prstGeom prst="rect">
-            <a:avLst/>
-          </a:prstGeom>
-          <a:noFill/>
-        </p:spPr>
-        <p:txBody>
-          <a:bodyPr wrap="square" lIns="0" rIns="0" tIns="0" bIns="0">
-            <a:spAutoFit/>
-          </a:bodyPr>
-          <a:lstStyle/>
-          <a:p>
-            <a:pPr algn="l">
-              <a:lnSpc>
-                <a:spcPct val="120000"/>
-              </a:lnSpc>
-              <a:spcAft>
-                <a:spcPts val="600"/>
-              </a:spcAft>
-            </a:pPr>
-            <a:r>
-              <a:rPr sz="1500" b="0">
-                <a:solidFill>
-                  <a:srgbClr val="6E6E6E"/>
-                </a:solidFill>
-                <a:latin typeface="Helvetica Neue"/>
-              </a:rPr>
-              <a:t>Gratis: ~10 min al mes. Voces en español sin pedir tarjeta</a:t>
-            </a:r>
-          </a:p>
-        </p:txBody>
-      </p:sp>
-      <p:sp>
-        <p:nvSpPr>
-          <p:cNvPr id="10" name="Rounded Rectangle 9"/>
+              <a:t>Subtítulos automáticos — y revisarlos</a:t>
+            </a:r>
+          </a:p>
+        </p:txBody>
+      </p:sp>
+      <p:sp>
+        <p:nvSpPr>
+          <p:cNvPr id="9" name="Rounded Rectangle 8"/>
           <p:cNvSpPr/>
           <p:nvPr/>
         </p:nvSpPr>
         <p:spPr>
           <a:xfrm>
-            <a:off x="2103120" y="3886200"/>
-            <a:ext cx="8778240" cy="1005840"/>
+            <a:off x="2103120" y="3703320"/>
+            <a:ext cx="8778240" cy="822960"/>
           </a:xfrm>
           <a:prstGeom prst="roundRect">
             <a:avLst>
@@ -6469,14 +6465,14 @@
       </p:sp>
       <p:sp>
         <p:nvSpPr>
-          <p:cNvPr id="11" name="TextBox 10"/>
+          <p:cNvPr id="10" name="TextBox 9"/>
           <p:cNvSpPr txBox="1"/>
           <p:nvPr/>
         </p:nvSpPr>
         <p:spPr>
           <a:xfrm>
-            <a:off x="2423160" y="4087368"/>
-            <a:ext cx="548640" cy="548640"/>
+            <a:off x="2468880" y="3831336"/>
+            <a:ext cx="457200" cy="548640"/>
           </a:xfrm>
           <a:prstGeom prst="rect">
             <a:avLst/>
@@ -6495,27 +6491,27 @@
               </a:spcAft>
             </a:pPr>
             <a:r>
-              <a:rPr sz="2600" b="1">
+              <a:rPr sz="2400" b="1">
                 <a:solidFill>
                   <a:srgbClr val="ED7623"/>
                 </a:solidFill>
                 <a:latin typeface="Helvetica Neue"/>
               </a:rPr>
-              <a:t>B</a:t>
-            </a:r>
-          </a:p>
-        </p:txBody>
-      </p:sp>
-      <p:sp>
-        <p:nvSpPr>
-          <p:cNvPr id="12" name="TextBox 11"/>
+              <a:t>2</a:t>
+            </a:r>
+          </a:p>
+        </p:txBody>
+      </p:sp>
+      <p:sp>
+        <p:nvSpPr>
+          <p:cNvPr id="11" name="TextBox 10"/>
           <p:cNvSpPr txBox="1"/>
           <p:nvPr/>
         </p:nvSpPr>
         <p:spPr>
           <a:xfrm>
-            <a:off x="3108960" y="4059936"/>
-            <a:ext cx="3017520" cy="457200"/>
+            <a:off x="3108960" y="3886200"/>
+            <a:ext cx="7498079" cy="548640"/>
           </a:xfrm>
           <a:prstGeom prst="rect">
             <a:avLst/>
@@ -6529,74 +6525,35 @@
           <a:lstStyle/>
           <a:p>
             <a:pPr algn="l">
+              <a:lnSpc>
+                <a:spcPct val="115000"/>
+              </a:lnSpc>
               <a:spcAft>
                 <a:spcPts val="600"/>
               </a:spcAft>
             </a:pPr>
             <a:r>
-              <a:rPr sz="2000" b="1">
+              <a:rPr sz="1800" b="0">
                 <a:solidFill>
                   <a:srgbClr val="11406E"/>
                 </a:solidFill>
                 <a:latin typeface="Helvetica Neue"/>
               </a:rPr>
-              <a:t>Google AI Studio</a:t>
-            </a:r>
-          </a:p>
-        </p:txBody>
-      </p:sp>
-      <p:sp>
-        <p:nvSpPr>
-          <p:cNvPr id="13" name="TextBox 12"/>
-          <p:cNvSpPr txBox="1"/>
-          <p:nvPr/>
-        </p:nvSpPr>
-        <p:spPr>
-          <a:xfrm>
-            <a:off x="6217920" y="4114800"/>
-            <a:ext cx="4480560" cy="548640"/>
-          </a:xfrm>
-          <a:prstGeom prst="rect">
-            <a:avLst/>
-          </a:prstGeom>
-          <a:noFill/>
-        </p:spPr>
-        <p:txBody>
-          <a:bodyPr wrap="square" lIns="0" rIns="0" tIns="0" bIns="0">
-            <a:spAutoFit/>
-          </a:bodyPr>
-          <a:lstStyle/>
-          <a:p>
-            <a:pPr algn="l">
-              <a:lnSpc>
-                <a:spcPct val="120000"/>
-              </a:lnSpc>
-              <a:spcAft>
-                <a:spcPts val="600"/>
-              </a:spcAft>
-            </a:pPr>
-            <a:r>
-              <a:rPr sz="1500" b="0">
-                <a:solidFill>
-                  <a:srgbClr val="6E6E6E"/>
-                </a:solidFill>
-                <a:latin typeface="Helvetica Neue"/>
-              </a:rPr>
-              <a:t>Filtra por Gender, no por Language: las de español cobran</a:t>
-            </a:r>
-          </a:p>
-        </p:txBody>
-      </p:sp>
-      <p:sp>
-        <p:nvSpPr>
-          <p:cNvPr id="14" name="Rounded Rectangle 13"/>
+              <a:t>Música de fondo al 10 o 15 % del volumen</a:t>
+            </a:r>
+          </a:p>
+        </p:txBody>
+      </p:sp>
+      <p:sp>
+        <p:nvSpPr>
+          <p:cNvPr id="12" name="Rounded Rectangle 11"/>
           <p:cNvSpPr/>
           <p:nvPr/>
         </p:nvSpPr>
         <p:spPr>
           <a:xfrm>
-            <a:off x="2103120" y="5074920"/>
-            <a:ext cx="8778240" cy="1005840"/>
+            <a:off x="2103120" y="4709160"/>
+            <a:ext cx="8778240" cy="822960"/>
           </a:xfrm>
           <a:prstGeom prst="roundRect">
             <a:avLst>
@@ -6637,14 +6594,14 @@
       </p:sp>
       <p:sp>
         <p:nvSpPr>
-          <p:cNvPr id="15" name="TextBox 14"/>
+          <p:cNvPr id="13" name="TextBox 12"/>
           <p:cNvSpPr txBox="1"/>
           <p:nvPr/>
         </p:nvSpPr>
         <p:spPr>
           <a:xfrm>
-            <a:off x="2423160" y="5276088"/>
-            <a:ext cx="548640" cy="548640"/>
+            <a:off x="2468880" y="4837176"/>
+            <a:ext cx="457200" cy="548640"/>
           </a:xfrm>
           <a:prstGeom prst="rect">
             <a:avLst/>
@@ -6663,27 +6620,27 @@
               </a:spcAft>
             </a:pPr>
             <a:r>
-              <a:rPr sz="2600" b="1">
+              <a:rPr sz="2400" b="1">
                 <a:solidFill>
                   <a:srgbClr val="ED7623"/>
                 </a:solidFill>
                 <a:latin typeface="Helvetica Neue"/>
               </a:rPr>
-              <a:t>C</a:t>
-            </a:r>
-          </a:p>
-        </p:txBody>
-      </p:sp>
-      <p:sp>
-        <p:nvSpPr>
-          <p:cNvPr id="16" name="TextBox 15"/>
+              <a:t>3</a:t>
+            </a:r>
+          </a:p>
+        </p:txBody>
+      </p:sp>
+      <p:sp>
+        <p:nvSpPr>
+          <p:cNvPr id="14" name="TextBox 13"/>
           <p:cNvSpPr txBox="1"/>
           <p:nvPr/>
         </p:nvSpPr>
         <p:spPr>
           <a:xfrm>
-            <a:off x="3108960" y="5248656"/>
-            <a:ext cx="3017520" cy="457200"/>
+            <a:off x="3108960" y="4892040"/>
+            <a:ext cx="7498079" cy="548640"/>
           </a:xfrm>
           <a:prstGeom prst="rect">
             <a:avLst/>
@@ -6697,32 +6654,81 @@
           <a:lstStyle/>
           <a:p>
             <a:pPr algn="l">
+              <a:lnSpc>
+                <a:spcPct val="115000"/>
+              </a:lnSpc>
               <a:spcAft>
                 <a:spcPts val="600"/>
               </a:spcAft>
             </a:pPr>
             <a:r>
-              <a:rPr sz="2000" b="1">
+              <a:rPr sz="1800" b="0">
                 <a:solidFill>
                   <a:srgbClr val="11406E"/>
                 </a:solidFill>
                 <a:latin typeface="Helvetica Neue"/>
               </a:rPr>
-              <a:t>Tu propia voz</a:t>
-            </a:r>
-          </a:p>
-        </p:txBody>
-      </p:sp>
-      <p:sp>
-        <p:nvSpPr>
-          <p:cNvPr id="17" name="TextBox 16"/>
+              <a:t>Cortar el silencio entre clip y clip</a:t>
+            </a:r>
+          </a:p>
+        </p:txBody>
+      </p:sp>
+      <p:sp>
+        <p:nvSpPr>
+          <p:cNvPr id="15" name="Rounded Rectangle 14"/>
+          <p:cNvSpPr/>
+          <p:nvPr/>
+        </p:nvSpPr>
+        <p:spPr>
+          <a:xfrm>
+            <a:off x="2103120" y="5806440"/>
+            <a:ext cx="8778240" cy="777240"/>
+          </a:xfrm>
+          <a:prstGeom prst="roundRect">
+            <a:avLst>
+              <a:gd name="adj" fmla="val 5000"/>
+            </a:avLst>
+          </a:prstGeom>
+          <a:solidFill>
+            <a:srgbClr val="ECF3F7"/>
+          </a:solidFill>
+          <a:ln>
+            <a:noFill/>
+          </a:ln>
+          <a:effectLst/>
+        </p:spPr>
+        <p:style>
+          <a:lnRef idx="1">
+            <a:schemeClr val="accent1"/>
+          </a:lnRef>
+          <a:fillRef idx="3">
+            <a:schemeClr val="accent1"/>
+          </a:fillRef>
+          <a:effectRef idx="2">
+            <a:schemeClr val="accent1"/>
+          </a:effectRef>
+          <a:fontRef idx="minor">
+            <a:schemeClr val="lt1"/>
+          </a:fontRef>
+        </p:style>
+        <p:txBody>
+          <a:bodyPr rtlCol="0" anchor="ctr"/>
+          <a:lstStyle/>
+          <a:p>
+            <a:pPr algn="ctr"/>
+          </a:p>
+        </p:txBody>
+      </p:sp>
+      <p:sp>
+        <p:nvSpPr>
+          <p:cNvPr id="16" name="TextBox 15"/>
           <p:cNvSpPr txBox="1"/>
           <p:nvPr/>
         </p:nvSpPr>
         <p:spPr>
           <a:xfrm>
-            <a:off x="6217920" y="5303520"/>
-            <a:ext cx="4480560" cy="548640"/>
+            <a:off x="2514600" y="6007608"/>
+            <a:ext cx="8138160" cy="457200"/>
           </a:xfrm>
           <a:prstGeom prst="rect">
             <a:avLst/>
@@ -6736,60 +6742,18 @@
           <a:lstStyle/>
           <a:p>
             <a:pPr algn="l">
-              <a:lnSpc>
-                <a:spcPct val="120000"/>
-              </a:lnSpc>
               <a:spcAft>
                 <a:spcPts val="600"/>
               </a:spcAft>
             </a:pPr>
             <a:r>
-              <a:rPr sz="1500" b="0">
-                <a:solidFill>
-                  <a:srgbClr val="6E6E6E"/>
-                </a:solidFill>
-                <a:latin typeface="Helvetica Neue"/>
-              </a:rPr>
-              <a:t>Grabarla es gratis. Clonarla cuesta</a:t>
-            </a:r>
-          </a:p>
-        </p:txBody>
-      </p:sp>
-      <p:sp>
-        <p:nvSpPr>
-          <p:cNvPr id="18" name="TextBox 17"/>
-          <p:cNvSpPr txBox="1"/>
-          <p:nvPr/>
-        </p:nvSpPr>
-        <p:spPr>
-          <a:xfrm>
-            <a:off x="2103120" y="6309360"/>
-            <a:ext cx="8778240" cy="457200"/>
-          </a:xfrm>
-          <a:prstGeom prst="rect">
-            <a:avLst/>
-          </a:prstGeom>
-          <a:noFill/>
-        </p:spPr>
-        <p:txBody>
-          <a:bodyPr wrap="square" lIns="0" rIns="0" tIns="0" bIns="0">
-            <a:spAutoFit/>
-          </a:bodyPr>
-          <a:lstStyle/>
-          <a:p>
-            <a:pPr algn="l">
-              <a:spcAft>
-                <a:spcPts val="600"/>
-              </a:spcAft>
-            </a:pPr>
-            <a:r>
-              <a:rPr sz="1500" b="0">
-                <a:solidFill>
-                  <a:srgbClr val="6E6E6E"/>
-                </a:solidFill>
-                <a:latin typeface="Helvetica Neue"/>
-              </a:rPr>
-              <a:t>Hazlo aparte solo si la voz de los clips no te gusta o te suena distinta entre uno y otro.</a:t>
+              <a:rPr sz="1600" b="1">
+                <a:solidFill>
+                  <a:srgbClr val="35789C"/>
+                </a:solidFill>
+                <a:latin typeface="Helvetica Neue"/>
+              </a:rPr>
+              <a:t>Música muy alta y subtítulos sin revisar: las dos marcas de un video amateur.</a:t>
             </a:r>
           </a:p>
         </p:txBody>
@@ -6872,8 +6836,8 @@
         </p:nvSpPr>
         <p:spPr>
           <a:xfrm>
-            <a:off x="822960" y="914400"/>
-            <a:ext cx="1828800" cy="1463040"/>
+            <a:off x="822960" y="502920"/>
+            <a:ext cx="10515600" cy="365760"/>
           </a:xfrm>
           <a:prstGeom prst="rect">
             <a:avLst/>
@@ -6892,13 +6856,13 @@
               </a:spcAft>
             </a:pPr>
             <a:r>
-              <a:rPr sz="9600" b="1">
-                <a:solidFill>
-                  <a:srgbClr val="ED7623"/>
-                </a:solidFill>
-                <a:latin typeface="Helvetica Neue"/>
-              </a:rPr>
-              <a:t>6</a:t>
+              <a:rPr sz="1200" b="1">
+                <a:solidFill>
+                  <a:srgbClr val="35789C"/>
+                </a:solidFill>
+                <a:latin typeface="Helvetica Neue"/>
+              </a:rPr>
+              <a:t>LO QUE VAN A VER Y VAN A PREGUNTAR</a:t>
             </a:r>
           </a:p>
         </p:txBody>
@@ -6911,8 +6875,8 @@
         </p:nvSpPr>
         <p:spPr>
           <a:xfrm>
-            <a:off x="2103120" y="1051560"/>
-            <a:ext cx="8686800" cy="822960"/>
+            <a:off x="822960" y="960120"/>
+            <a:ext cx="10607040" cy="1188720"/>
           </a:xfrm>
           <a:prstGeom prst="rect">
             <a:avLst/>
@@ -6926,18 +6890,21 @@
           <a:lstStyle/>
           <a:p>
             <a:pPr algn="l">
+              <a:lnSpc>
+                <a:spcPct val="105000"/>
+              </a:lnSpc>
               <a:spcAft>
                 <a:spcPts val="600"/>
               </a:spcAft>
             </a:pPr>
             <a:r>
-              <a:rPr sz="4400" b="1">
+              <a:rPr sz="3600" b="1">
                 <a:solidFill>
                   <a:srgbClr val="11406E"/>
                 </a:solidFill>
                 <a:latin typeface="Helvetica Neue"/>
               </a:rPr>
-              <a:t>Los remates</a:t>
+              <a:t>Los avatares de Flow: todavía no</a:t>
             </a:r>
           </a:p>
         </p:txBody>
@@ -6950,8 +6917,8 @@
         </p:nvSpPr>
         <p:spPr>
           <a:xfrm>
-            <a:off x="2103120" y="1965960"/>
-            <a:ext cx="8686800" cy="548640"/>
+            <a:off x="822960" y="2103120"/>
+            <a:ext cx="10515600" cy="731520"/>
           </a:xfrm>
           <a:prstGeom prst="rect">
             <a:avLst/>
@@ -6965,18 +6932,40 @@
           <a:lstStyle/>
           <a:p>
             <a:pPr algn="l">
-              <a:spcAft>
-                <a:spcPts val="600"/>
+              <a:lnSpc>
+                <a:spcPct val="130000"/>
+              </a:lnSpc>
+              <a:spcAft>
+                <a:spcPts val="200"/>
               </a:spcAft>
             </a:pPr>
             <a:r>
               <a:rPr sz="2000" b="0">
                 <a:solidFill>
-                  <a:srgbClr val="35789C"/>
-                </a:solidFill>
-                <a:latin typeface="Helvetica Neue"/>
-              </a:rPr>
-              <a:t>En CapCut, sobre el video ya unido</a:t>
+                  <a:srgbClr val="6E6E6E"/>
+                </a:solidFill>
+                <a:latin typeface="Helvetica Neue"/>
+              </a:rPr>
+              <a:t>Graba tu cara y tu voz con una videoselfie y te pone a ti en el video.</a:t>
+            </a:r>
+          </a:p>
+          <a:p>
+            <a:pPr algn="l">
+              <a:lnSpc>
+                <a:spcPct val="130000"/>
+              </a:lnSpc>
+              <a:spcAft>
+                <a:spcPts val="200"/>
+              </a:spcAft>
+            </a:pPr>
+            <a:r>
+              <a:rPr sz="2000" b="0">
+                <a:solidFill>
+                  <a:srgbClr val="6E6E6E"/>
+                </a:solidFill>
+                <a:latin typeface="Helvetica Neue"/>
+              </a:rPr>
+              <a:t>Suena perfecto. Pero la herramienta misma avisa que:</a:t>
             </a:r>
           </a:p>
         </p:txBody>
@@ -6989,8 +6978,8 @@
         </p:nvSpPr>
         <p:spPr>
           <a:xfrm>
-            <a:off x="2103120" y="2697480"/>
-            <a:ext cx="8778240" cy="822960"/>
+            <a:off x="822960" y="3429000"/>
+            <a:ext cx="10607040" cy="731520"/>
           </a:xfrm>
           <a:prstGeom prst="roundRect">
             <a:avLst>
@@ -7037,8 +7026,8 @@
         </p:nvSpPr>
         <p:spPr>
           <a:xfrm>
-            <a:off x="2468880" y="2825496"/>
-            <a:ext cx="457200" cy="548640"/>
+            <a:off x="1188720" y="3575304"/>
+            <a:ext cx="2743200" cy="457200"/>
           </a:xfrm>
           <a:prstGeom prst="rect">
             <a:avLst/>
@@ -7057,13 +7046,13 @@
               </a:spcAft>
             </a:pPr>
             <a:r>
-              <a:rPr sz="2400" b="1">
+              <a:rPr sz="1900" b="1">
                 <a:solidFill>
                   <a:srgbClr val="ED7623"/>
                 </a:solidFill>
                 <a:latin typeface="Helvetica Neue"/>
               </a:rPr>
-              <a:t>1</a:t>
+              <a:t>Experimental</a:t>
             </a:r>
           </a:p>
         </p:txBody>
@@ -7076,8 +7065,8 @@
         </p:nvSpPr>
         <p:spPr>
           <a:xfrm>
-            <a:off x="3108960" y="2880360"/>
-            <a:ext cx="7498079" cy="548640"/>
+            <a:off x="4114800" y="3602736"/>
+            <a:ext cx="6949440" cy="457200"/>
           </a:xfrm>
           <a:prstGeom prst="rect">
             <a:avLst/>
@@ -7091,21 +7080,18 @@
           <a:lstStyle/>
           <a:p>
             <a:pPr algn="l">
-              <a:lnSpc>
-                <a:spcPct val="115000"/>
-              </a:lnSpc>
               <a:spcAft>
                 <a:spcPts val="600"/>
               </a:spcAft>
             </a:pPr>
             <a:r>
-              <a:rPr sz="1800" b="0">
-                <a:solidFill>
-                  <a:srgbClr val="11406E"/>
-                </a:solidFill>
-                <a:latin typeface="Helvetica Neue"/>
-              </a:rPr>
-              <a:t>Subtítulos automáticos — y revisarlos</a:t>
+              <a:rPr sz="1600" b="0">
+                <a:solidFill>
+                  <a:srgbClr val="6E6E6E"/>
+                </a:solidFill>
+                <a:latin typeface="Helvetica Neue"/>
+              </a:rPr>
+              <a:t>La propia pantalla lo dice</a:t>
             </a:r>
           </a:p>
         </p:txBody>
@@ -7118,8 +7104,8 @@
         </p:nvSpPr>
         <p:spPr>
           <a:xfrm>
-            <a:off x="2103120" y="3703320"/>
-            <a:ext cx="8778240" cy="822960"/>
+            <a:off x="822960" y="4297680"/>
+            <a:ext cx="10607040" cy="731520"/>
           </a:xfrm>
           <a:prstGeom prst="roundRect">
             <a:avLst>
@@ -7166,8 +7152,8 @@
         </p:nvSpPr>
         <p:spPr>
           <a:xfrm>
-            <a:off x="2468880" y="3831336"/>
-            <a:ext cx="457200" cy="548640"/>
+            <a:off x="1188720" y="4443984"/>
+            <a:ext cx="2743200" cy="457200"/>
           </a:xfrm>
           <a:prstGeom prst="rect">
             <a:avLst/>
@@ -7186,13 +7172,13 @@
               </a:spcAft>
             </a:pPr>
             <a:r>
-              <a:rPr sz="2400" b="1">
+              <a:rPr sz="1900" b="1">
                 <a:solidFill>
                   <a:srgbClr val="ED7623"/>
                 </a:solidFill>
                 <a:latin typeface="Helvetica Neue"/>
               </a:rPr>
-              <a:t>2</a:t>
+              <a:t>Solo en inglés</a:t>
             </a:r>
           </a:p>
         </p:txBody>
@@ -7205,8 +7191,8 @@
         </p:nvSpPr>
         <p:spPr>
           <a:xfrm>
-            <a:off x="3108960" y="3886200"/>
-            <a:ext cx="7498079" cy="548640"/>
+            <a:off x="4114800" y="4471416"/>
+            <a:ext cx="6949440" cy="457200"/>
           </a:xfrm>
           <a:prstGeom prst="rect">
             <a:avLst/>
@@ -7220,21 +7206,18 @@
           <a:lstStyle/>
           <a:p>
             <a:pPr algn="l">
-              <a:lnSpc>
-                <a:spcPct val="115000"/>
-              </a:lnSpc>
               <a:spcAft>
                 <a:spcPts val="600"/>
               </a:spcAft>
             </a:pPr>
             <a:r>
-              <a:rPr sz="1800" b="0">
-                <a:solidFill>
-                  <a:srgbClr val="11406E"/>
-                </a:solidFill>
-                <a:latin typeface="Helvetica Neue"/>
-              </a:rPr>
-              <a:t>Música de fondo al 10 o 15 % del volumen</a:t>
+              <a:rPr sz="1600" b="0">
+                <a:solidFill>
+                  <a:srgbClr val="6E6E6E"/>
+                </a:solidFill>
+                <a:latin typeface="Helvetica Neue"/>
+              </a:rPr>
+              <a:t>El registro no está disponible en español</a:t>
             </a:r>
           </a:p>
         </p:txBody>
@@ -7247,8 +7230,8 @@
         </p:nvSpPr>
         <p:spPr>
           <a:xfrm>
-            <a:off x="2103120" y="4709160"/>
-            <a:ext cx="8778240" cy="822960"/>
+            <a:off x="822960" y="5166360"/>
+            <a:ext cx="10607040" cy="731520"/>
           </a:xfrm>
           <a:prstGeom prst="roundRect">
             <a:avLst>
@@ -7295,8 +7278,8 @@
         </p:nvSpPr>
         <p:spPr>
           <a:xfrm>
-            <a:off x="2468880" y="4837176"/>
-            <a:ext cx="457200" cy="548640"/>
+            <a:off x="1188720" y="5312664"/>
+            <a:ext cx="2743200" cy="457200"/>
           </a:xfrm>
           <a:prstGeom prst="rect">
             <a:avLst/>
@@ -7315,13 +7298,13 @@
               </a:spcAft>
             </a:pPr>
             <a:r>
-              <a:rPr sz="2400" b="1">
+              <a:rPr sz="1900" b="1">
                 <a:solidFill>
                   <a:srgbClr val="ED7623"/>
                 </a:solidFill>
                 <a:latin typeface="Helvetica Neue"/>
               </a:rPr>
-              <a:t>3</a:t>
+              <a:t>Varios intentos</a:t>
             </a:r>
           </a:p>
         </p:txBody>
@@ -7334,8 +7317,8 @@
         </p:nvSpPr>
         <p:spPr>
           <a:xfrm>
-            <a:off x="3108960" y="4892040"/>
-            <a:ext cx="7498079" cy="548640"/>
+            <a:off x="4114800" y="5340096"/>
+            <a:ext cx="6949440" cy="457200"/>
           </a:xfrm>
           <a:prstGeom prst="rect">
             <a:avLst/>
@@ -7349,21 +7332,18 @@
           <a:lstStyle/>
           <a:p>
             <a:pPr algn="l">
-              <a:lnSpc>
-                <a:spcPct val="115000"/>
-              </a:lnSpc>
               <a:spcAft>
                 <a:spcPts val="600"/>
               </a:spcAft>
             </a:pPr>
             <a:r>
-              <a:rPr sz="1800" b="0">
-                <a:solidFill>
-                  <a:srgbClr val="11406E"/>
-                </a:solidFill>
-                <a:latin typeface="Helvetica Neue"/>
-              </a:rPr>
-              <a:t>Cortar el silencio entre clip y clip</a:t>
+              <a:rPr sz="1600" b="0">
+                <a:solidFill>
+                  <a:srgbClr val="6E6E6E"/>
+                </a:solidFill>
+                <a:latin typeface="Helvetica Neue"/>
+              </a:rPr>
+              <a:t>«Es posible que requiera varios intentos»</a:t>
             </a:r>
           </a:p>
         </p:txBody>
@@ -7376,8 +7356,8 @@
         </p:nvSpPr>
         <p:spPr>
           <a:xfrm>
-            <a:off x="2103120" y="5806440"/>
-            <a:ext cx="8778240" cy="777240"/>
+            <a:off x="822960" y="6126480"/>
+            <a:ext cx="10515600" cy="685800"/>
           </a:xfrm>
           <a:prstGeom prst="roundRect">
             <a:avLst>
@@ -7385,7 +7365,7 @@
             </a:avLst>
           </a:prstGeom>
           <a:solidFill>
-            <a:srgbClr val="ECF3F7"/>
+            <a:srgbClr val="FDF0E6"/>
           </a:solidFill>
           <a:ln>
             <a:noFill/>
@@ -7422,8 +7402,8 @@
         </p:nvSpPr>
         <p:spPr>
           <a:xfrm>
-            <a:off x="2514600" y="6007608"/>
-            <a:ext cx="8138160" cy="457200"/>
+            <a:off x="1234440" y="6291072"/>
+            <a:ext cx="9692640" cy="457200"/>
           </a:xfrm>
           <a:prstGeom prst="rect">
             <a:avLst/>
@@ -7444,11 +7424,11 @@
             <a:r>
               <a:rPr sz="1600" b="1">
                 <a:solidFill>
-                  <a:srgbClr val="35789C"/>
-                </a:solidFill>
-                <a:latin typeface="Helvetica Neue"/>
-              </a:rPr>
-              <a:t>Música muy alta y subtítulos sin revisar: las dos marcas de un video amateur.</a:t>
+                  <a:srgbClr val="ED7623"/>
+                </a:solidFill>
+                <a:latin typeface="Helvetica Neue"/>
+              </a:rPr>
+              <a:t>Personajes hace el trabajo, es gratis, y funciona en español.</a:t>
             </a:r>
           </a:p>
         </p:txBody>
@@ -9070,7 +9050,7 @@
                 </a:solidFill>
                 <a:latin typeface="Helvetica Neue"/>
               </a:rPr>
-              <a:t>El guion completo está en las notas. A ti te piden tres frases.</a:t>
+              <a:t>El guion completo está en las notas. A ti te piden cuatro frases.</a:t>
             </a:r>
           </a:p>
         </p:txBody>
@@ -9573,7 +9553,7 @@
                 </a:solidFill>
                 <a:latin typeface="Helvetica Neue"/>
               </a:rPr>
-              <a:t>Treinta segundos: tres frases, tres clips, un archivo.</a:t>
+              <a:t>Medio minuto: cuatro frases, cuatro clips, un archivo.</a:t>
             </a:r>
           </a:p>
           <a:p>
@@ -9813,7 +9793,7 @@
                 </a:solidFill>
                 <a:latin typeface="Helvetica Neue"/>
               </a:rPr>
-              <a:t>Fue decidir qué valía la pena contar, y decirlo en tres frases.</a:t>
+              <a:t>Fue decidir qué valía la pena contar, y decirlo en cuatro frases.</a:t>
             </a:r>
           </a:p>
         </p:txBody>
@@ -10066,7 +10046,7 @@
                 </a:solidFill>
                 <a:latin typeface="Helvetica Neue"/>
               </a:rPr>
-              <a:t>Medio minuto, en tres pedazos</a:t>
+              <a:t>Medio minuto, en cuatro pedazos</a:t>
             </a:r>
           </a:p>
         </p:txBody>
@@ -10127,7 +10107,7 @@
                 </a:solidFill>
                 <a:latin typeface="Helvetica Neue"/>
               </a:rPr>
-              <a:t>Se hacen tres de diez segundos y se pegan. Así sí se puede.</a:t>
+              <a:t>Se hacen cuatro de ocho segundos y se pegan. Así sí se puede.</a:t>
             </a:r>
           </a:p>
         </p:txBody>
@@ -10259,7 +10239,7 @@
                 </a:solidFill>
                 <a:latin typeface="Helvetica Neue"/>
               </a:rPr>
-              <a:t>partido en 3 frases</a:t>
+              <a:t>partido en 4 frases</a:t>
             </a:r>
           </a:p>
         </p:txBody>
@@ -10349,7 +10329,7 @@
                 </a:solidFill>
                 <a:latin typeface="Helvetica Neue"/>
               </a:rPr>
-              <a:t>🧑 Tu foto</a:t>
+              <a:t>🧑 Personaje</a:t>
             </a:r>
           </a:p>
         </p:txBody>
@@ -10391,7 +10371,7 @@
                 </a:solidFill>
                 <a:latin typeface="Helvetica Neue"/>
               </a:rPr>
-              <a:t>la misma en todos</a:t>
+              <a:t>gratis, y con voz</a:t>
             </a:r>
           </a:p>
         </p:txBody>
@@ -10481,7 +10461,7 @@
                 </a:solidFill>
                 <a:latin typeface="Helvetica Neue"/>
               </a:rPr>
-              <a:t>🎬 3 clips</a:t>
+              <a:t>🎬 4 clips</a:t>
             </a:r>
           </a:p>
         </p:txBody>
@@ -10523,7 +10503,7 @@
                 </a:solidFill>
                 <a:latin typeface="Helvetica Neue"/>
               </a:rPr>
-              <a:t>10 segundos cada uno</a:t>
+              <a:t>8 segundos cada uno</a:t>
             </a:r>
           </a:p>
         </p:txBody>
@@ -10655,7 +10635,7 @@
                 </a:solidFill>
                 <a:latin typeface="Helvetica Neue"/>
               </a:rPr>
-              <a:t>en ChatGPT</a:t>
+              <a:t>en el mismo Flow</a:t>
             </a:r>
           </a:p>
         </p:txBody>
@@ -10974,7 +10954,7 @@
                 </a:solidFill>
                 <a:latin typeface="Helvetica Neue"/>
               </a:rPr>
-              <a:t>Partido en tres frases de 25 palabras</a:t>
+              <a:t>Partido en cuatro frases de 20 palabras</a:t>
             </a:r>
           </a:p>
         </p:txBody>
@@ -11100,7 +11080,7 @@
                 </a:solidFill>
                 <a:latin typeface="Helvetica Neue"/>
               </a:rPr>
-              <a:t>Tu foto</a:t>
+              <a:t>Tu personaje</a:t>
             </a:r>
           </a:p>
         </p:txBody>
@@ -11142,7 +11122,7 @@
                 </a:solidFill>
                 <a:latin typeface="Helvetica Neue"/>
               </a:rPr>
-              <a:t>Una sola, de frente. La misma siempre</a:t>
+              <a:t>Se crea en Flow, gratis, y lleva voz</a:t>
             </a:r>
           </a:p>
         </p:txBody>
@@ -11310,7 +11290,7 @@
                 </a:solidFill>
                 <a:latin typeface="Helvetica Neue"/>
               </a:rPr>
-              <a:t>Uno por frase, en Flow o Gemini</a:t>
+              <a:t>Uno por frase, adjuntando el personaje</a:t>
             </a:r>
           </a:p>
         </p:txBody>
@@ -11478,7 +11458,7 @@
                 </a:solidFill>
                 <a:latin typeface="Helvetica Neue"/>
               </a:rPr>
-              <a:t>En ChatGPT, en un solo archivo</a:t>
+              <a:t>En Flow mismo, o en ChatGPT</a:t>
             </a:r>
           </a:p>
         </p:txBody>
@@ -11604,7 +11584,7 @@
                 </a:solidFill>
                 <a:latin typeface="Helvetica Neue"/>
               </a:rPr>
-              <a:t>La voz  (opcional)</a:t>
+              <a:t>Remates  (opcional)</a:t>
             </a:r>
           </a:p>
         </p:txBody>
@@ -11646,7 +11626,7 @@
                 </a:solidFill>
                 <a:latin typeface="Helvetica Neue"/>
               </a:rPr>
-              <a:t>Otra narración encima</a:t>
+              <a:t>Subtítulos y música en CapCut</a:t>
             </a:r>
           </a:p>
         </p:txBody>
@@ -11772,7 +11752,7 @@
                 </a:solidFill>
                 <a:latin typeface="Helvetica Neue"/>
               </a:rPr>
-              <a:t>Remates  (opcional)</a:t>
+              <a:t>Ruta B  (opcional)</a:t>
             </a:r>
           </a:p>
         </p:txBody>
@@ -11814,7 +11794,7 @@
                 </a:solidFill>
                 <a:latin typeface="Helvetica Neue"/>
               </a:rPr>
-              <a:t>Subtítulos y música</a:t>
+              <a:t>Si no hay créditos ese día</a:t>
             </a:r>
           </a:p>
         </p:txBody>
@@ -12263,7 +12243,7 @@
                 </a:solidFill>
                 <a:latin typeface="Helvetica Neue"/>
               </a:rPr>
-              <a:t>Los tres clips</a:t>
+              <a:t>Personaje, clips y montaje</a:t>
             </a:r>
           </a:p>
         </p:txBody>
@@ -12305,7 +12285,7 @@
                 </a:solidFill>
                 <a:latin typeface="Helvetica Neue"/>
               </a:rPr>
-              <a:t>Google Flow (gratis) o Gemini (plan de pago)</a:t>
+              <a:t>Google Flow · 50 créditos gratis al día</a:t>
             </a:r>
           </a:p>
         </p:txBody>
@@ -12391,7 +12371,7 @@
                 </a:solidFill>
                 <a:latin typeface="Helvetica Neue"/>
               </a:rPr>
-              <a:t>Unirlos</a:t>
+              <a:t>Unirlos, si Flow falla</a:t>
             </a:r>
           </a:p>
         </p:txBody>
@@ -12519,7 +12499,7 @@
                 </a:solidFill>
                 <a:latin typeface="Helvetica Neue"/>
               </a:rPr>
-              <a:t>Voz aparte (opcional)</a:t>
+              <a:t>Subtítulos y música (opcional)</a:t>
             </a:r>
           </a:p>
         </p:txBody>
@@ -12561,134 +12541,6 @@
                 </a:solidFill>
                 <a:latin typeface="Helvetica Neue"/>
               </a:rPr>
-              <a:t>ElevenLabs</a:t>
-            </a:r>
-          </a:p>
-        </p:txBody>
-      </p:sp>
-      <p:sp>
-        <p:nvSpPr>
-          <p:cNvPr id="19" name="Rectangle 18"/>
-          <p:cNvSpPr/>
-          <p:nvPr/>
-        </p:nvSpPr>
-        <p:spPr>
-          <a:xfrm>
-            <a:off x="822960" y="4873752"/>
-            <a:ext cx="10607040" cy="7315"/>
-          </a:xfrm>
-          <a:prstGeom prst="rect">
-            <a:avLst/>
-          </a:prstGeom>
-          <a:solidFill>
-            <a:srgbClr val="E3E0DA"/>
-          </a:solidFill>
-          <a:ln>
-            <a:noFill/>
-          </a:ln>
-          <a:effectLst/>
-        </p:spPr>
-        <p:style>
-          <a:lnRef idx="1">
-            <a:schemeClr val="accent1"/>
-          </a:lnRef>
-          <a:fillRef idx="3">
-            <a:schemeClr val="accent1"/>
-          </a:fillRef>
-          <a:effectRef idx="2">
-            <a:schemeClr val="accent1"/>
-          </a:effectRef>
-          <a:fontRef idx="minor">
-            <a:schemeClr val="lt1"/>
-          </a:fontRef>
-        </p:style>
-        <p:txBody>
-          <a:bodyPr rtlCol="0" anchor="ctr"/>
-          <a:lstStyle/>
-          <a:p>
-            <a:pPr algn="ctr"/>
-          </a:p>
-        </p:txBody>
-      </p:sp>
-      <p:sp>
-        <p:nvSpPr>
-          <p:cNvPr id="20" name="TextBox 19"/>
-          <p:cNvSpPr txBox="1"/>
-          <p:nvPr/>
-        </p:nvSpPr>
-        <p:spPr>
-          <a:xfrm>
-            <a:off x="822960" y="4937760"/>
-            <a:ext cx="4572000" cy="566928"/>
-          </a:xfrm>
-          <a:prstGeom prst="rect">
-            <a:avLst/>
-          </a:prstGeom>
-          <a:noFill/>
-        </p:spPr>
-        <p:txBody>
-          <a:bodyPr wrap="square" lIns="0" rIns="0" tIns="0" bIns="0">
-            <a:spAutoFit/>
-          </a:bodyPr>
-          <a:lstStyle/>
-          <a:p>
-            <a:pPr algn="l">
-              <a:lnSpc>
-                <a:spcPct val="112000"/>
-              </a:lnSpc>
-              <a:spcAft>
-                <a:spcPts val="0"/>
-              </a:spcAft>
-            </a:pPr>
-            <a:r>
-              <a:rPr sz="1700" b="1">
-                <a:solidFill>
-                  <a:srgbClr val="ED7623"/>
-                </a:solidFill>
-                <a:latin typeface="Helvetica Neue"/>
-              </a:rPr>
-              <a:t>Subtítulos y música (opcional)</a:t>
-            </a:r>
-          </a:p>
-        </p:txBody>
-      </p:sp>
-      <p:sp>
-        <p:nvSpPr>
-          <p:cNvPr id="21" name="TextBox 20"/>
-          <p:cNvSpPr txBox="1"/>
-          <p:nvPr/>
-        </p:nvSpPr>
-        <p:spPr>
-          <a:xfrm>
-            <a:off x="5394960" y="4937760"/>
-            <a:ext cx="6035040" cy="566928"/>
-          </a:xfrm>
-          <a:prstGeom prst="rect">
-            <a:avLst/>
-          </a:prstGeom>
-          <a:noFill/>
-        </p:spPr>
-        <p:txBody>
-          <a:bodyPr wrap="square" lIns="0" rIns="0" tIns="0" bIns="0">
-            <a:spAutoFit/>
-          </a:bodyPr>
-          <a:lstStyle/>
-          <a:p>
-            <a:pPr algn="l">
-              <a:lnSpc>
-                <a:spcPct val="112000"/>
-              </a:lnSpc>
-              <a:spcAft>
-                <a:spcPts val="0"/>
-              </a:spcAft>
-            </a:pPr>
-            <a:r>
-              <a:rPr sz="1700" b="0">
-                <a:solidFill>
-                  <a:srgbClr val="6E6E6E"/>
-                </a:solidFill>
-                <a:latin typeface="Helvetica Neue"/>
-              </a:rPr>
               <a:t>CapCut</a:t>
             </a:r>
           </a:p>
@@ -12696,7 +12548,7 @@
       </p:sp>
       <p:sp>
         <p:nvSpPr>
-          <p:cNvPr id="22" name="Rounded Rectangle 21"/>
+          <p:cNvPr id="19" name="Rounded Rectangle 18"/>
           <p:cNvSpPr/>
           <p:nvPr/>
         </p:nvSpPr>
@@ -12742,7 +12594,7 @@
       </p:sp>
       <p:sp>
         <p:nvSpPr>
-          <p:cNvPr id="23" name="TextBox 22"/>
+          <p:cNvPr id="20" name="TextBox 19"/>
           <p:cNvSpPr txBox="1"/>
           <p:nvPr/>
         </p:nvSpPr>
@@ -12777,7 +12629,7 @@
                 </a:solidFill>
                 <a:latin typeface="Helvetica Neue"/>
               </a:rPr>
-              <a:t>La puerta gratuita es Google Flow: 50 créditos al día, 15 por clip.</a:t>
+              <a:t>Flow: 50 créditos al día, 10 por clip. Cuatro clips y uno de repuesto.</a:t>
             </a:r>
           </a:p>
           <a:p>
@@ -12796,7 +12648,7 @@
                 </a:solidFill>
                 <a:latin typeface="Helvetica Neue"/>
               </a:rPr>
-              <a:t>Te alcanza para tres clips. Ni uno de sobra: el guion tiene que estar listo antes.</a:t>
+              <a:t>Crear el personaje no gasta nada. La cuenta de la Universidad no sirve.</a:t>
             </a:r>
           </a:p>
         </p:txBody>
@@ -13530,7 +13382,7 @@
                 </a:solidFill>
                 <a:latin typeface="Helvetica Neue"/>
               </a:rPr>
-              <a:t>Y enseguida, partirlo en tres</a:t>
+              <a:t>Y enseguida, partirlo en cuatro</a:t>
             </a:r>
           </a:p>
         </p:txBody>
@@ -13639,7 +13491,7 @@
                 </a:solidFill>
                 <a:latin typeface="Helvetica Neue"/>
               </a:rPr>
-              <a:t>3 clips × 10 segundos  =  75 palabras</a:t>
+              <a:t>4 clips × 8 segundos  =  80 palabras</a:t>
             </a:r>
           </a:p>
           <a:p>
@@ -14265,7 +14117,7 @@
                 </a:solidFill>
                 <a:latin typeface="Helvetica Neue"/>
               </a:rPr>
-              <a:t>Después lo pules: «Limpia este dictado, quita las muletillas y déjalo en 75 palabras».</a:t>
+              <a:t>Después lo pules: «Limpia este dictado, quita las muletillas y déjalo en 80 palabras».</a:t>
             </a:r>
           </a:p>
         </p:txBody>
@@ -14413,7 +14265,7 @@
                 </a:solidFill>
                 <a:latin typeface="Helvetica Neue"/>
               </a:rPr>
-              <a:t>Tu foto</a:t>
+              <a:t>Tu personaje</a:t>
             </a:r>
           </a:p>
         </p:txBody>
@@ -14452,7 +14304,7 @@
                 </a:solidFill>
                 <a:latin typeface="Helvetica Neue"/>
               </a:rPr>
-              <a:t>La misma en los tres clips</a:t>
+              <a:t>Se crea una vez, no gasta créditos, y lleva voz propia</a:t>
             </a:r>
           </a:p>
         </p:txBody>
@@ -14542,7 +14394,7 @@
                 </a:solidFill>
                 <a:latin typeface="Helvetica Neue"/>
               </a:rPr>
-              <a:t>Qué sirve</a:t>
+              <a:t>Con tu foto</a:t>
             </a:r>
           </a:p>
           <a:p>
@@ -14571,7 +14423,7 @@
                 </a:solidFill>
                 <a:latin typeface="Helvetica Neue"/>
               </a:rPr>
-              <a:t>De frente, cara bien iluminada, sin gafas de sol, sin otras personas.</a:t>
+              <a:t>Botón Subir y eliges una foto tuya de frente, bien iluminada.</a:t>
             </a:r>
           </a:p>
         </p:txBody>
@@ -14661,7 +14513,7 @@
                 </a:solidFill>
                 <a:latin typeface="Helvetica Neue"/>
               </a:rPr>
-              <a:t>Sin tu cara</a:t>
+              <a:t>Descrito</a:t>
             </a:r>
           </a:p>
           <a:p>
@@ -14690,7 +14542,7 @@
                 </a:solidFill>
                 <a:latin typeface="Helvetica Neue"/>
               </a:rPr>
-              <a:t>No adjuntes nada y describe un personaje. La misma descripción en los tres.</a:t>
+              <a:t>Escribes cómo es y Flow lo dibuja. Queda igual de consistente.</a:t>
             </a:r>
           </a:p>
         </p:txBody>
@@ -14704,7 +14556,7 @@
         <p:spPr>
           <a:xfrm>
             <a:off x="2103120" y="5166360"/>
-            <a:ext cx="8778240" cy="914400"/>
+            <a:ext cx="8778240" cy="1234440"/>
           </a:xfrm>
           <a:prstGeom prst="roundRect">
             <a:avLst>
@@ -14749,8 +14601,8 @@
         </p:nvSpPr>
         <p:spPr>
           <a:xfrm>
-            <a:off x="2560320" y="5413248"/>
-            <a:ext cx="8046720" cy="548640"/>
+            <a:off x="2560320" y="5394960"/>
+            <a:ext cx="8046720" cy="914400"/>
           </a:xfrm>
           <a:prstGeom prst="rect">
             <a:avLst/>
@@ -14764,8 +14616,11 @@
           <a:lstStyle/>
           <a:p>
             <a:pPr algn="l">
-              <a:spcAft>
-                <a:spcPts val="600"/>
+              <a:lnSpc>
+                <a:spcPct val="130000"/>
+              </a:lnSpc>
+              <a:spcAft>
+                <a:spcPts val="200"/>
               </a:spcAft>
             </a:pPr>
             <a:r>
@@ -14775,7 +14630,26 @@
                 </a:solidFill>
                 <a:latin typeface="Helvetica Neue"/>
               </a:rPr>
-              <a:t>Si cambias de foto entre clips, cambias de persona.</a:t>
+              <a:t>Asígnale una voz antes de generar nada: así suena igual en los cuatro clips.</a:t>
+            </a:r>
+          </a:p>
+          <a:p>
+            <a:pPr algn="l">
+              <a:lnSpc>
+                <a:spcPct val="130000"/>
+              </a:lnSpc>
+              <a:spcAft>
+                <a:spcPts val="200"/>
+              </a:spcAft>
+            </a:pPr>
+            <a:r>
+              <a:rPr sz="1500" b="0">
+                <a:solidFill>
+                  <a:srgbClr val="6E6E6E"/>
+                </a:solidFill>
+                <a:latin typeface="Helvetica Neue"/>
+              </a:rPr>
+              <a:t>Y créalo en el lugar del video: el personaje se trae consigo su escenario.</a:t>
             </a:r>
           </a:p>
         </p:txBody>
@@ -14962,7 +14836,7 @@
                 </a:solidFill>
                 <a:latin typeface="Helvetica Neue"/>
               </a:rPr>
-              <a:t>Tres, uno por frase. Diez segundos cada uno, con voz incluida</a:t>
+              <a:t>Cuatro, uno por frase. Ocho segundos cada uno, con voz</a:t>
             </a:r>
           </a:p>
         </p:txBody>
@@ -15048,11 +14922,11 @@
             <a:r>
               <a:rPr sz="1900" b="1">
                 <a:solidFill>
-                  <a:srgbClr val="ED7623"/>
-                </a:solidFill>
-                <a:latin typeface="Helvetica Neue"/>
-              </a:rPr>
-              <a:t>Google Flow — 50 créditos al día, 15 por clip</a:t>
+                  <a:srgbClr val="11406E"/>
+                </a:solidFill>
+                <a:latin typeface="Helvetica Neue"/>
+              </a:rPr>
+              <a:t>Botón +  →  eliges tu personaje  →  Agregar a la instrucción</a:t>
             </a:r>
           </a:p>
           <a:p>
@@ -15064,15 +14938,6 @@
                 <a:spcPts val="400"/>
               </a:spcAft>
             </a:pPr>
-            <a:r>
-              <a:rPr sz="1900" b="1">
-                <a:solidFill>
-                  <a:srgbClr val="35789C"/>
-                </a:solidFill>
-                <a:latin typeface="Helvetica Neue"/>
-              </a:rPr>
-              <a:t>Pídele «usa omni» o te dará solo 8 segundos</a:t>
-            </a:r>
           </a:p>
           <a:p>
             <a:pPr algn="l">
@@ -15083,16 +14948,6 @@
                 <a:spcPts val="400"/>
               </a:spcAft>
             </a:pPr>
-          </a:p>
-          <a:p>
-            <a:pPr algn="l">
-              <a:lnSpc>
-                <a:spcPct val="135000"/>
-              </a:lnSpc>
-              <a:spcAft>
-                <a:spcPts val="400"/>
-              </a:spcAft>
-            </a:pPr>
             <a:r>
               <a:rPr sz="1500" b="0">
                 <a:solidFill>
@@ -15100,7 +14955,7 @@
                 </a:solidFill>
                 <a:latin typeface="Helvetica Neue"/>
               </a:rPr>
-              <a:t>Dos a cuatro minutos por clip. Lánzalos seguidos. El prompt está en las notas.</a:t>
+              <a:t>10 créditos por clip. Cuatro clips, y te queda uno de repuesto.</a:t>
             </a:r>
           </a:p>
         </p:txBody>
@@ -15188,7 +15043,7 @@
                 </a:solidFill>
                 <a:latin typeface="Helvetica Neue"/>
               </a:rPr>
-              <a:t>En la app de Gemini: primero Crear video, después la foto.</a:t>
+              <a:t>Adjunta el personaje, no lo menciones por escrito.</a:t>
             </a:r>
           </a:p>
           <a:p>
@@ -15207,7 +15062,7 @@
                 </a:solidFill>
                 <a:latin typeface="Helvetica Neue"/>
               </a:rPr>
-              <a:t>Al revés se sale del modo video y te contesta por escrito.</a:t>
+              <a:t>Si solo lo mencionas, Flow genera otra persona distinta.</a:t>
             </a:r>
           </a:p>
           <a:p>
@@ -15226,7 +15081,7 @@
                 </a:solidFill>
                 <a:latin typeface="Helvetica Neue"/>
               </a:rPr>
-              <a:t>Antes de enviar, comprueba que abajo diga «Videos».</a:t>
+              <a:t>Debe responderte que usa «la entidad del personaje referenciada».</a:t>
             </a:r>
           </a:p>
         </p:txBody>
